--- a/course/modules/M01/L002/M01-L002-canva-deck.pptx
+++ b/course/modules/M01/L002/M01-L002-canva-deck.pptx
@@ -5788,7 +5788,7 @@
                 <a:ea typeface="Sarabun"/>
                 <a:cs typeface="Sarabun"/>
               </a:rPr>
-              <a:t>Learner (your turn — answer with your name)</a:t>
+              <a:t>You</a:t>
             </a:r>
           </a:p>
         </p:txBody>
@@ -6032,7 +6032,7 @@
                 <a:ea typeface="Sarabun"/>
                 <a:cs typeface="Sarabun"/>
               </a:rPr>
-              <a:t>Learner (your turn — say where you are from)</a:t>
+              <a:t>You</a:t>
             </a:r>
           </a:p>
         </p:txBody>
@@ -6276,7 +6276,7 @@
                 <a:ea typeface="Sarabun"/>
                 <a:cs typeface="Sarabun"/>
               </a:rPr>
-              <a:t>Learner</a:t>
+              <a:t>You</a:t>
             </a:r>
           </a:p>
         </p:txBody>

--- a/course/modules/M01/L002/M01-L002-canva-deck.pptx
+++ b/course/modules/M01/L002/M01-L002-canva-deck.pptx
@@ -3268,6 +3268,63 @@
           </a:p>
         </p:txBody>
       </p:sp>
+      <p:sp>
+        <p:nvSpPr>
+          <p:cNvPr id="7" name="__pip_placeholder__"/>
+          <p:cNvSpPr/>
+          <p:nvPr/>
+        </p:nvSpPr>
+        <p:spPr>
+          <a:xfrm>
+            <a:off x="8351215" y="0"/>
+            <a:ext cx="3840480" cy="2880360"/>
+          </a:xfrm>
+          <a:prstGeom prst="rect">
+            <a:avLst/>
+          </a:prstGeom>
+          <a:solidFill>
+            <a:srgbClr val="DBE7EC">
+              <a:alpha val="30000"/>
+            </a:srgbClr>
+          </a:solidFill>
+          <a:ln w="19050">
+            <a:solidFill>
+              <a:srgbClr val="355C7D"/>
+            </a:solidFill>
+            <a:prstDash val="sysDash"/>
+          </a:ln>
+        </p:spPr>
+        <p:style>
+          <a:lnRef idx="1">
+            <a:schemeClr val="accent1"/>
+          </a:lnRef>
+          <a:fillRef idx="3">
+            <a:schemeClr val="accent1"/>
+          </a:fillRef>
+          <a:effectRef idx="2">
+            <a:schemeClr val="accent1"/>
+          </a:effectRef>
+          <a:fontRef idx="minor">
+            <a:schemeClr val="lt1"/>
+          </a:fontRef>
+        </p:style>
+        <p:txBody>
+          <a:bodyPr rtlCol="0" anchor="ctr" wrap="none"/>
+          <a:lstStyle/>
+          <a:p>
+            <a:pPr algn="ctr"/>
+            <a:r>
+              <a:rPr sz="1800" b="1">
+                <a:solidFill>
+                  <a:srgbClr val="355C7D"/>
+                </a:solidFill>
+                <a:latin typeface="Sarabun"/>
+              </a:rPr>
+              <a:t>Nine</a:t>
+            </a:r>
+          </a:p>
+        </p:txBody>
+      </p:sp>
     </p:spTree>
   </p:cSld>
   <p:clrMapOvr>
@@ -3642,6 +3699,63 @@
           </a:p>
         </p:txBody>
       </p:sp>
+      <p:sp>
+        <p:nvSpPr>
+          <p:cNvPr id="9" name="__pip_placeholder__"/>
+          <p:cNvSpPr/>
+          <p:nvPr/>
+        </p:nvSpPr>
+        <p:spPr>
+          <a:xfrm>
+            <a:off x="8351215" y="0"/>
+            <a:ext cx="3840480" cy="2880360"/>
+          </a:xfrm>
+          <a:prstGeom prst="rect">
+            <a:avLst/>
+          </a:prstGeom>
+          <a:solidFill>
+            <a:srgbClr val="DBE7EC">
+              <a:alpha val="30000"/>
+            </a:srgbClr>
+          </a:solidFill>
+          <a:ln w="19050">
+            <a:solidFill>
+              <a:srgbClr val="355C7D"/>
+            </a:solidFill>
+            <a:prstDash val="sysDash"/>
+          </a:ln>
+        </p:spPr>
+        <p:style>
+          <a:lnRef idx="1">
+            <a:schemeClr val="accent1"/>
+          </a:lnRef>
+          <a:fillRef idx="3">
+            <a:schemeClr val="accent1"/>
+          </a:fillRef>
+          <a:effectRef idx="2">
+            <a:schemeClr val="accent1"/>
+          </a:effectRef>
+          <a:fontRef idx="minor">
+            <a:schemeClr val="lt1"/>
+          </a:fontRef>
+        </p:style>
+        <p:txBody>
+          <a:bodyPr rtlCol="0" anchor="ctr" wrap="none"/>
+          <a:lstStyle/>
+          <a:p>
+            <a:pPr algn="ctr"/>
+            <a:r>
+              <a:rPr sz="1800" b="1">
+                <a:solidFill>
+                  <a:srgbClr val="355C7D"/>
+                </a:solidFill>
+                <a:latin typeface="Sarabun"/>
+              </a:rPr>
+              <a:t>Nine</a:t>
+            </a:r>
+          </a:p>
+        </p:txBody>
+      </p:sp>
     </p:spTree>
   </p:cSld>
   <p:clrMapOvr>
@@ -3991,6 +4105,63 @@
           </a:p>
         </p:txBody>
       </p:sp>
+      <p:sp>
+        <p:nvSpPr>
+          <p:cNvPr id="11" name="__pip_placeholder__"/>
+          <p:cNvSpPr/>
+          <p:nvPr/>
+        </p:nvSpPr>
+        <p:spPr>
+          <a:xfrm>
+            <a:off x="8351215" y="0"/>
+            <a:ext cx="3840480" cy="2880360"/>
+          </a:xfrm>
+          <a:prstGeom prst="rect">
+            <a:avLst/>
+          </a:prstGeom>
+          <a:solidFill>
+            <a:srgbClr val="DBE7EC">
+              <a:alpha val="30000"/>
+            </a:srgbClr>
+          </a:solidFill>
+          <a:ln w="19050">
+            <a:solidFill>
+              <a:srgbClr val="355C7D"/>
+            </a:solidFill>
+            <a:prstDash val="sysDash"/>
+          </a:ln>
+        </p:spPr>
+        <p:style>
+          <a:lnRef idx="1">
+            <a:schemeClr val="accent1"/>
+          </a:lnRef>
+          <a:fillRef idx="3">
+            <a:schemeClr val="accent1"/>
+          </a:fillRef>
+          <a:effectRef idx="2">
+            <a:schemeClr val="accent1"/>
+          </a:effectRef>
+          <a:fontRef idx="minor">
+            <a:schemeClr val="lt1"/>
+          </a:fontRef>
+        </p:style>
+        <p:txBody>
+          <a:bodyPr rtlCol="0" anchor="ctr" wrap="none"/>
+          <a:lstStyle/>
+          <a:p>
+            <a:pPr algn="ctr"/>
+            <a:r>
+              <a:rPr sz="1800" b="1">
+                <a:solidFill>
+                  <a:srgbClr val="355C7D"/>
+                </a:solidFill>
+                <a:latin typeface="Sarabun"/>
+              </a:rPr>
+              <a:t>Nine</a:t>
+            </a:r>
+          </a:p>
+        </p:txBody>
+      </p:sp>
     </p:spTree>
   </p:cSld>
   <p:clrMapOvr>
@@ -4584,6 +4755,63 @@
           </a:p>
         </p:txBody>
       </p:sp>
+      <p:sp>
+        <p:nvSpPr>
+          <p:cNvPr id="17" name="__pip_placeholder__"/>
+          <p:cNvSpPr/>
+          <p:nvPr/>
+        </p:nvSpPr>
+        <p:spPr>
+          <a:xfrm>
+            <a:off x="8351215" y="0"/>
+            <a:ext cx="3840480" cy="2880360"/>
+          </a:xfrm>
+          <a:prstGeom prst="rect">
+            <a:avLst/>
+          </a:prstGeom>
+          <a:solidFill>
+            <a:srgbClr val="DBE7EC">
+              <a:alpha val="30000"/>
+            </a:srgbClr>
+          </a:solidFill>
+          <a:ln w="19050">
+            <a:solidFill>
+              <a:srgbClr val="355C7D"/>
+            </a:solidFill>
+            <a:prstDash val="sysDash"/>
+          </a:ln>
+        </p:spPr>
+        <p:style>
+          <a:lnRef idx="1">
+            <a:schemeClr val="accent1"/>
+          </a:lnRef>
+          <a:fillRef idx="3">
+            <a:schemeClr val="accent1"/>
+          </a:fillRef>
+          <a:effectRef idx="2">
+            <a:schemeClr val="accent1"/>
+          </a:effectRef>
+          <a:fontRef idx="minor">
+            <a:schemeClr val="lt1"/>
+          </a:fontRef>
+        </p:style>
+        <p:txBody>
+          <a:bodyPr rtlCol="0" anchor="ctr" wrap="none"/>
+          <a:lstStyle/>
+          <a:p>
+            <a:pPr algn="ctr"/>
+            <a:r>
+              <a:rPr sz="1800" b="1">
+                <a:solidFill>
+                  <a:srgbClr val="355C7D"/>
+                </a:solidFill>
+                <a:latin typeface="Sarabun"/>
+              </a:rPr>
+              <a:t>Nine</a:t>
+            </a:r>
+          </a:p>
+        </p:txBody>
+      </p:sp>
     </p:spTree>
   </p:cSld>
   <p:clrMapOvr>
@@ -4940,6 +5168,63 @@
           </a:p>
         </p:txBody>
       </p:sp>
+      <p:sp>
+        <p:nvSpPr>
+          <p:cNvPr id="10" name="__pip_placeholder__"/>
+          <p:cNvSpPr/>
+          <p:nvPr/>
+        </p:nvSpPr>
+        <p:spPr>
+          <a:xfrm>
+            <a:off x="8351215" y="0"/>
+            <a:ext cx="3840480" cy="2880360"/>
+          </a:xfrm>
+          <a:prstGeom prst="rect">
+            <a:avLst/>
+          </a:prstGeom>
+          <a:solidFill>
+            <a:srgbClr val="DBE7EC">
+              <a:alpha val="30000"/>
+            </a:srgbClr>
+          </a:solidFill>
+          <a:ln w="19050">
+            <a:solidFill>
+              <a:srgbClr val="355C7D"/>
+            </a:solidFill>
+            <a:prstDash val="sysDash"/>
+          </a:ln>
+        </p:spPr>
+        <p:style>
+          <a:lnRef idx="1">
+            <a:schemeClr val="accent1"/>
+          </a:lnRef>
+          <a:fillRef idx="3">
+            <a:schemeClr val="accent1"/>
+          </a:fillRef>
+          <a:effectRef idx="2">
+            <a:schemeClr val="accent1"/>
+          </a:effectRef>
+          <a:fontRef idx="minor">
+            <a:schemeClr val="lt1"/>
+          </a:fontRef>
+        </p:style>
+        <p:txBody>
+          <a:bodyPr rtlCol="0" anchor="ctr" wrap="none"/>
+          <a:lstStyle/>
+          <a:p>
+            <a:pPr algn="ctr"/>
+            <a:r>
+              <a:rPr sz="1800" b="1">
+                <a:solidFill>
+                  <a:srgbClr val="355C7D"/>
+                </a:solidFill>
+                <a:latin typeface="Sarabun"/>
+              </a:rPr>
+              <a:t>Nine</a:t>
+            </a:r>
+          </a:p>
+        </p:txBody>
+      </p:sp>
     </p:spTree>
   </p:cSld>
   <p:clrMapOvr>
@@ -5518,6 +5803,63 @@
           </a:p>
         </p:txBody>
       </p:sp>
+      <p:sp>
+        <p:nvSpPr>
+          <p:cNvPr id="16" name="__pip_placeholder__"/>
+          <p:cNvSpPr/>
+          <p:nvPr/>
+        </p:nvSpPr>
+        <p:spPr>
+          <a:xfrm>
+            <a:off x="8351215" y="0"/>
+            <a:ext cx="3840480" cy="2880360"/>
+          </a:xfrm>
+          <a:prstGeom prst="rect">
+            <a:avLst/>
+          </a:prstGeom>
+          <a:solidFill>
+            <a:srgbClr val="DBE7EC">
+              <a:alpha val="30000"/>
+            </a:srgbClr>
+          </a:solidFill>
+          <a:ln w="19050">
+            <a:solidFill>
+              <a:srgbClr val="355C7D"/>
+            </a:solidFill>
+            <a:prstDash val="sysDash"/>
+          </a:ln>
+        </p:spPr>
+        <p:style>
+          <a:lnRef idx="1">
+            <a:schemeClr val="accent1"/>
+          </a:lnRef>
+          <a:fillRef idx="3">
+            <a:schemeClr val="accent1"/>
+          </a:fillRef>
+          <a:effectRef idx="2">
+            <a:schemeClr val="accent1"/>
+          </a:effectRef>
+          <a:fontRef idx="minor">
+            <a:schemeClr val="lt1"/>
+          </a:fontRef>
+        </p:style>
+        <p:txBody>
+          <a:bodyPr rtlCol="0" anchor="ctr" wrap="none"/>
+          <a:lstStyle/>
+          <a:p>
+            <a:pPr algn="ctr"/>
+            <a:r>
+              <a:rPr sz="1800" b="1">
+                <a:solidFill>
+                  <a:srgbClr val="355C7D"/>
+                </a:solidFill>
+                <a:latin typeface="Sarabun"/>
+              </a:rPr>
+              <a:t>Nine</a:t>
+            </a:r>
+          </a:p>
+        </p:txBody>
+      </p:sp>
     </p:spTree>
   </p:cSld>
   <p:clrMapOvr>
@@ -6366,6 +6708,63 @@
           </a:p>
         </p:txBody>
       </p:sp>
+      <p:sp>
+        <p:nvSpPr>
+          <p:cNvPr id="23" name="__pip_placeholder__"/>
+          <p:cNvSpPr/>
+          <p:nvPr/>
+        </p:nvSpPr>
+        <p:spPr>
+          <a:xfrm>
+            <a:off x="8351215" y="0"/>
+            <a:ext cx="3840480" cy="2880360"/>
+          </a:xfrm>
+          <a:prstGeom prst="rect">
+            <a:avLst/>
+          </a:prstGeom>
+          <a:solidFill>
+            <a:srgbClr val="DBE7EC">
+              <a:alpha val="30000"/>
+            </a:srgbClr>
+          </a:solidFill>
+          <a:ln w="19050">
+            <a:solidFill>
+              <a:srgbClr val="355C7D"/>
+            </a:solidFill>
+            <a:prstDash val="sysDash"/>
+          </a:ln>
+        </p:spPr>
+        <p:style>
+          <a:lnRef idx="1">
+            <a:schemeClr val="accent1"/>
+          </a:lnRef>
+          <a:fillRef idx="3">
+            <a:schemeClr val="accent1"/>
+          </a:fillRef>
+          <a:effectRef idx="2">
+            <a:schemeClr val="accent1"/>
+          </a:effectRef>
+          <a:fontRef idx="minor">
+            <a:schemeClr val="lt1"/>
+          </a:fontRef>
+        </p:style>
+        <p:txBody>
+          <a:bodyPr rtlCol="0" anchor="ctr" wrap="none"/>
+          <a:lstStyle/>
+          <a:p>
+            <a:pPr algn="ctr"/>
+            <a:r>
+              <a:rPr sz="1800" b="1">
+                <a:solidFill>
+                  <a:srgbClr val="355C7D"/>
+                </a:solidFill>
+                <a:latin typeface="Sarabun"/>
+              </a:rPr>
+              <a:t>Nine</a:t>
+            </a:r>
+          </a:p>
+        </p:txBody>
+      </p:sp>
     </p:spTree>
   </p:cSld>
   <p:clrMapOvr>
@@ -6795,6 +7194,63 @@
           </a:p>
         </p:txBody>
       </p:sp>
+      <p:sp>
+        <p:nvSpPr>
+          <p:cNvPr id="9" name="__pip_placeholder__"/>
+          <p:cNvSpPr/>
+          <p:nvPr/>
+        </p:nvSpPr>
+        <p:spPr>
+          <a:xfrm>
+            <a:off x="8351215" y="0"/>
+            <a:ext cx="3840480" cy="2880360"/>
+          </a:xfrm>
+          <a:prstGeom prst="rect">
+            <a:avLst/>
+          </a:prstGeom>
+          <a:solidFill>
+            <a:srgbClr val="DBE7EC">
+              <a:alpha val="30000"/>
+            </a:srgbClr>
+          </a:solidFill>
+          <a:ln w="19050">
+            <a:solidFill>
+              <a:srgbClr val="355C7D"/>
+            </a:solidFill>
+            <a:prstDash val="sysDash"/>
+          </a:ln>
+        </p:spPr>
+        <p:style>
+          <a:lnRef idx="1">
+            <a:schemeClr val="accent1"/>
+          </a:lnRef>
+          <a:fillRef idx="3">
+            <a:schemeClr val="accent1"/>
+          </a:fillRef>
+          <a:effectRef idx="2">
+            <a:schemeClr val="accent1"/>
+          </a:effectRef>
+          <a:fontRef idx="minor">
+            <a:schemeClr val="lt1"/>
+          </a:fontRef>
+        </p:style>
+        <p:txBody>
+          <a:bodyPr rtlCol="0" anchor="ctr" wrap="none"/>
+          <a:lstStyle/>
+          <a:p>
+            <a:pPr algn="ctr"/>
+            <a:r>
+              <a:rPr sz="1800" b="1">
+                <a:solidFill>
+                  <a:srgbClr val="355C7D"/>
+                </a:solidFill>
+                <a:latin typeface="Sarabun"/>
+              </a:rPr>
+              <a:t>Nine</a:t>
+            </a:r>
+          </a:p>
+        </p:txBody>
+      </p:sp>
     </p:spTree>
   </p:cSld>
   <p:clrMapOvr>
@@ -7032,6 +7488,63 @@
                 <a:cs typeface="Sarabun"/>
               </a:rPr>
               <a:t>Immersion Thai with Nine</a:t>
+            </a:r>
+          </a:p>
+        </p:txBody>
+      </p:sp>
+      <p:sp>
+        <p:nvSpPr>
+          <p:cNvPr id="8" name="__pip_placeholder__"/>
+          <p:cNvSpPr/>
+          <p:nvPr/>
+        </p:nvSpPr>
+        <p:spPr>
+          <a:xfrm>
+            <a:off x="8351215" y="0"/>
+            <a:ext cx="3840480" cy="2880360"/>
+          </a:xfrm>
+          <a:prstGeom prst="rect">
+            <a:avLst/>
+          </a:prstGeom>
+          <a:solidFill>
+            <a:srgbClr val="DBE7EC">
+              <a:alpha val="30000"/>
+            </a:srgbClr>
+          </a:solidFill>
+          <a:ln w="19050">
+            <a:solidFill>
+              <a:srgbClr val="355C7D"/>
+            </a:solidFill>
+            <a:prstDash val="sysDash"/>
+          </a:ln>
+        </p:spPr>
+        <p:style>
+          <a:lnRef idx="1">
+            <a:schemeClr val="accent1"/>
+          </a:lnRef>
+          <a:fillRef idx="3">
+            <a:schemeClr val="accent1"/>
+          </a:fillRef>
+          <a:effectRef idx="2">
+            <a:schemeClr val="accent1"/>
+          </a:effectRef>
+          <a:fontRef idx="minor">
+            <a:schemeClr val="lt1"/>
+          </a:fontRef>
+        </p:style>
+        <p:txBody>
+          <a:bodyPr rtlCol="0" anchor="ctr" wrap="none"/>
+          <a:lstStyle/>
+          <a:p>
+            <a:pPr algn="ctr"/>
+            <a:r>
+              <a:rPr sz="1800" b="1">
+                <a:solidFill>
+                  <a:srgbClr val="355C7D"/>
+                </a:solidFill>
+                <a:latin typeface="Sarabun"/>
+              </a:rPr>
+              <a:t>Nine</a:t>
             </a:r>
           </a:p>
         </p:txBody>

--- a/course/modules/M01/L002/M01-L002-canva-deck.pptx
+++ b/course/modules/M01/L002/M01-L002-canva-deck.pptx
@@ -4451,7 +4451,7 @@
         <p:spPr>
           <a:xfrm>
             <a:off x="731520" y="1325880"/>
-            <a:ext cx="3889080" cy="1572768"/>
+            <a:ext cx="7071055" cy="1572768"/>
           </a:xfrm>
           <a:prstGeom prst="roundRect">
             <a:avLst/>
@@ -4535,7 +4535,7 @@
         <p:spPr>
           <a:xfrm>
             <a:off x="1078992" y="1435608"/>
-            <a:ext cx="3431880" cy="658368"/>
+            <a:ext cx="6613855" cy="658368"/>
           </a:xfrm>
           <a:prstGeom prst="rect">
             <a:avLst/>
@@ -4583,7 +4583,7 @@
         <p:spPr>
           <a:xfrm>
             <a:off x="1078992" y="2203704"/>
-            <a:ext cx="3431880" cy="274320"/>
+            <a:ext cx="6613855" cy="274320"/>
           </a:xfrm>
           <a:prstGeom prst="rect">
             <a:avLst/>
@@ -4620,7 +4620,7 @@
         <p:spPr>
           <a:xfrm>
             <a:off x="731520" y="2606040"/>
-            <a:ext cx="3889080" cy="1572768"/>
+            <a:ext cx="7071055" cy="1572768"/>
           </a:xfrm>
           <a:prstGeom prst="roundRect">
             <a:avLst/>
@@ -4704,7 +4704,7 @@
         <p:spPr>
           <a:xfrm>
             <a:off x="1078992" y="2715768"/>
-            <a:ext cx="3431880" cy="658368"/>
+            <a:ext cx="6613855" cy="658368"/>
           </a:xfrm>
           <a:prstGeom prst="rect">
             <a:avLst/>
@@ -4752,7 +4752,7 @@
         <p:spPr>
           <a:xfrm>
             <a:off x="1078992" y="3483864"/>
-            <a:ext cx="3431880" cy="274320"/>
+            <a:ext cx="6613855" cy="274320"/>
           </a:xfrm>
           <a:prstGeom prst="rect">
             <a:avLst/>
@@ -4789,7 +4789,7 @@
         <p:spPr>
           <a:xfrm>
             <a:off x="731520" y="3886200"/>
-            <a:ext cx="3889080" cy="1572768"/>
+            <a:ext cx="7071055" cy="1572768"/>
           </a:xfrm>
           <a:prstGeom prst="roundRect">
             <a:avLst/>
@@ -4873,7 +4873,7 @@
         <p:spPr>
           <a:xfrm>
             <a:off x="1078992" y="3995928"/>
-            <a:ext cx="3431880" cy="658368"/>
+            <a:ext cx="6613855" cy="658368"/>
           </a:xfrm>
           <a:prstGeom prst="rect">
             <a:avLst/>
@@ -4921,7 +4921,7 @@
         <p:spPr>
           <a:xfrm>
             <a:off x="1078992" y="4764024"/>
-            <a:ext cx="3431880" cy="274320"/>
+            <a:ext cx="6613855" cy="274320"/>
           </a:xfrm>
           <a:prstGeom prst="rect">
             <a:avLst/>
@@ -4958,7 +4958,7 @@
         <p:spPr>
           <a:xfrm>
             <a:off x="731520" y="5166360"/>
-            <a:ext cx="3889080" cy="1572768"/>
+            <a:ext cx="7071055" cy="1572768"/>
           </a:xfrm>
           <a:prstGeom prst="roundRect">
             <a:avLst/>
@@ -5042,7 +5042,7 @@
         <p:spPr>
           <a:xfrm>
             <a:off x="1078992" y="5276088"/>
-            <a:ext cx="3431880" cy="658368"/>
+            <a:ext cx="6613855" cy="658368"/>
           </a:xfrm>
           <a:prstGeom prst="rect">
             <a:avLst/>
@@ -5090,7 +5090,7 @@
         <p:spPr>
           <a:xfrm>
             <a:off x="1078992" y="6044184"/>
-            <a:ext cx="3431880" cy="274320"/>
+            <a:ext cx="6613855" cy="274320"/>
           </a:xfrm>
           <a:prstGeom prst="rect">
             <a:avLst/>
@@ -5126,7 +5126,7 @@
         </p:nvSpPr>
         <p:spPr>
           <a:xfrm>
-            <a:off x="932688" y="6775704"/>
+            <a:off x="932688" y="6729984"/>
             <a:ext cx="9692640" cy="228600"/>
           </a:xfrm>
           <a:prstGeom prst="rect">
@@ -5163,7 +5163,7 @@
         </p:nvSpPr>
         <p:spPr>
           <a:xfrm>
-            <a:off x="932688" y="7159752"/>
+            <a:off x="932688" y="7114032"/>
             <a:ext cx="82296" cy="82296"/>
           </a:xfrm>
           <a:prstGeom prst="ellipse">
@@ -5206,7 +5206,7 @@
         </p:nvSpPr>
         <p:spPr>
           <a:xfrm>
-            <a:off x="1078992" y="7068312"/>
+            <a:off x="1078992" y="7022592"/>
             <a:ext cx="9555480" cy="274320"/>
           </a:xfrm>
           <a:prstGeom prst="rect">
@@ -5477,7 +5477,7 @@
         <p:spPr>
           <a:xfrm>
             <a:off x="731520" y="1325880"/>
-            <a:ext cx="3889080" cy="685800"/>
+            <a:ext cx="7071055" cy="685800"/>
           </a:xfrm>
           <a:prstGeom prst="roundRect">
             <a:avLst/>
@@ -5561,7 +5561,7 @@
         <p:spPr>
           <a:xfrm>
             <a:off x="1078992" y="1399032"/>
-            <a:ext cx="3431880" cy="320040"/>
+            <a:ext cx="6613855" cy="320040"/>
           </a:xfrm>
           <a:prstGeom prst="rect">
             <a:avLst/>
@@ -5609,7 +5609,7 @@
         <p:spPr>
           <a:xfrm>
             <a:off x="1078992" y="1709928"/>
-            <a:ext cx="3431880" cy="228600"/>
+            <a:ext cx="6613855" cy="228600"/>
           </a:xfrm>
           <a:prstGeom prst="rect">
             <a:avLst/>
@@ -5646,7 +5646,7 @@
         <p:spPr>
           <a:xfrm>
             <a:off x="731520" y="2130552"/>
-            <a:ext cx="3889080" cy="685800"/>
+            <a:ext cx="7071055" cy="685800"/>
           </a:xfrm>
           <a:prstGeom prst="roundRect">
             <a:avLst/>
@@ -5730,7 +5730,7 @@
         <p:spPr>
           <a:xfrm>
             <a:off x="1078992" y="2203704"/>
-            <a:ext cx="3431880" cy="320040"/>
+            <a:ext cx="6613855" cy="320040"/>
           </a:xfrm>
           <a:prstGeom prst="rect">
             <a:avLst/>
@@ -5778,7 +5778,7 @@
         <p:spPr>
           <a:xfrm>
             <a:off x="1078992" y="2514600"/>
-            <a:ext cx="3431880" cy="228600"/>
+            <a:ext cx="6613855" cy="228600"/>
           </a:xfrm>
           <a:prstGeom prst="rect">
             <a:avLst/>
@@ -5815,7 +5815,7 @@
         <p:spPr>
           <a:xfrm>
             <a:off x="731520" y="2935224"/>
-            <a:ext cx="3889080" cy="685800"/>
+            <a:ext cx="7071055" cy="685800"/>
           </a:xfrm>
           <a:prstGeom prst="roundRect">
             <a:avLst/>
@@ -5899,7 +5899,7 @@
         <p:spPr>
           <a:xfrm>
             <a:off x="1078992" y="3008376"/>
-            <a:ext cx="3431880" cy="320040"/>
+            <a:ext cx="6613855" cy="320040"/>
           </a:xfrm>
           <a:prstGeom prst="rect">
             <a:avLst/>
@@ -5947,7 +5947,7 @@
         <p:spPr>
           <a:xfrm>
             <a:off x="1078992" y="3319272"/>
-            <a:ext cx="3431880" cy="228600"/>
+            <a:ext cx="6613855" cy="228600"/>
           </a:xfrm>
           <a:prstGeom prst="rect">
             <a:avLst/>
@@ -5984,7 +5984,7 @@
         <p:spPr>
           <a:xfrm>
             <a:off x="731520" y="3739896"/>
-            <a:ext cx="3889080" cy="685800"/>
+            <a:ext cx="7071055" cy="685800"/>
           </a:xfrm>
           <a:prstGeom prst="roundRect">
             <a:avLst/>
@@ -6068,7 +6068,7 @@
         <p:spPr>
           <a:xfrm>
             <a:off x="1078992" y="3813048"/>
-            <a:ext cx="3431880" cy="320040"/>
+            <a:ext cx="6613855" cy="320040"/>
           </a:xfrm>
           <a:prstGeom prst="rect">
             <a:avLst/>
@@ -6116,7 +6116,7 @@
         <p:spPr>
           <a:xfrm>
             <a:off x="1078992" y="4123944"/>
-            <a:ext cx="3431880" cy="228600"/>
+            <a:ext cx="6613855" cy="228600"/>
           </a:xfrm>
           <a:prstGeom prst="rect">
             <a:avLst/>
@@ -6153,7 +6153,7 @@
         <p:spPr>
           <a:xfrm>
             <a:off x="731520" y="4544568"/>
-            <a:ext cx="3889080" cy="685800"/>
+            <a:ext cx="7071055" cy="685800"/>
           </a:xfrm>
           <a:prstGeom prst="roundRect">
             <a:avLst/>
@@ -6237,7 +6237,7 @@
         <p:spPr>
           <a:xfrm>
             <a:off x="1078992" y="4617720"/>
-            <a:ext cx="3431880" cy="320040"/>
+            <a:ext cx="6613855" cy="320040"/>
           </a:xfrm>
           <a:prstGeom prst="rect">
             <a:avLst/>
@@ -6285,7 +6285,7 @@
         <p:spPr>
           <a:xfrm>
             <a:off x="1078992" y="4928616"/>
-            <a:ext cx="3431880" cy="228600"/>
+            <a:ext cx="6613855" cy="228600"/>
           </a:xfrm>
           <a:prstGeom prst="rect">
             <a:avLst/>
@@ -6321,7 +6321,7 @@
         </p:nvSpPr>
         <p:spPr>
           <a:xfrm>
-            <a:off x="932688" y="5678424"/>
+            <a:off x="932688" y="5632704"/>
             <a:ext cx="9692640" cy="228600"/>
           </a:xfrm>
           <a:prstGeom prst="rect">
@@ -6358,7 +6358,7 @@
         </p:nvSpPr>
         <p:spPr>
           <a:xfrm>
-            <a:off x="932688" y="6062472"/>
+            <a:off x="932688" y="6016752"/>
             <a:ext cx="82296" cy="82296"/>
           </a:xfrm>
           <a:prstGeom prst="ellipse">
@@ -6401,7 +6401,7 @@
         </p:nvSpPr>
         <p:spPr>
           <a:xfrm>
-            <a:off x="1078992" y="5971032"/>
+            <a:off x="1078992" y="5925312"/>
             <a:ext cx="9555480" cy="274320"/>
           </a:xfrm>
           <a:prstGeom prst="rect">
@@ -6760,7 +6760,7 @@
         <p:spPr>
           <a:xfrm>
             <a:off x="731520" y="1325880"/>
-            <a:ext cx="3889080" cy="1572768"/>
+            <a:ext cx="7071055" cy="1572768"/>
           </a:xfrm>
           <a:prstGeom prst="roundRect">
             <a:avLst/>
@@ -6844,7 +6844,7 @@
         <p:spPr>
           <a:xfrm>
             <a:off x="1078992" y="1435608"/>
-            <a:ext cx="3431880" cy="658368"/>
+            <a:ext cx="6613855" cy="658368"/>
           </a:xfrm>
           <a:prstGeom prst="rect">
             <a:avLst/>
@@ -6892,7 +6892,7 @@
         <p:spPr>
           <a:xfrm>
             <a:off x="1078992" y="2203704"/>
-            <a:ext cx="3431880" cy="274320"/>
+            <a:ext cx="6613855" cy="274320"/>
           </a:xfrm>
           <a:prstGeom prst="rect">
             <a:avLst/>
@@ -6929,7 +6929,7 @@
         <p:spPr>
           <a:xfrm>
             <a:off x="731520" y="3081528"/>
-            <a:ext cx="3889080" cy="1572768"/>
+            <a:ext cx="7071055" cy="1572768"/>
           </a:xfrm>
           <a:prstGeom prst="roundRect">
             <a:avLst/>
@@ -7013,7 +7013,7 @@
         <p:spPr>
           <a:xfrm>
             <a:off x="1078992" y="3191256"/>
-            <a:ext cx="3431880" cy="658368"/>
+            <a:ext cx="6613855" cy="658368"/>
           </a:xfrm>
           <a:prstGeom prst="rect">
             <a:avLst/>
@@ -7061,7 +7061,7 @@
         <p:spPr>
           <a:xfrm>
             <a:off x="1078992" y="3959352"/>
-            <a:ext cx="3431880" cy="274320"/>
+            <a:ext cx="6613855" cy="274320"/>
           </a:xfrm>
           <a:prstGeom prst="rect">
             <a:avLst/>
@@ -7098,7 +7098,7 @@
         <p:spPr>
           <a:xfrm>
             <a:off x="731520" y="4837176"/>
-            <a:ext cx="3889080" cy="1572768"/>
+            <a:ext cx="7071055" cy="1572768"/>
           </a:xfrm>
           <a:prstGeom prst="roundRect">
             <a:avLst/>
@@ -7182,7 +7182,7 @@
         <p:spPr>
           <a:xfrm>
             <a:off x="1078992" y="4946904"/>
-            <a:ext cx="3431880" cy="658368"/>
+            <a:ext cx="6613855" cy="658368"/>
           </a:xfrm>
           <a:prstGeom prst="rect">
             <a:avLst/>
@@ -7230,7 +7230,7 @@
         <p:spPr>
           <a:xfrm>
             <a:off x="1078992" y="5715000"/>
-            <a:ext cx="3431880" cy="274320"/>
+            <a:ext cx="6613855" cy="274320"/>
           </a:xfrm>
           <a:prstGeom prst="rect">
             <a:avLst/>
@@ -7266,7 +7266,7 @@
         </p:nvSpPr>
         <p:spPr>
           <a:xfrm>
-            <a:off x="932688" y="6922008"/>
+            <a:off x="932688" y="6876288"/>
             <a:ext cx="9692640" cy="228600"/>
           </a:xfrm>
           <a:prstGeom prst="rect">
@@ -7303,7 +7303,7 @@
         </p:nvSpPr>
         <p:spPr>
           <a:xfrm>
-            <a:off x="932688" y="7306056"/>
+            <a:off x="932688" y="7260336"/>
             <a:ext cx="82296" cy="82296"/>
           </a:xfrm>
           <a:prstGeom prst="ellipse">
@@ -7346,7 +7346,7 @@
         </p:nvSpPr>
         <p:spPr>
           <a:xfrm>
-            <a:off x="1078992" y="7214616"/>
+            <a:off x="1078992" y="7168896"/>
             <a:ext cx="9555480" cy="274320"/>
           </a:xfrm>
           <a:prstGeom prst="rect">
@@ -7771,7 +7771,7 @@
         <p:spPr>
           <a:xfrm>
             <a:off x="731520" y="1325880"/>
-            <a:ext cx="3889080" cy="1572768"/>
+            <a:ext cx="7071055" cy="1572768"/>
           </a:xfrm>
           <a:prstGeom prst="roundRect">
             <a:avLst/>
@@ -7855,7 +7855,7 @@
         <p:spPr>
           <a:xfrm>
             <a:off x="1078992" y="1435608"/>
-            <a:ext cx="3431880" cy="658368"/>
+            <a:ext cx="6613855" cy="658368"/>
           </a:xfrm>
           <a:prstGeom prst="rect">
             <a:avLst/>
@@ -7903,7 +7903,7 @@
         <p:spPr>
           <a:xfrm>
             <a:off x="1078992" y="2203704"/>
-            <a:ext cx="3431880" cy="274320"/>
+            <a:ext cx="6613855" cy="274320"/>
           </a:xfrm>
           <a:prstGeom prst="rect">
             <a:avLst/>
@@ -7940,7 +7940,7 @@
         <p:spPr>
           <a:xfrm>
             <a:off x="731520" y="3081528"/>
-            <a:ext cx="3889080" cy="1572768"/>
+            <a:ext cx="7071055" cy="1572768"/>
           </a:xfrm>
           <a:prstGeom prst="roundRect">
             <a:avLst/>
@@ -8024,7 +8024,7 @@
         <p:spPr>
           <a:xfrm>
             <a:off x="1078992" y="3191256"/>
-            <a:ext cx="3431880" cy="658368"/>
+            <a:ext cx="6613855" cy="658368"/>
           </a:xfrm>
           <a:prstGeom prst="rect">
             <a:avLst/>
@@ -8072,7 +8072,7 @@
         <p:spPr>
           <a:xfrm>
             <a:off x="1078992" y="3959352"/>
-            <a:ext cx="3431880" cy="274320"/>
+            <a:ext cx="6613855" cy="274320"/>
           </a:xfrm>
           <a:prstGeom prst="rect">
             <a:avLst/>
@@ -8109,7 +8109,7 @@
         <p:spPr>
           <a:xfrm>
             <a:off x="731520" y="4837176"/>
-            <a:ext cx="3889080" cy="1572768"/>
+            <a:ext cx="7071055" cy="1572768"/>
           </a:xfrm>
           <a:prstGeom prst="roundRect">
             <a:avLst/>
@@ -8193,7 +8193,7 @@
         <p:spPr>
           <a:xfrm>
             <a:off x="1078992" y="4946904"/>
-            <a:ext cx="3431880" cy="658368"/>
+            <a:ext cx="6613855" cy="658368"/>
           </a:xfrm>
           <a:prstGeom prst="rect">
             <a:avLst/>
@@ -8241,7 +8241,7 @@
         <p:spPr>
           <a:xfrm>
             <a:off x="1078992" y="5715000"/>
-            <a:ext cx="3431880" cy="274320"/>
+            <a:ext cx="6613855" cy="274320"/>
           </a:xfrm>
           <a:prstGeom prst="rect">
             <a:avLst/>
@@ -8277,7 +8277,7 @@
         </p:nvSpPr>
         <p:spPr>
           <a:xfrm>
-            <a:off x="932688" y="6922008"/>
+            <a:off x="932688" y="6876288"/>
             <a:ext cx="9692640" cy="228600"/>
           </a:xfrm>
           <a:prstGeom prst="rect">
@@ -8314,7 +8314,7 @@
         </p:nvSpPr>
         <p:spPr>
           <a:xfrm>
-            <a:off x="932688" y="7306056"/>
+            <a:off x="932688" y="7260336"/>
             <a:ext cx="82296" cy="82296"/>
           </a:xfrm>
           <a:prstGeom prst="ellipse">
@@ -8357,7 +8357,7 @@
         </p:nvSpPr>
         <p:spPr>
           <a:xfrm>
-            <a:off x="1078992" y="7214616"/>
+            <a:off x="1078992" y="7168896"/>
             <a:ext cx="9555480" cy="274320"/>
           </a:xfrm>
           <a:prstGeom prst="rect">

--- a/course/modules/M01/L002/M01-L002-canva-deck.pptx
+++ b/course/modules/M01/L002/M01-L002-canva-deck.pptx
@@ -8,12 +8,12 @@
     <p:sldId id="256" r:id="rId7"/>
     <p:sldId id="257" r:id="rId8"/>
     <p:sldId id="258" r:id="rId9"/>
-    <p:sldId id="259" r:id="rId10"/>
-    <p:sldId id="260" r:id="rId11"/>
-    <p:sldId id="261" r:id="rId12"/>
-    <p:sldId id="262" r:id="rId13"/>
-    <p:sldId id="263" r:id="rId14"/>
-    <p:sldId id="264" r:id="rId15"/>
+    <p:sldId id="259" r:id="rId11"/>
+    <p:sldId id="260" r:id="rId12"/>
+    <p:sldId id="261" r:id="rId13"/>
+    <p:sldId id="262" r:id="rId14"/>
+    <p:sldId id="263" r:id="rId15"/>
+    <p:sldId id="264" r:id="rId16"/>
   </p:sldIdLst>
   <p:sldSz cx="12191695" cy="6858000" type="screen4x3"/>
   <p:notesSz cx="6858000" cy="9144000"/>
@@ -113,6 +113,615 @@
     </a:lvl9pPr>
   </p:defaultTextStyle>
 </p:presentation>
+</file>
+
+<file path=ppt/notesMasters/notesMaster1.xml><?xml version="1.0" encoding="utf-8"?>
+<p:notesMaster xmlns:a="http://schemas.openxmlformats.org/drawingml/2006/main" xmlns:p="http://schemas.openxmlformats.org/presentationml/2006/main" xmlns:r="http://schemas.openxmlformats.org/officeDocument/2006/relationships">
+  <p:cSld>
+    <p:bg>
+      <p:bgRef idx="1001">
+        <a:schemeClr val="bg1"/>
+      </p:bgRef>
+    </p:bg>
+    <p:spTree>
+      <p:nvGrpSpPr>
+        <p:cNvPr id="1" name=""/>
+        <p:cNvGrpSpPr/>
+        <p:nvPr/>
+      </p:nvGrpSpPr>
+      <p:grpSpPr>
+        <a:xfrm>
+          <a:off x="0" y="0"/>
+          <a:ext cx="0" cy="0"/>
+          <a:chOff x="0" y="0"/>
+          <a:chExt cx="0" cy="0"/>
+        </a:xfrm>
+      </p:grpSpPr>
+      <p:sp>
+        <p:nvSpPr>
+          <p:cNvPr id="2" name="Header Placeholder 1"/>
+          <p:cNvSpPr>
+            <a:spLocks noGrp="1"/>
+          </p:cNvSpPr>
+          <p:nvPr>
+            <p:ph type="hdr" sz="quarter"/>
+          </p:nvPr>
+        </p:nvSpPr>
+        <p:spPr>
+          <a:xfrm>
+            <a:off x="0" y="0"/>
+            <a:ext cx="2971800" cy="457200"/>
+          </a:xfrm>
+          <a:prstGeom prst="rect">
+            <a:avLst/>
+          </a:prstGeom>
+        </p:spPr>
+        <p:txBody>
+          <a:bodyPr vert="horz" lIns="91440" tIns="45720" rIns="91440" bIns="45720" rtlCol="0"/>
+          <a:lstStyle>
+            <a:lvl1pPr algn="l">
+              <a:defRPr sz="1200"/>
+            </a:lvl1pPr>
+          </a:lstStyle>
+          <a:p>
+            <a:endParaRPr lang="en-US"/>
+          </a:p>
+        </p:txBody>
+      </p:sp>
+      <p:sp>
+        <p:nvSpPr>
+          <p:cNvPr id="3" name="Date Placeholder 2"/>
+          <p:cNvSpPr>
+            <a:spLocks noGrp="1"/>
+          </p:cNvSpPr>
+          <p:nvPr>
+            <p:ph type="dt" idx="1"/>
+          </p:nvPr>
+        </p:nvSpPr>
+        <p:spPr>
+          <a:xfrm>
+            <a:off x="3884613" y="0"/>
+            <a:ext cx="2971800" cy="457200"/>
+          </a:xfrm>
+          <a:prstGeom prst="rect">
+            <a:avLst/>
+          </a:prstGeom>
+        </p:spPr>
+        <p:txBody>
+          <a:bodyPr vert="horz" lIns="91440" tIns="45720" rIns="91440" bIns="45720" rtlCol="0"/>
+          <a:lstStyle>
+            <a:lvl1pPr algn="r">
+              <a:defRPr sz="1200"/>
+            </a:lvl1pPr>
+          </a:lstStyle>
+          <a:p>
+            <a:fld id="{0F89C1C7-3DCD-1040-A9CF-14679D8B5DDD}" type="datetimeFigureOut">
+              <a:rPr lang="en-US" smtClean="0"/>
+              <a:t>10/17/16</a:t>
+            </a:fld>
+            <a:endParaRPr lang="en-US"/>
+          </a:p>
+        </p:txBody>
+      </p:sp>
+      <p:sp>
+        <p:nvSpPr>
+          <p:cNvPr id="4" name="Slide Image Placeholder 3"/>
+          <p:cNvSpPr>
+            <a:spLocks noGrp="1" noRot="1" noChangeAspect="1"/>
+          </p:cNvSpPr>
+          <p:nvPr>
+            <p:ph type="sldImg" idx="2"/>
+          </p:nvPr>
+        </p:nvSpPr>
+        <p:spPr>
+          <a:xfrm>
+            <a:off x="1143000" y="685800"/>
+            <a:ext cx="4572000" cy="3429000"/>
+          </a:xfrm>
+          <a:prstGeom prst="rect">
+            <a:avLst/>
+          </a:prstGeom>
+          <a:noFill/>
+          <a:ln w="12700">
+            <a:solidFill>
+              <a:prstClr val="black"/>
+            </a:solidFill>
+          </a:ln>
+        </p:spPr>
+        <p:txBody>
+          <a:bodyPr vert="horz" lIns="91440" tIns="45720" rIns="91440" bIns="45720" rtlCol="0" anchor="ctr"/>
+          <a:lstStyle/>
+          <a:p>
+            <a:endParaRPr lang="en-US"/>
+          </a:p>
+        </p:txBody>
+      </p:sp>
+      <p:sp>
+        <p:nvSpPr>
+          <p:cNvPr id="5" name="Notes Placeholder 4"/>
+          <p:cNvSpPr>
+            <a:spLocks noGrp="1"/>
+          </p:cNvSpPr>
+          <p:nvPr>
+            <p:ph type="body" sz="quarter" idx="3"/>
+          </p:nvPr>
+        </p:nvSpPr>
+        <p:spPr>
+          <a:xfrm>
+            <a:off x="685800" y="4343400"/>
+            <a:ext cx="5486400" cy="4114800"/>
+          </a:xfrm>
+          <a:prstGeom prst="rect">
+            <a:avLst/>
+          </a:prstGeom>
+        </p:spPr>
+        <p:txBody>
+          <a:bodyPr vert="horz" lIns="91440" tIns="45720" rIns="91440" bIns="45720" rtlCol="0"/>
+          <a:lstStyle/>
+          <a:p>
+            <a:pPr lvl="0"/>
+            <a:r>
+              <a:rPr lang="en-US" smtClean="0"/>
+              <a:t>Click to edit Master text styles</a:t>
+            </a:r>
+          </a:p>
+          <a:p>
+            <a:pPr lvl="1"/>
+            <a:r>
+              <a:rPr lang="en-US" smtClean="0"/>
+              <a:t>Second level</a:t>
+            </a:r>
+          </a:p>
+          <a:p>
+            <a:pPr lvl="2"/>
+            <a:r>
+              <a:rPr lang="en-US" smtClean="0"/>
+              <a:t>Third level</a:t>
+            </a:r>
+          </a:p>
+          <a:p>
+            <a:pPr lvl="3"/>
+            <a:r>
+              <a:rPr lang="en-US" smtClean="0"/>
+              <a:t>Fourth level</a:t>
+            </a:r>
+          </a:p>
+          <a:p>
+            <a:pPr lvl="4"/>
+            <a:r>
+              <a:rPr lang="en-US" smtClean="0"/>
+              <a:t>Fifth level</a:t>
+            </a:r>
+            <a:endParaRPr lang="en-US"/>
+          </a:p>
+        </p:txBody>
+      </p:sp>
+      <p:sp>
+        <p:nvSpPr>
+          <p:cNvPr id="6" name="Footer Placeholder 5"/>
+          <p:cNvSpPr>
+            <a:spLocks noGrp="1"/>
+          </p:cNvSpPr>
+          <p:nvPr>
+            <p:ph type="ftr" sz="quarter" idx="4"/>
+          </p:nvPr>
+        </p:nvSpPr>
+        <p:spPr>
+          <a:xfrm>
+            <a:off x="0" y="8685213"/>
+            <a:ext cx="2971800" cy="457200"/>
+          </a:xfrm>
+          <a:prstGeom prst="rect">
+            <a:avLst/>
+          </a:prstGeom>
+        </p:spPr>
+        <p:txBody>
+          <a:bodyPr vert="horz" lIns="91440" tIns="45720" rIns="91440" bIns="45720" rtlCol="0" anchor="b"/>
+          <a:lstStyle>
+            <a:lvl1pPr algn="l">
+              <a:defRPr sz="1200"/>
+            </a:lvl1pPr>
+          </a:lstStyle>
+          <a:p>
+            <a:endParaRPr lang="en-US"/>
+          </a:p>
+        </p:txBody>
+      </p:sp>
+      <p:sp>
+        <p:nvSpPr>
+          <p:cNvPr id="7" name="Slide Number Placeholder 6"/>
+          <p:cNvSpPr>
+            <a:spLocks noGrp="1"/>
+          </p:cNvSpPr>
+          <p:nvPr>
+            <p:ph type="sldNum" sz="quarter" idx="5"/>
+          </p:nvPr>
+        </p:nvSpPr>
+        <p:spPr>
+          <a:xfrm>
+            <a:off x="3884613" y="8685213"/>
+            <a:ext cx="2971800" cy="457200"/>
+          </a:xfrm>
+          <a:prstGeom prst="rect">
+            <a:avLst/>
+          </a:prstGeom>
+        </p:spPr>
+        <p:txBody>
+          <a:bodyPr vert="horz" lIns="91440" tIns="45720" rIns="91440" bIns="45720" rtlCol="0" anchor="b"/>
+          <a:lstStyle>
+            <a:lvl1pPr algn="r">
+              <a:defRPr sz="1200"/>
+            </a:lvl1pPr>
+          </a:lstStyle>
+          <a:p>
+            <a:fld id="{BB5E49A5-4136-284D-997B-48E1D791AD67}" type="slidenum">
+              <a:rPr lang="en-US" smtClean="0"/>
+              <a:t>‹#›</a:t>
+            </a:fld>
+            <a:endParaRPr lang="en-US"/>
+          </a:p>
+        </p:txBody>
+      </p:sp>
+    </p:spTree>
+    <p:extLst>
+      <p:ext uri="{BB962C8B-B14F-4D97-AF65-F5344CB8AC3E}">
+        <p14:creationId xmlns:p14="http://schemas.microsoft.com/office/powerpoint/2010/main" val="2623252185"/>
+      </p:ext>
+    </p:extLst>
+  </p:cSld>
+  <p:clrMap bg1="lt1" tx1="dk1" bg2="lt2" tx2="dk2" accent1="accent1" accent2="accent2" accent3="accent3" accent4="accent4" accent5="accent5" accent6="accent6" hlink="hlink" folHlink="folHlink"/>
+  <p:notesStyle>
+    <a:lvl1pPr marL="0" algn="l" defTabSz="457200" rtl="0" eaLnBrk="1" latinLnBrk="0" hangingPunct="1">
+      <a:defRPr sz="1200" kern="1200">
+        <a:solidFill>
+          <a:schemeClr val="tx1"/>
+        </a:solidFill>
+        <a:latin typeface="+mn-lt"/>
+        <a:ea typeface="+mn-ea"/>
+        <a:cs typeface="+mn-cs"/>
+      </a:defRPr>
+    </a:lvl1pPr>
+    <a:lvl2pPr marL="457200" algn="l" defTabSz="457200" rtl="0" eaLnBrk="1" latinLnBrk="0" hangingPunct="1">
+      <a:defRPr sz="1200" kern="1200">
+        <a:solidFill>
+          <a:schemeClr val="tx1"/>
+        </a:solidFill>
+        <a:latin typeface="+mn-lt"/>
+        <a:ea typeface="+mn-ea"/>
+        <a:cs typeface="+mn-cs"/>
+      </a:defRPr>
+    </a:lvl2pPr>
+    <a:lvl3pPr marL="914400" algn="l" defTabSz="457200" rtl="0" eaLnBrk="1" latinLnBrk="0" hangingPunct="1">
+      <a:defRPr sz="1200" kern="1200">
+        <a:solidFill>
+          <a:schemeClr val="tx1"/>
+        </a:solidFill>
+        <a:latin typeface="+mn-lt"/>
+        <a:ea typeface="+mn-ea"/>
+        <a:cs typeface="+mn-cs"/>
+      </a:defRPr>
+    </a:lvl3pPr>
+    <a:lvl4pPr marL="1371600" algn="l" defTabSz="457200" rtl="0" eaLnBrk="1" latinLnBrk="0" hangingPunct="1">
+      <a:defRPr sz="1200" kern="1200">
+        <a:solidFill>
+          <a:schemeClr val="tx1"/>
+        </a:solidFill>
+        <a:latin typeface="+mn-lt"/>
+        <a:ea typeface="+mn-ea"/>
+        <a:cs typeface="+mn-cs"/>
+      </a:defRPr>
+    </a:lvl4pPr>
+    <a:lvl5pPr marL="1828800" algn="l" defTabSz="457200" rtl="0" eaLnBrk="1" latinLnBrk="0" hangingPunct="1">
+      <a:defRPr sz="1200" kern="1200">
+        <a:solidFill>
+          <a:schemeClr val="tx1"/>
+        </a:solidFill>
+        <a:latin typeface="+mn-lt"/>
+        <a:ea typeface="+mn-ea"/>
+        <a:cs typeface="+mn-cs"/>
+      </a:defRPr>
+    </a:lvl5pPr>
+    <a:lvl6pPr marL="2286000" algn="l" defTabSz="457200" rtl="0" eaLnBrk="1" latinLnBrk="0" hangingPunct="1">
+      <a:defRPr sz="1200" kern="1200">
+        <a:solidFill>
+          <a:schemeClr val="tx1"/>
+        </a:solidFill>
+        <a:latin typeface="+mn-lt"/>
+        <a:ea typeface="+mn-ea"/>
+        <a:cs typeface="+mn-cs"/>
+      </a:defRPr>
+    </a:lvl6pPr>
+    <a:lvl7pPr marL="2743200" algn="l" defTabSz="457200" rtl="0" eaLnBrk="1" latinLnBrk="0" hangingPunct="1">
+      <a:defRPr sz="1200" kern="1200">
+        <a:solidFill>
+          <a:schemeClr val="tx1"/>
+        </a:solidFill>
+        <a:latin typeface="+mn-lt"/>
+        <a:ea typeface="+mn-ea"/>
+        <a:cs typeface="+mn-cs"/>
+      </a:defRPr>
+    </a:lvl7pPr>
+    <a:lvl8pPr marL="3200400" algn="l" defTabSz="457200" rtl="0" eaLnBrk="1" latinLnBrk="0" hangingPunct="1">
+      <a:defRPr sz="1200" kern="1200">
+        <a:solidFill>
+          <a:schemeClr val="tx1"/>
+        </a:solidFill>
+        <a:latin typeface="+mn-lt"/>
+        <a:ea typeface="+mn-ea"/>
+        <a:cs typeface="+mn-cs"/>
+      </a:defRPr>
+    </a:lvl8pPr>
+    <a:lvl9pPr marL="3657600" algn="l" defTabSz="457200" rtl="0" eaLnBrk="1" latinLnBrk="0" hangingPunct="1">
+      <a:defRPr sz="1200" kern="1200">
+        <a:solidFill>
+          <a:schemeClr val="tx1"/>
+        </a:solidFill>
+        <a:latin typeface="+mn-lt"/>
+        <a:ea typeface="+mn-ea"/>
+        <a:cs typeface="+mn-cs"/>
+      </a:defRPr>
+    </a:lvl9pPr>
+  </p:notesStyle>
+</p:notesMaster>
+</file>
+
+<file path=ppt/notesSlides/notesSlide1.xml><?xml version="1.0" encoding="utf-8"?>
+<p:notes xmlns:a="http://schemas.openxmlformats.org/drawingml/2006/main" xmlns:p="http://schemas.openxmlformats.org/presentationml/2006/main" xmlns:r="http://schemas.openxmlformats.org/officeDocument/2006/relationships">
+  <p:cSld>
+    <p:spTree>
+      <p:nvGrpSpPr>
+        <p:cNvPr id="1" name=""/>
+        <p:cNvGrpSpPr/>
+        <p:nvPr/>
+      </p:nvGrpSpPr>
+      <p:grpSpPr>
+        <a:xfrm>
+          <a:off x="0" y="0"/>
+          <a:ext cx="0" cy="0"/>
+          <a:chOff x="0" y="0"/>
+          <a:chExt cx="0" cy="0"/>
+        </a:xfrm>
+      </p:grpSpPr>
+      <p:sp>
+        <p:nvSpPr>
+          <p:cNvPr id="2" name="Slide Image Placeholder 1"/>
+          <p:cNvSpPr>
+            <a:spLocks noGrp="1"/>
+          </p:cNvSpPr>
+          <p:nvPr>
+            <p:ph type="sldImg" idx="2"/>
+          </p:nvPr>
+        </p:nvSpPr>
+        <p:spPr/>
+      </p:sp>
+      <p:sp>
+        <p:nvSpPr>
+          <p:cNvPr id="3" name="Notes Placeholder 2"/>
+          <p:cNvSpPr>
+            <a:spLocks noGrp="1"/>
+          </p:cNvSpPr>
+          <p:nvPr>
+            <p:ph type="body" idx="3" sz="quarter"/>
+          </p:nvPr>
+        </p:nvSpPr>
+        <p:spPr/>
+        <p:txBody>
+          <a:bodyPr/>
+          <a:lstStyle/>
+          <a:p/>
+          <a:p/>
+          <a:p>
+            <a:r>
+              <a:t>[Practice — moved to notes, no room on slide]</a:t>
+            </a:r>
+          </a:p>
+          <a:p>
+            <a:r>
+              <a:t>• Listen and repeat: คุณชื่ออะไรครับ. Now say it yourself.</a:t>
+            </a:r>
+          </a:p>
+          <a:p>
+            <a:r>
+              <a:t>• Pause-and-produce: I ask คุณชื่ออะไรครับ. Say your answer — ผมชื่อ or ฉันชื่อ plus your name — before I show it.</a:t>
+            </a:r>
+          </a:p>
+          <a:p>
+            <a:r>
+              <a:t>• Substitution drill: say ผมชื่อ with your name, then say ฉันชื่อ with your name.</a:t>
+            </a:r>
+          </a:p>
+          <a:p/>
+        </p:txBody>
+      </p:sp>
+      <p:sp>
+        <p:nvSpPr>
+          <p:cNvPr id="4" name="Slide Number Placeholder 3"/>
+          <p:cNvSpPr>
+            <a:spLocks noGrp="1"/>
+          </p:cNvSpPr>
+          <p:nvPr>
+            <p:ph type="sldNum" idx="5" sz="quarter"/>
+          </p:nvPr>
+        </p:nvSpPr>
+        <p:spPr/>
+      </p:sp>
+    </p:spTree>
+  </p:cSld>
+  <p:clrMapOvr>
+    <a:masterClrMapping/>
+  </p:clrMapOvr>
+</p:notes>
+</file>
+
+<file path=ppt/notesSlides/notesSlide2.xml><?xml version="1.0" encoding="utf-8"?>
+<p:notes xmlns:a="http://schemas.openxmlformats.org/drawingml/2006/main" xmlns:p="http://schemas.openxmlformats.org/presentationml/2006/main" xmlns:r="http://schemas.openxmlformats.org/officeDocument/2006/relationships">
+  <p:cSld>
+    <p:spTree>
+      <p:nvGrpSpPr>
+        <p:cNvPr id="1" name=""/>
+        <p:cNvGrpSpPr/>
+        <p:nvPr/>
+      </p:nvGrpSpPr>
+      <p:grpSpPr>
+        <a:xfrm>
+          <a:off x="0" y="0"/>
+          <a:ext cx="0" cy="0"/>
+          <a:chOff x="0" y="0"/>
+          <a:chExt cx="0" cy="0"/>
+        </a:xfrm>
+      </p:grpSpPr>
+      <p:sp>
+        <p:nvSpPr>
+          <p:cNvPr id="2" name="Slide Image Placeholder 1"/>
+          <p:cNvSpPr>
+            <a:spLocks noGrp="1"/>
+          </p:cNvSpPr>
+          <p:nvPr>
+            <p:ph type="sldImg" idx="2"/>
+          </p:nvPr>
+        </p:nvSpPr>
+        <p:spPr/>
+      </p:sp>
+      <p:sp>
+        <p:nvSpPr>
+          <p:cNvPr id="3" name="Notes Placeholder 2"/>
+          <p:cNvSpPr>
+            <a:spLocks noGrp="1"/>
+          </p:cNvSpPr>
+          <p:nvPr>
+            <p:ph type="body" idx="3" sz="quarter"/>
+          </p:nvPr>
+        </p:nvSpPr>
+        <p:spPr/>
+        <p:txBody>
+          <a:bodyPr/>
+          <a:lstStyle/>
+          <a:p/>
+          <a:p/>
+          <a:p>
+            <a:r>
+              <a:t>[Practice — moved to notes, no room on slide]</a:t>
+            </a:r>
+          </a:p>
+          <a:p>
+            <a:r>
+              <a:t>• Substitution drill: say คน + country. คนไทย — your turn. คนอังกฤษ — your turn. คนอเมริกา — your turn.</a:t>
+            </a:r>
+          </a:p>
+          <a:p>
+            <a:r>
+              <a:t>• Substitution drill (same format, different content): now use มาจาก + country. มาจากไทย — your turn. มาจากอังกฤษ — your turn.</a:t>
+            </a:r>
+          </a:p>
+          <a:p>
+            <a:r>
+              <a:t>• Recall drill: without looking, how do you say 'thank you' from last lesson? Say it before I show. ขอบคุณครับ.</a:t>
+            </a:r>
+          </a:p>
+          <a:p/>
+        </p:txBody>
+      </p:sp>
+      <p:sp>
+        <p:nvSpPr>
+          <p:cNvPr id="4" name="Slide Number Placeholder 3"/>
+          <p:cNvSpPr>
+            <a:spLocks noGrp="1"/>
+          </p:cNvSpPr>
+          <p:nvPr>
+            <p:ph type="sldNum" idx="5" sz="quarter"/>
+          </p:nvPr>
+        </p:nvSpPr>
+        <p:spPr/>
+      </p:sp>
+    </p:spTree>
+  </p:cSld>
+  <p:clrMapOvr>
+    <a:masterClrMapping/>
+  </p:clrMapOvr>
+</p:notes>
+</file>
+
+<file path=ppt/notesSlides/notesSlide3.xml><?xml version="1.0" encoding="utf-8"?>
+<p:notes xmlns:a="http://schemas.openxmlformats.org/drawingml/2006/main" xmlns:p="http://schemas.openxmlformats.org/presentationml/2006/main" xmlns:r="http://schemas.openxmlformats.org/officeDocument/2006/relationships">
+  <p:cSld>
+    <p:spTree>
+      <p:nvGrpSpPr>
+        <p:cNvPr id="1" name=""/>
+        <p:cNvGrpSpPr/>
+        <p:nvPr/>
+      </p:nvGrpSpPr>
+      <p:grpSpPr>
+        <a:xfrm>
+          <a:off x="0" y="0"/>
+          <a:ext cx="0" cy="0"/>
+          <a:chOff x="0" y="0"/>
+          <a:chExt cx="0" cy="0"/>
+        </a:xfrm>
+      </p:grpSpPr>
+      <p:sp>
+        <p:nvSpPr>
+          <p:cNvPr id="2" name="Slide Image Placeholder 1"/>
+          <p:cNvSpPr>
+            <a:spLocks noGrp="1"/>
+          </p:cNvSpPr>
+          <p:nvPr>
+            <p:ph type="sldImg" idx="2"/>
+          </p:nvPr>
+        </p:nvSpPr>
+        <p:spPr/>
+      </p:sp>
+      <p:sp>
+        <p:nvSpPr>
+          <p:cNvPr id="3" name="Notes Placeholder 2"/>
+          <p:cNvSpPr>
+            <a:spLocks noGrp="1"/>
+          </p:cNvSpPr>
+          <p:nvPr>
+            <p:ph type="body" idx="3" sz="quarter"/>
+          </p:nvPr>
+        </p:nvSpPr>
+        <p:spPr/>
+        <p:txBody>
+          <a:bodyPr/>
+          <a:lstStyle/>
+          <a:p/>
+          <a:p/>
+          <a:p>
+            <a:r>
+              <a:t>[Practice — moved to notes, no room on slide]</a:t>
+            </a:r>
+          </a:p>
+          <a:p>
+            <a:r>
+              <a:t>• Tone echo: I say ชื่อ. Repeat it with a falling tone. Now I say มา. Repeat it flat. Can you feel the difference?</a:t>
+            </a:r>
+          </a:p>
+          <a:p>
+            <a:r>
+              <a:t>• Minimal pair choice: I say two words from this lesson. Tell me which one has the falling tone.</a:t>
+            </a:r>
+          </a:p>
+          <a:p/>
+        </p:txBody>
+      </p:sp>
+      <p:sp>
+        <p:nvSpPr>
+          <p:cNvPr id="4" name="Slide Number Placeholder 3"/>
+          <p:cNvSpPr>
+            <a:spLocks noGrp="1"/>
+          </p:cNvSpPr>
+          <p:nvPr>
+            <p:ph type="sldNum" idx="5" sz="quarter"/>
+          </p:nvPr>
+        </p:nvSpPr>
+        <p:spPr/>
+      </p:sp>
+    </p:spTree>
+  </p:cSld>
+  <p:clrMapOvr>
+    <a:masterClrMapping/>
+  </p:clrMapOvr>
+</p:notes>
 </file>
 
 <file path=ppt/slideLayouts/slideLayout1.xml><?xml version="1.0" encoding="utf-8"?>
@@ -5118,156 +5727,6 @@
           </a:p>
         </p:txBody>
       </p:sp>
-      <p:sp>
-        <p:nvSpPr>
-          <p:cNvPr id="22" name="TextBox 21"/>
-          <p:cNvSpPr txBox="1"/>
-          <p:nvPr/>
-        </p:nvSpPr>
-        <p:spPr>
-          <a:xfrm>
-            <a:off x="932688" y="6729984"/>
-            <a:ext cx="9692640" cy="228600"/>
-          </a:xfrm>
-          <a:prstGeom prst="rect">
-            <a:avLst/>
-          </a:prstGeom>
-          <a:noFill/>
-        </p:spPr>
-        <p:txBody>
-          <a:bodyPr wrap="square" anchor="t">
-            <a:spAutoFit/>
-          </a:bodyPr>
-          <a:lstStyle/>
-          <a:p>
-            <a:pPr algn="l"/>
-            <a:r>
-              <a:rPr sz="1700" b="1" i="0" lang="en-US" altLang="en-US">
-                <a:solidFill>
-                  <a:srgbClr val="C96F4A"/>
-                </a:solidFill>
-                <a:latin typeface="Sarabun"/>
-                <a:ea typeface="Sarabun"/>
-                <a:cs typeface="Sarabun"/>
-              </a:rPr>
-              <a:t>Practice</a:t>
-            </a:r>
-          </a:p>
-        </p:txBody>
-      </p:sp>
-      <p:sp>
-        <p:nvSpPr>
-          <p:cNvPr id="23" name="Oval 22"/>
-          <p:cNvSpPr/>
-          <p:nvPr/>
-        </p:nvSpPr>
-        <p:spPr>
-          <a:xfrm>
-            <a:off x="932688" y="7114032"/>
-            <a:ext cx="82296" cy="82296"/>
-          </a:xfrm>
-          <a:prstGeom prst="ellipse">
-            <a:avLst/>
-          </a:prstGeom>
-          <a:solidFill>
-            <a:srgbClr val="C96F4A"/>
-          </a:solidFill>
-          <a:ln>
-            <a:noFill/>
-          </a:ln>
-        </p:spPr>
-        <p:style>
-          <a:lnRef idx="1">
-            <a:schemeClr val="accent1"/>
-          </a:lnRef>
-          <a:fillRef idx="3">
-            <a:schemeClr val="accent1"/>
-          </a:fillRef>
-          <a:effectRef idx="2">
-            <a:schemeClr val="accent1"/>
-          </a:effectRef>
-          <a:fontRef idx="minor">
-            <a:schemeClr val="lt1"/>
-          </a:fontRef>
-        </p:style>
-        <p:txBody>
-          <a:bodyPr rtlCol="0" anchor="ctr"/>
-          <a:lstStyle/>
-          <a:p>
-            <a:pPr algn="ctr"/>
-          </a:p>
-        </p:txBody>
-      </p:sp>
-      <p:sp>
-        <p:nvSpPr>
-          <p:cNvPr id="24" name="TextBox 23"/>
-          <p:cNvSpPr txBox="1"/>
-          <p:nvPr/>
-        </p:nvSpPr>
-        <p:spPr>
-          <a:xfrm>
-            <a:off x="1078992" y="7022592"/>
-            <a:ext cx="9555480" cy="274320"/>
-          </a:xfrm>
-          <a:prstGeom prst="rect">
-            <a:avLst/>
-          </a:prstGeom>
-          <a:noFill/>
-        </p:spPr>
-        <p:txBody>
-          <a:bodyPr wrap="square" anchor="t">
-            <a:spAutoFit/>
-          </a:bodyPr>
-          <a:lstStyle/>
-          <a:p>
-            <a:pPr algn="l"/>
-            <a:r>
-              <a:rPr sz="1700" b="0" i="0" lang="en-US" altLang="en-US">
-                <a:solidFill>
-                  <a:srgbClr val="24333D"/>
-                </a:solidFill>
-                <a:latin typeface="Sarabun"/>
-                <a:ea typeface="Sarabun"/>
-                <a:cs typeface="Sarabun"/>
-              </a:rPr>
-              <a:t>Listen and repeat: </a:t>
-            </a:r>
-            <a:r>
-              <a:rPr sz="1700" b="0" i="0" lang="th-TH" altLang="en-US">
-                <a:solidFill>
-                  <a:srgbClr val="24333D"/>
-                </a:solidFill>
-                <a:latin typeface="Sarabun"/>
-                <a:ea typeface="Sarabun"/>
-                <a:cs typeface="Sarabun"/>
-              </a:rPr>
-              <a:t>คุณชื่ออะไร</a:t>
-            </a:r>
-            <a:r>
-              <a:rPr sz="1700" b="0" i="1" lang="en-US" altLang="en-US">
-                <a:solidFill>
-                  <a:srgbClr val="566873"/>
-                </a:solidFill>
-                <a:latin typeface="Sarabun"/>
-                <a:ea typeface="Sarabun"/>
-                <a:cs typeface="Sarabun"/>
-              </a:rPr>
-              <a:t> (khun chûue à-rai)</a:t>
-            </a:r>
-            <a:r>
-              <a:rPr sz="1700" b="0" i="0" lang="th-TH" altLang="en-US">
-                <a:solidFill>
-                  <a:srgbClr val="24333D"/>
-                </a:solidFill>
-                <a:latin typeface="Sarabun"/>
-                <a:ea typeface="Sarabun"/>
-                <a:cs typeface="Sarabun"/>
-              </a:rPr>
-              <a:t>ครับ. Now say it yourself.</a:t>
-            </a:r>
-          </a:p>
-        </p:txBody>
-      </p:sp>
     </p:spTree>
   </p:cSld>
   <p:clrMapOvr>
@@ -7258,277 +7717,6 @@
           </a:p>
         </p:txBody>
       </p:sp>
-      <p:sp>
-        <p:nvSpPr>
-          <p:cNvPr id="18" name="TextBox 17"/>
-          <p:cNvSpPr txBox="1"/>
-          <p:nvPr/>
-        </p:nvSpPr>
-        <p:spPr>
-          <a:xfrm>
-            <a:off x="932688" y="6876288"/>
-            <a:ext cx="9692640" cy="228600"/>
-          </a:xfrm>
-          <a:prstGeom prst="rect">
-            <a:avLst/>
-          </a:prstGeom>
-          <a:noFill/>
-        </p:spPr>
-        <p:txBody>
-          <a:bodyPr wrap="square" anchor="t">
-            <a:spAutoFit/>
-          </a:bodyPr>
-          <a:lstStyle/>
-          <a:p>
-            <a:pPr algn="l"/>
-            <a:r>
-              <a:rPr sz="1700" b="1" i="0" lang="en-US" altLang="en-US">
-                <a:solidFill>
-                  <a:srgbClr val="C96F4A"/>
-                </a:solidFill>
-                <a:latin typeface="Sarabun"/>
-                <a:ea typeface="Sarabun"/>
-                <a:cs typeface="Sarabun"/>
-              </a:rPr>
-              <a:t>Practice</a:t>
-            </a:r>
-          </a:p>
-        </p:txBody>
-      </p:sp>
-      <p:sp>
-        <p:nvSpPr>
-          <p:cNvPr id="19" name="Oval 18"/>
-          <p:cNvSpPr/>
-          <p:nvPr/>
-        </p:nvSpPr>
-        <p:spPr>
-          <a:xfrm>
-            <a:off x="932688" y="7260336"/>
-            <a:ext cx="82296" cy="82296"/>
-          </a:xfrm>
-          <a:prstGeom prst="ellipse">
-            <a:avLst/>
-          </a:prstGeom>
-          <a:solidFill>
-            <a:srgbClr val="C96F4A"/>
-          </a:solidFill>
-          <a:ln>
-            <a:noFill/>
-          </a:ln>
-        </p:spPr>
-        <p:style>
-          <a:lnRef idx="1">
-            <a:schemeClr val="accent1"/>
-          </a:lnRef>
-          <a:fillRef idx="3">
-            <a:schemeClr val="accent1"/>
-          </a:fillRef>
-          <a:effectRef idx="2">
-            <a:schemeClr val="accent1"/>
-          </a:effectRef>
-          <a:fontRef idx="minor">
-            <a:schemeClr val="lt1"/>
-          </a:fontRef>
-        </p:style>
-        <p:txBody>
-          <a:bodyPr rtlCol="0" anchor="ctr"/>
-          <a:lstStyle/>
-          <a:p>
-            <a:pPr algn="ctr"/>
-          </a:p>
-        </p:txBody>
-      </p:sp>
-      <p:sp>
-        <p:nvSpPr>
-          <p:cNvPr id="20" name="TextBox 19"/>
-          <p:cNvSpPr txBox="1"/>
-          <p:nvPr/>
-        </p:nvSpPr>
-        <p:spPr>
-          <a:xfrm>
-            <a:off x="1078992" y="7168896"/>
-            <a:ext cx="9555480" cy="274320"/>
-          </a:xfrm>
-          <a:prstGeom prst="rect">
-            <a:avLst/>
-          </a:prstGeom>
-          <a:noFill/>
-        </p:spPr>
-        <p:txBody>
-          <a:bodyPr wrap="square" anchor="t">
-            <a:spAutoFit/>
-          </a:bodyPr>
-          <a:lstStyle/>
-          <a:p>
-            <a:pPr algn="l"/>
-            <a:r>
-              <a:rPr sz="1700" b="0" i="0" lang="en-US" altLang="en-US">
-                <a:solidFill>
-                  <a:srgbClr val="24333D"/>
-                </a:solidFill>
-                <a:latin typeface="Sarabun"/>
-                <a:ea typeface="Sarabun"/>
-                <a:cs typeface="Sarabun"/>
-              </a:rPr>
-              <a:t>Substitution drill: say </a:t>
-            </a:r>
-            <a:r>
-              <a:rPr sz="1700" b="0" i="0" lang="th-TH" altLang="en-US">
-                <a:solidFill>
-                  <a:srgbClr val="24333D"/>
-                </a:solidFill>
-                <a:latin typeface="Sarabun"/>
-                <a:ea typeface="Sarabun"/>
-                <a:cs typeface="Sarabun"/>
-              </a:rPr>
-              <a:t>คน</a:t>
-            </a:r>
-            <a:r>
-              <a:rPr sz="1700" b="0" i="1" lang="en-US" altLang="en-US">
-                <a:solidFill>
-                  <a:srgbClr val="566873"/>
-                </a:solidFill>
-                <a:latin typeface="Sarabun"/>
-                <a:ea typeface="Sarabun"/>
-                <a:cs typeface="Sarabun"/>
-              </a:rPr>
-              <a:t> (khon)</a:t>
-            </a:r>
-            <a:r>
-              <a:rPr sz="1700" b="0" i="0" lang="en-US" altLang="en-US">
-                <a:solidFill>
-                  <a:srgbClr val="24333D"/>
-                </a:solidFill>
-                <a:latin typeface="Sarabun"/>
-                <a:ea typeface="Sarabun"/>
-                <a:cs typeface="Sarabun"/>
-              </a:rPr>
-              <a:t> + country. </a:t>
-            </a:r>
-            <a:r>
-              <a:rPr sz="1700" b="0" i="0" lang="th-TH" altLang="en-US">
-                <a:solidFill>
-                  <a:srgbClr val="24333D"/>
-                </a:solidFill>
-                <a:latin typeface="Sarabun"/>
-                <a:ea typeface="Sarabun"/>
-                <a:cs typeface="Sarabun"/>
-              </a:rPr>
-              <a:t>คนไทย</a:t>
-            </a:r>
-            <a:r>
-              <a:rPr sz="1700" b="0" i="1" lang="en-US" altLang="en-US">
-                <a:solidFill>
-                  <a:srgbClr val="566873"/>
-                </a:solidFill>
-                <a:latin typeface="Sarabun"/>
-                <a:ea typeface="Sarabun"/>
-                <a:cs typeface="Sarabun"/>
-              </a:rPr>
-              <a:t> (khon thai)</a:t>
-            </a:r>
-            <a:r>
-              <a:rPr sz="1700" b="0" i="0" lang="en-US" altLang="en-US">
-                <a:solidFill>
-                  <a:srgbClr val="24333D"/>
-                </a:solidFill>
-                <a:latin typeface="Sarabun"/>
-                <a:ea typeface="Sarabun"/>
-                <a:cs typeface="Sarabun"/>
-              </a:rPr>
-              <a:t> — your turn. </a:t>
-            </a:r>
-            <a:r>
-              <a:rPr sz="1700" b="0" i="0" lang="th-TH" altLang="en-US">
-                <a:solidFill>
-                  <a:srgbClr val="24333D"/>
-                </a:solidFill>
-                <a:latin typeface="Sarabun"/>
-                <a:ea typeface="Sarabun"/>
-                <a:cs typeface="Sarabun"/>
-              </a:rPr>
-              <a:t>คนอังกฤษ</a:t>
-            </a:r>
-            <a:r>
-              <a:rPr sz="1700" b="0" i="1" lang="en-US" altLang="en-US">
-                <a:solidFill>
-                  <a:srgbClr val="566873"/>
-                </a:solidFill>
-                <a:latin typeface="Sarabun"/>
-                <a:ea typeface="Sarabun"/>
-                <a:cs typeface="Sarabun"/>
-              </a:rPr>
-              <a:t> (khon ang-grìt)</a:t>
-            </a:r>
-            <a:r>
-              <a:rPr sz="1700" b="0" i="0" lang="en-US" altLang="en-US">
-                <a:solidFill>
-                  <a:srgbClr val="24333D"/>
-                </a:solidFill>
-                <a:latin typeface="Sarabun"/>
-                <a:ea typeface="Sarabun"/>
-                <a:cs typeface="Sarabun"/>
-              </a:rPr>
-              <a:t> — your turn. </a:t>
-            </a:r>
-            <a:r>
-              <a:rPr sz="1700" b="0" i="0" lang="th-TH" altLang="en-US">
-                <a:solidFill>
-                  <a:srgbClr val="24333D"/>
-                </a:solidFill>
-                <a:latin typeface="Sarabun"/>
-                <a:ea typeface="Sarabun"/>
-                <a:cs typeface="Sarabun"/>
-              </a:rPr>
-              <a:t>คน</a:t>
-            </a:r>
-            <a:r>
-              <a:rPr sz="1700" b="0" i="1" lang="en-US" altLang="en-US">
-                <a:solidFill>
-                  <a:srgbClr val="566873"/>
-                </a:solidFill>
-                <a:latin typeface="Sarabun"/>
-                <a:ea typeface="Sarabun"/>
-                <a:cs typeface="Sarabun"/>
-              </a:rPr>
-              <a:t> (khon)</a:t>
-            </a:r>
-            <a:r>
-              <a:rPr sz="1700" b="0" i="0" lang="th-TH" altLang="en-US">
-                <a:solidFill>
-                  <a:srgbClr val="24333D"/>
-                </a:solidFill>
-                <a:latin typeface="Sarabun"/>
-                <a:ea typeface="Sarabun"/>
-                <a:cs typeface="Sarabun"/>
-              </a:rPr>
-              <a:t>อเมริกา</a:t>
-            </a:r>
-            <a:r>
-              <a:rPr sz="1700" b="0" i="1" lang="en-US" altLang="en-US">
-                <a:solidFill>
-                  <a:srgbClr val="566873"/>
-                </a:solidFill>
-                <a:latin typeface="Sarabun"/>
-                <a:ea typeface="Sarabun"/>
-                <a:cs typeface="Sarabun"/>
-              </a:rPr>
-              <a:t> (à-mee-rí-kaa)</a:t>
-            </a:r>
-            <a:r>
-              <a:rPr sz="1700" b="0" i="0" lang="en-US" altLang="en-US">
-                <a:solidFill>
-                  <a:srgbClr val="24333D"/>
-                </a:solidFill>
-                <a:latin typeface="Sarabun"/>
-                <a:ea typeface="Sarabun"/>
-                <a:cs typeface="Sarabun"/>
-              </a:rPr>
-              <a:t> — your turn.</a:t>
-            </a:r>
-          </a:p>
-        </p:txBody>
-      </p:sp>
     </p:spTree>
   </p:cSld>
   <p:clrMapOvr>
@@ -8265,189 +8453,6 @@
                 <a:cs typeface="Sarabun"/>
               </a:rPr>
               <a:t>low tone — voice dips down</a:t>
-            </a:r>
-          </a:p>
-        </p:txBody>
-      </p:sp>
-      <p:sp>
-        <p:nvSpPr>
-          <p:cNvPr id="18" name="TextBox 17"/>
-          <p:cNvSpPr txBox="1"/>
-          <p:nvPr/>
-        </p:nvSpPr>
-        <p:spPr>
-          <a:xfrm>
-            <a:off x="932688" y="6876288"/>
-            <a:ext cx="9692640" cy="228600"/>
-          </a:xfrm>
-          <a:prstGeom prst="rect">
-            <a:avLst/>
-          </a:prstGeom>
-          <a:noFill/>
-        </p:spPr>
-        <p:txBody>
-          <a:bodyPr wrap="square" anchor="t">
-            <a:spAutoFit/>
-          </a:bodyPr>
-          <a:lstStyle/>
-          <a:p>
-            <a:pPr algn="l"/>
-            <a:r>
-              <a:rPr sz="1700" b="1" i="0" lang="en-US" altLang="en-US">
-                <a:solidFill>
-                  <a:srgbClr val="C96F4A"/>
-                </a:solidFill>
-                <a:latin typeface="Sarabun"/>
-                <a:ea typeface="Sarabun"/>
-                <a:cs typeface="Sarabun"/>
-              </a:rPr>
-              <a:t>Practice</a:t>
-            </a:r>
-          </a:p>
-        </p:txBody>
-      </p:sp>
-      <p:sp>
-        <p:nvSpPr>
-          <p:cNvPr id="19" name="Oval 18"/>
-          <p:cNvSpPr/>
-          <p:nvPr/>
-        </p:nvSpPr>
-        <p:spPr>
-          <a:xfrm>
-            <a:off x="932688" y="7260336"/>
-            <a:ext cx="82296" cy="82296"/>
-          </a:xfrm>
-          <a:prstGeom prst="ellipse">
-            <a:avLst/>
-          </a:prstGeom>
-          <a:solidFill>
-            <a:srgbClr val="C96F4A"/>
-          </a:solidFill>
-          <a:ln>
-            <a:noFill/>
-          </a:ln>
-        </p:spPr>
-        <p:style>
-          <a:lnRef idx="1">
-            <a:schemeClr val="accent1"/>
-          </a:lnRef>
-          <a:fillRef idx="3">
-            <a:schemeClr val="accent1"/>
-          </a:fillRef>
-          <a:effectRef idx="2">
-            <a:schemeClr val="accent1"/>
-          </a:effectRef>
-          <a:fontRef idx="minor">
-            <a:schemeClr val="lt1"/>
-          </a:fontRef>
-        </p:style>
-        <p:txBody>
-          <a:bodyPr rtlCol="0" anchor="ctr"/>
-          <a:lstStyle/>
-          <a:p>
-            <a:pPr algn="ctr"/>
-          </a:p>
-        </p:txBody>
-      </p:sp>
-      <p:sp>
-        <p:nvSpPr>
-          <p:cNvPr id="20" name="TextBox 19"/>
-          <p:cNvSpPr txBox="1"/>
-          <p:nvPr/>
-        </p:nvSpPr>
-        <p:spPr>
-          <a:xfrm>
-            <a:off x="1078992" y="7168896"/>
-            <a:ext cx="9555480" cy="274320"/>
-          </a:xfrm>
-          <a:prstGeom prst="rect">
-            <a:avLst/>
-          </a:prstGeom>
-          <a:noFill/>
-        </p:spPr>
-        <p:txBody>
-          <a:bodyPr wrap="square" anchor="t">
-            <a:spAutoFit/>
-          </a:bodyPr>
-          <a:lstStyle/>
-          <a:p>
-            <a:pPr algn="l"/>
-            <a:r>
-              <a:rPr sz="1700" b="0" i="0" lang="en-US" altLang="en-US">
-                <a:solidFill>
-                  <a:srgbClr val="24333D"/>
-                </a:solidFill>
-                <a:latin typeface="Sarabun"/>
-                <a:ea typeface="Sarabun"/>
-                <a:cs typeface="Sarabun"/>
-              </a:rPr>
-              <a:t>Tone echo: I say </a:t>
-            </a:r>
-            <a:r>
-              <a:rPr sz="1700" b="0" i="0" lang="th-TH" altLang="en-US">
-                <a:solidFill>
-                  <a:srgbClr val="24333D"/>
-                </a:solidFill>
-                <a:latin typeface="Sarabun"/>
-                <a:ea typeface="Sarabun"/>
-                <a:cs typeface="Sarabun"/>
-              </a:rPr>
-              <a:t>ชื่อ</a:t>
-            </a:r>
-            <a:r>
-              <a:rPr sz="1700" b="0" i="1" lang="en-US" altLang="en-US">
-                <a:solidFill>
-                  <a:srgbClr val="566873"/>
-                </a:solidFill>
-                <a:latin typeface="Sarabun"/>
-                <a:ea typeface="Sarabun"/>
-                <a:cs typeface="Sarabun"/>
-              </a:rPr>
-              <a:t> (chûue)</a:t>
-            </a:r>
-            <a:r>
-              <a:rPr sz="1700" b="0" i="0" lang="en-US" altLang="en-US">
-                <a:solidFill>
-                  <a:srgbClr val="24333D"/>
-                </a:solidFill>
-                <a:latin typeface="Sarabun"/>
-                <a:ea typeface="Sarabun"/>
-                <a:cs typeface="Sarabun"/>
-              </a:rPr>
-              <a:t>. Repeat it with a falling tone. Now I say </a:t>
-            </a:r>
-            <a:r>
-              <a:rPr sz="1700" b="0" i="0" lang="th-TH" altLang="en-US">
-                <a:solidFill>
-                  <a:srgbClr val="24333D"/>
-                </a:solidFill>
-                <a:latin typeface="Sarabun"/>
-                <a:ea typeface="Sarabun"/>
-                <a:cs typeface="Sarabun"/>
-              </a:rPr>
-              <a:t>มา</a:t>
-            </a:r>
-            <a:r>
-              <a:rPr sz="1700" b="0" i="1" lang="en-US" altLang="en-US">
-                <a:solidFill>
-                  <a:srgbClr val="566873"/>
-                </a:solidFill>
-                <a:latin typeface="Sarabun"/>
-                <a:ea typeface="Sarabun"/>
-                <a:cs typeface="Sarabun"/>
-              </a:rPr>
-              <a:t> (maa)</a:t>
-            </a:r>
-            <a:r>
-              <a:rPr sz="1700" b="0" i="0" lang="en-US" altLang="en-US">
-                <a:solidFill>
-                  <a:srgbClr val="24333D"/>
-                </a:solidFill>
-                <a:latin typeface="Sarabun"/>
-                <a:ea typeface="Sarabun"/>
-                <a:cs typeface="Sarabun"/>
-              </a:rPr>
-              <a:t>. Repeat it flat. Can you feel the difference?</a:t>
             </a:r>
           </a:p>
         </p:txBody>
@@ -11272,4 +11277,324 @@
   </ns0:objectDefaults>
   <ns0:extraClrSchemeLst/>
 </ns0:theme>
+</file>
+
+<file path=ppt/theme/theme2.xml><?xml version="1.0" encoding="utf-8"?>
+<a:theme xmlns:a="http://schemas.openxmlformats.org/drawingml/2006/main" name="Office Theme">
+  <a:themeElements>
+    <a:clrScheme name="Office">
+      <a:dk1>
+        <a:sysClr val="windowText" lastClr="000000"/>
+      </a:dk1>
+      <a:lt1>
+        <a:sysClr val="window" lastClr="FFFFFF"/>
+      </a:lt1>
+      <a:dk2>
+        <a:srgbClr val="1F497D"/>
+      </a:dk2>
+      <a:lt2>
+        <a:srgbClr val="EEECE1"/>
+      </a:lt2>
+      <a:accent1>
+        <a:srgbClr val="4F81BD"/>
+      </a:accent1>
+      <a:accent2>
+        <a:srgbClr val="C0504D"/>
+      </a:accent2>
+      <a:accent3>
+        <a:srgbClr val="9BBB59"/>
+      </a:accent3>
+      <a:accent4>
+        <a:srgbClr val="8064A2"/>
+      </a:accent4>
+      <a:accent5>
+        <a:srgbClr val="4BACC6"/>
+      </a:accent5>
+      <a:accent6>
+        <a:srgbClr val="F79646"/>
+      </a:accent6>
+      <a:hlink>
+        <a:srgbClr val="0000FF"/>
+      </a:hlink>
+      <a:folHlink>
+        <a:srgbClr val="800080"/>
+      </a:folHlink>
+    </a:clrScheme>
+    <a:fontScheme name="Office">
+      <a:majorFont>
+        <a:latin typeface="Calibri"/>
+        <a:ea typeface=""/>
+        <a:cs typeface=""/>
+        <a:font script="Jpan" typeface="ＭＳ Ｐゴシック"/>
+        <a:font script="Hang" typeface="맑은 고딕"/>
+        <a:font script="Hans" typeface="宋体"/>
+        <a:font script="Hant" typeface="新細明體"/>
+        <a:font script="Arab" typeface="Times New Roman"/>
+        <a:font script="Hebr" typeface="Times New Roman"/>
+        <a:font script="Thai" typeface="Angsana New"/>
+        <a:font script="Ethi" typeface="Nyala"/>
+        <a:font script="Beng" typeface="Vrinda"/>
+        <a:font script="Gujr" typeface="Shruti"/>
+        <a:font script="Khmr" typeface="MoolBoran"/>
+        <a:font script="Knda" typeface="Tunga"/>
+        <a:font script="Guru" typeface="Raavi"/>
+        <a:font script="Cans" typeface="Euphemia"/>
+        <a:font script="Cher" typeface="Plantagenet Cherokee"/>
+        <a:font script="Yiii" typeface="Microsoft Yi Baiti"/>
+        <a:font script="Tibt" typeface="Microsoft Himalaya"/>
+        <a:font script="Thaa" typeface="MV Boli"/>
+        <a:font script="Deva" typeface="Mangal"/>
+        <a:font script="Telu" typeface="Gautami"/>
+        <a:font script="Taml" typeface="Latha"/>
+        <a:font script="Syrc" typeface="Estrangelo Edessa"/>
+        <a:font script="Orya" typeface="Kalinga"/>
+        <a:font script="Mlym" typeface="Kartika"/>
+        <a:font script="Laoo" typeface="DokChampa"/>
+        <a:font script="Sinh" typeface="Iskoola Pota"/>
+        <a:font script="Mong" typeface="Mongolian Baiti"/>
+        <a:font script="Viet" typeface="Times New Roman"/>
+        <a:font script="Uigh" typeface="Microsoft Uighur"/>
+        <a:font script="Geor" typeface="Sylfaen"/>
+      </a:majorFont>
+      <a:minorFont>
+        <a:latin typeface="Calibri"/>
+        <a:ea typeface=""/>
+        <a:cs typeface=""/>
+        <a:font script="Jpan" typeface="ＭＳ Ｐゴシック"/>
+        <a:font script="Hang" typeface="맑은 고딕"/>
+        <a:font script="Hans" typeface="宋体"/>
+        <a:font script="Hant" typeface="新細明體"/>
+        <a:font script="Arab" typeface="Arial"/>
+        <a:font script="Hebr" typeface="Arial"/>
+        <a:font script="Thai" typeface="Cordia New"/>
+        <a:font script="Ethi" typeface="Nyala"/>
+        <a:font script="Beng" typeface="Vrinda"/>
+        <a:font script="Gujr" typeface="Shruti"/>
+        <a:font script="Khmr" typeface="DaunPenh"/>
+        <a:font script="Knda" typeface="Tunga"/>
+        <a:font script="Guru" typeface="Raavi"/>
+        <a:font script="Cans" typeface="Euphemia"/>
+        <a:font script="Cher" typeface="Plantagenet Cherokee"/>
+        <a:font script="Yiii" typeface="Microsoft Yi Baiti"/>
+        <a:font script="Tibt" typeface="Microsoft Himalaya"/>
+        <a:font script="Thaa" typeface="MV Boli"/>
+        <a:font script="Deva" typeface="Mangal"/>
+        <a:font script="Telu" typeface="Gautami"/>
+        <a:font script="Taml" typeface="Latha"/>
+        <a:font script="Syrc" typeface="Estrangelo Edessa"/>
+        <a:font script="Orya" typeface="Kalinga"/>
+        <a:font script="Mlym" typeface="Kartika"/>
+        <a:font script="Laoo" typeface="DokChampa"/>
+        <a:font script="Sinh" typeface="Iskoola Pota"/>
+        <a:font script="Mong" typeface="Mongolian Baiti"/>
+        <a:font script="Viet" typeface="Arial"/>
+        <a:font script="Uigh" typeface="Microsoft Uighur"/>
+        <a:font script="Geor" typeface="Sylfaen"/>
+      </a:minorFont>
+    </a:fontScheme>
+    <a:fmtScheme name="Office">
+      <a:fillStyleLst>
+        <a:solidFill>
+          <a:schemeClr val="phClr"/>
+        </a:solidFill>
+        <a:gradFill rotWithShape="1">
+          <a:gsLst>
+            <a:gs pos="0">
+              <a:schemeClr val="phClr">
+                <a:tint val="50000"/>
+                <a:satMod val="300000"/>
+              </a:schemeClr>
+            </a:gs>
+            <a:gs pos="35000">
+              <a:schemeClr val="phClr">
+                <a:tint val="37000"/>
+                <a:satMod val="300000"/>
+              </a:schemeClr>
+            </a:gs>
+            <a:gs pos="100000">
+              <a:schemeClr val="phClr">
+                <a:tint val="15000"/>
+                <a:satMod val="350000"/>
+              </a:schemeClr>
+            </a:gs>
+          </a:gsLst>
+          <a:lin ang="16200000" scaled="1"/>
+        </a:gradFill>
+        <a:gradFill rotWithShape="1">
+          <a:gsLst>
+            <a:gs pos="0">
+              <a:schemeClr val="phClr">
+                <a:tint val="100000"/>
+                <a:shade val="100000"/>
+                <a:satMod val="130000"/>
+              </a:schemeClr>
+            </a:gs>
+            <a:gs pos="100000">
+              <a:schemeClr val="phClr">
+                <a:tint val="50000"/>
+                <a:shade val="100000"/>
+                <a:satMod val="350000"/>
+              </a:schemeClr>
+            </a:gs>
+          </a:gsLst>
+          <a:lin ang="16200000" scaled="0"/>
+        </a:gradFill>
+      </a:fillStyleLst>
+      <a:lnStyleLst>
+        <a:ln w="9525" cap="flat" cmpd="sng" algn="ctr">
+          <a:solidFill>
+            <a:schemeClr val="phClr">
+              <a:shade val="95000"/>
+              <a:satMod val="105000"/>
+            </a:schemeClr>
+          </a:solidFill>
+          <a:prstDash val="solid"/>
+        </a:ln>
+        <a:ln w="25400" cap="flat" cmpd="sng" algn="ctr">
+          <a:solidFill>
+            <a:schemeClr val="phClr"/>
+          </a:solidFill>
+          <a:prstDash val="solid"/>
+        </a:ln>
+        <a:ln w="38100" cap="flat" cmpd="sng" algn="ctr">
+          <a:solidFill>
+            <a:schemeClr val="phClr"/>
+          </a:solidFill>
+          <a:prstDash val="solid"/>
+        </a:ln>
+      </a:lnStyleLst>
+      <a:effectStyleLst>
+        <a:effectStyle>
+          <a:effectLst>
+            <a:outerShdw blurRad="40000" dist="20000" dir="5400000" rotWithShape="0">
+              <a:srgbClr val="000000">
+                <a:alpha val="38000"/>
+              </a:srgbClr>
+            </a:outerShdw>
+          </a:effectLst>
+        </a:effectStyle>
+        <a:effectStyle>
+          <a:effectLst>
+            <a:outerShdw blurRad="40000" dist="23000" dir="5400000" rotWithShape="0">
+              <a:srgbClr val="000000">
+                <a:alpha val="35000"/>
+              </a:srgbClr>
+            </a:outerShdw>
+          </a:effectLst>
+        </a:effectStyle>
+        <a:effectStyle>
+          <a:effectLst>
+            <a:outerShdw blurRad="40000" dist="23000" dir="5400000" rotWithShape="0">
+              <a:srgbClr val="000000">
+                <a:alpha val="35000"/>
+              </a:srgbClr>
+            </a:outerShdw>
+          </a:effectLst>
+          <a:scene3d>
+            <a:camera prst="orthographicFront">
+              <a:rot lat="0" lon="0" rev="0"/>
+            </a:camera>
+            <a:lightRig rig="threePt" dir="t">
+              <a:rot lat="0" lon="0" rev="1200000"/>
+            </a:lightRig>
+          </a:scene3d>
+          <a:sp3d>
+            <a:bevelT w="63500" h="25400"/>
+          </a:sp3d>
+        </a:effectStyle>
+      </a:effectStyleLst>
+      <a:bgFillStyleLst>
+        <a:solidFill>
+          <a:schemeClr val="phClr"/>
+        </a:solidFill>
+        <a:gradFill rotWithShape="1">
+          <a:gsLst>
+            <a:gs pos="0">
+              <a:schemeClr val="phClr">
+                <a:tint val="40000"/>
+                <a:satMod val="350000"/>
+              </a:schemeClr>
+            </a:gs>
+            <a:gs pos="40000">
+              <a:schemeClr val="phClr">
+                <a:tint val="45000"/>
+                <a:shade val="99000"/>
+                <a:satMod val="350000"/>
+              </a:schemeClr>
+            </a:gs>
+            <a:gs pos="100000">
+              <a:schemeClr val="phClr">
+                <a:shade val="20000"/>
+                <a:satMod val="255000"/>
+              </a:schemeClr>
+            </a:gs>
+          </a:gsLst>
+          <a:path path="circle">
+            <a:fillToRect l="50000" t="-80000" r="50000" b="180000"/>
+          </a:path>
+        </a:gradFill>
+        <a:gradFill rotWithShape="1">
+          <a:gsLst>
+            <a:gs pos="0">
+              <a:schemeClr val="phClr">
+                <a:tint val="80000"/>
+                <a:satMod val="300000"/>
+              </a:schemeClr>
+            </a:gs>
+            <a:gs pos="100000">
+              <a:schemeClr val="phClr">
+                <a:shade val="30000"/>
+                <a:satMod val="200000"/>
+              </a:schemeClr>
+            </a:gs>
+          </a:gsLst>
+          <a:path path="circle">
+            <a:fillToRect l="50000" t="50000" r="50000" b="50000"/>
+          </a:path>
+        </a:gradFill>
+      </a:bgFillStyleLst>
+    </a:fmtScheme>
+  </a:themeElements>
+  <a:objectDefaults>
+    <a:spDef>
+      <a:spPr/>
+      <a:bodyPr/>
+      <a:lstStyle/>
+      <a:style>
+        <a:lnRef idx="1">
+          <a:schemeClr val="accent1"/>
+        </a:lnRef>
+        <a:fillRef idx="3">
+          <a:schemeClr val="accent1"/>
+        </a:fillRef>
+        <a:effectRef idx="2">
+          <a:schemeClr val="accent1"/>
+        </a:effectRef>
+        <a:fontRef idx="minor">
+          <a:schemeClr val="lt1"/>
+        </a:fontRef>
+      </a:style>
+    </a:spDef>
+    <a:lnDef>
+      <a:spPr/>
+      <a:bodyPr/>
+      <a:lstStyle/>
+      <a:style>
+        <a:lnRef idx="2">
+          <a:schemeClr val="accent1"/>
+        </a:lnRef>
+        <a:fillRef idx="0">
+          <a:schemeClr val="accent1"/>
+        </a:fillRef>
+        <a:effectRef idx="1">
+          <a:schemeClr val="accent1"/>
+        </a:effectRef>
+        <a:fontRef idx="minor">
+          <a:schemeClr val="tx1"/>
+        </a:fontRef>
+      </a:style>
+    </a:lnDef>
+  </a:objectDefaults>
+  <a:extraClrSchemeLst/>
+</a:theme>
 </file>
--- a/course/modules/M01/L002/M01-L002-canva-deck.pptx
+++ b/course/modules/M01/L002/M01-L002-canva-deck.pptx
@@ -4013,7 +4013,7 @@
         <p:spPr>
           <a:xfrm>
             <a:off x="1078992" y="4553712"/>
-            <a:ext cx="6568135" cy="274320"/>
+            <a:ext cx="6568135" cy="475488"/>
           </a:xfrm>
           <a:prstGeom prst="rect">
             <a:avLst/>
@@ -4049,7 +4049,7 @@
         </p:nvSpPr>
         <p:spPr>
           <a:xfrm>
-            <a:off x="932688" y="4956048"/>
+            <a:off x="932688" y="5175504"/>
             <a:ext cx="82296" cy="82296"/>
           </a:xfrm>
           <a:prstGeom prst="ellipse">
@@ -4092,8 +4092,8 @@
         </p:nvSpPr>
         <p:spPr>
           <a:xfrm>
-            <a:off x="1078992" y="4864608"/>
-            <a:ext cx="6568135" cy="274320"/>
+            <a:off x="1078992" y="5084064"/>
+            <a:ext cx="6568135" cy="475488"/>
           </a:xfrm>
           <a:prstGeom prst="rect">
             <a:avLst/>
@@ -6861,7 +6861,7 @@
         <p:spPr>
           <a:xfrm>
             <a:off x="1078992" y="5925312"/>
-            <a:ext cx="9555480" cy="274320"/>
+            <a:ext cx="9555480" cy="475488"/>
           </a:xfrm>
           <a:prstGeom prst="rect">
             <a:avLst/>
@@ -9792,7 +9792,7 @@
         <p:spPr>
           <a:xfrm>
             <a:off x="1078992" y="1856232"/>
-            <a:ext cx="6568135" cy="274320"/>
+            <a:ext cx="6568135" cy="475488"/>
           </a:xfrm>
           <a:prstGeom prst="rect">
             <a:avLst/>
@@ -9861,7 +9861,7 @@
         </p:nvSpPr>
         <p:spPr>
           <a:xfrm>
-            <a:off x="932688" y="2258568"/>
+            <a:off x="932688" y="2478024"/>
             <a:ext cx="82296" cy="82296"/>
           </a:xfrm>
           <a:prstGeom prst="ellipse">
@@ -9904,8 +9904,8 @@
         </p:nvSpPr>
         <p:spPr>
           <a:xfrm>
-            <a:off x="1078992" y="2167128"/>
-            <a:ext cx="6568135" cy="274320"/>
+            <a:off x="1078992" y="2386584"/>
+            <a:ext cx="6568135" cy="475488"/>
           </a:xfrm>
           <a:prstGeom prst="rect">
             <a:avLst/>
@@ -9974,7 +9974,7 @@
         </p:nvSpPr>
         <p:spPr>
           <a:xfrm>
-            <a:off x="932688" y="2569464"/>
+            <a:off x="932688" y="3008376"/>
             <a:ext cx="82296" cy="82296"/>
           </a:xfrm>
           <a:prstGeom prst="ellipse">
@@ -10017,8 +10017,8 @@
         </p:nvSpPr>
         <p:spPr>
           <a:xfrm>
-            <a:off x="1078992" y="2478024"/>
-            <a:ext cx="6568135" cy="274320"/>
+            <a:off x="1078992" y="2916936"/>
+            <a:ext cx="6568135" cy="475488"/>
           </a:xfrm>
           <a:prstGeom prst="rect">
             <a:avLst/>
@@ -10120,7 +10120,7 @@
         </p:nvSpPr>
         <p:spPr>
           <a:xfrm>
-            <a:off x="932688" y="2880360"/>
+            <a:off x="932688" y="3538728"/>
             <a:ext cx="82296" cy="82296"/>
           </a:xfrm>
           <a:prstGeom prst="ellipse">
@@ -10163,8 +10163,8 @@
         </p:nvSpPr>
         <p:spPr>
           <a:xfrm>
-            <a:off x="1078992" y="2788920"/>
-            <a:ext cx="6568135" cy="274320"/>
+            <a:off x="1078992" y="3447288"/>
+            <a:ext cx="6568135" cy="475488"/>
           </a:xfrm>
           <a:prstGeom prst="rect">
             <a:avLst/>
@@ -10233,7 +10233,7 @@
         </p:nvSpPr>
         <p:spPr>
           <a:xfrm>
-            <a:off x="932688" y="3191256"/>
+            <a:off x="932688" y="4069080"/>
             <a:ext cx="82296" cy="82296"/>
           </a:xfrm>
           <a:prstGeom prst="ellipse">
@@ -10276,8 +10276,8 @@
         </p:nvSpPr>
         <p:spPr>
           <a:xfrm>
-            <a:off x="1078992" y="3099816"/>
-            <a:ext cx="6568135" cy="274320"/>
+            <a:off x="1078992" y="3977640"/>
+            <a:ext cx="6568135" cy="475488"/>
           </a:xfrm>
           <a:prstGeom prst="rect">
             <a:avLst/>
@@ -10379,7 +10379,7 @@
         </p:nvSpPr>
         <p:spPr>
           <a:xfrm>
-            <a:off x="932688" y="4306824"/>
+            <a:off x="932688" y="4928616"/>
             <a:ext cx="9692640" cy="228600"/>
           </a:xfrm>
           <a:prstGeom prst="rect">
@@ -10416,7 +10416,7 @@
         </p:nvSpPr>
         <p:spPr>
           <a:xfrm>
-            <a:off x="932688" y="4690872"/>
+            <a:off x="932688" y="5312664"/>
             <a:ext cx="82296" cy="82296"/>
           </a:xfrm>
           <a:prstGeom prst="ellipse">
@@ -10459,8 +10459,8 @@
         </p:nvSpPr>
         <p:spPr>
           <a:xfrm>
-            <a:off x="1078992" y="4599432"/>
-            <a:ext cx="9555480" cy="274320"/>
+            <a:off x="1078992" y="5221224"/>
+            <a:ext cx="9555480" cy="475488"/>
           </a:xfrm>
           <a:prstGeom prst="rect">
             <a:avLst/>
@@ -10843,7 +10843,7 @@
         <p:spPr>
           <a:xfrm>
             <a:off x="1078992" y="2039112"/>
-            <a:ext cx="6568135" cy="274320"/>
+            <a:ext cx="6568135" cy="676656"/>
           </a:xfrm>
           <a:prstGeom prst="rect">
             <a:avLst/>
@@ -10879,7 +10879,7 @@
         </p:nvSpPr>
         <p:spPr>
           <a:xfrm>
-            <a:off x="932688" y="2441448"/>
+            <a:off x="932688" y="2862072"/>
             <a:ext cx="82296" cy="82296"/>
           </a:xfrm>
           <a:prstGeom prst="ellipse">
@@ -10922,7 +10922,7 @@
         </p:nvSpPr>
         <p:spPr>
           <a:xfrm>
-            <a:off x="1078992" y="2350008"/>
+            <a:off x="1078992" y="2770632"/>
             <a:ext cx="6568135" cy="274320"/>
           </a:xfrm>
           <a:prstGeom prst="rect">

--- a/course/modules/M01/L002/M01-L002-canva-deck.pptx
+++ b/course/modules/M01/L002/M01-L002-canva-deck.pptx
@@ -5143,8 +5143,8 @@
         </p:nvSpPr>
         <p:spPr>
           <a:xfrm>
-            <a:off x="1078992" y="1435608"/>
-            <a:ext cx="6613855" cy="658368"/>
+            <a:off x="1078992" y="1463040"/>
+            <a:ext cx="6613855" cy="320040"/>
           </a:xfrm>
           <a:prstGeom prst="rect">
             <a:avLst/>
@@ -5159,7 +5159,7 @@
           <a:p>
             <a:pPr algn="l"/>
             <a:r>
-              <a:rPr sz="3600" b="1" i="0" lang="th-TH" altLang="en-US">
+              <a:rPr sz="1700" b="0" i="0" lang="th-TH" altLang="en-US">
                 <a:solidFill>
                   <a:srgbClr val="24333D"/>
                 </a:solidFill>
@@ -5168,17 +5168,6 @@
                 <a:cs typeface="Sarabun"/>
               </a:rPr>
               <a:t>ชื่อ</a:t>
-            </a:r>
-            <a:r>
-              <a:rPr sz="2230" b="0" i="1" lang="en-US" altLang="en-US">
-                <a:solidFill>
-                  <a:srgbClr val="566873"/>
-                </a:solidFill>
-                <a:latin typeface="Sarabun"/>
-                <a:ea typeface="Sarabun"/>
-                <a:cs typeface="Sarabun"/>
-              </a:rPr>
-              <a:t> (chûue)</a:t>
             </a:r>
           </a:p>
         </p:txBody>
@@ -5191,7 +5180,7 @@
         </p:nvSpPr>
         <p:spPr>
           <a:xfrm>
-            <a:off x="1078992" y="2203704"/>
+            <a:off x="1078992" y="1828800"/>
             <a:ext cx="6613855" cy="274320"/>
           </a:xfrm>
           <a:prstGeom prst="rect">
@@ -5207,6 +5196,43 @@
           <a:p>
             <a:pPr algn="l"/>
             <a:r>
+              <a:rPr sz="1700" b="0" i="1" lang="en-US" altLang="en-US">
+                <a:solidFill>
+                  <a:srgbClr val="566873"/>
+                </a:solidFill>
+                <a:latin typeface="Sarabun"/>
+                <a:ea typeface="Sarabun"/>
+                <a:cs typeface="Sarabun"/>
+              </a:rPr>
+              <a:t>chûue</a:t>
+            </a:r>
+          </a:p>
+        </p:txBody>
+      </p:sp>
+      <p:sp>
+        <p:nvSpPr>
+          <p:cNvPr id="10" name="TextBox 9"/>
+          <p:cNvSpPr txBox="1"/>
+          <p:nvPr/>
+        </p:nvSpPr>
+        <p:spPr>
+          <a:xfrm>
+            <a:off x="1078992" y="2203704"/>
+            <a:ext cx="6613855" cy="274320"/>
+          </a:xfrm>
+          <a:prstGeom prst="rect">
+            <a:avLst/>
+          </a:prstGeom>
+          <a:noFill/>
+        </p:spPr>
+        <p:txBody>
+          <a:bodyPr wrap="square" anchor="t">
+            <a:spAutoFit/>
+          </a:bodyPr>
+          <a:lstStyle/>
+          <a:p>
+            <a:pPr algn="l"/>
+            <a:r>
               <a:rPr sz="1700" b="0" i="0" lang="en-US" altLang="en-US">
                 <a:solidFill>
                   <a:srgbClr val="82909A"/>
@@ -5222,7 +5248,7 @@
       </p:sp>
       <p:sp>
         <p:nvSpPr>
-          <p:cNvPr id="10" name="Rounded Rectangle 9"/>
+          <p:cNvPr id="11" name="Rounded Rectangle 10"/>
           <p:cNvSpPr/>
           <p:nvPr/>
         </p:nvSpPr>
@@ -5263,7 +5289,7 @@
       </p:sp>
       <p:sp>
         <p:nvSpPr>
-          <p:cNvPr id="11" name="Rectangle 10"/>
+          <p:cNvPr id="12" name="Rectangle 11"/>
           <p:cNvSpPr/>
           <p:nvPr/>
         </p:nvSpPr>
@@ -5306,14 +5332,14 @@
       </p:sp>
       <p:sp>
         <p:nvSpPr>
-          <p:cNvPr id="12" name="TextBox 11"/>
+          <p:cNvPr id="13" name="TextBox 12"/>
           <p:cNvSpPr txBox="1"/>
           <p:nvPr/>
         </p:nvSpPr>
         <p:spPr>
           <a:xfrm>
-            <a:off x="1078992" y="2715768"/>
-            <a:ext cx="6613855" cy="658368"/>
+            <a:off x="1078992" y="2743200"/>
+            <a:ext cx="6613855" cy="320040"/>
           </a:xfrm>
           <a:prstGeom prst="rect">
             <a:avLst/>
@@ -5328,7 +5354,7 @@
           <a:p>
             <a:pPr algn="l"/>
             <a:r>
-              <a:rPr sz="3600" b="1" i="0" lang="th-TH" altLang="en-US">
+              <a:rPr sz="1700" b="0" i="0" lang="th-TH" altLang="en-US">
                 <a:solidFill>
                   <a:srgbClr val="24333D"/>
                 </a:solidFill>
@@ -5338,29 +5364,18 @@
               </a:rPr>
               <a:t>คุณชื่ออะไร</a:t>
             </a:r>
-            <a:r>
-              <a:rPr sz="2230" b="0" i="1" lang="en-US" altLang="en-US">
-                <a:solidFill>
-                  <a:srgbClr val="566873"/>
-                </a:solidFill>
-                <a:latin typeface="Sarabun"/>
-                <a:ea typeface="Sarabun"/>
-                <a:cs typeface="Sarabun"/>
-              </a:rPr>
-              <a:t> (khun chûue à-rai)</a:t>
-            </a:r>
-          </a:p>
-        </p:txBody>
-      </p:sp>
-      <p:sp>
-        <p:nvSpPr>
-          <p:cNvPr id="13" name="TextBox 12"/>
+          </a:p>
+        </p:txBody>
+      </p:sp>
+      <p:sp>
+        <p:nvSpPr>
+          <p:cNvPr id="14" name="TextBox 13"/>
           <p:cNvSpPr txBox="1"/>
           <p:nvPr/>
         </p:nvSpPr>
         <p:spPr>
           <a:xfrm>
-            <a:off x="1078992" y="3483864"/>
+            <a:off x="1078992" y="3108960"/>
             <a:ext cx="6613855" cy="274320"/>
           </a:xfrm>
           <a:prstGeom prst="rect">
@@ -5376,6 +5391,43 @@
           <a:p>
             <a:pPr algn="l"/>
             <a:r>
+              <a:rPr sz="1700" b="0" i="1" lang="en-US" altLang="en-US">
+                <a:solidFill>
+                  <a:srgbClr val="566873"/>
+                </a:solidFill>
+                <a:latin typeface="Sarabun"/>
+                <a:ea typeface="Sarabun"/>
+                <a:cs typeface="Sarabun"/>
+              </a:rPr>
+              <a:t>khun chûue à-rai</a:t>
+            </a:r>
+          </a:p>
+        </p:txBody>
+      </p:sp>
+      <p:sp>
+        <p:nvSpPr>
+          <p:cNvPr id="15" name="TextBox 14"/>
+          <p:cNvSpPr txBox="1"/>
+          <p:nvPr/>
+        </p:nvSpPr>
+        <p:spPr>
+          <a:xfrm>
+            <a:off x="1078992" y="3483864"/>
+            <a:ext cx="6613855" cy="274320"/>
+          </a:xfrm>
+          <a:prstGeom prst="rect">
+            <a:avLst/>
+          </a:prstGeom>
+          <a:noFill/>
+        </p:spPr>
+        <p:txBody>
+          <a:bodyPr wrap="square" anchor="t">
+            <a:spAutoFit/>
+          </a:bodyPr>
+          <a:lstStyle/>
+          <a:p>
+            <a:pPr algn="l"/>
+            <a:r>
               <a:rPr sz="1700" b="0" i="0" lang="en-US" altLang="en-US">
                 <a:solidFill>
                   <a:srgbClr val="82909A"/>
@@ -5391,7 +5443,7 @@
       </p:sp>
       <p:sp>
         <p:nvSpPr>
-          <p:cNvPr id="14" name="Rounded Rectangle 13"/>
+          <p:cNvPr id="16" name="Rounded Rectangle 15"/>
           <p:cNvSpPr/>
           <p:nvPr/>
         </p:nvSpPr>
@@ -5432,7 +5484,7 @@
       </p:sp>
       <p:sp>
         <p:nvSpPr>
-          <p:cNvPr id="15" name="Rectangle 14"/>
+          <p:cNvPr id="17" name="Rectangle 16"/>
           <p:cNvSpPr/>
           <p:nvPr/>
         </p:nvSpPr>
@@ -5475,14 +5527,14 @@
       </p:sp>
       <p:sp>
         <p:nvSpPr>
-          <p:cNvPr id="16" name="TextBox 15"/>
+          <p:cNvPr id="18" name="TextBox 17"/>
           <p:cNvSpPr txBox="1"/>
           <p:nvPr/>
         </p:nvSpPr>
         <p:spPr>
           <a:xfrm>
-            <a:off x="1078992" y="3995928"/>
-            <a:ext cx="6613855" cy="658368"/>
+            <a:off x="1078992" y="4023360"/>
+            <a:ext cx="6613855" cy="320040"/>
           </a:xfrm>
           <a:prstGeom prst="rect">
             <a:avLst/>
@@ -5497,7 +5549,7 @@
           <a:p>
             <a:pPr algn="l"/>
             <a:r>
-              <a:rPr sz="3600" b="1" i="0" lang="th-TH" altLang="en-US">
+              <a:rPr sz="1700" b="0" i="0" lang="th-TH" altLang="en-US">
                 <a:solidFill>
                   <a:srgbClr val="24333D"/>
                 </a:solidFill>
@@ -5507,29 +5559,18 @@
               </a:rPr>
               <a:t>ผมชื่อ...</a:t>
             </a:r>
-            <a:r>
-              <a:rPr sz="2230" b="0" i="1" lang="en-US" altLang="en-US">
-                <a:solidFill>
-                  <a:srgbClr val="566873"/>
-                </a:solidFill>
-                <a:latin typeface="Sarabun"/>
-                <a:ea typeface="Sarabun"/>
-                <a:cs typeface="Sarabun"/>
-              </a:rPr>
-              <a:t> (phǒm chûue...)</a:t>
-            </a:r>
-          </a:p>
-        </p:txBody>
-      </p:sp>
-      <p:sp>
-        <p:nvSpPr>
-          <p:cNvPr id="17" name="TextBox 16"/>
+          </a:p>
+        </p:txBody>
+      </p:sp>
+      <p:sp>
+        <p:nvSpPr>
+          <p:cNvPr id="19" name="TextBox 18"/>
           <p:cNvSpPr txBox="1"/>
           <p:nvPr/>
         </p:nvSpPr>
         <p:spPr>
           <a:xfrm>
-            <a:off x="1078992" y="4764024"/>
+            <a:off x="1078992" y="4389120"/>
             <a:ext cx="6613855" cy="274320"/>
           </a:xfrm>
           <a:prstGeom prst="rect">
@@ -5545,6 +5586,43 @@
           <a:p>
             <a:pPr algn="l"/>
             <a:r>
+              <a:rPr sz="1700" b="0" i="1" lang="en-US" altLang="en-US">
+                <a:solidFill>
+                  <a:srgbClr val="566873"/>
+                </a:solidFill>
+                <a:latin typeface="Sarabun"/>
+                <a:ea typeface="Sarabun"/>
+                <a:cs typeface="Sarabun"/>
+              </a:rPr>
+              <a:t>phǒm chûue...</a:t>
+            </a:r>
+          </a:p>
+        </p:txBody>
+      </p:sp>
+      <p:sp>
+        <p:nvSpPr>
+          <p:cNvPr id="20" name="TextBox 19"/>
+          <p:cNvSpPr txBox="1"/>
+          <p:nvPr/>
+        </p:nvSpPr>
+        <p:spPr>
+          <a:xfrm>
+            <a:off x="1078992" y="4764024"/>
+            <a:ext cx="6613855" cy="274320"/>
+          </a:xfrm>
+          <a:prstGeom prst="rect">
+            <a:avLst/>
+          </a:prstGeom>
+          <a:noFill/>
+        </p:spPr>
+        <p:txBody>
+          <a:bodyPr wrap="square" anchor="t">
+            <a:spAutoFit/>
+          </a:bodyPr>
+          <a:lstStyle/>
+          <a:p>
+            <a:pPr algn="l"/>
+            <a:r>
               <a:rPr sz="1700" b="0" i="0" lang="en-US" altLang="en-US">
                 <a:solidFill>
                   <a:srgbClr val="82909A"/>
@@ -5560,7 +5638,7 @@
       </p:sp>
       <p:sp>
         <p:nvSpPr>
-          <p:cNvPr id="18" name="Rounded Rectangle 17"/>
+          <p:cNvPr id="21" name="Rounded Rectangle 20"/>
           <p:cNvSpPr/>
           <p:nvPr/>
         </p:nvSpPr>
@@ -5601,7 +5679,7 @@
       </p:sp>
       <p:sp>
         <p:nvSpPr>
-          <p:cNvPr id="19" name="Rectangle 18"/>
+          <p:cNvPr id="22" name="Rectangle 21"/>
           <p:cNvSpPr/>
           <p:nvPr/>
         </p:nvSpPr>
@@ -5644,14 +5722,14 @@
       </p:sp>
       <p:sp>
         <p:nvSpPr>
-          <p:cNvPr id="20" name="TextBox 19"/>
+          <p:cNvPr id="23" name="TextBox 22"/>
           <p:cNvSpPr txBox="1"/>
           <p:nvPr/>
         </p:nvSpPr>
         <p:spPr>
           <a:xfrm>
-            <a:off x="1078992" y="5276088"/>
-            <a:ext cx="6613855" cy="658368"/>
+            <a:off x="1078992" y="5303520"/>
+            <a:ext cx="6613855" cy="320040"/>
           </a:xfrm>
           <a:prstGeom prst="rect">
             <a:avLst/>
@@ -5666,7 +5744,7 @@
           <a:p>
             <a:pPr algn="l"/>
             <a:r>
-              <a:rPr sz="3600" b="1" i="0" lang="th-TH" altLang="en-US">
+              <a:rPr sz="1700" b="0" i="0" lang="th-TH" altLang="en-US">
                 <a:solidFill>
                   <a:srgbClr val="24333D"/>
                 </a:solidFill>
@@ -5676,8 +5754,34 @@
               </a:rPr>
               <a:t>ฉันชื่อ...</a:t>
             </a:r>
-            <a:r>
-              <a:rPr sz="2230" b="0" i="1" lang="en-US" altLang="en-US">
+          </a:p>
+        </p:txBody>
+      </p:sp>
+      <p:sp>
+        <p:nvSpPr>
+          <p:cNvPr id="24" name="TextBox 23"/>
+          <p:cNvSpPr txBox="1"/>
+          <p:nvPr/>
+        </p:nvSpPr>
+        <p:spPr>
+          <a:xfrm>
+            <a:off x="1078992" y="5669280"/>
+            <a:ext cx="6613855" cy="274320"/>
+          </a:xfrm>
+          <a:prstGeom prst="rect">
+            <a:avLst/>
+          </a:prstGeom>
+          <a:noFill/>
+        </p:spPr>
+        <p:txBody>
+          <a:bodyPr wrap="square" anchor="t">
+            <a:spAutoFit/>
+          </a:bodyPr>
+          <a:lstStyle/>
+          <a:p>
+            <a:pPr algn="l"/>
+            <a:r>
+              <a:rPr sz="1700" b="0" i="1" lang="en-US" altLang="en-US">
                 <a:solidFill>
                   <a:srgbClr val="566873"/>
                 </a:solidFill>
@@ -5685,14 +5789,14 @@
                 <a:ea typeface="Sarabun"/>
                 <a:cs typeface="Sarabun"/>
               </a:rPr>
-              <a:t> (chǎn chûue...)</a:t>
-            </a:r>
-          </a:p>
-        </p:txBody>
-      </p:sp>
-      <p:sp>
-        <p:nvSpPr>
-          <p:cNvPr id="21" name="TextBox 20"/>
+              <a:t>chǎn chûue...</a:t>
+            </a:r>
+          </a:p>
+        </p:txBody>
+      </p:sp>
+      <p:sp>
+        <p:nvSpPr>
+          <p:cNvPr id="25" name="TextBox 24"/>
           <p:cNvSpPr txBox="1"/>
           <p:nvPr/>
         </p:nvSpPr>
@@ -5936,7 +6040,7 @@
         <p:spPr>
           <a:xfrm>
             <a:off x="731520" y="1325880"/>
-            <a:ext cx="7071055" cy="685800"/>
+            <a:ext cx="7071055" cy="804672"/>
           </a:xfrm>
           <a:prstGeom prst="roundRect">
             <a:avLst/>
@@ -5977,7 +6081,7 @@
         <p:spPr>
           <a:xfrm>
             <a:off x="868680" y="1435608"/>
-            <a:ext cx="73152" cy="411480"/>
+            <a:ext cx="73152" cy="548640"/>
           </a:xfrm>
           <a:prstGeom prst="rect">
             <a:avLst/>
@@ -6020,7 +6124,7 @@
         <p:spPr>
           <a:xfrm>
             <a:off x="1078992" y="1399032"/>
-            <a:ext cx="6613855" cy="320040"/>
+            <a:ext cx="6613855" cy="228600"/>
           </a:xfrm>
           <a:prstGeom prst="rect">
             <a:avLst/>
@@ -6035,7 +6139,7 @@
           <a:p>
             <a:pPr algn="l"/>
             <a:r>
-              <a:rPr sz="2600" b="1" i="0" lang="th-TH" altLang="en-US">
+              <a:rPr sz="1700" b="0" i="0" lang="th-TH" altLang="en-US">
                 <a:solidFill>
                   <a:srgbClr val="24333D"/>
                 </a:solidFill>
@@ -6044,17 +6148,6 @@
                 <a:cs typeface="Sarabun"/>
               </a:rPr>
               <a:t>มาจาก</a:t>
-            </a:r>
-            <a:r>
-              <a:rPr sz="1700" b="0" i="1" lang="en-US" altLang="en-US">
-                <a:solidFill>
-                  <a:srgbClr val="566873"/>
-                </a:solidFill>
-                <a:latin typeface="Sarabun"/>
-                <a:ea typeface="Sarabun"/>
-                <a:cs typeface="Sarabun"/>
-              </a:rPr>
-              <a:t> (maa-jàak)</a:t>
             </a:r>
           </a:p>
         </p:txBody>
@@ -6067,8 +6160,8 @@
         </p:nvSpPr>
         <p:spPr>
           <a:xfrm>
-            <a:off x="1078992" y="1709928"/>
-            <a:ext cx="6613855" cy="228600"/>
+            <a:off x="1078992" y="1627632"/>
+            <a:ext cx="6613855" cy="201168"/>
           </a:xfrm>
           <a:prstGeom prst="rect">
             <a:avLst/>
@@ -6083,7 +6176,44 @@
           <a:p>
             <a:pPr algn="l"/>
             <a:r>
-              <a:rPr sz="1300" b="0" i="0" lang="en-US" altLang="en-US">
+              <a:rPr sz="1700" b="0" i="1" lang="en-US" altLang="en-US">
+                <a:solidFill>
+                  <a:srgbClr val="566873"/>
+                </a:solidFill>
+                <a:latin typeface="Sarabun"/>
+                <a:ea typeface="Sarabun"/>
+                <a:cs typeface="Sarabun"/>
+              </a:rPr>
+              <a:t>maa-jàak</a:t>
+            </a:r>
+          </a:p>
+        </p:txBody>
+      </p:sp>
+      <p:sp>
+        <p:nvSpPr>
+          <p:cNvPr id="10" name="TextBox 9"/>
+          <p:cNvSpPr txBox="1"/>
+          <p:nvPr/>
+        </p:nvSpPr>
+        <p:spPr>
+          <a:xfrm>
+            <a:off x="1078992" y="1828800"/>
+            <a:ext cx="6613855" cy="201168"/>
+          </a:xfrm>
+          <a:prstGeom prst="rect">
+            <a:avLst/>
+          </a:prstGeom>
+          <a:noFill/>
+        </p:spPr>
+        <p:txBody>
+          <a:bodyPr wrap="square" anchor="t">
+            <a:spAutoFit/>
+          </a:bodyPr>
+          <a:lstStyle/>
+          <a:p>
+            <a:pPr algn="l"/>
+            <a:r>
+              <a:rPr sz="1700" b="0" i="0" lang="en-US" altLang="en-US">
                 <a:solidFill>
                   <a:srgbClr val="82909A"/>
                 </a:solidFill>
@@ -6098,14 +6228,14 @@
       </p:sp>
       <p:sp>
         <p:nvSpPr>
-          <p:cNvPr id="10" name="Rounded Rectangle 9"/>
+          <p:cNvPr id="11" name="Rounded Rectangle 10"/>
           <p:cNvSpPr/>
           <p:nvPr/>
         </p:nvSpPr>
         <p:spPr>
           <a:xfrm>
             <a:off x="731520" y="2130552"/>
-            <a:ext cx="7071055" cy="685800"/>
+            <a:ext cx="7071055" cy="804672"/>
           </a:xfrm>
           <a:prstGeom prst="roundRect">
             <a:avLst/>
@@ -6139,14 +6269,14 @@
       </p:sp>
       <p:sp>
         <p:nvSpPr>
-          <p:cNvPr id="11" name="Rectangle 10"/>
+          <p:cNvPr id="12" name="Rectangle 11"/>
           <p:cNvSpPr/>
           <p:nvPr/>
         </p:nvSpPr>
         <p:spPr>
           <a:xfrm>
             <a:off x="868680" y="2240280"/>
-            <a:ext cx="73152" cy="411480"/>
+            <a:ext cx="73152" cy="548640"/>
           </a:xfrm>
           <a:prstGeom prst="rect">
             <a:avLst/>
@@ -6182,14 +6312,14 @@
       </p:sp>
       <p:sp>
         <p:nvSpPr>
-          <p:cNvPr id="12" name="TextBox 11"/>
+          <p:cNvPr id="13" name="TextBox 12"/>
           <p:cNvSpPr txBox="1"/>
           <p:nvPr/>
         </p:nvSpPr>
         <p:spPr>
           <a:xfrm>
             <a:off x="1078992" y="2203704"/>
-            <a:ext cx="6613855" cy="320040"/>
+            <a:ext cx="6613855" cy="228600"/>
           </a:xfrm>
           <a:prstGeom prst="rect">
             <a:avLst/>
@@ -6204,7 +6334,7 @@
           <a:p>
             <a:pPr algn="l"/>
             <a:r>
-              <a:rPr sz="2600" b="1" i="0" lang="th-TH" altLang="en-US">
+              <a:rPr sz="1700" b="0" i="0" lang="th-TH" altLang="en-US">
                 <a:solidFill>
                   <a:srgbClr val="24333D"/>
                 </a:solidFill>
@@ -6214,30 +6344,19 @@
               </a:rPr>
               <a:t>ประเทศ</a:t>
             </a:r>
-            <a:r>
-              <a:rPr sz="1700" b="0" i="1" lang="en-US" altLang="en-US">
-                <a:solidFill>
-                  <a:srgbClr val="566873"/>
-                </a:solidFill>
-                <a:latin typeface="Sarabun"/>
-                <a:ea typeface="Sarabun"/>
-                <a:cs typeface="Sarabun"/>
-              </a:rPr>
-              <a:t> (bprà-thêet)</a:t>
-            </a:r>
-          </a:p>
-        </p:txBody>
-      </p:sp>
-      <p:sp>
-        <p:nvSpPr>
-          <p:cNvPr id="13" name="TextBox 12"/>
+          </a:p>
+        </p:txBody>
+      </p:sp>
+      <p:sp>
+        <p:nvSpPr>
+          <p:cNvPr id="14" name="TextBox 13"/>
           <p:cNvSpPr txBox="1"/>
           <p:nvPr/>
         </p:nvSpPr>
         <p:spPr>
           <a:xfrm>
-            <a:off x="1078992" y="2514600"/>
-            <a:ext cx="6613855" cy="228600"/>
+            <a:off x="1078992" y="2432304"/>
+            <a:ext cx="6613855" cy="201168"/>
           </a:xfrm>
           <a:prstGeom prst="rect">
             <a:avLst/>
@@ -6252,7 +6371,44 @@
           <a:p>
             <a:pPr algn="l"/>
             <a:r>
-              <a:rPr sz="1300" b="0" i="0" lang="en-US" altLang="en-US">
+              <a:rPr sz="1700" b="0" i="1" lang="en-US" altLang="en-US">
+                <a:solidFill>
+                  <a:srgbClr val="566873"/>
+                </a:solidFill>
+                <a:latin typeface="Sarabun"/>
+                <a:ea typeface="Sarabun"/>
+                <a:cs typeface="Sarabun"/>
+              </a:rPr>
+              <a:t>bprà-thêet</a:t>
+            </a:r>
+          </a:p>
+        </p:txBody>
+      </p:sp>
+      <p:sp>
+        <p:nvSpPr>
+          <p:cNvPr id="15" name="TextBox 14"/>
+          <p:cNvSpPr txBox="1"/>
+          <p:nvPr/>
+        </p:nvSpPr>
+        <p:spPr>
+          <a:xfrm>
+            <a:off x="1078992" y="2633472"/>
+            <a:ext cx="6613855" cy="201168"/>
+          </a:xfrm>
+          <a:prstGeom prst="rect">
+            <a:avLst/>
+          </a:prstGeom>
+          <a:noFill/>
+        </p:spPr>
+        <p:txBody>
+          <a:bodyPr wrap="square" anchor="t">
+            <a:spAutoFit/>
+          </a:bodyPr>
+          <a:lstStyle/>
+          <a:p>
+            <a:pPr algn="l"/>
+            <a:r>
+              <a:rPr sz="1700" b="0" i="0" lang="en-US" altLang="en-US">
                 <a:solidFill>
                   <a:srgbClr val="82909A"/>
                 </a:solidFill>
@@ -6267,14 +6423,14 @@
       </p:sp>
       <p:sp>
         <p:nvSpPr>
-          <p:cNvPr id="14" name="Rounded Rectangle 13"/>
+          <p:cNvPr id="16" name="Rounded Rectangle 15"/>
           <p:cNvSpPr/>
           <p:nvPr/>
         </p:nvSpPr>
         <p:spPr>
           <a:xfrm>
             <a:off x="731520" y="2935224"/>
-            <a:ext cx="7071055" cy="685800"/>
+            <a:ext cx="7071055" cy="804672"/>
           </a:xfrm>
           <a:prstGeom prst="roundRect">
             <a:avLst/>
@@ -6308,14 +6464,14 @@
       </p:sp>
       <p:sp>
         <p:nvSpPr>
-          <p:cNvPr id="15" name="Rectangle 14"/>
+          <p:cNvPr id="17" name="Rectangle 16"/>
           <p:cNvSpPr/>
           <p:nvPr/>
         </p:nvSpPr>
         <p:spPr>
           <a:xfrm>
             <a:off x="868680" y="3044952"/>
-            <a:ext cx="73152" cy="411480"/>
+            <a:ext cx="73152" cy="548640"/>
           </a:xfrm>
           <a:prstGeom prst="rect">
             <a:avLst/>
@@ -6351,14 +6507,14 @@
       </p:sp>
       <p:sp>
         <p:nvSpPr>
-          <p:cNvPr id="16" name="TextBox 15"/>
+          <p:cNvPr id="18" name="TextBox 17"/>
           <p:cNvSpPr txBox="1"/>
           <p:nvPr/>
         </p:nvSpPr>
         <p:spPr>
           <a:xfrm>
             <a:off x="1078992" y="3008376"/>
-            <a:ext cx="6613855" cy="320040"/>
+            <a:ext cx="6613855" cy="228600"/>
           </a:xfrm>
           <a:prstGeom prst="rect">
             <a:avLst/>
@@ -6373,7 +6529,7 @@
           <a:p>
             <a:pPr algn="l"/>
             <a:r>
-              <a:rPr sz="2600" b="1" i="0" lang="th-TH" altLang="en-US">
+              <a:rPr sz="1700" b="0" i="0" lang="th-TH" altLang="en-US">
                 <a:solidFill>
                   <a:srgbClr val="24333D"/>
                 </a:solidFill>
@@ -6383,30 +6539,19 @@
               </a:rPr>
               <a:t>ไทย</a:t>
             </a:r>
-            <a:r>
-              <a:rPr sz="1700" b="0" i="1" lang="en-US" altLang="en-US">
-                <a:solidFill>
-                  <a:srgbClr val="566873"/>
-                </a:solidFill>
-                <a:latin typeface="Sarabun"/>
-                <a:ea typeface="Sarabun"/>
-                <a:cs typeface="Sarabun"/>
-              </a:rPr>
-              <a:t> (thai)</a:t>
-            </a:r>
-          </a:p>
-        </p:txBody>
-      </p:sp>
-      <p:sp>
-        <p:nvSpPr>
-          <p:cNvPr id="17" name="TextBox 16"/>
+          </a:p>
+        </p:txBody>
+      </p:sp>
+      <p:sp>
+        <p:nvSpPr>
+          <p:cNvPr id="19" name="TextBox 18"/>
           <p:cNvSpPr txBox="1"/>
           <p:nvPr/>
         </p:nvSpPr>
         <p:spPr>
           <a:xfrm>
-            <a:off x="1078992" y="3319272"/>
-            <a:ext cx="6613855" cy="228600"/>
+            <a:off x="1078992" y="3236976"/>
+            <a:ext cx="6613855" cy="201168"/>
           </a:xfrm>
           <a:prstGeom prst="rect">
             <a:avLst/>
@@ -6421,7 +6566,44 @@
           <a:p>
             <a:pPr algn="l"/>
             <a:r>
-              <a:rPr sz="1300" b="0" i="0" lang="en-US" altLang="en-US">
+              <a:rPr sz="1700" b="0" i="1" lang="en-US" altLang="en-US">
+                <a:solidFill>
+                  <a:srgbClr val="566873"/>
+                </a:solidFill>
+                <a:latin typeface="Sarabun"/>
+                <a:ea typeface="Sarabun"/>
+                <a:cs typeface="Sarabun"/>
+              </a:rPr>
+              <a:t>thai</a:t>
+            </a:r>
+          </a:p>
+        </p:txBody>
+      </p:sp>
+      <p:sp>
+        <p:nvSpPr>
+          <p:cNvPr id="20" name="TextBox 19"/>
+          <p:cNvSpPr txBox="1"/>
+          <p:nvPr/>
+        </p:nvSpPr>
+        <p:spPr>
+          <a:xfrm>
+            <a:off x="1078992" y="3438144"/>
+            <a:ext cx="6613855" cy="201168"/>
+          </a:xfrm>
+          <a:prstGeom prst="rect">
+            <a:avLst/>
+          </a:prstGeom>
+          <a:noFill/>
+        </p:spPr>
+        <p:txBody>
+          <a:bodyPr wrap="square" anchor="t">
+            <a:spAutoFit/>
+          </a:bodyPr>
+          <a:lstStyle/>
+          <a:p>
+            <a:pPr algn="l"/>
+            <a:r>
+              <a:rPr sz="1700" b="0" i="0" lang="en-US" altLang="en-US">
                 <a:solidFill>
                   <a:srgbClr val="82909A"/>
                 </a:solidFill>
@@ -6436,14 +6618,14 @@
       </p:sp>
       <p:sp>
         <p:nvSpPr>
-          <p:cNvPr id="18" name="Rounded Rectangle 17"/>
+          <p:cNvPr id="21" name="Rounded Rectangle 20"/>
           <p:cNvSpPr/>
           <p:nvPr/>
         </p:nvSpPr>
         <p:spPr>
           <a:xfrm>
             <a:off x="731520" y="3739896"/>
-            <a:ext cx="7071055" cy="685800"/>
+            <a:ext cx="7071055" cy="804672"/>
           </a:xfrm>
           <a:prstGeom prst="roundRect">
             <a:avLst/>
@@ -6477,14 +6659,14 @@
       </p:sp>
       <p:sp>
         <p:nvSpPr>
-          <p:cNvPr id="19" name="Rectangle 18"/>
+          <p:cNvPr id="22" name="Rectangle 21"/>
           <p:cNvSpPr/>
           <p:nvPr/>
         </p:nvSpPr>
         <p:spPr>
           <a:xfrm>
             <a:off x="868680" y="3849624"/>
-            <a:ext cx="73152" cy="411480"/>
+            <a:ext cx="73152" cy="548640"/>
           </a:xfrm>
           <a:prstGeom prst="rect">
             <a:avLst/>
@@ -6520,14 +6702,14 @@
       </p:sp>
       <p:sp>
         <p:nvSpPr>
-          <p:cNvPr id="20" name="TextBox 19"/>
+          <p:cNvPr id="23" name="TextBox 22"/>
           <p:cNvSpPr txBox="1"/>
           <p:nvPr/>
         </p:nvSpPr>
         <p:spPr>
           <a:xfrm>
             <a:off x="1078992" y="3813048"/>
-            <a:ext cx="6613855" cy="320040"/>
+            <a:ext cx="6613855" cy="228600"/>
           </a:xfrm>
           <a:prstGeom prst="rect">
             <a:avLst/>
@@ -6542,7 +6724,7 @@
           <a:p>
             <a:pPr algn="l"/>
             <a:r>
-              <a:rPr sz="2600" b="1" i="0" lang="th-TH" altLang="en-US">
+              <a:rPr sz="1700" b="0" i="0" lang="th-TH" altLang="en-US">
                 <a:solidFill>
                   <a:srgbClr val="24333D"/>
                 </a:solidFill>
@@ -6552,30 +6734,19 @@
               </a:rPr>
               <a:t>อังกฤษ</a:t>
             </a:r>
-            <a:r>
-              <a:rPr sz="1700" b="0" i="1" lang="en-US" altLang="en-US">
-                <a:solidFill>
-                  <a:srgbClr val="566873"/>
-                </a:solidFill>
-                <a:latin typeface="Sarabun"/>
-                <a:ea typeface="Sarabun"/>
-                <a:cs typeface="Sarabun"/>
-              </a:rPr>
-              <a:t> (ang-grìt)</a:t>
-            </a:r>
-          </a:p>
-        </p:txBody>
-      </p:sp>
-      <p:sp>
-        <p:nvSpPr>
-          <p:cNvPr id="21" name="TextBox 20"/>
+          </a:p>
+        </p:txBody>
+      </p:sp>
+      <p:sp>
+        <p:nvSpPr>
+          <p:cNvPr id="24" name="TextBox 23"/>
           <p:cNvSpPr txBox="1"/>
           <p:nvPr/>
         </p:nvSpPr>
         <p:spPr>
           <a:xfrm>
-            <a:off x="1078992" y="4123944"/>
-            <a:ext cx="6613855" cy="228600"/>
+            <a:off x="1078992" y="4041648"/>
+            <a:ext cx="6613855" cy="201168"/>
           </a:xfrm>
           <a:prstGeom prst="rect">
             <a:avLst/>
@@ -6590,7 +6761,44 @@
           <a:p>
             <a:pPr algn="l"/>
             <a:r>
-              <a:rPr sz="1300" b="0" i="0" lang="en-US" altLang="en-US">
+              <a:rPr sz="1700" b="0" i="1" lang="en-US" altLang="en-US">
+                <a:solidFill>
+                  <a:srgbClr val="566873"/>
+                </a:solidFill>
+                <a:latin typeface="Sarabun"/>
+                <a:ea typeface="Sarabun"/>
+                <a:cs typeface="Sarabun"/>
+              </a:rPr>
+              <a:t>ang-grìt</a:t>
+            </a:r>
+          </a:p>
+        </p:txBody>
+      </p:sp>
+      <p:sp>
+        <p:nvSpPr>
+          <p:cNvPr id="25" name="TextBox 24"/>
+          <p:cNvSpPr txBox="1"/>
+          <p:nvPr/>
+        </p:nvSpPr>
+        <p:spPr>
+          <a:xfrm>
+            <a:off x="1078992" y="4242816"/>
+            <a:ext cx="6613855" cy="201168"/>
+          </a:xfrm>
+          <a:prstGeom prst="rect">
+            <a:avLst/>
+          </a:prstGeom>
+          <a:noFill/>
+        </p:spPr>
+        <p:txBody>
+          <a:bodyPr wrap="square" anchor="t">
+            <a:spAutoFit/>
+          </a:bodyPr>
+          <a:lstStyle/>
+          <a:p>
+            <a:pPr algn="l"/>
+            <a:r>
+              <a:rPr sz="1700" b="0" i="0" lang="en-US" altLang="en-US">
                 <a:solidFill>
                   <a:srgbClr val="82909A"/>
                 </a:solidFill>
@@ -6605,14 +6813,14 @@
       </p:sp>
       <p:sp>
         <p:nvSpPr>
-          <p:cNvPr id="22" name="Rounded Rectangle 21"/>
+          <p:cNvPr id="26" name="Rounded Rectangle 25"/>
           <p:cNvSpPr/>
           <p:nvPr/>
         </p:nvSpPr>
         <p:spPr>
           <a:xfrm>
             <a:off x="731520" y="4544568"/>
-            <a:ext cx="7071055" cy="685800"/>
+            <a:ext cx="7071055" cy="804672"/>
           </a:xfrm>
           <a:prstGeom prst="roundRect">
             <a:avLst/>
@@ -6646,14 +6854,14 @@
       </p:sp>
       <p:sp>
         <p:nvSpPr>
-          <p:cNvPr id="23" name="Rectangle 22"/>
+          <p:cNvPr id="27" name="Rectangle 26"/>
           <p:cNvSpPr/>
           <p:nvPr/>
         </p:nvSpPr>
         <p:spPr>
           <a:xfrm>
             <a:off x="868680" y="4654296"/>
-            <a:ext cx="73152" cy="411480"/>
+            <a:ext cx="73152" cy="548640"/>
           </a:xfrm>
           <a:prstGeom prst="rect">
             <a:avLst/>
@@ -6689,14 +6897,14 @@
       </p:sp>
       <p:sp>
         <p:nvSpPr>
-          <p:cNvPr id="24" name="TextBox 23"/>
+          <p:cNvPr id="28" name="TextBox 27"/>
           <p:cNvSpPr txBox="1"/>
           <p:nvPr/>
         </p:nvSpPr>
         <p:spPr>
           <a:xfrm>
             <a:off x="1078992" y="4617720"/>
-            <a:ext cx="6613855" cy="320040"/>
+            <a:ext cx="6613855" cy="228600"/>
           </a:xfrm>
           <a:prstGeom prst="rect">
             <a:avLst/>
@@ -6711,7 +6919,7 @@
           <a:p>
             <a:pPr algn="l"/>
             <a:r>
-              <a:rPr sz="2600" b="1" i="0" lang="th-TH" altLang="en-US">
+              <a:rPr sz="1700" b="0" i="0" lang="th-TH" altLang="en-US">
                 <a:solidFill>
                   <a:srgbClr val="24333D"/>
                 </a:solidFill>
@@ -6721,30 +6929,19 @@
               </a:rPr>
               <a:t>อเมริกา</a:t>
             </a:r>
-            <a:r>
-              <a:rPr sz="1700" b="0" i="1" lang="en-US" altLang="en-US">
-                <a:solidFill>
-                  <a:srgbClr val="566873"/>
-                </a:solidFill>
-                <a:latin typeface="Sarabun"/>
-                <a:ea typeface="Sarabun"/>
-                <a:cs typeface="Sarabun"/>
-              </a:rPr>
-              <a:t> (à-mee-rí-kaa)</a:t>
-            </a:r>
-          </a:p>
-        </p:txBody>
-      </p:sp>
-      <p:sp>
-        <p:nvSpPr>
-          <p:cNvPr id="25" name="TextBox 24"/>
+          </a:p>
+        </p:txBody>
+      </p:sp>
+      <p:sp>
+        <p:nvSpPr>
+          <p:cNvPr id="29" name="TextBox 28"/>
           <p:cNvSpPr txBox="1"/>
           <p:nvPr/>
         </p:nvSpPr>
         <p:spPr>
           <a:xfrm>
-            <a:off x="1078992" y="4928616"/>
-            <a:ext cx="6613855" cy="228600"/>
+            <a:off x="1078992" y="4846320"/>
+            <a:ext cx="6613855" cy="201168"/>
           </a:xfrm>
           <a:prstGeom prst="rect">
             <a:avLst/>
@@ -6759,29 +6956,29 @@
           <a:p>
             <a:pPr algn="l"/>
             <a:r>
-              <a:rPr sz="1300" b="0" i="0" lang="en-US" altLang="en-US">
-                <a:solidFill>
-                  <a:srgbClr val="82909A"/>
-                </a:solidFill>
-                <a:latin typeface="Sarabun"/>
-                <a:ea typeface="Sarabun"/>
-                <a:cs typeface="Sarabun"/>
-              </a:rPr>
-              <a:t>America</a:t>
-            </a:r>
-          </a:p>
-        </p:txBody>
-      </p:sp>
-      <p:sp>
-        <p:nvSpPr>
-          <p:cNvPr id="26" name="TextBox 25"/>
+              <a:rPr sz="1700" b="0" i="1" lang="en-US" altLang="en-US">
+                <a:solidFill>
+                  <a:srgbClr val="566873"/>
+                </a:solidFill>
+                <a:latin typeface="Sarabun"/>
+                <a:ea typeface="Sarabun"/>
+                <a:cs typeface="Sarabun"/>
+              </a:rPr>
+              <a:t>à-mee-rí-kaa</a:t>
+            </a:r>
+          </a:p>
+        </p:txBody>
+      </p:sp>
+      <p:sp>
+        <p:nvSpPr>
+          <p:cNvPr id="30" name="TextBox 29"/>
           <p:cNvSpPr txBox="1"/>
           <p:nvPr/>
         </p:nvSpPr>
         <p:spPr>
           <a:xfrm>
-            <a:off x="932688" y="5632704"/>
-            <a:ext cx="9692640" cy="228600"/>
+            <a:off x="1078992" y="5047488"/>
+            <a:ext cx="6613855" cy="201168"/>
           </a:xfrm>
           <a:prstGeom prst="rect">
             <a:avLst/>
@@ -6796,6 +6993,43 @@
           <a:p>
             <a:pPr algn="l"/>
             <a:r>
+              <a:rPr sz="1700" b="0" i="0" lang="en-US" altLang="en-US">
+                <a:solidFill>
+                  <a:srgbClr val="82909A"/>
+                </a:solidFill>
+                <a:latin typeface="Sarabun"/>
+                <a:ea typeface="Sarabun"/>
+                <a:cs typeface="Sarabun"/>
+              </a:rPr>
+              <a:t>America</a:t>
+            </a:r>
+          </a:p>
+        </p:txBody>
+      </p:sp>
+      <p:sp>
+        <p:nvSpPr>
+          <p:cNvPr id="31" name="TextBox 30"/>
+          <p:cNvSpPr txBox="1"/>
+          <p:nvPr/>
+        </p:nvSpPr>
+        <p:spPr>
+          <a:xfrm>
+            <a:off x="932688" y="5632704"/>
+            <a:ext cx="9692640" cy="228600"/>
+          </a:xfrm>
+          <a:prstGeom prst="rect">
+            <a:avLst/>
+          </a:prstGeom>
+          <a:noFill/>
+        </p:spPr>
+        <p:txBody>
+          <a:bodyPr wrap="square" anchor="t">
+            <a:spAutoFit/>
+          </a:bodyPr>
+          <a:lstStyle/>
+          <a:p>
+            <a:pPr algn="l"/>
+            <a:r>
               <a:rPr sz="1700" b="1" i="0" lang="en-US" altLang="en-US">
                 <a:solidFill>
                   <a:srgbClr val="C96F4A"/>
@@ -6811,7 +7045,7 @@
       </p:sp>
       <p:sp>
         <p:nvSpPr>
-          <p:cNvPr id="27" name="Oval 26"/>
+          <p:cNvPr id="32" name="Oval 31"/>
           <p:cNvSpPr/>
           <p:nvPr/>
         </p:nvSpPr>
@@ -6854,7 +7088,7 @@
       </p:sp>
       <p:sp>
         <p:nvSpPr>
-          <p:cNvPr id="28" name="TextBox 27"/>
+          <p:cNvPr id="33" name="TextBox 32"/>
           <p:cNvSpPr txBox="1"/>
           <p:nvPr/>
         </p:nvSpPr>
@@ -7302,8 +7536,8 @@
         </p:nvSpPr>
         <p:spPr>
           <a:xfrm>
-            <a:off x="1078992" y="1435608"/>
-            <a:ext cx="6613855" cy="658368"/>
+            <a:off x="1078992" y="1463040"/>
+            <a:ext cx="6613855" cy="320040"/>
           </a:xfrm>
           <a:prstGeom prst="rect">
             <a:avLst/>
@@ -7318,7 +7552,7 @@
           <a:p>
             <a:pPr algn="l"/>
             <a:r>
-              <a:rPr sz="3600" b="1" i="0" lang="th-TH" altLang="en-US">
+              <a:rPr sz="1700" b="0" i="0" lang="th-TH" altLang="en-US">
                 <a:solidFill>
                   <a:srgbClr val="24333D"/>
                 </a:solidFill>
@@ -7327,17 +7561,6 @@
                 <a:cs typeface="Sarabun"/>
               </a:rPr>
               <a:t>คน</a:t>
-            </a:r>
-            <a:r>
-              <a:rPr sz="2230" b="0" i="1" lang="en-US" altLang="en-US">
-                <a:solidFill>
-                  <a:srgbClr val="566873"/>
-                </a:solidFill>
-                <a:latin typeface="Sarabun"/>
-                <a:ea typeface="Sarabun"/>
-                <a:cs typeface="Sarabun"/>
-              </a:rPr>
-              <a:t> (khon)</a:t>
             </a:r>
           </a:p>
         </p:txBody>
@@ -7350,7 +7573,7 @@
         </p:nvSpPr>
         <p:spPr>
           <a:xfrm>
-            <a:off x="1078992" y="2203704"/>
+            <a:off x="1078992" y="1828800"/>
             <a:ext cx="6613855" cy="274320"/>
           </a:xfrm>
           <a:prstGeom prst="rect">
@@ -7366,6 +7589,43 @@
           <a:p>
             <a:pPr algn="l"/>
             <a:r>
+              <a:rPr sz="1700" b="0" i="1" lang="en-US" altLang="en-US">
+                <a:solidFill>
+                  <a:srgbClr val="566873"/>
+                </a:solidFill>
+                <a:latin typeface="Sarabun"/>
+                <a:ea typeface="Sarabun"/>
+                <a:cs typeface="Sarabun"/>
+              </a:rPr>
+              <a:t>khon</a:t>
+            </a:r>
+          </a:p>
+        </p:txBody>
+      </p:sp>
+      <p:sp>
+        <p:nvSpPr>
+          <p:cNvPr id="10" name="TextBox 9"/>
+          <p:cNvSpPr txBox="1"/>
+          <p:nvPr/>
+        </p:nvSpPr>
+        <p:spPr>
+          <a:xfrm>
+            <a:off x="1078992" y="2203704"/>
+            <a:ext cx="6613855" cy="274320"/>
+          </a:xfrm>
+          <a:prstGeom prst="rect">
+            <a:avLst/>
+          </a:prstGeom>
+          <a:noFill/>
+        </p:spPr>
+        <p:txBody>
+          <a:bodyPr wrap="square" anchor="t">
+            <a:spAutoFit/>
+          </a:bodyPr>
+          <a:lstStyle/>
+          <a:p>
+            <a:pPr algn="l"/>
+            <a:r>
               <a:rPr sz="1700" b="0" i="0" lang="en-US" altLang="en-US">
                 <a:solidFill>
                   <a:srgbClr val="82909A"/>
@@ -7381,7 +7641,7 @@
       </p:sp>
       <p:sp>
         <p:nvSpPr>
-          <p:cNvPr id="10" name="Rounded Rectangle 9"/>
+          <p:cNvPr id="11" name="Rounded Rectangle 10"/>
           <p:cNvSpPr/>
           <p:nvPr/>
         </p:nvSpPr>
@@ -7422,7 +7682,7 @@
       </p:sp>
       <p:sp>
         <p:nvSpPr>
-          <p:cNvPr id="11" name="Rectangle 10"/>
+          <p:cNvPr id="12" name="Rectangle 11"/>
           <p:cNvSpPr/>
           <p:nvPr/>
         </p:nvSpPr>
@@ -7465,14 +7725,14 @@
       </p:sp>
       <p:sp>
         <p:nvSpPr>
-          <p:cNvPr id="12" name="TextBox 11"/>
+          <p:cNvPr id="13" name="TextBox 12"/>
           <p:cNvSpPr txBox="1"/>
           <p:nvPr/>
         </p:nvSpPr>
         <p:spPr>
           <a:xfrm>
-            <a:off x="1078992" y="3191256"/>
-            <a:ext cx="6613855" cy="658368"/>
+            <a:off x="1078992" y="3218688"/>
+            <a:ext cx="6613855" cy="320040"/>
           </a:xfrm>
           <a:prstGeom prst="rect">
             <a:avLst/>
@@ -7487,7 +7747,7 @@
           <a:p>
             <a:pPr algn="l"/>
             <a:r>
-              <a:rPr sz="3600" b="1" i="0" lang="th-TH" altLang="en-US">
+              <a:rPr sz="1700" b="0" i="0" lang="th-TH" altLang="en-US">
                 <a:solidFill>
                   <a:srgbClr val="24333D"/>
                 </a:solidFill>
@@ -7497,29 +7757,18 @@
               </a:rPr>
               <a:t>คนไทย</a:t>
             </a:r>
-            <a:r>
-              <a:rPr sz="2230" b="0" i="1" lang="en-US" altLang="en-US">
-                <a:solidFill>
-                  <a:srgbClr val="566873"/>
-                </a:solidFill>
-                <a:latin typeface="Sarabun"/>
-                <a:ea typeface="Sarabun"/>
-                <a:cs typeface="Sarabun"/>
-              </a:rPr>
-              <a:t> (khon thai)</a:t>
-            </a:r>
-          </a:p>
-        </p:txBody>
-      </p:sp>
-      <p:sp>
-        <p:nvSpPr>
-          <p:cNvPr id="13" name="TextBox 12"/>
+          </a:p>
+        </p:txBody>
+      </p:sp>
+      <p:sp>
+        <p:nvSpPr>
+          <p:cNvPr id="14" name="TextBox 13"/>
           <p:cNvSpPr txBox="1"/>
           <p:nvPr/>
         </p:nvSpPr>
         <p:spPr>
           <a:xfrm>
-            <a:off x="1078992" y="3959352"/>
+            <a:off x="1078992" y="3584448"/>
             <a:ext cx="6613855" cy="274320"/>
           </a:xfrm>
           <a:prstGeom prst="rect">
@@ -7535,6 +7784,43 @@
           <a:p>
             <a:pPr algn="l"/>
             <a:r>
+              <a:rPr sz="1700" b="0" i="1" lang="en-US" altLang="en-US">
+                <a:solidFill>
+                  <a:srgbClr val="566873"/>
+                </a:solidFill>
+                <a:latin typeface="Sarabun"/>
+                <a:ea typeface="Sarabun"/>
+                <a:cs typeface="Sarabun"/>
+              </a:rPr>
+              <a:t>khon thai</a:t>
+            </a:r>
+          </a:p>
+        </p:txBody>
+      </p:sp>
+      <p:sp>
+        <p:nvSpPr>
+          <p:cNvPr id="15" name="TextBox 14"/>
+          <p:cNvSpPr txBox="1"/>
+          <p:nvPr/>
+        </p:nvSpPr>
+        <p:spPr>
+          <a:xfrm>
+            <a:off x="1078992" y="3959352"/>
+            <a:ext cx="6613855" cy="274320"/>
+          </a:xfrm>
+          <a:prstGeom prst="rect">
+            <a:avLst/>
+          </a:prstGeom>
+          <a:noFill/>
+        </p:spPr>
+        <p:txBody>
+          <a:bodyPr wrap="square" anchor="t">
+            <a:spAutoFit/>
+          </a:bodyPr>
+          <a:lstStyle/>
+          <a:p>
+            <a:pPr algn="l"/>
+            <a:r>
               <a:rPr sz="1700" b="0" i="0" lang="en-US" altLang="en-US">
                 <a:solidFill>
                   <a:srgbClr val="82909A"/>
@@ -7550,7 +7836,7 @@
       </p:sp>
       <p:sp>
         <p:nvSpPr>
-          <p:cNvPr id="14" name="Rounded Rectangle 13"/>
+          <p:cNvPr id="16" name="Rounded Rectangle 15"/>
           <p:cNvSpPr/>
           <p:nvPr/>
         </p:nvSpPr>
@@ -7591,7 +7877,7 @@
       </p:sp>
       <p:sp>
         <p:nvSpPr>
-          <p:cNvPr id="15" name="Rectangle 14"/>
+          <p:cNvPr id="17" name="Rectangle 16"/>
           <p:cNvSpPr/>
           <p:nvPr/>
         </p:nvSpPr>
@@ -7634,14 +7920,14 @@
       </p:sp>
       <p:sp>
         <p:nvSpPr>
-          <p:cNvPr id="16" name="TextBox 15"/>
+          <p:cNvPr id="18" name="TextBox 17"/>
           <p:cNvSpPr txBox="1"/>
           <p:nvPr/>
         </p:nvSpPr>
         <p:spPr>
           <a:xfrm>
-            <a:off x="1078992" y="4946904"/>
-            <a:ext cx="6613855" cy="658368"/>
+            <a:off x="1078992" y="4974336"/>
+            <a:ext cx="6613855" cy="320040"/>
           </a:xfrm>
           <a:prstGeom prst="rect">
             <a:avLst/>
@@ -7656,7 +7942,7 @@
           <a:p>
             <a:pPr algn="l"/>
             <a:r>
-              <a:rPr sz="3600" b="1" i="0" lang="th-TH" altLang="en-US">
+              <a:rPr sz="1700" b="0" i="0" lang="th-TH" altLang="en-US">
                 <a:solidFill>
                   <a:srgbClr val="24333D"/>
                 </a:solidFill>
@@ -7666,8 +7952,34 @@
               </a:rPr>
               <a:t>คนอังกฤษ</a:t>
             </a:r>
-            <a:r>
-              <a:rPr sz="2230" b="0" i="1" lang="en-US" altLang="en-US">
+          </a:p>
+        </p:txBody>
+      </p:sp>
+      <p:sp>
+        <p:nvSpPr>
+          <p:cNvPr id="19" name="TextBox 18"/>
+          <p:cNvSpPr txBox="1"/>
+          <p:nvPr/>
+        </p:nvSpPr>
+        <p:spPr>
+          <a:xfrm>
+            <a:off x="1078992" y="5340096"/>
+            <a:ext cx="6613855" cy="274320"/>
+          </a:xfrm>
+          <a:prstGeom prst="rect">
+            <a:avLst/>
+          </a:prstGeom>
+          <a:noFill/>
+        </p:spPr>
+        <p:txBody>
+          <a:bodyPr wrap="square" anchor="t">
+            <a:spAutoFit/>
+          </a:bodyPr>
+          <a:lstStyle/>
+          <a:p>
+            <a:pPr algn="l"/>
+            <a:r>
+              <a:rPr sz="1700" b="0" i="1" lang="en-US" altLang="en-US">
                 <a:solidFill>
                   <a:srgbClr val="566873"/>
                 </a:solidFill>
@@ -7675,14 +7987,14 @@
                 <a:ea typeface="Sarabun"/>
                 <a:cs typeface="Sarabun"/>
               </a:rPr>
-              <a:t> (khon ang-grìt)</a:t>
-            </a:r>
-          </a:p>
-        </p:txBody>
-      </p:sp>
-      <p:sp>
-        <p:nvSpPr>
-          <p:cNvPr id="17" name="TextBox 16"/>
+              <a:t>khon ang-grìt</a:t>
+            </a:r>
+          </a:p>
+        </p:txBody>
+      </p:sp>
+      <p:sp>
+        <p:nvSpPr>
+          <p:cNvPr id="20" name="TextBox 19"/>
           <p:cNvSpPr txBox="1"/>
           <p:nvPr/>
         </p:nvSpPr>
@@ -8042,8 +8354,8 @@
         </p:nvSpPr>
         <p:spPr>
           <a:xfrm>
-            <a:off x="1078992" y="1435608"/>
-            <a:ext cx="6613855" cy="658368"/>
+            <a:off x="1078992" y="1463040"/>
+            <a:ext cx="6613855" cy="320040"/>
           </a:xfrm>
           <a:prstGeom prst="rect">
             <a:avLst/>
@@ -8058,7 +8370,7 @@
           <a:p>
             <a:pPr algn="l"/>
             <a:r>
-              <a:rPr sz="3600" b="1" i="0" lang="th-TH" altLang="en-US">
+              <a:rPr sz="1700" b="0" i="0" lang="th-TH" altLang="en-US">
                 <a:solidFill>
                   <a:srgbClr val="24333D"/>
                 </a:solidFill>
@@ -8067,17 +8379,6 @@
                 <a:cs typeface="Sarabun"/>
               </a:rPr>
               <a:t>ชื่อ</a:t>
-            </a:r>
-            <a:r>
-              <a:rPr sz="2230" b="0" i="1" lang="en-US" altLang="en-US">
-                <a:solidFill>
-                  <a:srgbClr val="566873"/>
-                </a:solidFill>
-                <a:latin typeface="Sarabun"/>
-                <a:ea typeface="Sarabun"/>
-                <a:cs typeface="Sarabun"/>
-              </a:rPr>
-              <a:t> (chûue)</a:t>
             </a:r>
           </a:p>
         </p:txBody>
@@ -8090,7 +8391,7 @@
         </p:nvSpPr>
         <p:spPr>
           <a:xfrm>
-            <a:off x="1078992" y="2203704"/>
+            <a:off x="1078992" y="1828800"/>
             <a:ext cx="6613855" cy="274320"/>
           </a:xfrm>
           <a:prstGeom prst="rect">
@@ -8106,6 +8407,43 @@
           <a:p>
             <a:pPr algn="l"/>
             <a:r>
+              <a:rPr sz="1700" b="0" i="1" lang="en-US" altLang="en-US">
+                <a:solidFill>
+                  <a:srgbClr val="566873"/>
+                </a:solidFill>
+                <a:latin typeface="Sarabun"/>
+                <a:ea typeface="Sarabun"/>
+                <a:cs typeface="Sarabun"/>
+              </a:rPr>
+              <a:t>chûue</a:t>
+            </a:r>
+          </a:p>
+        </p:txBody>
+      </p:sp>
+      <p:sp>
+        <p:nvSpPr>
+          <p:cNvPr id="10" name="TextBox 9"/>
+          <p:cNvSpPr txBox="1"/>
+          <p:nvPr/>
+        </p:nvSpPr>
+        <p:spPr>
+          <a:xfrm>
+            <a:off x="1078992" y="2203704"/>
+            <a:ext cx="6613855" cy="274320"/>
+          </a:xfrm>
+          <a:prstGeom prst="rect">
+            <a:avLst/>
+          </a:prstGeom>
+          <a:noFill/>
+        </p:spPr>
+        <p:txBody>
+          <a:bodyPr wrap="square" anchor="t">
+            <a:spAutoFit/>
+          </a:bodyPr>
+          <a:lstStyle/>
+          <a:p>
+            <a:pPr algn="l"/>
+            <a:r>
               <a:rPr sz="1700" b="0" i="0" lang="en-US" altLang="en-US">
                 <a:solidFill>
                   <a:srgbClr val="82909A"/>
@@ -8121,7 +8459,7 @@
       </p:sp>
       <p:sp>
         <p:nvSpPr>
-          <p:cNvPr id="10" name="Rounded Rectangle 9"/>
+          <p:cNvPr id="11" name="Rounded Rectangle 10"/>
           <p:cNvSpPr/>
           <p:nvPr/>
         </p:nvSpPr>
@@ -8162,7 +8500,7 @@
       </p:sp>
       <p:sp>
         <p:nvSpPr>
-          <p:cNvPr id="11" name="Rectangle 10"/>
+          <p:cNvPr id="12" name="Rectangle 11"/>
           <p:cNvSpPr/>
           <p:nvPr/>
         </p:nvSpPr>
@@ -8205,14 +8543,14 @@
       </p:sp>
       <p:sp>
         <p:nvSpPr>
-          <p:cNvPr id="12" name="TextBox 11"/>
+          <p:cNvPr id="13" name="TextBox 12"/>
           <p:cNvSpPr txBox="1"/>
           <p:nvPr/>
         </p:nvSpPr>
         <p:spPr>
           <a:xfrm>
-            <a:off x="1078992" y="3191256"/>
-            <a:ext cx="6613855" cy="658368"/>
+            <a:off x="1078992" y="3218688"/>
+            <a:ext cx="6613855" cy="320040"/>
           </a:xfrm>
           <a:prstGeom prst="rect">
             <a:avLst/>
@@ -8227,7 +8565,7 @@
           <a:p>
             <a:pPr algn="l"/>
             <a:r>
-              <a:rPr sz="3600" b="1" i="0" lang="th-TH" altLang="en-US">
+              <a:rPr sz="1700" b="0" i="0" lang="th-TH" altLang="en-US">
                 <a:solidFill>
                   <a:srgbClr val="24333D"/>
                 </a:solidFill>
@@ -8237,29 +8575,18 @@
               </a:rPr>
               <a:t>มา</a:t>
             </a:r>
-            <a:r>
-              <a:rPr sz="2230" b="0" i="1" lang="en-US" altLang="en-US">
-                <a:solidFill>
-                  <a:srgbClr val="566873"/>
-                </a:solidFill>
-                <a:latin typeface="Sarabun"/>
-                <a:ea typeface="Sarabun"/>
-                <a:cs typeface="Sarabun"/>
-              </a:rPr>
-              <a:t> (maa)</a:t>
-            </a:r>
-          </a:p>
-        </p:txBody>
-      </p:sp>
-      <p:sp>
-        <p:nvSpPr>
-          <p:cNvPr id="13" name="TextBox 12"/>
+          </a:p>
+        </p:txBody>
+      </p:sp>
+      <p:sp>
+        <p:nvSpPr>
+          <p:cNvPr id="14" name="TextBox 13"/>
           <p:cNvSpPr txBox="1"/>
           <p:nvPr/>
         </p:nvSpPr>
         <p:spPr>
           <a:xfrm>
-            <a:off x="1078992" y="3959352"/>
+            <a:off x="1078992" y="3584448"/>
             <a:ext cx="6613855" cy="274320"/>
           </a:xfrm>
           <a:prstGeom prst="rect">
@@ -8275,6 +8602,43 @@
           <a:p>
             <a:pPr algn="l"/>
             <a:r>
+              <a:rPr sz="1700" b="0" i="1" lang="en-US" altLang="en-US">
+                <a:solidFill>
+                  <a:srgbClr val="566873"/>
+                </a:solidFill>
+                <a:latin typeface="Sarabun"/>
+                <a:ea typeface="Sarabun"/>
+                <a:cs typeface="Sarabun"/>
+              </a:rPr>
+              <a:t>maa</a:t>
+            </a:r>
+          </a:p>
+        </p:txBody>
+      </p:sp>
+      <p:sp>
+        <p:nvSpPr>
+          <p:cNvPr id="15" name="TextBox 14"/>
+          <p:cNvSpPr txBox="1"/>
+          <p:nvPr/>
+        </p:nvSpPr>
+        <p:spPr>
+          <a:xfrm>
+            <a:off x="1078992" y="3959352"/>
+            <a:ext cx="6613855" cy="274320"/>
+          </a:xfrm>
+          <a:prstGeom prst="rect">
+            <a:avLst/>
+          </a:prstGeom>
+          <a:noFill/>
+        </p:spPr>
+        <p:txBody>
+          <a:bodyPr wrap="square" anchor="t">
+            <a:spAutoFit/>
+          </a:bodyPr>
+          <a:lstStyle/>
+          <a:p>
+            <a:pPr algn="l"/>
+            <a:r>
               <a:rPr sz="1700" b="0" i="0" lang="en-US" altLang="en-US">
                 <a:solidFill>
                   <a:srgbClr val="82909A"/>
@@ -8290,7 +8654,7 @@
       </p:sp>
       <p:sp>
         <p:nvSpPr>
-          <p:cNvPr id="14" name="Rounded Rectangle 13"/>
+          <p:cNvPr id="16" name="Rounded Rectangle 15"/>
           <p:cNvSpPr/>
           <p:nvPr/>
         </p:nvSpPr>
@@ -8331,7 +8695,7 @@
       </p:sp>
       <p:sp>
         <p:nvSpPr>
-          <p:cNvPr id="15" name="Rectangle 14"/>
+          <p:cNvPr id="17" name="Rectangle 16"/>
           <p:cNvSpPr/>
           <p:nvPr/>
         </p:nvSpPr>
@@ -8374,14 +8738,14 @@
       </p:sp>
       <p:sp>
         <p:nvSpPr>
-          <p:cNvPr id="16" name="TextBox 15"/>
+          <p:cNvPr id="18" name="TextBox 17"/>
           <p:cNvSpPr txBox="1"/>
           <p:nvPr/>
         </p:nvSpPr>
         <p:spPr>
           <a:xfrm>
-            <a:off x="1078992" y="4946904"/>
-            <a:ext cx="6613855" cy="658368"/>
+            <a:off x="1078992" y="4974336"/>
+            <a:ext cx="6613855" cy="320040"/>
           </a:xfrm>
           <a:prstGeom prst="rect">
             <a:avLst/>
@@ -8396,7 +8760,7 @@
           <a:p>
             <a:pPr algn="l"/>
             <a:r>
-              <a:rPr sz="3600" b="1" i="0" lang="th-TH" altLang="en-US">
+              <a:rPr sz="1700" b="0" i="0" lang="th-TH" altLang="en-US">
                 <a:solidFill>
                   <a:srgbClr val="24333D"/>
                 </a:solidFill>
@@ -8406,8 +8770,34 @@
               </a:rPr>
               <a:t>จาก</a:t>
             </a:r>
-            <a:r>
-              <a:rPr sz="2230" b="0" i="1" lang="en-US" altLang="en-US">
+          </a:p>
+        </p:txBody>
+      </p:sp>
+      <p:sp>
+        <p:nvSpPr>
+          <p:cNvPr id="19" name="TextBox 18"/>
+          <p:cNvSpPr txBox="1"/>
+          <p:nvPr/>
+        </p:nvSpPr>
+        <p:spPr>
+          <a:xfrm>
+            <a:off x="1078992" y="5340096"/>
+            <a:ext cx="6613855" cy="274320"/>
+          </a:xfrm>
+          <a:prstGeom prst="rect">
+            <a:avLst/>
+          </a:prstGeom>
+          <a:noFill/>
+        </p:spPr>
+        <p:txBody>
+          <a:bodyPr wrap="square" anchor="t">
+            <a:spAutoFit/>
+          </a:bodyPr>
+          <a:lstStyle/>
+          <a:p>
+            <a:pPr algn="l"/>
+            <a:r>
+              <a:rPr sz="1700" b="0" i="1" lang="en-US" altLang="en-US">
                 <a:solidFill>
                   <a:srgbClr val="566873"/>
                 </a:solidFill>
@@ -8415,14 +8805,14 @@
                 <a:ea typeface="Sarabun"/>
                 <a:cs typeface="Sarabun"/>
               </a:rPr>
-              <a:t> (jàak)</a:t>
-            </a:r>
-          </a:p>
-        </p:txBody>
-      </p:sp>
-      <p:sp>
-        <p:nvSpPr>
-          <p:cNvPr id="17" name="TextBox 16"/>
+              <a:t>jàak</a:t>
+            </a:r>
+          </a:p>
+        </p:txBody>
+      </p:sp>
+      <p:sp>
+        <p:nvSpPr>
+          <p:cNvPr id="20" name="TextBox 19"/>
           <p:cNvSpPr txBox="1"/>
           <p:nvPr/>
         </p:nvSpPr>
@@ -8722,7 +9112,7 @@
         <p:spPr>
           <a:xfrm>
             <a:off x="1965960" y="1069848"/>
-            <a:ext cx="5836615" cy="384048"/>
+            <a:ext cx="5836615" cy="228600"/>
           </a:xfrm>
           <a:prstGeom prst="rect">
             <a:avLst/>
@@ -8737,7 +9127,7 @@
           <a:p>
             <a:pPr algn="l"/>
             <a:r>
-              <a:rPr sz="2600" b="1" i="0" lang="th-TH" altLang="en-US">
+              <a:rPr sz="1700" b="0" i="0" lang="th-TH" altLang="en-US">
                 <a:solidFill>
                   <a:srgbClr val="24333D"/>
                 </a:solidFill>
@@ -8746,17 +9136,6 @@
                 <a:cs typeface="Sarabun"/>
               </a:rPr>
               <a:t>สวัสดีค่ะ คุณชื่ออะไรคะ</a:t>
-            </a:r>
-            <a:r>
-              <a:rPr sz="1700" b="0" i="1" lang="en-US" altLang="en-US">
-                <a:solidFill>
-                  <a:srgbClr val="566873"/>
-                </a:solidFill>
-                <a:latin typeface="Sarabun"/>
-                <a:ea typeface="Sarabun"/>
-                <a:cs typeface="Sarabun"/>
-              </a:rPr>
-              <a:t> (sà-wàt-dii khâ khun chûue à-rai khá)</a:t>
             </a:r>
           </a:p>
         </p:txBody>
@@ -8769,8 +9148,8 @@
         </p:nvSpPr>
         <p:spPr>
           <a:xfrm>
-            <a:off x="1965960" y="1353312"/>
-            <a:ext cx="5836615" cy="228600"/>
+            <a:off x="1965960" y="1298448"/>
+            <a:ext cx="5836615" cy="201168"/>
           </a:xfrm>
           <a:prstGeom prst="rect">
             <a:avLst/>
@@ -8785,7 +9164,7 @@
           <a:p>
             <a:pPr algn="l"/>
             <a:r>
-              <a:rPr sz="1300" b="0" i="0" lang="en-US" altLang="en-US">
+              <a:rPr sz="1700" b="0" i="1" lang="en-US" altLang="en-US">
                 <a:solidFill>
                   <a:srgbClr val="566873"/>
                 </a:solidFill>
@@ -8793,6 +9172,43 @@
                 <a:ea typeface="Sarabun"/>
                 <a:cs typeface="Sarabun"/>
               </a:rPr>
+              <a:t>sà-wàt-dii khâ khun chûue à-rai khá</a:t>
+            </a:r>
+          </a:p>
+        </p:txBody>
+      </p:sp>
+      <p:sp>
+        <p:nvSpPr>
+          <p:cNvPr id="9" name="TextBox 8"/>
+          <p:cNvSpPr txBox="1"/>
+          <p:nvPr/>
+        </p:nvSpPr>
+        <p:spPr>
+          <a:xfrm>
+            <a:off x="1965960" y="1499616"/>
+            <a:ext cx="5836615" cy="201168"/>
+          </a:xfrm>
+          <a:prstGeom prst="rect">
+            <a:avLst/>
+          </a:prstGeom>
+          <a:noFill/>
+        </p:spPr>
+        <p:txBody>
+          <a:bodyPr wrap="square" anchor="t">
+            <a:spAutoFit/>
+          </a:bodyPr>
+          <a:lstStyle/>
+          <a:p>
+            <a:pPr algn="l"/>
+            <a:r>
+              <a:rPr sz="1700" b="0" i="0" lang="en-US" altLang="en-US">
+                <a:solidFill>
+                  <a:srgbClr val="566873"/>
+                </a:solidFill>
+                <a:latin typeface="Sarabun"/>
+                <a:ea typeface="Sarabun"/>
+                <a:cs typeface="Sarabun"/>
+              </a:rPr>
               <a:t>Hello! What is your name?</a:t>
             </a:r>
           </a:p>
@@ -8800,13 +9216,13 @@
       </p:sp>
       <p:sp>
         <p:nvSpPr>
-          <p:cNvPr id="9" name="Rounded Rectangle 8"/>
+          <p:cNvPr id="10" name="Rounded Rectangle 9"/>
           <p:cNvSpPr/>
           <p:nvPr/>
         </p:nvSpPr>
         <p:spPr>
           <a:xfrm>
-            <a:off x="731520" y="1874520"/>
+            <a:off x="731520" y="2011680"/>
             <a:ext cx="1051560" cy="274320"/>
           </a:xfrm>
           <a:prstGeom prst="roundRect">
@@ -8856,14 +9272,14 @@
       </p:sp>
       <p:sp>
         <p:nvSpPr>
-          <p:cNvPr id="10" name="TextBox 9"/>
+          <p:cNvPr id="11" name="TextBox 10"/>
           <p:cNvSpPr txBox="1"/>
           <p:nvPr/>
         </p:nvSpPr>
         <p:spPr>
           <a:xfrm>
-            <a:off x="1965960" y="1847088"/>
-            <a:ext cx="5836615" cy="384048"/>
+            <a:off x="1965960" y="1984248"/>
+            <a:ext cx="5836615" cy="228600"/>
           </a:xfrm>
           <a:prstGeom prst="rect">
             <a:avLst/>
@@ -8878,7 +9294,7 @@
           <a:p>
             <a:pPr algn="l"/>
             <a:r>
-              <a:rPr sz="2600" b="1" i="0" lang="th-TH" altLang="en-US">
+              <a:rPr sz="1700" b="0" i="0" lang="th-TH" altLang="en-US">
                 <a:solidFill>
                   <a:srgbClr val="24333D"/>
                 </a:solidFill>
@@ -8888,30 +9304,19 @@
               </a:rPr>
               <a:t>สวัสดีครับ ผมชื่อ Oliver ครับ</a:t>
             </a:r>
-            <a:r>
-              <a:rPr sz="1700" b="0" i="1" lang="en-US" altLang="en-US">
-                <a:solidFill>
-                  <a:srgbClr val="566873"/>
-                </a:solidFill>
-                <a:latin typeface="Sarabun"/>
-                <a:ea typeface="Sarabun"/>
-                <a:cs typeface="Sarabun"/>
-              </a:rPr>
-              <a:t> (sà-wàt-dii khráp phǒm chûue Oliver khráp)</a:t>
-            </a:r>
-          </a:p>
-        </p:txBody>
-      </p:sp>
-      <p:sp>
-        <p:nvSpPr>
-          <p:cNvPr id="11" name="TextBox 10"/>
+          </a:p>
+        </p:txBody>
+      </p:sp>
+      <p:sp>
+        <p:nvSpPr>
+          <p:cNvPr id="12" name="TextBox 11"/>
           <p:cNvSpPr txBox="1"/>
           <p:nvPr/>
         </p:nvSpPr>
         <p:spPr>
           <a:xfrm>
-            <a:off x="1965960" y="2130552"/>
-            <a:ext cx="5836615" cy="228600"/>
+            <a:off x="1965960" y="2212848"/>
+            <a:ext cx="5836615" cy="201168"/>
           </a:xfrm>
           <a:prstGeom prst="rect">
             <a:avLst/>
@@ -8926,7 +9331,7 @@
           <a:p>
             <a:pPr algn="l"/>
             <a:r>
-              <a:rPr sz="1300" b="0" i="0" lang="en-US" altLang="en-US">
+              <a:rPr sz="1700" b="0" i="1" lang="en-US" altLang="en-US">
                 <a:solidFill>
                   <a:srgbClr val="566873"/>
                 </a:solidFill>
@@ -8934,6 +9339,43 @@
                 <a:ea typeface="Sarabun"/>
                 <a:cs typeface="Sarabun"/>
               </a:rPr>
+              <a:t>sà-wàt-dii khráp phǒm chûue Oliver khráp</a:t>
+            </a:r>
+          </a:p>
+        </p:txBody>
+      </p:sp>
+      <p:sp>
+        <p:nvSpPr>
+          <p:cNvPr id="13" name="TextBox 12"/>
+          <p:cNvSpPr txBox="1"/>
+          <p:nvPr/>
+        </p:nvSpPr>
+        <p:spPr>
+          <a:xfrm>
+            <a:off x="1965960" y="2414016"/>
+            <a:ext cx="5836615" cy="201168"/>
+          </a:xfrm>
+          <a:prstGeom prst="rect">
+            <a:avLst/>
+          </a:prstGeom>
+          <a:noFill/>
+        </p:spPr>
+        <p:txBody>
+          <a:bodyPr wrap="square" anchor="t">
+            <a:spAutoFit/>
+          </a:bodyPr>
+          <a:lstStyle/>
+          <a:p>
+            <a:pPr algn="l"/>
+            <a:r>
+              <a:rPr sz="1700" b="0" i="0" lang="en-US" altLang="en-US">
+                <a:solidFill>
+                  <a:srgbClr val="566873"/>
+                </a:solidFill>
+                <a:latin typeface="Sarabun"/>
+                <a:ea typeface="Sarabun"/>
+                <a:cs typeface="Sarabun"/>
+              </a:rPr>
               <a:t>Hello! My name is Oliver.</a:t>
             </a:r>
           </a:p>
@@ -8941,13 +9383,13 @@
       </p:sp>
       <p:sp>
         <p:nvSpPr>
-          <p:cNvPr id="12" name="Rounded Rectangle 11"/>
+          <p:cNvPr id="14" name="Rounded Rectangle 13"/>
           <p:cNvSpPr/>
           <p:nvPr/>
         </p:nvSpPr>
         <p:spPr>
           <a:xfrm>
-            <a:off x="731520" y="2651760"/>
+            <a:off x="731520" y="2926080"/>
             <a:ext cx="1371600" cy="274320"/>
           </a:xfrm>
           <a:prstGeom prst="roundRect">
@@ -8997,14 +9439,14 @@
       </p:sp>
       <p:sp>
         <p:nvSpPr>
-          <p:cNvPr id="13" name="TextBox 12"/>
+          <p:cNvPr id="15" name="TextBox 14"/>
           <p:cNvSpPr txBox="1"/>
           <p:nvPr/>
         </p:nvSpPr>
         <p:spPr>
           <a:xfrm>
-            <a:off x="1965960" y="2624328"/>
-            <a:ext cx="5836615" cy="384048"/>
+            <a:off x="1965960" y="2898648"/>
+            <a:ext cx="8823960" cy="228600"/>
           </a:xfrm>
           <a:prstGeom prst="rect">
             <a:avLst/>
@@ -9019,7 +9461,7 @@
           <a:p>
             <a:pPr algn="l"/>
             <a:r>
-              <a:rPr sz="2600" b="1" i="0" lang="th-TH" altLang="en-US">
+              <a:rPr sz="1700" b="0" i="0" lang="th-TH" altLang="en-US">
                 <a:solidFill>
                   <a:srgbClr val="24333D"/>
                 </a:solidFill>
@@ -9029,30 +9471,19 @@
               </a:rPr>
               <a:t>ยินดีที่ได้รู้จักค่ะ คุณมาจากไหนคะ</a:t>
             </a:r>
-            <a:r>
-              <a:rPr sz="1700" b="0" i="1" lang="en-US" altLang="en-US">
-                <a:solidFill>
-                  <a:srgbClr val="566873"/>
-                </a:solidFill>
-                <a:latin typeface="Sarabun"/>
-                <a:ea typeface="Sarabun"/>
-                <a:cs typeface="Sarabun"/>
-              </a:rPr>
-              <a:t> (yin-dii thîi dâai rúu-jàk khâ khun maa-jàak nǎi khá)</a:t>
-            </a:r>
-          </a:p>
-        </p:txBody>
-      </p:sp>
-      <p:sp>
-        <p:nvSpPr>
-          <p:cNvPr id="14" name="TextBox 13"/>
+          </a:p>
+        </p:txBody>
+      </p:sp>
+      <p:sp>
+        <p:nvSpPr>
+          <p:cNvPr id="16" name="TextBox 15"/>
           <p:cNvSpPr txBox="1"/>
           <p:nvPr/>
         </p:nvSpPr>
         <p:spPr>
           <a:xfrm>
-            <a:off x="1965960" y="2907792"/>
-            <a:ext cx="5836615" cy="228600"/>
+            <a:off x="1965960" y="3127248"/>
+            <a:ext cx="8823960" cy="201168"/>
           </a:xfrm>
           <a:prstGeom prst="rect">
             <a:avLst/>
@@ -9067,7 +9498,7 @@
           <a:p>
             <a:pPr algn="l"/>
             <a:r>
-              <a:rPr sz="1300" b="0" i="0" lang="en-US" altLang="en-US">
+              <a:rPr sz="1700" b="0" i="1" lang="en-US" altLang="en-US">
                 <a:solidFill>
                   <a:srgbClr val="566873"/>
                 </a:solidFill>
@@ -9075,6 +9506,43 @@
                 <a:ea typeface="Sarabun"/>
                 <a:cs typeface="Sarabun"/>
               </a:rPr>
+              <a:t>yin-dii thîi dâai rúu-jàk khâ khun maa-jàak nǎi khá</a:t>
+            </a:r>
+          </a:p>
+        </p:txBody>
+      </p:sp>
+      <p:sp>
+        <p:nvSpPr>
+          <p:cNvPr id="17" name="TextBox 16"/>
+          <p:cNvSpPr txBox="1"/>
+          <p:nvPr/>
+        </p:nvSpPr>
+        <p:spPr>
+          <a:xfrm>
+            <a:off x="1965960" y="3328416"/>
+            <a:ext cx="8823960" cy="201168"/>
+          </a:xfrm>
+          <a:prstGeom prst="rect">
+            <a:avLst/>
+          </a:prstGeom>
+          <a:noFill/>
+        </p:spPr>
+        <p:txBody>
+          <a:bodyPr wrap="square" anchor="t">
+            <a:spAutoFit/>
+          </a:bodyPr>
+          <a:lstStyle/>
+          <a:p>
+            <a:pPr algn="l"/>
+            <a:r>
+              <a:rPr sz="1700" b="0" i="0" lang="en-US" altLang="en-US">
+                <a:solidFill>
+                  <a:srgbClr val="566873"/>
+                </a:solidFill>
+                <a:latin typeface="Sarabun"/>
+                <a:ea typeface="Sarabun"/>
+                <a:cs typeface="Sarabun"/>
+              </a:rPr>
               <a:t>Nice to meet you. Where are you from?</a:t>
             </a:r>
           </a:p>
@@ -9082,13 +9550,13 @@
       </p:sp>
       <p:sp>
         <p:nvSpPr>
-          <p:cNvPr id="15" name="Rounded Rectangle 14"/>
+          <p:cNvPr id="18" name="Rounded Rectangle 17"/>
           <p:cNvSpPr/>
           <p:nvPr/>
         </p:nvSpPr>
         <p:spPr>
           <a:xfrm>
-            <a:off x="731520" y="3429000"/>
+            <a:off x="731520" y="3840480"/>
             <a:ext cx="1051560" cy="274320"/>
           </a:xfrm>
           <a:prstGeom prst="roundRect">
@@ -9138,14 +9606,14 @@
       </p:sp>
       <p:sp>
         <p:nvSpPr>
-          <p:cNvPr id="16" name="TextBox 15"/>
+          <p:cNvPr id="19" name="TextBox 18"/>
           <p:cNvSpPr txBox="1"/>
           <p:nvPr/>
         </p:nvSpPr>
         <p:spPr>
           <a:xfrm>
-            <a:off x="1965960" y="3401568"/>
-            <a:ext cx="8823960" cy="384048"/>
+            <a:off x="1965960" y="3813048"/>
+            <a:ext cx="8823960" cy="228600"/>
           </a:xfrm>
           <a:prstGeom prst="rect">
             <a:avLst/>
@@ -9160,7 +9628,7 @@
           <a:p>
             <a:pPr algn="l"/>
             <a:r>
-              <a:rPr sz="2600" b="1" i="0" lang="th-TH" altLang="en-US">
+              <a:rPr sz="1700" b="0" i="0" lang="th-TH" altLang="en-US">
                 <a:solidFill>
                   <a:srgbClr val="24333D"/>
                 </a:solidFill>
@@ -9170,30 +9638,19 @@
               </a:rPr>
               <a:t>ผมมาจากอังกฤษครับ</a:t>
             </a:r>
-            <a:r>
-              <a:rPr sz="1700" b="0" i="1" lang="en-US" altLang="en-US">
-                <a:solidFill>
-                  <a:srgbClr val="566873"/>
-                </a:solidFill>
-                <a:latin typeface="Sarabun"/>
-                <a:ea typeface="Sarabun"/>
-                <a:cs typeface="Sarabun"/>
-              </a:rPr>
-              <a:t> (phǒm maa-jàak ang-grìt khráp)</a:t>
-            </a:r>
-          </a:p>
-        </p:txBody>
-      </p:sp>
-      <p:sp>
-        <p:nvSpPr>
-          <p:cNvPr id="17" name="TextBox 16"/>
+          </a:p>
+        </p:txBody>
+      </p:sp>
+      <p:sp>
+        <p:nvSpPr>
+          <p:cNvPr id="20" name="TextBox 19"/>
           <p:cNvSpPr txBox="1"/>
           <p:nvPr/>
         </p:nvSpPr>
         <p:spPr>
           <a:xfrm>
-            <a:off x="1965960" y="3685032"/>
-            <a:ext cx="8823960" cy="228600"/>
+            <a:off x="1965960" y="4041648"/>
+            <a:ext cx="8823960" cy="201168"/>
           </a:xfrm>
           <a:prstGeom prst="rect">
             <a:avLst/>
@@ -9208,7 +9665,7 @@
           <a:p>
             <a:pPr algn="l"/>
             <a:r>
-              <a:rPr sz="1300" b="0" i="0" lang="en-US" altLang="en-US">
+              <a:rPr sz="1700" b="0" i="1" lang="en-US" altLang="en-US">
                 <a:solidFill>
                   <a:srgbClr val="566873"/>
                 </a:solidFill>
@@ -9216,6 +9673,43 @@
                 <a:ea typeface="Sarabun"/>
                 <a:cs typeface="Sarabun"/>
               </a:rPr>
+              <a:t>phǒm maa-jàak ang-grìt khráp</a:t>
+            </a:r>
+          </a:p>
+        </p:txBody>
+      </p:sp>
+      <p:sp>
+        <p:nvSpPr>
+          <p:cNvPr id="21" name="TextBox 20"/>
+          <p:cNvSpPr txBox="1"/>
+          <p:nvPr/>
+        </p:nvSpPr>
+        <p:spPr>
+          <a:xfrm>
+            <a:off x="1965960" y="4242816"/>
+            <a:ext cx="8823960" cy="201168"/>
+          </a:xfrm>
+          <a:prstGeom prst="rect">
+            <a:avLst/>
+          </a:prstGeom>
+          <a:noFill/>
+        </p:spPr>
+        <p:txBody>
+          <a:bodyPr wrap="square" anchor="t">
+            <a:spAutoFit/>
+          </a:bodyPr>
+          <a:lstStyle/>
+          <a:p>
+            <a:pPr algn="l"/>
+            <a:r>
+              <a:rPr sz="1700" b="0" i="0" lang="en-US" altLang="en-US">
+                <a:solidFill>
+                  <a:srgbClr val="566873"/>
+                </a:solidFill>
+                <a:latin typeface="Sarabun"/>
+                <a:ea typeface="Sarabun"/>
+                <a:cs typeface="Sarabun"/>
+              </a:rPr>
               <a:t>I am from England.</a:t>
             </a:r>
           </a:p>
@@ -9223,13 +9717,13 @@
       </p:sp>
       <p:sp>
         <p:nvSpPr>
-          <p:cNvPr id="18" name="Rounded Rectangle 17"/>
+          <p:cNvPr id="22" name="Rounded Rectangle 21"/>
           <p:cNvSpPr/>
           <p:nvPr/>
         </p:nvSpPr>
         <p:spPr>
           <a:xfrm>
-            <a:off x="731520" y="4206240"/>
+            <a:off x="731520" y="4754880"/>
             <a:ext cx="1371600" cy="274320"/>
           </a:xfrm>
           <a:prstGeom prst="roundRect">
@@ -9279,14 +9773,14 @@
       </p:sp>
       <p:sp>
         <p:nvSpPr>
-          <p:cNvPr id="19" name="TextBox 18"/>
+          <p:cNvPr id="23" name="TextBox 22"/>
           <p:cNvSpPr txBox="1"/>
           <p:nvPr/>
         </p:nvSpPr>
         <p:spPr>
           <a:xfrm>
-            <a:off x="1965960" y="4178808"/>
-            <a:ext cx="8823960" cy="384048"/>
+            <a:off x="1965960" y="4727448"/>
+            <a:ext cx="8823960" cy="228600"/>
           </a:xfrm>
           <a:prstGeom prst="rect">
             <a:avLst/>
@@ -9301,7 +9795,7 @@
           <a:p>
             <a:pPr algn="l"/>
             <a:r>
-              <a:rPr sz="2600" b="1" i="0" lang="th-TH" altLang="en-US">
+              <a:rPr sz="1700" b="0" i="0" lang="th-TH" altLang="en-US">
                 <a:solidFill>
                   <a:srgbClr val="24333D"/>
                 </a:solidFill>
@@ -9311,30 +9805,19 @@
               </a:rPr>
               <a:t>อ๋อ คนอังกฤษ ยินดีต้อนรับค่ะ</a:t>
             </a:r>
-            <a:r>
-              <a:rPr sz="1700" b="0" i="1" lang="en-US" altLang="en-US">
-                <a:solidFill>
-                  <a:srgbClr val="566873"/>
-                </a:solidFill>
-                <a:latin typeface="Sarabun"/>
-                <a:ea typeface="Sarabun"/>
-                <a:cs typeface="Sarabun"/>
-              </a:rPr>
-              <a:t> (ǎw khon ang-grìt yin-dii dtâwn-ráp khâ)</a:t>
-            </a:r>
-          </a:p>
-        </p:txBody>
-      </p:sp>
-      <p:sp>
-        <p:nvSpPr>
-          <p:cNvPr id="20" name="TextBox 19"/>
+          </a:p>
+        </p:txBody>
+      </p:sp>
+      <p:sp>
+        <p:nvSpPr>
+          <p:cNvPr id="24" name="TextBox 23"/>
           <p:cNvSpPr txBox="1"/>
           <p:nvPr/>
         </p:nvSpPr>
         <p:spPr>
           <a:xfrm>
-            <a:off x="1965960" y="4462272"/>
-            <a:ext cx="8823960" cy="228600"/>
+            <a:off x="1965960" y="4956048"/>
+            <a:ext cx="8823960" cy="201168"/>
           </a:xfrm>
           <a:prstGeom prst="rect">
             <a:avLst/>
@@ -9349,7 +9832,7 @@
           <a:p>
             <a:pPr algn="l"/>
             <a:r>
-              <a:rPr sz="1300" b="0" i="0" lang="en-US" altLang="en-US">
+              <a:rPr sz="1700" b="0" i="1" lang="en-US" altLang="en-US">
                 <a:solidFill>
                   <a:srgbClr val="566873"/>
                 </a:solidFill>
@@ -9357,77 +9840,21 @@
                 <a:ea typeface="Sarabun"/>
                 <a:cs typeface="Sarabun"/>
               </a:rPr>
-              <a:t>Oh, an English person! Welcome.</a:t>
-            </a:r>
-          </a:p>
-        </p:txBody>
-      </p:sp>
-      <p:sp>
-        <p:nvSpPr>
-          <p:cNvPr id="21" name="Rounded Rectangle 20"/>
-          <p:cNvSpPr/>
-          <p:nvPr/>
-        </p:nvSpPr>
-        <p:spPr>
-          <a:xfrm>
-            <a:off x="731520" y="4983480"/>
-            <a:ext cx="1051560" cy="274320"/>
-          </a:xfrm>
-          <a:prstGeom prst="roundRect">
-            <a:avLst>
-              <a:gd name="adj" fmla="val 28000"/>
-            </a:avLst>
-          </a:prstGeom>
-          <a:solidFill>
-            <a:srgbClr val="C96F4A"/>
-          </a:solidFill>
-          <a:ln>
-            <a:noFill/>
-          </a:ln>
-        </p:spPr>
-        <p:style>
-          <a:lnRef idx="1">
-            <a:schemeClr val="accent1"/>
-          </a:lnRef>
-          <a:fillRef idx="3">
-            <a:schemeClr val="accent1"/>
-          </a:fillRef>
-          <a:effectRef idx="2">
-            <a:schemeClr val="accent1"/>
-          </a:effectRef>
-          <a:fontRef idx="minor">
-            <a:schemeClr val="lt1"/>
-          </a:fontRef>
-        </p:style>
-        <p:txBody>
-          <a:bodyPr rtlCol="0" anchor="ctr" wrap="none"/>
-          <a:lstStyle/>
-          <a:p>
-            <a:pPr algn="ctr"/>
-            <a:r>
-              <a:rPr sz="1200" b="1" lang="en-US" altLang="en-US">
-                <a:solidFill>
-                  <a:srgbClr val="FFFFFF"/>
-                </a:solidFill>
-                <a:latin typeface="Sarabun"/>
-                <a:ea typeface="Sarabun"/>
-                <a:cs typeface="Sarabun"/>
-              </a:rPr>
-              <a:t>You</a:t>
-            </a:r>
-          </a:p>
-        </p:txBody>
-      </p:sp>
-      <p:sp>
-        <p:nvSpPr>
-          <p:cNvPr id="22" name="TextBox 21"/>
+              <a:t>ǎw khon ang-grìt yin-dii dtâwn-ráp khâ</a:t>
+            </a:r>
+          </a:p>
+        </p:txBody>
+      </p:sp>
+      <p:sp>
+        <p:nvSpPr>
+          <p:cNvPr id="25" name="TextBox 24"/>
           <p:cNvSpPr txBox="1"/>
           <p:nvPr/>
         </p:nvSpPr>
         <p:spPr>
           <a:xfrm>
-            <a:off x="1965960" y="4956048"/>
-            <a:ext cx="8823960" cy="384048"/>
+            <a:off x="1965960" y="5157216"/>
+            <a:ext cx="8823960" cy="201168"/>
           </a:xfrm>
           <a:prstGeom prst="rect">
             <a:avLst/>
@@ -9442,18 +9869,7 @@
           <a:p>
             <a:pPr algn="l"/>
             <a:r>
-              <a:rPr sz="2600" b="1" i="0" lang="th-TH" altLang="en-US">
-                <a:solidFill>
-                  <a:srgbClr val="24333D"/>
-                </a:solidFill>
-                <a:latin typeface="Sarabun"/>
-                <a:ea typeface="Sarabun"/>
-                <a:cs typeface="Sarabun"/>
-              </a:rPr>
-              <a:t>ขอบคุณครับ</a:t>
-            </a:r>
-            <a:r>
-              <a:rPr sz="1700" b="0" i="1" lang="en-US" altLang="en-US">
+              <a:rPr sz="1700" b="0" i="0" lang="en-US" altLang="en-US">
                 <a:solidFill>
                   <a:srgbClr val="566873"/>
                 </a:solidFill>
@@ -9461,44 +9877,7 @@
                 <a:ea typeface="Sarabun"/>
                 <a:cs typeface="Sarabun"/>
               </a:rPr>
-              <a:t> (khàawp-khun khráp)</a:t>
-            </a:r>
-          </a:p>
-        </p:txBody>
-      </p:sp>
-      <p:sp>
-        <p:nvSpPr>
-          <p:cNvPr id="23" name="TextBox 22"/>
-          <p:cNvSpPr txBox="1"/>
-          <p:nvPr/>
-        </p:nvSpPr>
-        <p:spPr>
-          <a:xfrm>
-            <a:off x="1965960" y="5239512"/>
-            <a:ext cx="8823960" cy="228600"/>
-          </a:xfrm>
-          <a:prstGeom prst="rect">
-            <a:avLst/>
-          </a:prstGeom>
-          <a:noFill/>
-        </p:spPr>
-        <p:txBody>
-          <a:bodyPr wrap="square" anchor="t">
-            <a:spAutoFit/>
-          </a:bodyPr>
-          <a:lstStyle/>
-          <a:p>
-            <a:pPr algn="l"/>
-            <a:r>
-              <a:rPr sz="1300" b="0" i="0" lang="en-US" altLang="en-US">
-                <a:solidFill>
-                  <a:srgbClr val="566873"/>
-                </a:solidFill>
-                <a:latin typeface="Sarabun"/>
-                <a:ea typeface="Sarabun"/>
-                <a:cs typeface="Sarabun"/>
-              </a:rPr>
-              <a:t>Thank you.</a:t>
+              <a:t>Oh, an English person! Welcome.</a:t>
             </a:r>
           </a:p>
         </p:txBody>

--- a/course/modules/M01/L002/M01-L002-canva-deck.pptx
+++ b/course/modules/M01/L002/M01-L002-canva-deck.pptx
@@ -14,6 +14,8 @@
     <p:sldId id="262" r:id="rId14"/>
     <p:sldId id="263" r:id="rId15"/>
     <p:sldId id="264" r:id="rId16"/>
+    <p:sldId id="265" r:id="rId17"/>
+    <p:sldId id="266" r:id="rId18"/>
   </p:sldIdLst>
   <p:sldSz cx="12191695" cy="6858000" type="screen4x3"/>
   <p:notesSz cx="6858000" cy="9144000"/>
@@ -517,17 +519,17 @@
           </a:p>
           <a:p>
             <a:r>
-              <a:t>• Listen and repeat: คุณชื่ออะไรครับ. Now say it yourself.</a:t>
-            </a:r>
-          </a:p>
-          <a:p>
-            <a:r>
-              <a:t>• Pause-and-produce: I ask คุณชื่ออะไรครับ. Say your answer — ผมชื่อ or ฉันชื่อ plus your name — before I show it.</a:t>
-            </a:r>
-          </a:p>
-          <a:p>
-            <a:r>
-              <a:t>• Substitution drill: say ผมชื่อ with your name, then say ฉันชื่อ with your name.</a:t>
+              <a:t>• Listen and repeat: ชื่อ chûue. Again. Now อะไร à-rai. Again. Now the full question: คุณชื่ออะไร.</a:t>
+            </a:r>
+          </a:p>
+          <a:p>
+            <a:r>
+              <a:t>• Pause-and-produce: I want to ask someone their name politely. Say the full question with ครับ or คะ before I show the answer.</a:t>
+            </a:r>
+          </a:p>
+          <a:p>
+            <a:r>
+              <a:t>• Tone echo: ชื่อ has a falling tone — voice goes high then drops. Say ชื่อ three times, exaggerating the fall each time.</a:t>
             </a:r>
           </a:p>
           <a:p/>
@@ -605,17 +607,17 @@
           </a:p>
           <a:p>
             <a:r>
-              <a:t>• Substitution drill: say คน + country. คนไทย — your turn. คนอังกฤษ — your turn. คนอเมริกา — your turn.</a:t>
-            </a:r>
-          </a:p>
-          <a:p>
-            <a:r>
-              <a:t>• Substitution drill (same format, different content): now use มาจาก + country. มาจากไทย — your turn. มาจากอังกฤษ — your turn.</a:t>
-            </a:r>
-          </a:p>
-          <a:p>
-            <a:r>
-              <a:t>• Recall drill: without looking, how do you say 'thank you' from last lesson? Say it before I show. ขอบคุณครับ.</a:t>
+              <a:t>• Response-building: I ask คุณชื่ออะไรครับ — now you answer with your real name using ผมชื่อ or ฉันชื่อ. Say it aloud.</a:t>
+            </a:r>
+          </a:p>
+          <a:p>
+            <a:r>
+              <a:t>• Substitution drill: say ผมชื่อ Nine ครับ. Now replace Nine with your own name. Now say it with ฉัน and ค่ะ instead.</a:t>
+            </a:r>
+          </a:p>
+          <a:p>
+            <a:r>
+              <a:t>• Pause-and-produce: someone asks you คุณชื่ออะไร — what do you say? Answer before I show it.</a:t>
             </a:r>
           </a:p>
           <a:p/>
@@ -693,12 +695,178 @@
           </a:p>
           <a:p>
             <a:r>
-              <a:t>• Tone echo: I say ชื่อ. Repeat it with a falling tone. Now I say มา. Repeat it flat. Can you feel the difference?</a:t>
-            </a:r>
-          </a:p>
-          <a:p>
-            <a:r>
-              <a:t>• Minimal pair choice: I say two words from this lesson. Tell me which one has the falling tone.</a:t>
+              <a:t>• Listen and repeat: มาจาก. Again. ประเทศ. Again. มาจากประเทศ. Again.</a:t>
+            </a:r>
+          </a:p>
+          <a:p>
+            <a:r>
+              <a:t>• Substitution drill: say มาจากประเทศ slowly. Now say ผมมาจากประเทศ with ครับ. Now say ฉันมาจากประเทศ with ค่ะ.</a:t>
+            </a:r>
+          </a:p>
+          <a:p>
+            <a:r>
+              <a:t>• Pause-and-produce: how do you say 'come from country'? Say it before I show the answer. มาจากประเทศ.</a:t>
+            </a:r>
+          </a:p>
+          <a:p/>
+        </p:txBody>
+      </p:sp>
+      <p:sp>
+        <p:nvSpPr>
+          <p:cNvPr id="4" name="Slide Number Placeholder 3"/>
+          <p:cNvSpPr>
+            <a:spLocks noGrp="1"/>
+          </p:cNvSpPr>
+          <p:nvPr>
+            <p:ph type="sldNum" idx="5" sz="quarter"/>
+          </p:nvPr>
+        </p:nvSpPr>
+        <p:spPr/>
+      </p:sp>
+    </p:spTree>
+  </p:cSld>
+  <p:clrMapOvr>
+    <a:masterClrMapping/>
+  </p:clrMapOvr>
+</p:notes>
+</file>
+
+<file path=ppt/notesSlides/notesSlide4.xml><?xml version="1.0" encoding="utf-8"?>
+<p:notes xmlns:a="http://schemas.openxmlformats.org/drawingml/2006/main" xmlns:p="http://schemas.openxmlformats.org/presentationml/2006/main" xmlns:r="http://schemas.openxmlformats.org/officeDocument/2006/relationships">
+  <p:cSld>
+    <p:spTree>
+      <p:nvGrpSpPr>
+        <p:cNvPr id="1" name=""/>
+        <p:cNvGrpSpPr/>
+        <p:nvPr/>
+      </p:nvGrpSpPr>
+      <p:grpSpPr>
+        <a:xfrm>
+          <a:off x="0" y="0"/>
+          <a:ext cx="0" cy="0"/>
+          <a:chOff x="0" y="0"/>
+          <a:chExt cx="0" cy="0"/>
+        </a:xfrm>
+      </p:grpSpPr>
+      <p:sp>
+        <p:nvSpPr>
+          <p:cNvPr id="2" name="Slide Image Placeholder 1"/>
+          <p:cNvSpPr>
+            <a:spLocks noGrp="1"/>
+          </p:cNvSpPr>
+          <p:nvPr>
+            <p:ph type="sldImg" idx="2"/>
+          </p:nvPr>
+        </p:nvSpPr>
+        <p:spPr/>
+      </p:sp>
+      <p:sp>
+        <p:nvSpPr>
+          <p:cNvPr id="3" name="Notes Placeholder 2"/>
+          <p:cNvSpPr>
+            <a:spLocks noGrp="1"/>
+          </p:cNvSpPr>
+          <p:nvPr>
+            <p:ph type="body" idx="3" sz="quarter"/>
+          </p:nvPr>
+        </p:nvSpPr>
+        <p:spPr/>
+        <p:txBody>
+          <a:bodyPr/>
+          <a:lstStyle/>
+          <a:p/>
+          <a:p/>
+          <a:p>
+            <a:r>
+              <a:t>[Practice — moved to notes, no room on slide]</a:t>
+            </a:r>
+          </a:p>
+          <a:p>
+            <a:r>
+              <a:t>• Teach ไทย (Thailand), อังกฤษ (England), and อเมริกา (America) individually, then use them in full origin sentences with the pattern from section 3.</a:t>
+            </a:r>
+          </a:p>
+          <a:p/>
+        </p:txBody>
+      </p:sp>
+      <p:sp>
+        <p:nvSpPr>
+          <p:cNvPr id="4" name="Slide Number Placeholder 3"/>
+          <p:cNvSpPr>
+            <a:spLocks noGrp="1"/>
+          </p:cNvSpPr>
+          <p:nvPr>
+            <p:ph type="sldNum" idx="5" sz="quarter"/>
+          </p:nvPr>
+        </p:nvSpPr>
+        <p:spPr/>
+      </p:sp>
+    </p:spTree>
+  </p:cSld>
+  <p:clrMapOvr>
+    <a:masterClrMapping/>
+  </p:clrMapOvr>
+</p:notes>
+</file>
+
+<file path=ppt/notesSlides/notesSlide5.xml><?xml version="1.0" encoding="utf-8"?>
+<p:notes xmlns:a="http://schemas.openxmlformats.org/drawingml/2006/main" xmlns:p="http://schemas.openxmlformats.org/presentationml/2006/main" xmlns:r="http://schemas.openxmlformats.org/officeDocument/2006/relationships">
+  <p:cSld>
+    <p:spTree>
+      <p:nvGrpSpPr>
+        <p:cNvPr id="1" name=""/>
+        <p:cNvGrpSpPr/>
+        <p:nvPr/>
+      </p:nvGrpSpPr>
+      <p:grpSpPr>
+        <a:xfrm>
+          <a:off x="0" y="0"/>
+          <a:ext cx="0" cy="0"/>
+          <a:chOff x="0" y="0"/>
+          <a:chExt cx="0" cy="0"/>
+        </a:xfrm>
+      </p:grpSpPr>
+      <p:sp>
+        <p:nvSpPr>
+          <p:cNvPr id="2" name="Slide Image Placeholder 1"/>
+          <p:cNvSpPr>
+            <a:spLocks noGrp="1"/>
+          </p:cNvSpPr>
+          <p:nvPr>
+            <p:ph type="sldImg" idx="2"/>
+          </p:nvPr>
+        </p:nvSpPr>
+        <p:spPr/>
+      </p:sp>
+      <p:sp>
+        <p:nvSpPr>
+          <p:cNvPr id="3" name="Notes Placeholder 2"/>
+          <p:cNvSpPr>
+            <a:spLocks noGrp="1"/>
+          </p:cNvSpPr>
+          <p:nvPr>
+            <p:ph type="body" idx="3" sz="quarter"/>
+          </p:nvPr>
+        </p:nvSpPr>
+        <p:spPr/>
+        <p:txBody>
+          <a:bodyPr/>
+          <a:lstStyle/>
+          <a:p/>
+          <a:p/>
+          <a:p>
+            <a:r>
+              <a:t>[Practice — moved to notes, no room on slide]</a:t>
+            </a:r>
+          </a:p>
+          <a:p>
+            <a:r>
+              <a:t>• Tone echo: say ประเทศ bprà-thêet three times. Focus on keeping the bp without an air puff.</a:t>
+            </a:r>
+          </a:p>
+          <a:p>
+            <a:r>
+              <a:t>• Minimal pair choice: I say two words — bpàa and phâa. Which one is forest and which is cloth? Point before I tell you.</a:t>
             </a:r>
           </a:p>
           <a:p/>
@@ -3919,7 +4087,7 @@
                 <a:ea typeface="Sarabun"/>
                 <a:cs typeface="Sarabun"/>
               </a:rPr>
-              <a:t>Names and Countries</a:t>
+              <a:t>Names and Countries — Introducing Yourself</a:t>
             </a:r>
           </a:p>
         </p:txBody>
@@ -4154,6 +4322,1190 @@
                 <a:cs typeface="Sarabun"/>
               </a:rPr>
               <a:t>Immersion Thai with Nine</a:t>
+            </a:r>
+          </a:p>
+        </p:txBody>
+      </p:sp>
+    </p:spTree>
+  </p:cSld>
+  <p:clrMapOvr>
+    <a:masterClrMapping/>
+  </p:clrMapOvr>
+</p:sld>
+</file>
+
+<file path=ppt/slides/slide10.xml><?xml version="1.0" encoding="utf-8"?>
+<p:sld xmlns:a="http://schemas.openxmlformats.org/drawingml/2006/main" xmlns:p="http://schemas.openxmlformats.org/presentationml/2006/main" xmlns:r="http://schemas.openxmlformats.org/officeDocument/2006/relationships">
+  <p:cSld>
+    <p:bg>
+      <p:bgPr>
+        <a:solidFill>
+          <a:srgbClr val="F5F7F8"/>
+        </a:solidFill>
+        <a:effectLst/>
+      </p:bgPr>
+    </p:bg>
+    <p:spTree>
+      <p:nvGrpSpPr>
+        <p:cNvPr id="1" name=""/>
+        <p:cNvGrpSpPr/>
+        <p:nvPr/>
+      </p:nvGrpSpPr>
+      <p:grpSpPr/>
+      <p:sp>
+        <p:nvSpPr>
+          <p:cNvPr id="2" name="__pip_placeholder__"/>
+          <p:cNvSpPr/>
+          <p:nvPr/>
+        </p:nvSpPr>
+        <p:spPr>
+          <a:xfrm>
+            <a:off x="8351215" y="0"/>
+            <a:ext cx="3840480" cy="2880360"/>
+          </a:xfrm>
+          <a:prstGeom prst="rect">
+            <a:avLst/>
+          </a:prstGeom>
+          <a:solidFill>
+            <a:srgbClr val="DBE7EC">
+              <a:alpha val="30000"/>
+            </a:srgbClr>
+          </a:solidFill>
+          <a:ln w="19050">
+            <a:solidFill>
+              <a:srgbClr val="355C7D"/>
+            </a:solidFill>
+            <a:prstDash val="sysDash"/>
+          </a:ln>
+        </p:spPr>
+        <p:style>
+          <a:lnRef idx="1">
+            <a:schemeClr val="accent1"/>
+          </a:lnRef>
+          <a:fillRef idx="3">
+            <a:schemeClr val="accent1"/>
+          </a:fillRef>
+          <a:effectRef idx="2">
+            <a:schemeClr val="accent1"/>
+          </a:effectRef>
+          <a:fontRef idx="minor">
+            <a:schemeClr val="lt1"/>
+          </a:fontRef>
+        </p:style>
+        <p:txBody>
+          <a:bodyPr rtlCol="0" anchor="ctr" wrap="none"/>
+          <a:lstStyle/>
+          <a:p>
+            <a:pPr algn="ctr"/>
+            <a:r>
+              <a:rPr sz="1800" b="1">
+                <a:solidFill>
+                  <a:srgbClr val="355C7D"/>
+                </a:solidFill>
+                <a:latin typeface="Sarabun"/>
+              </a:rPr>
+              <a:t>Nine</a:t>
+            </a:r>
+          </a:p>
+        </p:txBody>
+      </p:sp>
+      <p:sp>
+        <p:nvSpPr>
+          <p:cNvPr id="3" name="Rectangle 2"/>
+          <p:cNvSpPr/>
+          <p:nvPr/>
+        </p:nvSpPr>
+        <p:spPr>
+          <a:xfrm>
+            <a:off x="0" y="0"/>
+            <a:ext cx="12191695" cy="63500"/>
+          </a:xfrm>
+          <a:prstGeom prst="rect">
+            <a:avLst/>
+          </a:prstGeom>
+          <a:solidFill>
+            <a:srgbClr val="355C7D"/>
+          </a:solidFill>
+          <a:ln>
+            <a:noFill/>
+          </a:ln>
+        </p:spPr>
+        <p:style>
+          <a:lnRef idx="1">
+            <a:schemeClr val="accent1"/>
+          </a:lnRef>
+          <a:fillRef idx="3">
+            <a:schemeClr val="accent1"/>
+          </a:fillRef>
+          <a:effectRef idx="2">
+            <a:schemeClr val="accent1"/>
+          </a:effectRef>
+          <a:fontRef idx="minor">
+            <a:schemeClr val="lt1"/>
+          </a:fontRef>
+        </p:style>
+        <p:txBody>
+          <a:bodyPr rtlCol="0" anchor="ctr"/>
+          <a:lstStyle/>
+          <a:p>
+            <a:pPr algn="ctr"/>
+          </a:p>
+        </p:txBody>
+      </p:sp>
+      <p:sp>
+        <p:nvSpPr>
+          <p:cNvPr id="4" name="TextBox 3"/>
+          <p:cNvSpPr txBox="1"/>
+          <p:nvPr/>
+        </p:nvSpPr>
+        <p:spPr>
+          <a:xfrm>
+            <a:off x="731520" y="256032"/>
+            <a:ext cx="7071055" cy="256032"/>
+          </a:xfrm>
+          <a:prstGeom prst="rect">
+            <a:avLst/>
+          </a:prstGeom>
+          <a:noFill/>
+        </p:spPr>
+        <p:txBody>
+          <a:bodyPr wrap="square" anchor="t">
+            <a:spAutoFit/>
+          </a:bodyPr>
+          <a:lstStyle/>
+          <a:p>
+            <a:pPr algn="l"/>
+            <a:r>
+              <a:rPr sz="1200" b="1" i="0" lang="en-US" altLang="en-US">
+                <a:solidFill>
+                  <a:srgbClr val="355C7D"/>
+                </a:solidFill>
+                <a:latin typeface="Sarabun"/>
+                <a:ea typeface="Sarabun"/>
+                <a:cs typeface="Sarabun"/>
+              </a:rPr>
+              <a:t>Recap</a:t>
+            </a:r>
+          </a:p>
+        </p:txBody>
+      </p:sp>
+      <p:sp>
+        <p:nvSpPr>
+          <p:cNvPr id="5" name="TextBox 4"/>
+          <p:cNvSpPr txBox="1"/>
+          <p:nvPr/>
+        </p:nvSpPr>
+        <p:spPr>
+          <a:xfrm>
+            <a:off x="731520" y="530352"/>
+            <a:ext cx="7071055" cy="640080"/>
+          </a:xfrm>
+          <a:prstGeom prst="rect">
+            <a:avLst/>
+          </a:prstGeom>
+          <a:noFill/>
+        </p:spPr>
+        <p:txBody>
+          <a:bodyPr wrap="square" anchor="t">
+            <a:spAutoFit/>
+          </a:bodyPr>
+          <a:lstStyle/>
+          <a:p>
+            <a:pPr algn="l"/>
+            <a:r>
+              <a:rPr sz="3600" b="1" i="0" lang="en-US" altLang="en-US">
+                <a:solidFill>
+                  <a:srgbClr val="24333D"/>
+                </a:solidFill>
+                <a:latin typeface="Sarabun"/>
+                <a:ea typeface="Sarabun"/>
+                <a:cs typeface="Sarabun"/>
+              </a:rPr>
+              <a:t>Recap</a:t>
+            </a:r>
+          </a:p>
+        </p:txBody>
+      </p:sp>
+      <p:sp>
+        <p:nvSpPr>
+          <p:cNvPr id="6" name="TextBox 5"/>
+          <p:cNvSpPr txBox="1"/>
+          <p:nvPr/>
+        </p:nvSpPr>
+        <p:spPr>
+          <a:xfrm>
+            <a:off x="932688" y="1563624"/>
+            <a:ext cx="6705295" cy="228600"/>
+          </a:xfrm>
+          <a:prstGeom prst="rect">
+            <a:avLst/>
+          </a:prstGeom>
+          <a:noFill/>
+        </p:spPr>
+        <p:txBody>
+          <a:bodyPr wrap="square" anchor="t">
+            <a:spAutoFit/>
+          </a:bodyPr>
+          <a:lstStyle/>
+          <a:p>
+            <a:pPr algn="l"/>
+            <a:r>
+              <a:rPr sz="1700" b="1" i="0" lang="en-US" altLang="en-US">
+                <a:solidFill>
+                  <a:srgbClr val="355C7D"/>
+                </a:solidFill>
+                <a:latin typeface="Sarabun"/>
+                <a:ea typeface="Sarabun"/>
+                <a:cs typeface="Sarabun"/>
+              </a:rPr>
+              <a:t>What you can now do</a:t>
+            </a:r>
+          </a:p>
+        </p:txBody>
+      </p:sp>
+      <p:sp>
+        <p:nvSpPr>
+          <p:cNvPr id="7" name="Oval 6"/>
+          <p:cNvSpPr/>
+          <p:nvPr/>
+        </p:nvSpPr>
+        <p:spPr>
+          <a:xfrm>
+            <a:off x="932688" y="1947672"/>
+            <a:ext cx="82296" cy="82296"/>
+          </a:xfrm>
+          <a:prstGeom prst="ellipse">
+            <a:avLst/>
+          </a:prstGeom>
+          <a:solidFill>
+            <a:srgbClr val="355C7D"/>
+          </a:solidFill>
+          <a:ln>
+            <a:noFill/>
+          </a:ln>
+        </p:spPr>
+        <p:style>
+          <a:lnRef idx="1">
+            <a:schemeClr val="accent1"/>
+          </a:lnRef>
+          <a:fillRef idx="3">
+            <a:schemeClr val="accent1"/>
+          </a:fillRef>
+          <a:effectRef idx="2">
+            <a:schemeClr val="accent1"/>
+          </a:effectRef>
+          <a:fontRef idx="minor">
+            <a:schemeClr val="lt1"/>
+          </a:fontRef>
+        </p:style>
+        <p:txBody>
+          <a:bodyPr rtlCol="0" anchor="ctr"/>
+          <a:lstStyle/>
+          <a:p>
+            <a:pPr algn="ctr"/>
+          </a:p>
+        </p:txBody>
+      </p:sp>
+      <p:sp>
+        <p:nvSpPr>
+          <p:cNvPr id="8" name="TextBox 7"/>
+          <p:cNvSpPr txBox="1"/>
+          <p:nvPr/>
+        </p:nvSpPr>
+        <p:spPr>
+          <a:xfrm>
+            <a:off x="1078992" y="1856232"/>
+            <a:ext cx="6568135" cy="274320"/>
+          </a:xfrm>
+          <a:prstGeom prst="rect">
+            <a:avLst/>
+          </a:prstGeom>
+          <a:noFill/>
+        </p:spPr>
+        <p:txBody>
+          <a:bodyPr wrap="square" anchor="t">
+            <a:spAutoFit/>
+          </a:bodyPr>
+          <a:lstStyle/>
+          <a:p>
+            <a:pPr algn="l"/>
+            <a:r>
+              <a:rPr sz="1700" b="0" i="0" lang="en-US" altLang="en-US">
+                <a:solidFill>
+                  <a:srgbClr val="24333D"/>
+                </a:solidFill>
+                <a:latin typeface="Sarabun"/>
+                <a:ea typeface="Sarabun"/>
+                <a:cs typeface="Sarabun"/>
+              </a:rPr>
+              <a:t>How do you ask someone's name in Thai? Say it now.</a:t>
+            </a:r>
+          </a:p>
+        </p:txBody>
+      </p:sp>
+      <p:sp>
+        <p:nvSpPr>
+          <p:cNvPr id="9" name="Oval 8"/>
+          <p:cNvSpPr/>
+          <p:nvPr/>
+        </p:nvSpPr>
+        <p:spPr>
+          <a:xfrm>
+            <a:off x="932688" y="2276856"/>
+            <a:ext cx="82296" cy="82296"/>
+          </a:xfrm>
+          <a:prstGeom prst="ellipse">
+            <a:avLst/>
+          </a:prstGeom>
+          <a:solidFill>
+            <a:srgbClr val="355C7D"/>
+          </a:solidFill>
+          <a:ln>
+            <a:noFill/>
+          </a:ln>
+        </p:spPr>
+        <p:style>
+          <a:lnRef idx="1">
+            <a:schemeClr val="accent1"/>
+          </a:lnRef>
+          <a:fillRef idx="3">
+            <a:schemeClr val="accent1"/>
+          </a:fillRef>
+          <a:effectRef idx="2">
+            <a:schemeClr val="accent1"/>
+          </a:effectRef>
+          <a:fontRef idx="minor">
+            <a:schemeClr val="lt1"/>
+          </a:fontRef>
+        </p:style>
+        <p:txBody>
+          <a:bodyPr rtlCol="0" anchor="ctr"/>
+          <a:lstStyle/>
+          <a:p>
+            <a:pPr algn="ctr"/>
+          </a:p>
+        </p:txBody>
+      </p:sp>
+      <p:sp>
+        <p:nvSpPr>
+          <p:cNvPr id="10" name="TextBox 9"/>
+          <p:cNvSpPr txBox="1"/>
+          <p:nvPr/>
+        </p:nvSpPr>
+        <p:spPr>
+          <a:xfrm>
+            <a:off x="1078992" y="2185416"/>
+            <a:ext cx="6568135" cy="274320"/>
+          </a:xfrm>
+          <a:prstGeom prst="rect">
+            <a:avLst/>
+          </a:prstGeom>
+          <a:noFill/>
+        </p:spPr>
+        <p:txBody>
+          <a:bodyPr wrap="square" anchor="t">
+            <a:spAutoFit/>
+          </a:bodyPr>
+          <a:lstStyle/>
+          <a:p>
+            <a:pPr algn="l"/>
+            <a:r>
+              <a:rPr sz="1700" b="0" i="0" lang="en-US" altLang="en-US">
+                <a:solidFill>
+                  <a:srgbClr val="24333D"/>
+                </a:solidFill>
+                <a:latin typeface="Sarabun"/>
+                <a:ea typeface="Sarabun"/>
+                <a:cs typeface="Sarabun"/>
+              </a:rPr>
+              <a:t>Say 'my name is...' using your real name.</a:t>
+            </a:r>
+          </a:p>
+        </p:txBody>
+      </p:sp>
+      <p:sp>
+        <p:nvSpPr>
+          <p:cNvPr id="11" name="Oval 10"/>
+          <p:cNvSpPr/>
+          <p:nvPr/>
+        </p:nvSpPr>
+        <p:spPr>
+          <a:xfrm>
+            <a:off x="932688" y="2606040"/>
+            <a:ext cx="82296" cy="82296"/>
+          </a:xfrm>
+          <a:prstGeom prst="ellipse">
+            <a:avLst/>
+          </a:prstGeom>
+          <a:solidFill>
+            <a:srgbClr val="355C7D"/>
+          </a:solidFill>
+          <a:ln>
+            <a:noFill/>
+          </a:ln>
+        </p:spPr>
+        <p:style>
+          <a:lnRef idx="1">
+            <a:schemeClr val="accent1"/>
+          </a:lnRef>
+          <a:fillRef idx="3">
+            <a:schemeClr val="accent1"/>
+          </a:fillRef>
+          <a:effectRef idx="2">
+            <a:schemeClr val="accent1"/>
+          </a:effectRef>
+          <a:fontRef idx="minor">
+            <a:schemeClr val="lt1"/>
+          </a:fontRef>
+        </p:style>
+        <p:txBody>
+          <a:bodyPr rtlCol="0" anchor="ctr"/>
+          <a:lstStyle/>
+          <a:p>
+            <a:pPr algn="ctr"/>
+          </a:p>
+        </p:txBody>
+      </p:sp>
+      <p:sp>
+        <p:nvSpPr>
+          <p:cNvPr id="12" name="TextBox 11"/>
+          <p:cNvSpPr txBox="1"/>
+          <p:nvPr/>
+        </p:nvSpPr>
+        <p:spPr>
+          <a:xfrm>
+            <a:off x="1078992" y="2514600"/>
+            <a:ext cx="6568135" cy="274320"/>
+          </a:xfrm>
+          <a:prstGeom prst="rect">
+            <a:avLst/>
+          </a:prstGeom>
+          <a:noFill/>
+        </p:spPr>
+        <p:txBody>
+          <a:bodyPr wrap="square" anchor="t">
+            <a:spAutoFit/>
+          </a:bodyPr>
+          <a:lstStyle/>
+          <a:p>
+            <a:pPr algn="l"/>
+            <a:r>
+              <a:rPr sz="1700" b="0" i="0" lang="en-US" altLang="en-US">
+                <a:solidFill>
+                  <a:srgbClr val="24333D"/>
+                </a:solidFill>
+                <a:latin typeface="Sarabun"/>
+                <a:ea typeface="Sarabun"/>
+                <a:cs typeface="Sarabun"/>
+              </a:rPr>
+              <a:t>How do you say 'I come from America'?</a:t>
+            </a:r>
+          </a:p>
+        </p:txBody>
+      </p:sp>
+      <p:sp>
+        <p:nvSpPr>
+          <p:cNvPr id="13" name="Oval 12"/>
+          <p:cNvSpPr/>
+          <p:nvPr/>
+        </p:nvSpPr>
+        <p:spPr>
+          <a:xfrm>
+            <a:off x="932688" y="2935224"/>
+            <a:ext cx="82296" cy="82296"/>
+          </a:xfrm>
+          <a:prstGeom prst="ellipse">
+            <a:avLst/>
+          </a:prstGeom>
+          <a:solidFill>
+            <a:srgbClr val="355C7D"/>
+          </a:solidFill>
+          <a:ln>
+            <a:noFill/>
+          </a:ln>
+        </p:spPr>
+        <p:style>
+          <a:lnRef idx="1">
+            <a:schemeClr val="accent1"/>
+          </a:lnRef>
+          <a:fillRef idx="3">
+            <a:schemeClr val="accent1"/>
+          </a:fillRef>
+          <a:effectRef idx="2">
+            <a:schemeClr val="accent1"/>
+          </a:effectRef>
+          <a:fontRef idx="minor">
+            <a:schemeClr val="lt1"/>
+          </a:fontRef>
+        </p:style>
+        <p:txBody>
+          <a:bodyPr rtlCol="0" anchor="ctr"/>
+          <a:lstStyle/>
+          <a:p>
+            <a:pPr algn="ctr"/>
+          </a:p>
+        </p:txBody>
+      </p:sp>
+      <p:sp>
+        <p:nvSpPr>
+          <p:cNvPr id="14" name="TextBox 13"/>
+          <p:cNvSpPr txBox="1"/>
+          <p:nvPr/>
+        </p:nvSpPr>
+        <p:spPr>
+          <a:xfrm>
+            <a:off x="1078992" y="2843784"/>
+            <a:ext cx="6568135" cy="274320"/>
+          </a:xfrm>
+          <a:prstGeom prst="rect">
+            <a:avLst/>
+          </a:prstGeom>
+          <a:noFill/>
+        </p:spPr>
+        <p:txBody>
+          <a:bodyPr wrap="square" anchor="t">
+            <a:spAutoFit/>
+          </a:bodyPr>
+          <a:lstStyle/>
+          <a:p>
+            <a:pPr algn="l"/>
+            <a:r>
+              <a:rPr sz="1700" b="0" i="0" lang="en-US" altLang="en-US">
+                <a:solidFill>
+                  <a:srgbClr val="24333D"/>
+                </a:solidFill>
+                <a:latin typeface="Sarabun"/>
+                <a:ea typeface="Sarabun"/>
+                <a:cs typeface="Sarabun"/>
+              </a:rPr>
+              <a:t>What does </a:t>
+            </a:r>
+            <a:r>
+              <a:rPr sz="1700" b="0" i="0" lang="th-TH" altLang="en-US">
+                <a:solidFill>
+                  <a:srgbClr val="24333D"/>
+                </a:solidFill>
+                <a:latin typeface="Sarabun"/>
+                <a:ea typeface="Sarabun"/>
+                <a:cs typeface="Sarabun"/>
+              </a:rPr>
+              <a:t>คนไทย</a:t>
+            </a:r>
+            <a:r>
+              <a:rPr sz="1700" b="0" i="1" lang="en-US" altLang="en-US">
+                <a:solidFill>
+                  <a:srgbClr val="566873"/>
+                </a:solidFill>
+                <a:latin typeface="Sarabun"/>
+                <a:ea typeface="Sarabun"/>
+                <a:cs typeface="Sarabun"/>
+              </a:rPr>
+              <a:t> (khon thai)</a:t>
+            </a:r>
+            <a:r>
+              <a:rPr sz="1700" b="0" i="0" lang="en-US" altLang="en-US">
+                <a:solidFill>
+                  <a:srgbClr val="24333D"/>
+                </a:solidFill>
+                <a:latin typeface="Sarabun"/>
+                <a:ea typeface="Sarabun"/>
+                <a:cs typeface="Sarabun"/>
+              </a:rPr>
+              <a:t> mean?</a:t>
+            </a:r>
+          </a:p>
+        </p:txBody>
+      </p:sp>
+      <p:sp>
+        <p:nvSpPr>
+          <p:cNvPr id="15" name="Oval 14"/>
+          <p:cNvSpPr/>
+          <p:nvPr/>
+        </p:nvSpPr>
+        <p:spPr>
+          <a:xfrm>
+            <a:off x="932688" y="3264408"/>
+            <a:ext cx="82296" cy="82296"/>
+          </a:xfrm>
+          <a:prstGeom prst="ellipse">
+            <a:avLst/>
+          </a:prstGeom>
+          <a:solidFill>
+            <a:srgbClr val="355C7D"/>
+          </a:solidFill>
+          <a:ln>
+            <a:noFill/>
+          </a:ln>
+        </p:spPr>
+        <p:style>
+          <a:lnRef idx="1">
+            <a:schemeClr val="accent1"/>
+          </a:lnRef>
+          <a:fillRef idx="3">
+            <a:schemeClr val="accent1"/>
+          </a:fillRef>
+          <a:effectRef idx="2">
+            <a:schemeClr val="accent1"/>
+          </a:effectRef>
+          <a:fontRef idx="minor">
+            <a:schemeClr val="lt1"/>
+          </a:fontRef>
+        </p:style>
+        <p:txBody>
+          <a:bodyPr rtlCol="0" anchor="ctr"/>
+          <a:lstStyle/>
+          <a:p>
+            <a:pPr algn="ctr"/>
+          </a:p>
+        </p:txBody>
+      </p:sp>
+      <p:sp>
+        <p:nvSpPr>
+          <p:cNvPr id="16" name="TextBox 15"/>
+          <p:cNvSpPr txBox="1"/>
+          <p:nvPr/>
+        </p:nvSpPr>
+        <p:spPr>
+          <a:xfrm>
+            <a:off x="1078992" y="3172968"/>
+            <a:ext cx="6568135" cy="274320"/>
+          </a:xfrm>
+          <a:prstGeom prst="rect">
+            <a:avLst/>
+          </a:prstGeom>
+          <a:noFill/>
+        </p:spPr>
+        <p:txBody>
+          <a:bodyPr wrap="square" anchor="t">
+            <a:spAutoFit/>
+          </a:bodyPr>
+          <a:lstStyle/>
+          <a:p>
+            <a:pPr algn="l"/>
+            <a:r>
+              <a:rPr sz="1700" b="0" i="0" lang="en-US" altLang="en-US">
+                <a:solidFill>
+                  <a:srgbClr val="24333D"/>
+                </a:solidFill>
+                <a:latin typeface="Sarabun"/>
+                <a:ea typeface="Sarabun"/>
+                <a:cs typeface="Sarabun"/>
+              </a:rPr>
+              <a:t>What is the difference between bp and ph sounds?</a:t>
+            </a:r>
+          </a:p>
+        </p:txBody>
+      </p:sp>
+      <p:sp>
+        <p:nvSpPr>
+          <p:cNvPr id="17" name="TextBox 16"/>
+          <p:cNvSpPr txBox="1"/>
+          <p:nvPr/>
+        </p:nvSpPr>
+        <p:spPr>
+          <a:xfrm>
+            <a:off x="932688" y="4306824"/>
+            <a:ext cx="9692640" cy="228600"/>
+          </a:xfrm>
+          <a:prstGeom prst="rect">
+            <a:avLst/>
+          </a:prstGeom>
+          <a:noFill/>
+        </p:spPr>
+        <p:txBody>
+          <a:bodyPr wrap="square" anchor="t">
+            <a:spAutoFit/>
+          </a:bodyPr>
+          <a:lstStyle/>
+          <a:p>
+            <a:pPr algn="l"/>
+            <a:r>
+              <a:rPr sz="1700" b="1" i="0" lang="en-US" altLang="en-US">
+                <a:solidFill>
+                  <a:srgbClr val="7A8F54"/>
+                </a:solidFill>
+                <a:latin typeface="Sarabun"/>
+                <a:ea typeface="Sarabun"/>
+                <a:cs typeface="Sarabun"/>
+              </a:rPr>
+              <a:t>Remember</a:t>
+            </a:r>
+          </a:p>
+        </p:txBody>
+      </p:sp>
+      <p:sp>
+        <p:nvSpPr>
+          <p:cNvPr id="18" name="Oval 17"/>
+          <p:cNvSpPr/>
+          <p:nvPr/>
+        </p:nvSpPr>
+        <p:spPr>
+          <a:xfrm>
+            <a:off x="932688" y="4690872"/>
+            <a:ext cx="82296" cy="82296"/>
+          </a:xfrm>
+          <a:prstGeom prst="ellipse">
+            <a:avLst/>
+          </a:prstGeom>
+          <a:solidFill>
+            <a:srgbClr val="7A8F54"/>
+          </a:solidFill>
+          <a:ln>
+            <a:noFill/>
+          </a:ln>
+        </p:spPr>
+        <p:style>
+          <a:lnRef idx="1">
+            <a:schemeClr val="accent1"/>
+          </a:lnRef>
+          <a:fillRef idx="3">
+            <a:schemeClr val="accent1"/>
+          </a:fillRef>
+          <a:effectRef idx="2">
+            <a:schemeClr val="accent1"/>
+          </a:effectRef>
+          <a:fontRef idx="minor">
+            <a:schemeClr val="lt1"/>
+          </a:fontRef>
+        </p:style>
+        <p:txBody>
+          <a:bodyPr rtlCol="0" anchor="ctr"/>
+          <a:lstStyle/>
+          <a:p>
+            <a:pPr algn="ctr"/>
+          </a:p>
+        </p:txBody>
+      </p:sp>
+      <p:sp>
+        <p:nvSpPr>
+          <p:cNvPr id="19" name="TextBox 18"/>
+          <p:cNvSpPr txBox="1"/>
+          <p:nvPr/>
+        </p:nvSpPr>
+        <p:spPr>
+          <a:xfrm>
+            <a:off x="1078992" y="4599432"/>
+            <a:ext cx="9555480" cy="274320"/>
+          </a:xfrm>
+          <a:prstGeom prst="rect">
+            <a:avLst/>
+          </a:prstGeom>
+          <a:noFill/>
+        </p:spPr>
+        <p:txBody>
+          <a:bodyPr wrap="square" anchor="t">
+            <a:spAutoFit/>
+          </a:bodyPr>
+          <a:lstStyle/>
+          <a:p>
+            <a:pPr algn="l"/>
+            <a:r>
+              <a:rPr sz="1700" b="0" i="0" lang="en-US" altLang="en-US">
+                <a:solidFill>
+                  <a:srgbClr val="24333D"/>
+                </a:solidFill>
+                <a:latin typeface="Sarabun"/>
+                <a:ea typeface="Sarabun"/>
+                <a:cs typeface="Sarabun"/>
+              </a:rPr>
+              <a:t>What is the difference between bp and ph sounds?</a:t>
+            </a:r>
+          </a:p>
+        </p:txBody>
+      </p:sp>
+    </p:spTree>
+  </p:cSld>
+  <p:clrMapOvr>
+    <a:masterClrMapping/>
+  </p:clrMapOvr>
+</p:sld>
+</file>
+
+<file path=ppt/slides/slide11.xml><?xml version="1.0" encoding="utf-8"?>
+<p:sld xmlns:a="http://schemas.openxmlformats.org/drawingml/2006/main" xmlns:p="http://schemas.openxmlformats.org/presentationml/2006/main" xmlns:r="http://schemas.openxmlformats.org/officeDocument/2006/relationships">
+  <p:cSld>
+    <p:bg>
+      <p:bgPr>
+        <a:solidFill>
+          <a:srgbClr val="F5F7F8"/>
+        </a:solidFill>
+        <a:effectLst/>
+      </p:bgPr>
+    </p:bg>
+    <p:spTree>
+      <p:nvGrpSpPr>
+        <p:cNvPr id="1" name=""/>
+        <p:cNvGrpSpPr/>
+        <p:nvPr/>
+      </p:nvGrpSpPr>
+      <p:grpSpPr/>
+      <p:sp>
+        <p:nvSpPr>
+          <p:cNvPr id="2" name="__pip_placeholder__"/>
+          <p:cNvSpPr/>
+          <p:nvPr/>
+        </p:nvSpPr>
+        <p:spPr>
+          <a:xfrm>
+            <a:off x="8351215" y="0"/>
+            <a:ext cx="3840480" cy="2880360"/>
+          </a:xfrm>
+          <a:prstGeom prst="rect">
+            <a:avLst/>
+          </a:prstGeom>
+          <a:solidFill>
+            <a:srgbClr val="DBE7EC">
+              <a:alpha val="30000"/>
+            </a:srgbClr>
+          </a:solidFill>
+          <a:ln w="19050">
+            <a:solidFill>
+              <a:srgbClr val="355C7D"/>
+            </a:solidFill>
+            <a:prstDash val="sysDash"/>
+          </a:ln>
+        </p:spPr>
+        <p:style>
+          <a:lnRef idx="1">
+            <a:schemeClr val="accent1"/>
+          </a:lnRef>
+          <a:fillRef idx="3">
+            <a:schemeClr val="accent1"/>
+          </a:fillRef>
+          <a:effectRef idx="2">
+            <a:schemeClr val="accent1"/>
+          </a:effectRef>
+          <a:fontRef idx="minor">
+            <a:schemeClr val="lt1"/>
+          </a:fontRef>
+        </p:style>
+        <p:txBody>
+          <a:bodyPr rtlCol="0" anchor="ctr" wrap="none"/>
+          <a:lstStyle/>
+          <a:p>
+            <a:pPr algn="ctr"/>
+            <a:r>
+              <a:rPr sz="1800" b="1">
+                <a:solidFill>
+                  <a:srgbClr val="355C7D"/>
+                </a:solidFill>
+                <a:latin typeface="Sarabun"/>
+              </a:rPr>
+              <a:t>Nine</a:t>
+            </a:r>
+          </a:p>
+        </p:txBody>
+      </p:sp>
+      <p:sp>
+        <p:nvSpPr>
+          <p:cNvPr id="3" name="Rectangle 2"/>
+          <p:cNvSpPr/>
+          <p:nvPr/>
+        </p:nvSpPr>
+        <p:spPr>
+          <a:xfrm>
+            <a:off x="0" y="0"/>
+            <a:ext cx="12191695" cy="63500"/>
+          </a:xfrm>
+          <a:prstGeom prst="rect">
+            <a:avLst/>
+          </a:prstGeom>
+          <a:solidFill>
+            <a:srgbClr val="355C7D"/>
+          </a:solidFill>
+          <a:ln>
+            <a:noFill/>
+          </a:ln>
+        </p:spPr>
+        <p:style>
+          <a:lnRef idx="1">
+            <a:schemeClr val="accent1"/>
+          </a:lnRef>
+          <a:fillRef idx="3">
+            <a:schemeClr val="accent1"/>
+          </a:fillRef>
+          <a:effectRef idx="2">
+            <a:schemeClr val="accent1"/>
+          </a:effectRef>
+          <a:fontRef idx="minor">
+            <a:schemeClr val="lt1"/>
+          </a:fontRef>
+        </p:style>
+        <p:txBody>
+          <a:bodyPr rtlCol="0" anchor="ctr"/>
+          <a:lstStyle/>
+          <a:p>
+            <a:pPr algn="ctr"/>
+          </a:p>
+        </p:txBody>
+      </p:sp>
+      <p:sp>
+        <p:nvSpPr>
+          <p:cNvPr id="4" name="TextBox 3"/>
+          <p:cNvSpPr txBox="1"/>
+          <p:nvPr/>
+        </p:nvSpPr>
+        <p:spPr>
+          <a:xfrm>
+            <a:off x="731520" y="256032"/>
+            <a:ext cx="7071055" cy="256032"/>
+          </a:xfrm>
+          <a:prstGeom prst="rect">
+            <a:avLst/>
+          </a:prstGeom>
+          <a:noFill/>
+        </p:spPr>
+        <p:txBody>
+          <a:bodyPr wrap="square" anchor="t">
+            <a:spAutoFit/>
+          </a:bodyPr>
+          <a:lstStyle/>
+          <a:p>
+            <a:pPr algn="l"/>
+            <a:r>
+              <a:rPr sz="1200" b="1" i="0" lang="en-US" altLang="en-US">
+                <a:solidFill>
+                  <a:srgbClr val="355C7D"/>
+                </a:solidFill>
+                <a:latin typeface="Sarabun"/>
+                <a:ea typeface="Sarabun"/>
+                <a:cs typeface="Sarabun"/>
+              </a:rPr>
+              <a:t>Closing</a:t>
+            </a:r>
+          </a:p>
+        </p:txBody>
+      </p:sp>
+      <p:sp>
+        <p:nvSpPr>
+          <p:cNvPr id="5" name="TextBox 4"/>
+          <p:cNvSpPr txBox="1"/>
+          <p:nvPr/>
+        </p:nvSpPr>
+        <p:spPr>
+          <a:xfrm>
+            <a:off x="731520" y="530352"/>
+            <a:ext cx="7071055" cy="640080"/>
+          </a:xfrm>
+          <a:prstGeom prst="rect">
+            <a:avLst/>
+          </a:prstGeom>
+          <a:noFill/>
+        </p:spPr>
+        <p:txBody>
+          <a:bodyPr wrap="square" anchor="t">
+            <a:spAutoFit/>
+          </a:bodyPr>
+          <a:lstStyle/>
+          <a:p>
+            <a:pPr algn="l"/>
+            <a:r>
+              <a:rPr sz="3600" b="1" i="0" lang="en-US" altLang="en-US">
+                <a:solidFill>
+                  <a:srgbClr val="24333D"/>
+                </a:solidFill>
+                <a:latin typeface="Sarabun"/>
+                <a:ea typeface="Sarabun"/>
+                <a:cs typeface="Sarabun"/>
+              </a:rPr>
+              <a:t>Closing</a:t>
+            </a:r>
+          </a:p>
+        </p:txBody>
+      </p:sp>
+      <p:sp>
+        <p:nvSpPr>
+          <p:cNvPr id="6" name="TextBox 5"/>
+          <p:cNvSpPr txBox="1"/>
+          <p:nvPr/>
+        </p:nvSpPr>
+        <p:spPr>
+          <a:xfrm>
+            <a:off x="932688" y="1746504"/>
+            <a:ext cx="6705295" cy="228600"/>
+          </a:xfrm>
+          <a:prstGeom prst="rect">
+            <a:avLst/>
+          </a:prstGeom>
+          <a:noFill/>
+        </p:spPr>
+        <p:txBody>
+          <a:bodyPr wrap="square" anchor="t">
+            <a:spAutoFit/>
+          </a:bodyPr>
+          <a:lstStyle/>
+          <a:p>
+            <a:pPr algn="l"/>
+            <a:r>
+              <a:rPr sz="1700" b="1" i="0" lang="en-US" altLang="en-US">
+                <a:solidFill>
+                  <a:srgbClr val="C96F4A"/>
+                </a:solidFill>
+                <a:latin typeface="Sarabun"/>
+                <a:ea typeface="Sarabun"/>
+                <a:cs typeface="Sarabun"/>
+              </a:rPr>
+              <a:t>Next steps</a:t>
+            </a:r>
+          </a:p>
+        </p:txBody>
+      </p:sp>
+      <p:sp>
+        <p:nvSpPr>
+          <p:cNvPr id="7" name="Oval 6"/>
+          <p:cNvSpPr/>
+          <p:nvPr/>
+        </p:nvSpPr>
+        <p:spPr>
+          <a:xfrm>
+            <a:off x="932688" y="2130552"/>
+            <a:ext cx="82296" cy="82296"/>
+          </a:xfrm>
+          <a:prstGeom prst="ellipse">
+            <a:avLst/>
+          </a:prstGeom>
+          <a:solidFill>
+            <a:srgbClr val="C96F4A"/>
+          </a:solidFill>
+          <a:ln>
+            <a:noFill/>
+          </a:ln>
+        </p:spPr>
+        <p:style>
+          <a:lnRef idx="1">
+            <a:schemeClr val="accent1"/>
+          </a:lnRef>
+          <a:fillRef idx="3">
+            <a:schemeClr val="accent1"/>
+          </a:fillRef>
+          <a:effectRef idx="2">
+            <a:schemeClr val="accent1"/>
+          </a:effectRef>
+          <a:fontRef idx="minor">
+            <a:schemeClr val="lt1"/>
+          </a:fontRef>
+        </p:style>
+        <p:txBody>
+          <a:bodyPr rtlCol="0" anchor="ctr"/>
+          <a:lstStyle/>
+          <a:p>
+            <a:pPr algn="ctr"/>
+          </a:p>
+        </p:txBody>
+      </p:sp>
+      <p:sp>
+        <p:nvSpPr>
+          <p:cNvPr id="8" name="TextBox 7"/>
+          <p:cNvSpPr txBox="1"/>
+          <p:nvPr/>
+        </p:nvSpPr>
+        <p:spPr>
+          <a:xfrm>
+            <a:off x="1078992" y="2039112"/>
+            <a:ext cx="6568135" cy="676656"/>
+          </a:xfrm>
+          <a:prstGeom prst="rect">
+            <a:avLst/>
+          </a:prstGeom>
+          <a:noFill/>
+        </p:spPr>
+        <p:txBody>
+          <a:bodyPr wrap="square" anchor="t">
+            <a:spAutoFit/>
+          </a:bodyPr>
+          <a:lstStyle/>
+          <a:p>
+            <a:pPr algn="l"/>
+            <a:r>
+              <a:rPr sz="1700" b="0" i="0" lang="en-US" altLang="en-US">
+                <a:solidFill>
+                  <a:srgbClr val="24333D"/>
+                </a:solidFill>
+                <a:latin typeface="Sarabun"/>
+                <a:ea typeface="Sarabun"/>
+                <a:cs typeface="Sarabun"/>
+              </a:rPr>
+              <a:t>By the end, you can introduce yourself with your name and country of origin in a natural 3–4 line Thai exchange.</a:t>
+            </a:r>
+          </a:p>
+        </p:txBody>
+      </p:sp>
+      <p:sp>
+        <p:nvSpPr>
+          <p:cNvPr id="9" name="Oval 8"/>
+          <p:cNvSpPr/>
+          <p:nvPr/>
+        </p:nvSpPr>
+        <p:spPr>
+          <a:xfrm>
+            <a:off x="932688" y="2862072"/>
+            <a:ext cx="82296" cy="82296"/>
+          </a:xfrm>
+          <a:prstGeom prst="ellipse">
+            <a:avLst/>
+          </a:prstGeom>
+          <a:solidFill>
+            <a:srgbClr val="C96F4A"/>
+          </a:solidFill>
+          <a:ln>
+            <a:noFill/>
+          </a:ln>
+        </p:spPr>
+        <p:style>
+          <a:lnRef idx="1">
+            <a:schemeClr val="accent1"/>
+          </a:lnRef>
+          <a:fillRef idx="3">
+            <a:schemeClr val="accent1"/>
+          </a:fillRef>
+          <a:effectRef idx="2">
+            <a:schemeClr val="accent1"/>
+          </a:effectRef>
+          <a:fontRef idx="minor">
+            <a:schemeClr val="lt1"/>
+          </a:fontRef>
+        </p:style>
+        <p:txBody>
+          <a:bodyPr rtlCol="0" anchor="ctr"/>
+          <a:lstStyle/>
+          <a:p>
+            <a:pPr algn="ctr"/>
+          </a:p>
+        </p:txBody>
+      </p:sp>
+      <p:sp>
+        <p:nvSpPr>
+          <p:cNvPr id="10" name="TextBox 9"/>
+          <p:cNvSpPr txBox="1"/>
+          <p:nvPr/>
+        </p:nvSpPr>
+        <p:spPr>
+          <a:xfrm>
+            <a:off x="1078992" y="2770632"/>
+            <a:ext cx="6568135" cy="274320"/>
+          </a:xfrm>
+          <a:prstGeom prst="rect">
+            <a:avLst/>
+          </a:prstGeom>
+          <a:noFill/>
+        </p:spPr>
+        <p:txBody>
+          <a:bodyPr wrap="square" anchor="t">
+            <a:spAutoFit/>
+          </a:bodyPr>
+          <a:lstStyle/>
+          <a:p>
+            <a:pPr algn="l"/>
+            <a:r>
+              <a:rPr sz="1700" b="0" i="0" lang="en-US" altLang="en-US">
+                <a:solidFill>
+                  <a:srgbClr val="24333D"/>
+                </a:solidFill>
+                <a:latin typeface="Sarabun"/>
+                <a:ea typeface="Sarabun"/>
+                <a:cs typeface="Sarabun"/>
+              </a:rPr>
+              <a:t>Next: First Contact and Courtesy continues.</a:t>
             </a:r>
           </a:p>
         </p:txBody>
@@ -5046,7 +6398,7 @@
                 <a:ea typeface="Sarabun"/>
                 <a:cs typeface="Sarabun"/>
               </a:rPr>
-              <a:t>Ask and give your name</a:t>
+              <a:t>Your name in Thai</a:t>
             </a:r>
           </a:p>
         </p:txBody>
@@ -5254,7 +6606,7 @@
         </p:nvSpPr>
         <p:spPr>
           <a:xfrm>
-            <a:off x="731520" y="2606040"/>
+            <a:off x="731520" y="3081528"/>
             <a:ext cx="7071055" cy="1572768"/>
           </a:xfrm>
           <a:prstGeom prst="roundRect">
@@ -5295,7 +6647,7 @@
         </p:nvSpPr>
         <p:spPr>
           <a:xfrm>
-            <a:off x="868680" y="2807208"/>
+            <a:off x="868680" y="3282696"/>
             <a:ext cx="73152" cy="1143000"/>
           </a:xfrm>
           <a:prstGeom prst="rect">
@@ -5338,7 +6690,7 @@
         </p:nvSpPr>
         <p:spPr>
           <a:xfrm>
-            <a:off x="1078992" y="2743200"/>
+            <a:off x="1078992" y="3218688"/>
             <a:ext cx="6613855" cy="320040"/>
           </a:xfrm>
           <a:prstGeom prst="rect">
@@ -5362,7 +6714,7 @@
                 <a:ea typeface="Sarabun"/>
                 <a:cs typeface="Sarabun"/>
               </a:rPr>
-              <a:t>คุณชื่ออะไร</a:t>
+              <a:t>อะไร</a:t>
             </a:r>
           </a:p>
         </p:txBody>
@@ -5375,7 +6727,7 @@
         </p:nvSpPr>
         <p:spPr>
           <a:xfrm>
-            <a:off x="1078992" y="3108960"/>
+            <a:off x="1078992" y="3584448"/>
             <a:ext cx="6613855" cy="274320"/>
           </a:xfrm>
           <a:prstGeom prst="rect">
@@ -5399,7 +6751,7 @@
                 <a:ea typeface="Sarabun"/>
                 <a:cs typeface="Sarabun"/>
               </a:rPr>
-              <a:t>khun chûue à-rai</a:t>
+              <a:t>à-rai</a:t>
             </a:r>
           </a:p>
         </p:txBody>
@@ -5412,7 +6764,7 @@
         </p:nvSpPr>
         <p:spPr>
           <a:xfrm>
-            <a:off x="1078992" y="3483864"/>
+            <a:off x="1078992" y="3959352"/>
             <a:ext cx="6613855" cy="274320"/>
           </a:xfrm>
           <a:prstGeom prst="rect">
@@ -5436,7 +6788,7 @@
                 <a:ea typeface="Sarabun"/>
                 <a:cs typeface="Sarabun"/>
               </a:rPr>
-              <a:t>what is your name?</a:t>
+              <a:t>what</a:t>
             </a:r>
           </a:p>
         </p:txBody>
@@ -5449,7 +6801,7 @@
         </p:nvSpPr>
         <p:spPr>
           <a:xfrm>
-            <a:off x="731520" y="3886200"/>
+            <a:off x="731520" y="4837176"/>
             <a:ext cx="7071055" cy="1572768"/>
           </a:xfrm>
           <a:prstGeom prst="roundRect">
@@ -5490,7 +6842,7 @@
         </p:nvSpPr>
         <p:spPr>
           <a:xfrm>
-            <a:off x="868680" y="4087368"/>
+            <a:off x="868680" y="5038344"/>
             <a:ext cx="73152" cy="1143000"/>
           </a:xfrm>
           <a:prstGeom prst="rect">
@@ -5533,7 +6885,7 @@
         </p:nvSpPr>
         <p:spPr>
           <a:xfrm>
-            <a:off x="1078992" y="4023360"/>
+            <a:off x="1078992" y="4974336"/>
             <a:ext cx="6613855" cy="320040"/>
           </a:xfrm>
           <a:prstGeom prst="rect">
@@ -5557,7 +6909,7 @@
                 <a:ea typeface="Sarabun"/>
                 <a:cs typeface="Sarabun"/>
               </a:rPr>
-              <a:t>ผมชื่อ...</a:t>
+              <a:t>คุณชื่ออะไร</a:t>
             </a:r>
           </a:p>
         </p:txBody>
@@ -5570,7 +6922,7 @@
         </p:nvSpPr>
         <p:spPr>
           <a:xfrm>
-            <a:off x="1078992" y="4389120"/>
+            <a:off x="1078992" y="5340096"/>
             <a:ext cx="6613855" cy="274320"/>
           </a:xfrm>
           <a:prstGeom prst="rect">
@@ -5594,7 +6946,7 @@
                 <a:ea typeface="Sarabun"/>
                 <a:cs typeface="Sarabun"/>
               </a:rPr>
-              <a:t>phǒm chûue...</a:t>
+              <a:t>khun chûue à-rai</a:t>
             </a:r>
           </a:p>
         </p:txBody>
@@ -5607,7 +6959,7 @@
         </p:nvSpPr>
         <p:spPr>
           <a:xfrm>
-            <a:off x="1078992" y="4764024"/>
+            <a:off x="1078992" y="5715000"/>
             <a:ext cx="6613855" cy="274320"/>
           </a:xfrm>
           <a:prstGeom prst="rect">
@@ -5631,202 +6983,7 @@
                 <a:ea typeface="Sarabun"/>
                 <a:cs typeface="Sarabun"/>
               </a:rPr>
-              <a:t>my name is... (male)</a:t>
-            </a:r>
-          </a:p>
-        </p:txBody>
-      </p:sp>
-      <p:sp>
-        <p:nvSpPr>
-          <p:cNvPr id="21" name="Rounded Rectangle 20"/>
-          <p:cNvSpPr/>
-          <p:nvPr/>
-        </p:nvSpPr>
-        <p:spPr>
-          <a:xfrm>
-            <a:off x="731520" y="5166360"/>
-            <a:ext cx="7071055" cy="1572768"/>
-          </a:xfrm>
-          <a:prstGeom prst="roundRect">
-            <a:avLst/>
-          </a:prstGeom>
-          <a:noFill/>
-          <a:ln>
-            <a:noFill/>
-          </a:ln>
-        </p:spPr>
-        <p:style>
-          <a:lnRef idx="1">
-            <a:schemeClr val="accent1"/>
-          </a:lnRef>
-          <a:fillRef idx="3">
-            <a:schemeClr val="accent1"/>
-          </a:fillRef>
-          <a:effectRef idx="2">
-            <a:schemeClr val="accent1"/>
-          </a:effectRef>
-          <a:fontRef idx="minor">
-            <a:schemeClr val="lt1"/>
-          </a:fontRef>
-        </p:style>
-        <p:txBody>
-          <a:bodyPr rtlCol="0" anchor="ctr"/>
-          <a:lstStyle/>
-          <a:p>
-            <a:pPr algn="ctr"/>
-          </a:p>
-        </p:txBody>
-      </p:sp>
-      <p:sp>
-        <p:nvSpPr>
-          <p:cNvPr id="22" name="Rectangle 21"/>
-          <p:cNvSpPr/>
-          <p:nvPr/>
-        </p:nvSpPr>
-        <p:spPr>
-          <a:xfrm>
-            <a:off x="868680" y="5367528"/>
-            <a:ext cx="73152" cy="1143000"/>
-          </a:xfrm>
-          <a:prstGeom prst="rect">
-            <a:avLst/>
-          </a:prstGeom>
-          <a:solidFill>
-            <a:srgbClr val="355C7D"/>
-          </a:solidFill>
-          <a:ln>
-            <a:noFill/>
-          </a:ln>
-        </p:spPr>
-        <p:style>
-          <a:lnRef idx="1">
-            <a:schemeClr val="accent1"/>
-          </a:lnRef>
-          <a:fillRef idx="3">
-            <a:schemeClr val="accent1"/>
-          </a:fillRef>
-          <a:effectRef idx="2">
-            <a:schemeClr val="accent1"/>
-          </a:effectRef>
-          <a:fontRef idx="minor">
-            <a:schemeClr val="lt1"/>
-          </a:fontRef>
-        </p:style>
-        <p:txBody>
-          <a:bodyPr rtlCol="0" anchor="ctr"/>
-          <a:lstStyle/>
-          <a:p>
-            <a:pPr algn="ctr"/>
-          </a:p>
-        </p:txBody>
-      </p:sp>
-      <p:sp>
-        <p:nvSpPr>
-          <p:cNvPr id="23" name="TextBox 22"/>
-          <p:cNvSpPr txBox="1"/>
-          <p:nvPr/>
-        </p:nvSpPr>
-        <p:spPr>
-          <a:xfrm>
-            <a:off x="1078992" y="5303520"/>
-            <a:ext cx="6613855" cy="320040"/>
-          </a:xfrm>
-          <a:prstGeom prst="rect">
-            <a:avLst/>
-          </a:prstGeom>
-          <a:noFill/>
-        </p:spPr>
-        <p:txBody>
-          <a:bodyPr wrap="square" anchor="t">
-            <a:spAutoFit/>
-          </a:bodyPr>
-          <a:lstStyle/>
-          <a:p>
-            <a:pPr algn="l"/>
-            <a:r>
-              <a:rPr sz="1700" b="0" i="0" lang="th-TH" altLang="en-US">
-                <a:solidFill>
-                  <a:srgbClr val="24333D"/>
-                </a:solidFill>
-                <a:latin typeface="Sarabun"/>
-                <a:ea typeface="Sarabun"/>
-                <a:cs typeface="Sarabun"/>
-              </a:rPr>
-              <a:t>ฉันชื่อ...</a:t>
-            </a:r>
-          </a:p>
-        </p:txBody>
-      </p:sp>
-      <p:sp>
-        <p:nvSpPr>
-          <p:cNvPr id="24" name="TextBox 23"/>
-          <p:cNvSpPr txBox="1"/>
-          <p:nvPr/>
-        </p:nvSpPr>
-        <p:spPr>
-          <a:xfrm>
-            <a:off x="1078992" y="5669280"/>
-            <a:ext cx="6613855" cy="274320"/>
-          </a:xfrm>
-          <a:prstGeom prst="rect">
-            <a:avLst/>
-          </a:prstGeom>
-          <a:noFill/>
-        </p:spPr>
-        <p:txBody>
-          <a:bodyPr wrap="square" anchor="t">
-            <a:spAutoFit/>
-          </a:bodyPr>
-          <a:lstStyle/>
-          <a:p>
-            <a:pPr algn="l"/>
-            <a:r>
-              <a:rPr sz="1700" b="0" i="1" lang="en-US" altLang="en-US">
-                <a:solidFill>
-                  <a:srgbClr val="566873"/>
-                </a:solidFill>
-                <a:latin typeface="Sarabun"/>
-                <a:ea typeface="Sarabun"/>
-                <a:cs typeface="Sarabun"/>
-              </a:rPr>
-              <a:t>chǎn chûue...</a:t>
-            </a:r>
-          </a:p>
-        </p:txBody>
-      </p:sp>
-      <p:sp>
-        <p:nvSpPr>
-          <p:cNvPr id="25" name="TextBox 24"/>
-          <p:cNvSpPr txBox="1"/>
-          <p:nvPr/>
-        </p:nvSpPr>
-        <p:spPr>
-          <a:xfrm>
-            <a:off x="1078992" y="6044184"/>
-            <a:ext cx="6613855" cy="274320"/>
-          </a:xfrm>
-          <a:prstGeom prst="rect">
-            <a:avLst/>
-          </a:prstGeom>
-          <a:noFill/>
-        </p:spPr>
-        <p:txBody>
-          <a:bodyPr wrap="square" anchor="t">
-            <a:spAutoFit/>
-          </a:bodyPr>
-          <a:lstStyle/>
-          <a:p>
-            <a:pPr algn="l"/>
-            <a:r>
-              <a:rPr sz="1700" b="0" i="0" lang="en-US" altLang="en-US">
-                <a:solidFill>
-                  <a:srgbClr val="82909A"/>
-                </a:solidFill>
-                <a:latin typeface="Sarabun"/>
-                <a:ea typeface="Sarabun"/>
-                <a:cs typeface="Sarabun"/>
-              </a:rPr>
-              <a:t>my name is... (female)</a:t>
+              <a:t>what is your name?</a:t>
             </a:r>
           </a:p>
         </p:txBody>
@@ -6026,7 +7183,7 @@
                 <a:ea typeface="Sarabun"/>
                 <a:cs typeface="Sarabun"/>
               </a:rPr>
-              <a:t>Say where you are from</a:t>
+              <a:t>Say your name</a:t>
             </a:r>
           </a:p>
         </p:txBody>
@@ -6040,7 +7197,7 @@
         <p:spPr>
           <a:xfrm>
             <a:off x="731520" y="1325880"/>
-            <a:ext cx="7071055" cy="804672"/>
+            <a:ext cx="7071055" cy="1572768"/>
           </a:xfrm>
           <a:prstGeom prst="roundRect">
             <a:avLst/>
@@ -6080,8 +7237,8 @@
         </p:nvSpPr>
         <p:spPr>
           <a:xfrm>
-            <a:off x="868680" y="1435608"/>
-            <a:ext cx="73152" cy="548640"/>
+            <a:off x="868680" y="1527048"/>
+            <a:ext cx="73152" cy="1143000"/>
           </a:xfrm>
           <a:prstGeom prst="rect">
             <a:avLst/>
@@ -6123,8 +7280,8 @@
         </p:nvSpPr>
         <p:spPr>
           <a:xfrm>
-            <a:off x="1078992" y="1399032"/>
-            <a:ext cx="6613855" cy="228600"/>
+            <a:off x="1078992" y="1463040"/>
+            <a:ext cx="6613855" cy="320040"/>
           </a:xfrm>
           <a:prstGeom prst="rect">
             <a:avLst/>
@@ -6147,7 +7304,7 @@
                 <a:ea typeface="Sarabun"/>
                 <a:cs typeface="Sarabun"/>
               </a:rPr>
-              <a:t>มาจาก</a:t>
+              <a:t>คน</a:t>
             </a:r>
           </a:p>
         </p:txBody>
@@ -6160,8 +7317,8 @@
         </p:nvSpPr>
         <p:spPr>
           <a:xfrm>
-            <a:off x="1078992" y="1627632"/>
-            <a:ext cx="6613855" cy="201168"/>
+            <a:off x="1078992" y="1828800"/>
+            <a:ext cx="6613855" cy="274320"/>
           </a:xfrm>
           <a:prstGeom prst="rect">
             <a:avLst/>
@@ -6184,7 +7341,7 @@
                 <a:ea typeface="Sarabun"/>
                 <a:cs typeface="Sarabun"/>
               </a:rPr>
-              <a:t>maa-jàak</a:t>
+              <a:t>khon</a:t>
             </a:r>
           </a:p>
         </p:txBody>
@@ -6197,8 +7354,8 @@
         </p:nvSpPr>
         <p:spPr>
           <a:xfrm>
-            <a:off x="1078992" y="1828800"/>
-            <a:ext cx="6613855" cy="201168"/>
+            <a:off x="1078992" y="2203704"/>
+            <a:ext cx="6613855" cy="274320"/>
           </a:xfrm>
           <a:prstGeom prst="rect">
             <a:avLst/>
@@ -6221,7 +7378,7 @@
                 <a:ea typeface="Sarabun"/>
                 <a:cs typeface="Sarabun"/>
               </a:rPr>
-              <a:t>come from</a:t>
+              <a:t>person</a:t>
             </a:r>
           </a:p>
         </p:txBody>
@@ -6234,8 +7391,8 @@
         </p:nvSpPr>
         <p:spPr>
           <a:xfrm>
-            <a:off x="731520" y="2130552"/>
-            <a:ext cx="7071055" cy="804672"/>
+            <a:off x="731520" y="3081528"/>
+            <a:ext cx="7071055" cy="1572768"/>
           </a:xfrm>
           <a:prstGeom prst="roundRect">
             <a:avLst/>
@@ -6275,8 +7432,8 @@
         </p:nvSpPr>
         <p:spPr>
           <a:xfrm>
-            <a:off x="868680" y="2240280"/>
-            <a:ext cx="73152" cy="548640"/>
+            <a:off x="868680" y="3282696"/>
+            <a:ext cx="73152" cy="1143000"/>
           </a:xfrm>
           <a:prstGeom prst="rect">
             <a:avLst/>
@@ -6318,8 +7475,8 @@
         </p:nvSpPr>
         <p:spPr>
           <a:xfrm>
-            <a:off x="1078992" y="2203704"/>
-            <a:ext cx="6613855" cy="228600"/>
+            <a:off x="1078992" y="3218688"/>
+            <a:ext cx="6613855" cy="320040"/>
           </a:xfrm>
           <a:prstGeom prst="rect">
             <a:avLst/>
@@ -6342,7 +7499,7 @@
                 <a:ea typeface="Sarabun"/>
                 <a:cs typeface="Sarabun"/>
               </a:rPr>
-              <a:t>ประเทศ</a:t>
+              <a:t>ผมชื่อ...</a:t>
             </a:r>
           </a:p>
         </p:txBody>
@@ -6355,8 +7512,8 @@
         </p:nvSpPr>
         <p:spPr>
           <a:xfrm>
-            <a:off x="1078992" y="2432304"/>
-            <a:ext cx="6613855" cy="201168"/>
+            <a:off x="1078992" y="3584448"/>
+            <a:ext cx="6613855" cy="274320"/>
           </a:xfrm>
           <a:prstGeom prst="rect">
             <a:avLst/>
@@ -6379,7 +7536,7 @@
                 <a:ea typeface="Sarabun"/>
                 <a:cs typeface="Sarabun"/>
               </a:rPr>
-              <a:t>bprà-thêet</a:t>
+              <a:t>phǒm chûue...</a:t>
             </a:r>
           </a:p>
         </p:txBody>
@@ -6392,8 +7549,8 @@
         </p:nvSpPr>
         <p:spPr>
           <a:xfrm>
-            <a:off x="1078992" y="2633472"/>
-            <a:ext cx="6613855" cy="201168"/>
+            <a:off x="1078992" y="3959352"/>
+            <a:ext cx="6613855" cy="274320"/>
           </a:xfrm>
           <a:prstGeom prst="rect">
             <a:avLst/>
@@ -6416,7 +7573,7 @@
                 <a:ea typeface="Sarabun"/>
                 <a:cs typeface="Sarabun"/>
               </a:rPr>
-              <a:t>country</a:t>
+              <a:t>my name is... (male)</a:t>
             </a:r>
           </a:p>
         </p:txBody>
@@ -6429,8 +7586,8 @@
         </p:nvSpPr>
         <p:spPr>
           <a:xfrm>
-            <a:off x="731520" y="2935224"/>
-            <a:ext cx="7071055" cy="804672"/>
+            <a:off x="731520" y="4837176"/>
+            <a:ext cx="7071055" cy="1572768"/>
           </a:xfrm>
           <a:prstGeom prst="roundRect">
             <a:avLst/>
@@ -6470,8 +7627,8 @@
         </p:nvSpPr>
         <p:spPr>
           <a:xfrm>
-            <a:off x="868680" y="3044952"/>
-            <a:ext cx="73152" cy="548640"/>
+            <a:off x="868680" y="5038344"/>
+            <a:ext cx="73152" cy="1143000"/>
           </a:xfrm>
           <a:prstGeom prst="rect">
             <a:avLst/>
@@ -6513,8 +7670,8 @@
         </p:nvSpPr>
         <p:spPr>
           <a:xfrm>
-            <a:off x="1078992" y="3008376"/>
-            <a:ext cx="6613855" cy="228600"/>
+            <a:off x="1078992" y="4974336"/>
+            <a:ext cx="6613855" cy="320040"/>
           </a:xfrm>
           <a:prstGeom prst="rect">
             <a:avLst/>
@@ -6537,7 +7694,7 @@
                 <a:ea typeface="Sarabun"/>
                 <a:cs typeface="Sarabun"/>
               </a:rPr>
-              <a:t>ไทย</a:t>
+              <a:t>ฉันชื่อ...</a:t>
             </a:r>
           </a:p>
         </p:txBody>
@@ -6550,8 +7707,8 @@
         </p:nvSpPr>
         <p:spPr>
           <a:xfrm>
-            <a:off x="1078992" y="3236976"/>
-            <a:ext cx="6613855" cy="201168"/>
+            <a:off x="1078992" y="5340096"/>
+            <a:ext cx="6613855" cy="274320"/>
           </a:xfrm>
           <a:prstGeom prst="rect">
             <a:avLst/>
@@ -6574,7 +7731,7 @@
                 <a:ea typeface="Sarabun"/>
                 <a:cs typeface="Sarabun"/>
               </a:rPr>
-              <a:t>thai</a:t>
+              <a:t>chǎn chûue...</a:t>
             </a:r>
           </a:p>
         </p:txBody>
@@ -6587,8 +7744,8 @@
         </p:nvSpPr>
         <p:spPr>
           <a:xfrm>
-            <a:off x="1078992" y="3438144"/>
-            <a:ext cx="6613855" cy="201168"/>
+            <a:off x="1078992" y="5715000"/>
+            <a:ext cx="6613855" cy="274320"/>
           </a:xfrm>
           <a:prstGeom prst="rect">
             <a:avLst/>
@@ -6611,635 +7768,7 @@
                 <a:ea typeface="Sarabun"/>
                 <a:cs typeface="Sarabun"/>
               </a:rPr>
-              <a:t>Thailand / Thai</a:t>
-            </a:r>
-          </a:p>
-        </p:txBody>
-      </p:sp>
-      <p:sp>
-        <p:nvSpPr>
-          <p:cNvPr id="21" name="Rounded Rectangle 20"/>
-          <p:cNvSpPr/>
-          <p:nvPr/>
-        </p:nvSpPr>
-        <p:spPr>
-          <a:xfrm>
-            <a:off x="731520" y="3739896"/>
-            <a:ext cx="7071055" cy="804672"/>
-          </a:xfrm>
-          <a:prstGeom prst="roundRect">
-            <a:avLst/>
-          </a:prstGeom>
-          <a:noFill/>
-          <a:ln>
-            <a:noFill/>
-          </a:ln>
-        </p:spPr>
-        <p:style>
-          <a:lnRef idx="1">
-            <a:schemeClr val="accent1"/>
-          </a:lnRef>
-          <a:fillRef idx="3">
-            <a:schemeClr val="accent1"/>
-          </a:fillRef>
-          <a:effectRef idx="2">
-            <a:schemeClr val="accent1"/>
-          </a:effectRef>
-          <a:fontRef idx="minor">
-            <a:schemeClr val="lt1"/>
-          </a:fontRef>
-        </p:style>
-        <p:txBody>
-          <a:bodyPr rtlCol="0" anchor="ctr"/>
-          <a:lstStyle/>
-          <a:p>
-            <a:pPr algn="ctr"/>
-          </a:p>
-        </p:txBody>
-      </p:sp>
-      <p:sp>
-        <p:nvSpPr>
-          <p:cNvPr id="22" name="Rectangle 21"/>
-          <p:cNvSpPr/>
-          <p:nvPr/>
-        </p:nvSpPr>
-        <p:spPr>
-          <a:xfrm>
-            <a:off x="868680" y="3849624"/>
-            <a:ext cx="73152" cy="548640"/>
-          </a:xfrm>
-          <a:prstGeom prst="rect">
-            <a:avLst/>
-          </a:prstGeom>
-          <a:solidFill>
-            <a:srgbClr val="355C7D"/>
-          </a:solidFill>
-          <a:ln>
-            <a:noFill/>
-          </a:ln>
-        </p:spPr>
-        <p:style>
-          <a:lnRef idx="1">
-            <a:schemeClr val="accent1"/>
-          </a:lnRef>
-          <a:fillRef idx="3">
-            <a:schemeClr val="accent1"/>
-          </a:fillRef>
-          <a:effectRef idx="2">
-            <a:schemeClr val="accent1"/>
-          </a:effectRef>
-          <a:fontRef idx="minor">
-            <a:schemeClr val="lt1"/>
-          </a:fontRef>
-        </p:style>
-        <p:txBody>
-          <a:bodyPr rtlCol="0" anchor="ctr"/>
-          <a:lstStyle/>
-          <a:p>
-            <a:pPr algn="ctr"/>
-          </a:p>
-        </p:txBody>
-      </p:sp>
-      <p:sp>
-        <p:nvSpPr>
-          <p:cNvPr id="23" name="TextBox 22"/>
-          <p:cNvSpPr txBox="1"/>
-          <p:nvPr/>
-        </p:nvSpPr>
-        <p:spPr>
-          <a:xfrm>
-            <a:off x="1078992" y="3813048"/>
-            <a:ext cx="6613855" cy="228600"/>
-          </a:xfrm>
-          <a:prstGeom prst="rect">
-            <a:avLst/>
-          </a:prstGeom>
-          <a:noFill/>
-        </p:spPr>
-        <p:txBody>
-          <a:bodyPr wrap="square" anchor="t">
-            <a:spAutoFit/>
-          </a:bodyPr>
-          <a:lstStyle/>
-          <a:p>
-            <a:pPr algn="l"/>
-            <a:r>
-              <a:rPr sz="1700" b="0" i="0" lang="th-TH" altLang="en-US">
-                <a:solidFill>
-                  <a:srgbClr val="24333D"/>
-                </a:solidFill>
-                <a:latin typeface="Sarabun"/>
-                <a:ea typeface="Sarabun"/>
-                <a:cs typeface="Sarabun"/>
-              </a:rPr>
-              <a:t>อังกฤษ</a:t>
-            </a:r>
-          </a:p>
-        </p:txBody>
-      </p:sp>
-      <p:sp>
-        <p:nvSpPr>
-          <p:cNvPr id="24" name="TextBox 23"/>
-          <p:cNvSpPr txBox="1"/>
-          <p:nvPr/>
-        </p:nvSpPr>
-        <p:spPr>
-          <a:xfrm>
-            <a:off x="1078992" y="4041648"/>
-            <a:ext cx="6613855" cy="201168"/>
-          </a:xfrm>
-          <a:prstGeom prst="rect">
-            <a:avLst/>
-          </a:prstGeom>
-          <a:noFill/>
-        </p:spPr>
-        <p:txBody>
-          <a:bodyPr wrap="square" anchor="t">
-            <a:spAutoFit/>
-          </a:bodyPr>
-          <a:lstStyle/>
-          <a:p>
-            <a:pPr algn="l"/>
-            <a:r>
-              <a:rPr sz="1700" b="0" i="1" lang="en-US" altLang="en-US">
-                <a:solidFill>
-                  <a:srgbClr val="566873"/>
-                </a:solidFill>
-                <a:latin typeface="Sarabun"/>
-                <a:ea typeface="Sarabun"/>
-                <a:cs typeface="Sarabun"/>
-              </a:rPr>
-              <a:t>ang-grìt</a:t>
-            </a:r>
-          </a:p>
-        </p:txBody>
-      </p:sp>
-      <p:sp>
-        <p:nvSpPr>
-          <p:cNvPr id="25" name="TextBox 24"/>
-          <p:cNvSpPr txBox="1"/>
-          <p:nvPr/>
-        </p:nvSpPr>
-        <p:spPr>
-          <a:xfrm>
-            <a:off x="1078992" y="4242816"/>
-            <a:ext cx="6613855" cy="201168"/>
-          </a:xfrm>
-          <a:prstGeom prst="rect">
-            <a:avLst/>
-          </a:prstGeom>
-          <a:noFill/>
-        </p:spPr>
-        <p:txBody>
-          <a:bodyPr wrap="square" anchor="t">
-            <a:spAutoFit/>
-          </a:bodyPr>
-          <a:lstStyle/>
-          <a:p>
-            <a:pPr algn="l"/>
-            <a:r>
-              <a:rPr sz="1700" b="0" i="0" lang="en-US" altLang="en-US">
-                <a:solidFill>
-                  <a:srgbClr val="82909A"/>
-                </a:solidFill>
-                <a:latin typeface="Sarabun"/>
-                <a:ea typeface="Sarabun"/>
-                <a:cs typeface="Sarabun"/>
-              </a:rPr>
-              <a:t>England / English</a:t>
-            </a:r>
-          </a:p>
-        </p:txBody>
-      </p:sp>
-      <p:sp>
-        <p:nvSpPr>
-          <p:cNvPr id="26" name="Rounded Rectangle 25"/>
-          <p:cNvSpPr/>
-          <p:nvPr/>
-        </p:nvSpPr>
-        <p:spPr>
-          <a:xfrm>
-            <a:off x="731520" y="4544568"/>
-            <a:ext cx="7071055" cy="804672"/>
-          </a:xfrm>
-          <a:prstGeom prst="roundRect">
-            <a:avLst/>
-          </a:prstGeom>
-          <a:noFill/>
-          <a:ln>
-            <a:noFill/>
-          </a:ln>
-        </p:spPr>
-        <p:style>
-          <a:lnRef idx="1">
-            <a:schemeClr val="accent1"/>
-          </a:lnRef>
-          <a:fillRef idx="3">
-            <a:schemeClr val="accent1"/>
-          </a:fillRef>
-          <a:effectRef idx="2">
-            <a:schemeClr val="accent1"/>
-          </a:effectRef>
-          <a:fontRef idx="minor">
-            <a:schemeClr val="lt1"/>
-          </a:fontRef>
-        </p:style>
-        <p:txBody>
-          <a:bodyPr rtlCol="0" anchor="ctr"/>
-          <a:lstStyle/>
-          <a:p>
-            <a:pPr algn="ctr"/>
-          </a:p>
-        </p:txBody>
-      </p:sp>
-      <p:sp>
-        <p:nvSpPr>
-          <p:cNvPr id="27" name="Rectangle 26"/>
-          <p:cNvSpPr/>
-          <p:nvPr/>
-        </p:nvSpPr>
-        <p:spPr>
-          <a:xfrm>
-            <a:off x="868680" y="4654296"/>
-            <a:ext cx="73152" cy="548640"/>
-          </a:xfrm>
-          <a:prstGeom prst="rect">
-            <a:avLst/>
-          </a:prstGeom>
-          <a:solidFill>
-            <a:srgbClr val="355C7D"/>
-          </a:solidFill>
-          <a:ln>
-            <a:noFill/>
-          </a:ln>
-        </p:spPr>
-        <p:style>
-          <a:lnRef idx="1">
-            <a:schemeClr val="accent1"/>
-          </a:lnRef>
-          <a:fillRef idx="3">
-            <a:schemeClr val="accent1"/>
-          </a:fillRef>
-          <a:effectRef idx="2">
-            <a:schemeClr val="accent1"/>
-          </a:effectRef>
-          <a:fontRef idx="minor">
-            <a:schemeClr val="lt1"/>
-          </a:fontRef>
-        </p:style>
-        <p:txBody>
-          <a:bodyPr rtlCol="0" anchor="ctr"/>
-          <a:lstStyle/>
-          <a:p>
-            <a:pPr algn="ctr"/>
-          </a:p>
-        </p:txBody>
-      </p:sp>
-      <p:sp>
-        <p:nvSpPr>
-          <p:cNvPr id="28" name="TextBox 27"/>
-          <p:cNvSpPr txBox="1"/>
-          <p:nvPr/>
-        </p:nvSpPr>
-        <p:spPr>
-          <a:xfrm>
-            <a:off x="1078992" y="4617720"/>
-            <a:ext cx="6613855" cy="228600"/>
-          </a:xfrm>
-          <a:prstGeom prst="rect">
-            <a:avLst/>
-          </a:prstGeom>
-          <a:noFill/>
-        </p:spPr>
-        <p:txBody>
-          <a:bodyPr wrap="square" anchor="t">
-            <a:spAutoFit/>
-          </a:bodyPr>
-          <a:lstStyle/>
-          <a:p>
-            <a:pPr algn="l"/>
-            <a:r>
-              <a:rPr sz="1700" b="0" i="0" lang="th-TH" altLang="en-US">
-                <a:solidFill>
-                  <a:srgbClr val="24333D"/>
-                </a:solidFill>
-                <a:latin typeface="Sarabun"/>
-                <a:ea typeface="Sarabun"/>
-                <a:cs typeface="Sarabun"/>
-              </a:rPr>
-              <a:t>อเมริกา</a:t>
-            </a:r>
-          </a:p>
-        </p:txBody>
-      </p:sp>
-      <p:sp>
-        <p:nvSpPr>
-          <p:cNvPr id="29" name="TextBox 28"/>
-          <p:cNvSpPr txBox="1"/>
-          <p:nvPr/>
-        </p:nvSpPr>
-        <p:spPr>
-          <a:xfrm>
-            <a:off x="1078992" y="4846320"/>
-            <a:ext cx="6613855" cy="201168"/>
-          </a:xfrm>
-          <a:prstGeom prst="rect">
-            <a:avLst/>
-          </a:prstGeom>
-          <a:noFill/>
-        </p:spPr>
-        <p:txBody>
-          <a:bodyPr wrap="square" anchor="t">
-            <a:spAutoFit/>
-          </a:bodyPr>
-          <a:lstStyle/>
-          <a:p>
-            <a:pPr algn="l"/>
-            <a:r>
-              <a:rPr sz="1700" b="0" i="1" lang="en-US" altLang="en-US">
-                <a:solidFill>
-                  <a:srgbClr val="566873"/>
-                </a:solidFill>
-                <a:latin typeface="Sarabun"/>
-                <a:ea typeface="Sarabun"/>
-                <a:cs typeface="Sarabun"/>
-              </a:rPr>
-              <a:t>à-mee-rí-kaa</a:t>
-            </a:r>
-          </a:p>
-        </p:txBody>
-      </p:sp>
-      <p:sp>
-        <p:nvSpPr>
-          <p:cNvPr id="30" name="TextBox 29"/>
-          <p:cNvSpPr txBox="1"/>
-          <p:nvPr/>
-        </p:nvSpPr>
-        <p:spPr>
-          <a:xfrm>
-            <a:off x="1078992" y="5047488"/>
-            <a:ext cx="6613855" cy="201168"/>
-          </a:xfrm>
-          <a:prstGeom prst="rect">
-            <a:avLst/>
-          </a:prstGeom>
-          <a:noFill/>
-        </p:spPr>
-        <p:txBody>
-          <a:bodyPr wrap="square" anchor="t">
-            <a:spAutoFit/>
-          </a:bodyPr>
-          <a:lstStyle/>
-          <a:p>
-            <a:pPr algn="l"/>
-            <a:r>
-              <a:rPr sz="1700" b="0" i="0" lang="en-US" altLang="en-US">
-                <a:solidFill>
-                  <a:srgbClr val="82909A"/>
-                </a:solidFill>
-                <a:latin typeface="Sarabun"/>
-                <a:ea typeface="Sarabun"/>
-                <a:cs typeface="Sarabun"/>
-              </a:rPr>
-              <a:t>America</a:t>
-            </a:r>
-          </a:p>
-        </p:txBody>
-      </p:sp>
-      <p:sp>
-        <p:nvSpPr>
-          <p:cNvPr id="31" name="TextBox 30"/>
-          <p:cNvSpPr txBox="1"/>
-          <p:nvPr/>
-        </p:nvSpPr>
-        <p:spPr>
-          <a:xfrm>
-            <a:off x="932688" y="5632704"/>
-            <a:ext cx="9692640" cy="228600"/>
-          </a:xfrm>
-          <a:prstGeom prst="rect">
-            <a:avLst/>
-          </a:prstGeom>
-          <a:noFill/>
-        </p:spPr>
-        <p:txBody>
-          <a:bodyPr wrap="square" anchor="t">
-            <a:spAutoFit/>
-          </a:bodyPr>
-          <a:lstStyle/>
-          <a:p>
-            <a:pPr algn="l"/>
-            <a:r>
-              <a:rPr sz="1700" b="1" i="0" lang="en-US" altLang="en-US">
-                <a:solidFill>
-                  <a:srgbClr val="C96F4A"/>
-                </a:solidFill>
-                <a:latin typeface="Sarabun"/>
-                <a:ea typeface="Sarabun"/>
-                <a:cs typeface="Sarabun"/>
-              </a:rPr>
-              <a:t>Practice</a:t>
-            </a:r>
-          </a:p>
-        </p:txBody>
-      </p:sp>
-      <p:sp>
-        <p:nvSpPr>
-          <p:cNvPr id="32" name="Oval 31"/>
-          <p:cNvSpPr/>
-          <p:nvPr/>
-        </p:nvSpPr>
-        <p:spPr>
-          <a:xfrm>
-            <a:off x="932688" y="6016752"/>
-            <a:ext cx="82296" cy="82296"/>
-          </a:xfrm>
-          <a:prstGeom prst="ellipse">
-            <a:avLst/>
-          </a:prstGeom>
-          <a:solidFill>
-            <a:srgbClr val="C96F4A"/>
-          </a:solidFill>
-          <a:ln>
-            <a:noFill/>
-          </a:ln>
-        </p:spPr>
-        <p:style>
-          <a:lnRef idx="1">
-            <a:schemeClr val="accent1"/>
-          </a:lnRef>
-          <a:fillRef idx="3">
-            <a:schemeClr val="accent1"/>
-          </a:fillRef>
-          <a:effectRef idx="2">
-            <a:schemeClr val="accent1"/>
-          </a:effectRef>
-          <a:fontRef idx="minor">
-            <a:schemeClr val="lt1"/>
-          </a:fontRef>
-        </p:style>
-        <p:txBody>
-          <a:bodyPr rtlCol="0" anchor="ctr"/>
-          <a:lstStyle/>
-          <a:p>
-            <a:pPr algn="ctr"/>
-          </a:p>
-        </p:txBody>
-      </p:sp>
-      <p:sp>
-        <p:nvSpPr>
-          <p:cNvPr id="33" name="TextBox 32"/>
-          <p:cNvSpPr txBox="1"/>
-          <p:nvPr/>
-        </p:nvSpPr>
-        <p:spPr>
-          <a:xfrm>
-            <a:off x="1078992" y="5925312"/>
-            <a:ext cx="9555480" cy="475488"/>
-          </a:xfrm>
-          <a:prstGeom prst="rect">
-            <a:avLst/>
-          </a:prstGeom>
-          <a:noFill/>
-        </p:spPr>
-        <p:txBody>
-          <a:bodyPr wrap="square" anchor="t">
-            <a:spAutoFit/>
-          </a:bodyPr>
-          <a:lstStyle/>
-          <a:p>
-            <a:pPr algn="l"/>
-            <a:r>
-              <a:rPr sz="1700" b="0" i="0" lang="en-US" altLang="en-US">
-                <a:solidFill>
-                  <a:srgbClr val="24333D"/>
-                </a:solidFill>
-                <a:latin typeface="Sarabun"/>
-                <a:ea typeface="Sarabun"/>
-                <a:cs typeface="Sarabun"/>
-              </a:rPr>
-              <a:t>Listen and repeat: </a:t>
-            </a:r>
-            <a:r>
-              <a:rPr sz="1700" b="0" i="0" lang="th-TH" altLang="en-US">
-                <a:solidFill>
-                  <a:srgbClr val="24333D"/>
-                </a:solidFill>
-                <a:latin typeface="Sarabun"/>
-                <a:ea typeface="Sarabun"/>
-                <a:cs typeface="Sarabun"/>
-              </a:rPr>
-              <a:t>ผมมาจากอังกฤษครับ</a:t>
-            </a:r>
-            <a:r>
-              <a:rPr sz="1700" b="0" i="1" lang="en-US" altLang="en-US">
-                <a:solidFill>
-                  <a:srgbClr val="566873"/>
-                </a:solidFill>
-                <a:latin typeface="Sarabun"/>
-                <a:ea typeface="Sarabun"/>
-                <a:cs typeface="Sarabun"/>
-              </a:rPr>
-              <a:t> (phǒm maa-jàak ang-grìt khráp)</a:t>
-            </a:r>
-            <a:r>
-              <a:rPr sz="1700" b="0" i="0" lang="en-US" altLang="en-US">
-                <a:solidFill>
-                  <a:srgbClr val="24333D"/>
-                </a:solidFill>
-                <a:latin typeface="Sarabun"/>
-                <a:ea typeface="Sarabun"/>
-                <a:cs typeface="Sarabun"/>
-              </a:rPr>
-              <a:t>. Now with </a:t>
-            </a:r>
-            <a:r>
-              <a:rPr sz="1700" b="0" i="0" lang="th-TH" altLang="en-US">
-                <a:solidFill>
-                  <a:srgbClr val="24333D"/>
-                </a:solidFill>
-                <a:latin typeface="Sarabun"/>
-                <a:ea typeface="Sarabun"/>
-                <a:cs typeface="Sarabun"/>
-              </a:rPr>
-              <a:t>อเมริกา</a:t>
-            </a:r>
-            <a:r>
-              <a:rPr sz="1700" b="0" i="1" lang="en-US" altLang="en-US">
-                <a:solidFill>
-                  <a:srgbClr val="566873"/>
-                </a:solidFill>
-                <a:latin typeface="Sarabun"/>
-                <a:ea typeface="Sarabun"/>
-                <a:cs typeface="Sarabun"/>
-              </a:rPr>
-              <a:t> (à-mee-rí-kaa)</a:t>
-            </a:r>
-            <a:r>
-              <a:rPr sz="1700" b="0" i="0" lang="th-TH" altLang="en-US">
-                <a:solidFill>
-                  <a:srgbClr val="24333D"/>
-                </a:solidFill>
-                <a:latin typeface="Sarabun"/>
-                <a:ea typeface="Sarabun"/>
-                <a:cs typeface="Sarabun"/>
-              </a:rPr>
-              <a:t>: ผม</a:t>
-            </a:r>
-            <a:r>
-              <a:rPr sz="1700" b="0" i="0" lang="th-TH" altLang="en-US">
-                <a:solidFill>
-                  <a:srgbClr val="24333D"/>
-                </a:solidFill>
-                <a:latin typeface="Sarabun"/>
-                <a:ea typeface="Sarabun"/>
-                <a:cs typeface="Sarabun"/>
-              </a:rPr>
-              <a:t>มาจาก</a:t>
-            </a:r>
-            <a:r>
-              <a:rPr sz="1700" b="0" i="1" lang="en-US" altLang="en-US">
-                <a:solidFill>
-                  <a:srgbClr val="566873"/>
-                </a:solidFill>
-                <a:latin typeface="Sarabun"/>
-                <a:ea typeface="Sarabun"/>
-                <a:cs typeface="Sarabun"/>
-              </a:rPr>
-              <a:t> (maa-jàak)</a:t>
-            </a:r>
-            <a:r>
-              <a:rPr sz="1700" b="0" i="0" lang="th-TH" altLang="en-US">
-                <a:solidFill>
-                  <a:srgbClr val="24333D"/>
-                </a:solidFill>
-                <a:latin typeface="Sarabun"/>
-                <a:ea typeface="Sarabun"/>
-                <a:cs typeface="Sarabun"/>
-              </a:rPr>
-              <a:t>อเมริกา</a:t>
-            </a:r>
-            <a:r>
-              <a:rPr sz="1700" b="0" i="1" lang="en-US" altLang="en-US">
-                <a:solidFill>
-                  <a:srgbClr val="566873"/>
-                </a:solidFill>
-                <a:latin typeface="Sarabun"/>
-                <a:ea typeface="Sarabun"/>
-                <a:cs typeface="Sarabun"/>
-              </a:rPr>
-              <a:t> (à-mee-rí-kaa)</a:t>
-            </a:r>
-            <a:r>
-              <a:rPr sz="1700" b="0" i="0" lang="th-TH" altLang="en-US">
-                <a:solidFill>
-                  <a:srgbClr val="24333D"/>
-                </a:solidFill>
-                <a:latin typeface="Sarabun"/>
-                <a:ea typeface="Sarabun"/>
-                <a:cs typeface="Sarabun"/>
-              </a:rPr>
-              <a:t>ครับ.</a:t>
+              <a:t>my name is... (female)</a:t>
             </a:r>
           </a:p>
         </p:txBody>
@@ -7431,7 +7960,7 @@
           <a:p>
             <a:pPr algn="l"/>
             <a:r>
-              <a:rPr sz="2800" b="1" i="0" lang="en-US" altLang="en-US">
+              <a:rPr sz="3600" b="1" i="0" lang="en-US" altLang="en-US">
                 <a:solidFill>
                   <a:srgbClr val="24333D"/>
                 </a:solidFill>
@@ -7439,7 +7968,7 @@
                 <a:ea typeface="Sarabun"/>
                 <a:cs typeface="Sarabun"/>
               </a:rPr>
-              <a:t>The word for person and putting it together</a:t>
+              <a:t>Where you come from</a:t>
             </a:r>
           </a:p>
         </p:txBody>
@@ -7560,7 +8089,7 @@
                 <a:ea typeface="Sarabun"/>
                 <a:cs typeface="Sarabun"/>
               </a:rPr>
-              <a:t>คน</a:t>
+              <a:t>มาจาก</a:t>
             </a:r>
           </a:p>
         </p:txBody>
@@ -7597,7 +8126,7 @@
                 <a:ea typeface="Sarabun"/>
                 <a:cs typeface="Sarabun"/>
               </a:rPr>
-              <a:t>khon</a:t>
+              <a:t>maa-jàak</a:t>
             </a:r>
           </a:p>
         </p:txBody>
@@ -7634,7 +8163,7 @@
                 <a:ea typeface="Sarabun"/>
                 <a:cs typeface="Sarabun"/>
               </a:rPr>
-              <a:t>person</a:t>
+              <a:t>come from</a:t>
             </a:r>
           </a:p>
         </p:txBody>
@@ -7755,7 +8284,7 @@
                 <a:ea typeface="Sarabun"/>
                 <a:cs typeface="Sarabun"/>
               </a:rPr>
-              <a:t>คนไทย</a:t>
+              <a:t>ประเทศ</a:t>
             </a:r>
           </a:p>
         </p:txBody>
@@ -7792,7 +8321,7 @@
                 <a:ea typeface="Sarabun"/>
                 <a:cs typeface="Sarabun"/>
               </a:rPr>
-              <a:t>khon thai</a:t>
+              <a:t>bprà-thêet</a:t>
             </a:r>
           </a:p>
         </p:txBody>
@@ -7829,7 +8358,7 @@
                 <a:ea typeface="Sarabun"/>
                 <a:cs typeface="Sarabun"/>
               </a:rPr>
-              <a:t>Thai person</a:t>
+              <a:t>country</a:t>
             </a:r>
           </a:p>
         </p:txBody>
@@ -7950,7 +8479,7 @@
                 <a:ea typeface="Sarabun"/>
                 <a:cs typeface="Sarabun"/>
               </a:rPr>
-              <a:t>คนอังกฤษ</a:t>
+              <a:t>มาจากประเทศ...</a:t>
             </a:r>
           </a:p>
         </p:txBody>
@@ -7987,7 +8516,7 @@
                 <a:ea typeface="Sarabun"/>
                 <a:cs typeface="Sarabun"/>
               </a:rPr>
-              <a:t>khon ang-grìt</a:t>
+              <a:t>maa-jàak bprà-thêet...</a:t>
             </a:r>
           </a:p>
         </p:txBody>
@@ -8024,7 +8553,7 @@
                 <a:ea typeface="Sarabun"/>
                 <a:cs typeface="Sarabun"/>
               </a:rPr>
-              <a:t>English person</a:t>
+              <a:t>come from (country)...</a:t>
             </a:r>
           </a:p>
         </p:txBody>
@@ -8216,7 +8745,7 @@
           <a:p>
             <a:pPr algn="l"/>
             <a:r>
-              <a:rPr sz="2800" b="1" i="0" lang="en-US" altLang="en-US">
+              <a:rPr sz="3600" b="1" i="0" lang="en-US" altLang="en-US">
                 <a:solidFill>
                   <a:srgbClr val="24333D"/>
                 </a:solidFill>
@@ -8224,40 +8753,7 @@
                 <a:ea typeface="Sarabun"/>
                 <a:cs typeface="Sarabun"/>
               </a:rPr>
-              <a:t>Pronunciation: the falling tone on </a:t>
-            </a:r>
-            <a:r>
-              <a:rPr sz="2800" b="1" i="0" lang="th-TH" altLang="en-US">
-                <a:solidFill>
-                  <a:srgbClr val="24333D"/>
-                </a:solidFill>
-                <a:latin typeface="Sarabun"/>
-                <a:ea typeface="Sarabun"/>
-                <a:cs typeface="Sarabun"/>
-              </a:rPr>
-              <a:t>ชื่อ</a:t>
-            </a:r>
-            <a:r>
-              <a:rPr sz="1739" b="0" i="1" lang="en-US" altLang="en-US">
-                <a:solidFill>
-                  <a:srgbClr val="566873"/>
-                </a:solidFill>
-                <a:latin typeface="Sarabun"/>
-                <a:ea typeface="Sarabun"/>
-                <a:cs typeface="Sarabun"/>
-              </a:rPr>
-              <a:t> (chûue)</a:t>
-            </a:r>
-            <a:r>
-              <a:rPr sz="2800" b="1" i="0" lang="th-TH" altLang="en-US">
-                <a:solidFill>
-                  <a:srgbClr val="24333D"/>
-                </a:solidFill>
-                <a:latin typeface="Sarabun"/>
-                <a:ea typeface="Sarabun"/>
-                <a:cs typeface="Sarabun"/>
-              </a:rPr>
-              <a:t> and rising tone on ไหน</a:t>
+              <a:t>Thailand, England, and America</a:t>
             </a:r>
           </a:p>
         </p:txBody>
@@ -8378,7 +8874,7 @@
                 <a:ea typeface="Sarabun"/>
                 <a:cs typeface="Sarabun"/>
               </a:rPr>
-              <a:t>ชื่อ</a:t>
+              <a:t>ไทย</a:t>
             </a:r>
           </a:p>
         </p:txBody>
@@ -8415,7 +8911,7 @@
                 <a:ea typeface="Sarabun"/>
                 <a:cs typeface="Sarabun"/>
               </a:rPr>
-              <a:t>chûue</a:t>
+              <a:t>thai</a:t>
             </a:r>
           </a:p>
         </p:txBody>
@@ -8452,7 +8948,7 @@
                 <a:ea typeface="Sarabun"/>
                 <a:cs typeface="Sarabun"/>
               </a:rPr>
-              <a:t>falling tone — voice starts high, drops</a:t>
+              <a:t>Thailand / Thai</a:t>
             </a:r>
           </a:p>
         </p:txBody>
@@ -8573,7 +9069,7 @@
                 <a:ea typeface="Sarabun"/>
                 <a:cs typeface="Sarabun"/>
               </a:rPr>
-              <a:t>มา</a:t>
+              <a:t>อังกฤษ</a:t>
             </a:r>
           </a:p>
         </p:txBody>
@@ -8610,7 +9106,7 @@
                 <a:ea typeface="Sarabun"/>
                 <a:cs typeface="Sarabun"/>
               </a:rPr>
-              <a:t>maa</a:t>
+              <a:t>ang-grìt</a:t>
             </a:r>
           </a:p>
         </p:txBody>
@@ -8647,7 +9143,7 @@
                 <a:ea typeface="Sarabun"/>
                 <a:cs typeface="Sarabun"/>
               </a:rPr>
-              <a:t>mid tone — voice stays flat</a:t>
+              <a:t>England / English</a:t>
             </a:r>
           </a:p>
         </p:txBody>
@@ -8768,7 +9264,7 @@
                 <a:ea typeface="Sarabun"/>
                 <a:cs typeface="Sarabun"/>
               </a:rPr>
-              <a:t>จาก</a:t>
+              <a:t>อเมริกา</a:t>
             </a:r>
           </a:p>
         </p:txBody>
@@ -8805,7 +9301,7 @@
                 <a:ea typeface="Sarabun"/>
                 <a:cs typeface="Sarabun"/>
               </a:rPr>
-              <a:t>jàak</a:t>
+              <a:t>à-mee-rí-kaa</a:t>
             </a:r>
           </a:p>
         </p:txBody>
@@ -8842,7 +9338,7 @@
                 <a:ea typeface="Sarabun"/>
                 <a:cs typeface="Sarabun"/>
               </a:rPr>
-              <a:t>low tone — voice dips down</a:t>
+              <a:t>America</a:t>
             </a:r>
           </a:p>
         </p:txBody>
@@ -9005,7 +9501,7 @@
                 <a:ea typeface="Sarabun"/>
                 <a:cs typeface="Sarabun"/>
               </a:rPr>
-              <a:t>Roleplay</a:t>
+              <a:t>Teaching slide</a:t>
             </a:r>
           </a:p>
         </p:txBody>
@@ -9042,7 +9538,7 @@
                 <a:ea typeface="Sarabun"/>
                 <a:cs typeface="Sarabun"/>
               </a:rPr>
-              <a:t>Roleplay</a:t>
+              <a:t>Thailand, England, and America</a:t>
             </a:r>
           </a:p>
         </p:txBody>
@@ -9055,17 +9551,13 @@
         </p:nvSpPr>
         <p:spPr>
           <a:xfrm>
-            <a:off x="731520" y="1097280"/>
-            <a:ext cx="1371600" cy="274320"/>
+            <a:off x="731520" y="1325880"/>
+            <a:ext cx="7071055" cy="1572768"/>
           </a:xfrm>
           <a:prstGeom prst="roundRect">
-            <a:avLst>
-              <a:gd name="adj" fmla="val 28000"/>
-            </a:avLst>
-          </a:prstGeom>
-          <a:solidFill>
-            <a:srgbClr val="7A8F54"/>
-          </a:solidFill>
+            <a:avLst/>
+          </a:prstGeom>
+          <a:noFill/>
           <a:ln>
             <a:noFill/>
           </a:ln>
@@ -9085,34 +9577,66 @@
           </a:fontRef>
         </p:style>
         <p:txBody>
-          <a:bodyPr rtlCol="0" anchor="ctr" wrap="none"/>
+          <a:bodyPr rtlCol="0" anchor="ctr"/>
           <a:lstStyle/>
           <a:p>
             <a:pPr algn="ctr"/>
-            <a:r>
-              <a:rPr sz="1200" b="1" lang="en-US" altLang="en-US">
-                <a:solidFill>
-                  <a:srgbClr val="FFFFFF"/>
-                </a:solidFill>
-                <a:latin typeface="Sarabun"/>
-                <a:ea typeface="Sarabun"/>
-                <a:cs typeface="Sarabun"/>
-              </a:rPr>
-              <a:t>New person</a:t>
-            </a:r>
-          </a:p>
-        </p:txBody>
-      </p:sp>
-      <p:sp>
-        <p:nvSpPr>
-          <p:cNvPr id="7" name="TextBox 6"/>
+          </a:p>
+        </p:txBody>
+      </p:sp>
+      <p:sp>
+        <p:nvSpPr>
+          <p:cNvPr id="7" name="Rectangle 6"/>
+          <p:cNvSpPr/>
+          <p:nvPr/>
+        </p:nvSpPr>
+        <p:spPr>
+          <a:xfrm>
+            <a:off x="868680" y="1527048"/>
+            <a:ext cx="73152" cy="1143000"/>
+          </a:xfrm>
+          <a:prstGeom prst="rect">
+            <a:avLst/>
+          </a:prstGeom>
+          <a:solidFill>
+            <a:srgbClr val="355C7D"/>
+          </a:solidFill>
+          <a:ln>
+            <a:noFill/>
+          </a:ln>
+        </p:spPr>
+        <p:style>
+          <a:lnRef idx="1">
+            <a:schemeClr val="accent1"/>
+          </a:lnRef>
+          <a:fillRef idx="3">
+            <a:schemeClr val="accent1"/>
+          </a:fillRef>
+          <a:effectRef idx="2">
+            <a:schemeClr val="accent1"/>
+          </a:effectRef>
+          <a:fontRef idx="minor">
+            <a:schemeClr val="lt1"/>
+          </a:fontRef>
+        </p:style>
+        <p:txBody>
+          <a:bodyPr rtlCol="0" anchor="ctr"/>
+          <a:lstStyle/>
+          <a:p>
+            <a:pPr algn="ctr"/>
+          </a:p>
+        </p:txBody>
+      </p:sp>
+      <p:sp>
+        <p:nvSpPr>
+          <p:cNvPr id="8" name="TextBox 7"/>
           <p:cNvSpPr txBox="1"/>
           <p:nvPr/>
         </p:nvSpPr>
         <p:spPr>
           <a:xfrm>
-            <a:off x="1965960" y="1069848"/>
-            <a:ext cx="5836615" cy="228600"/>
+            <a:off x="1078992" y="1463040"/>
+            <a:ext cx="6613855" cy="320040"/>
           </a:xfrm>
           <a:prstGeom prst="rect">
             <a:avLst/>
@@ -9135,21 +9659,21 @@
                 <a:ea typeface="Sarabun"/>
                 <a:cs typeface="Sarabun"/>
               </a:rPr>
-              <a:t>สวัสดีค่ะ คุณชื่ออะไรคะ</a:t>
-            </a:r>
-          </a:p>
-        </p:txBody>
-      </p:sp>
-      <p:sp>
-        <p:nvSpPr>
-          <p:cNvPr id="8" name="TextBox 7"/>
+              <a:t>คนไทย</a:t>
+            </a:r>
+          </a:p>
+        </p:txBody>
+      </p:sp>
+      <p:sp>
+        <p:nvSpPr>
+          <p:cNvPr id="9" name="TextBox 8"/>
           <p:cNvSpPr txBox="1"/>
           <p:nvPr/>
         </p:nvSpPr>
         <p:spPr>
           <a:xfrm>
-            <a:off x="1965960" y="1298448"/>
-            <a:ext cx="5836615" cy="201168"/>
+            <a:off x="1078992" y="1828800"/>
+            <a:ext cx="6613855" cy="274320"/>
           </a:xfrm>
           <a:prstGeom prst="rect">
             <a:avLst/>
@@ -9172,21 +9696,21 @@
                 <a:ea typeface="Sarabun"/>
                 <a:cs typeface="Sarabun"/>
               </a:rPr>
-              <a:t>sà-wàt-dii khâ khun chûue à-rai khá</a:t>
-            </a:r>
-          </a:p>
-        </p:txBody>
-      </p:sp>
-      <p:sp>
-        <p:nvSpPr>
-          <p:cNvPr id="9" name="TextBox 8"/>
+              <a:t>khon thai</a:t>
+            </a:r>
+          </a:p>
+        </p:txBody>
+      </p:sp>
+      <p:sp>
+        <p:nvSpPr>
+          <p:cNvPr id="10" name="TextBox 9"/>
           <p:cNvSpPr txBox="1"/>
           <p:nvPr/>
         </p:nvSpPr>
         <p:spPr>
           <a:xfrm>
-            <a:off x="1965960" y="1499616"/>
-            <a:ext cx="5836615" cy="201168"/>
+            <a:off x="1078992" y="2203704"/>
+            <a:ext cx="6613855" cy="274320"/>
           </a:xfrm>
           <a:prstGeom prst="rect">
             <a:avLst/>
@@ -9203,32 +9727,262 @@
             <a:r>
               <a:rPr sz="1700" b="0" i="0" lang="en-US" altLang="en-US">
                 <a:solidFill>
+                  <a:srgbClr val="82909A"/>
+                </a:solidFill>
+                <a:latin typeface="Sarabun"/>
+                <a:ea typeface="Sarabun"/>
+                <a:cs typeface="Sarabun"/>
+              </a:rPr>
+              <a:t>Thai person</a:t>
+            </a:r>
+          </a:p>
+        </p:txBody>
+      </p:sp>
+      <p:sp>
+        <p:nvSpPr>
+          <p:cNvPr id="11" name="Rounded Rectangle 10"/>
+          <p:cNvSpPr/>
+          <p:nvPr/>
+        </p:nvSpPr>
+        <p:spPr>
+          <a:xfrm>
+            <a:off x="731520" y="3081528"/>
+            <a:ext cx="7071055" cy="1572768"/>
+          </a:xfrm>
+          <a:prstGeom prst="roundRect">
+            <a:avLst/>
+          </a:prstGeom>
+          <a:noFill/>
+          <a:ln>
+            <a:noFill/>
+          </a:ln>
+        </p:spPr>
+        <p:style>
+          <a:lnRef idx="1">
+            <a:schemeClr val="accent1"/>
+          </a:lnRef>
+          <a:fillRef idx="3">
+            <a:schemeClr val="accent1"/>
+          </a:fillRef>
+          <a:effectRef idx="2">
+            <a:schemeClr val="accent1"/>
+          </a:effectRef>
+          <a:fontRef idx="minor">
+            <a:schemeClr val="lt1"/>
+          </a:fontRef>
+        </p:style>
+        <p:txBody>
+          <a:bodyPr rtlCol="0" anchor="ctr"/>
+          <a:lstStyle/>
+          <a:p>
+            <a:pPr algn="ctr"/>
+          </a:p>
+        </p:txBody>
+      </p:sp>
+      <p:sp>
+        <p:nvSpPr>
+          <p:cNvPr id="12" name="Rectangle 11"/>
+          <p:cNvSpPr/>
+          <p:nvPr/>
+        </p:nvSpPr>
+        <p:spPr>
+          <a:xfrm>
+            <a:off x="868680" y="3282696"/>
+            <a:ext cx="73152" cy="1143000"/>
+          </a:xfrm>
+          <a:prstGeom prst="rect">
+            <a:avLst/>
+          </a:prstGeom>
+          <a:solidFill>
+            <a:srgbClr val="355C7D"/>
+          </a:solidFill>
+          <a:ln>
+            <a:noFill/>
+          </a:ln>
+        </p:spPr>
+        <p:style>
+          <a:lnRef idx="1">
+            <a:schemeClr val="accent1"/>
+          </a:lnRef>
+          <a:fillRef idx="3">
+            <a:schemeClr val="accent1"/>
+          </a:fillRef>
+          <a:effectRef idx="2">
+            <a:schemeClr val="accent1"/>
+          </a:effectRef>
+          <a:fontRef idx="minor">
+            <a:schemeClr val="lt1"/>
+          </a:fontRef>
+        </p:style>
+        <p:txBody>
+          <a:bodyPr rtlCol="0" anchor="ctr"/>
+          <a:lstStyle/>
+          <a:p>
+            <a:pPr algn="ctr"/>
+          </a:p>
+        </p:txBody>
+      </p:sp>
+      <p:sp>
+        <p:nvSpPr>
+          <p:cNvPr id="13" name="TextBox 12"/>
+          <p:cNvSpPr txBox="1"/>
+          <p:nvPr/>
+        </p:nvSpPr>
+        <p:spPr>
+          <a:xfrm>
+            <a:off x="1078992" y="3218688"/>
+            <a:ext cx="6613855" cy="320040"/>
+          </a:xfrm>
+          <a:prstGeom prst="rect">
+            <a:avLst/>
+          </a:prstGeom>
+          <a:noFill/>
+        </p:spPr>
+        <p:txBody>
+          <a:bodyPr wrap="square" anchor="t">
+            <a:spAutoFit/>
+          </a:bodyPr>
+          <a:lstStyle/>
+          <a:p>
+            <a:pPr algn="l"/>
+            <a:r>
+              <a:rPr sz="1700" b="0" i="0" lang="th-TH" altLang="en-US">
+                <a:solidFill>
+                  <a:srgbClr val="24333D"/>
+                </a:solidFill>
+                <a:latin typeface="Sarabun"/>
+                <a:ea typeface="Sarabun"/>
+                <a:cs typeface="Sarabun"/>
+              </a:rPr>
+              <a:t>คนอังกฤษ</a:t>
+            </a:r>
+          </a:p>
+        </p:txBody>
+      </p:sp>
+      <p:sp>
+        <p:nvSpPr>
+          <p:cNvPr id="14" name="TextBox 13"/>
+          <p:cNvSpPr txBox="1"/>
+          <p:nvPr/>
+        </p:nvSpPr>
+        <p:spPr>
+          <a:xfrm>
+            <a:off x="1078992" y="3584448"/>
+            <a:ext cx="6613855" cy="274320"/>
+          </a:xfrm>
+          <a:prstGeom prst="rect">
+            <a:avLst/>
+          </a:prstGeom>
+          <a:noFill/>
+        </p:spPr>
+        <p:txBody>
+          <a:bodyPr wrap="square" anchor="t">
+            <a:spAutoFit/>
+          </a:bodyPr>
+          <a:lstStyle/>
+          <a:p>
+            <a:pPr algn="l"/>
+            <a:r>
+              <a:rPr sz="1700" b="0" i="1" lang="en-US" altLang="en-US">
+                <a:solidFill>
                   <a:srgbClr val="566873"/>
                 </a:solidFill>
                 <a:latin typeface="Sarabun"/>
                 <a:ea typeface="Sarabun"/>
                 <a:cs typeface="Sarabun"/>
               </a:rPr>
-              <a:t>Hello! What is your name?</a:t>
-            </a:r>
-          </a:p>
-        </p:txBody>
-      </p:sp>
-      <p:sp>
-        <p:nvSpPr>
-          <p:cNvPr id="10" name="Rounded Rectangle 9"/>
+              <a:t>khon ang-grìt</a:t>
+            </a:r>
+          </a:p>
+        </p:txBody>
+      </p:sp>
+      <p:sp>
+        <p:nvSpPr>
+          <p:cNvPr id="15" name="TextBox 14"/>
+          <p:cNvSpPr txBox="1"/>
+          <p:nvPr/>
+        </p:nvSpPr>
+        <p:spPr>
+          <a:xfrm>
+            <a:off x="1078992" y="3959352"/>
+            <a:ext cx="6613855" cy="274320"/>
+          </a:xfrm>
+          <a:prstGeom prst="rect">
+            <a:avLst/>
+          </a:prstGeom>
+          <a:noFill/>
+        </p:spPr>
+        <p:txBody>
+          <a:bodyPr wrap="square" anchor="t">
+            <a:spAutoFit/>
+          </a:bodyPr>
+          <a:lstStyle/>
+          <a:p>
+            <a:pPr algn="l"/>
+            <a:r>
+              <a:rPr sz="1700" b="0" i="0" lang="en-US" altLang="en-US">
+                <a:solidFill>
+                  <a:srgbClr val="82909A"/>
+                </a:solidFill>
+                <a:latin typeface="Sarabun"/>
+                <a:ea typeface="Sarabun"/>
+                <a:cs typeface="Sarabun"/>
+              </a:rPr>
+              <a:t>English person</a:t>
+            </a:r>
+          </a:p>
+        </p:txBody>
+      </p:sp>
+      <p:sp>
+        <p:nvSpPr>
+          <p:cNvPr id="16" name="TextBox 15"/>
+          <p:cNvSpPr txBox="1"/>
+          <p:nvPr/>
+        </p:nvSpPr>
+        <p:spPr>
+          <a:xfrm>
+            <a:off x="932688" y="5120640"/>
+            <a:ext cx="9692640" cy="228600"/>
+          </a:xfrm>
+          <a:prstGeom prst="rect">
+            <a:avLst/>
+          </a:prstGeom>
+          <a:noFill/>
+        </p:spPr>
+        <p:txBody>
+          <a:bodyPr wrap="square" anchor="t">
+            <a:spAutoFit/>
+          </a:bodyPr>
+          <a:lstStyle/>
+          <a:p>
+            <a:pPr algn="l"/>
+            <a:r>
+              <a:rPr sz="1700" b="1" i="0" lang="en-US" altLang="en-US">
+                <a:solidFill>
+                  <a:srgbClr val="C96F4A"/>
+                </a:solidFill>
+                <a:latin typeface="Sarabun"/>
+                <a:ea typeface="Sarabun"/>
+                <a:cs typeface="Sarabun"/>
+              </a:rPr>
+              <a:t>Practice</a:t>
+            </a:r>
+          </a:p>
+        </p:txBody>
+      </p:sp>
+      <p:sp>
+        <p:nvSpPr>
+          <p:cNvPr id="17" name="Oval 16"/>
           <p:cNvSpPr/>
           <p:nvPr/>
         </p:nvSpPr>
         <p:spPr>
           <a:xfrm>
-            <a:off x="731520" y="2011680"/>
-            <a:ext cx="1051560" cy="274320"/>
-          </a:xfrm>
-          <a:prstGeom prst="roundRect">
-            <a:avLst>
-              <a:gd name="adj" fmla="val 28000"/>
-            </a:avLst>
+            <a:off x="932688" y="5504688"/>
+            <a:ext cx="82296" cy="82296"/>
+          </a:xfrm>
+          <a:prstGeom prst="ellipse">
+            <a:avLst/>
           </a:prstGeom>
           <a:solidFill>
             <a:srgbClr val="C96F4A"/>
@@ -9252,34 +10006,23 @@
           </a:fontRef>
         </p:style>
         <p:txBody>
-          <a:bodyPr rtlCol="0" anchor="ctr" wrap="none"/>
+          <a:bodyPr rtlCol="0" anchor="ctr"/>
           <a:lstStyle/>
           <a:p>
             <a:pPr algn="ctr"/>
-            <a:r>
-              <a:rPr sz="1200" b="1" lang="en-US" altLang="en-US">
-                <a:solidFill>
-                  <a:srgbClr val="FFFFFF"/>
-                </a:solidFill>
-                <a:latin typeface="Sarabun"/>
-                <a:ea typeface="Sarabun"/>
-                <a:cs typeface="Sarabun"/>
-              </a:rPr>
-              <a:t>You</a:t>
-            </a:r>
-          </a:p>
-        </p:txBody>
-      </p:sp>
-      <p:sp>
-        <p:nvSpPr>
-          <p:cNvPr id="11" name="TextBox 10"/>
+          </a:p>
+        </p:txBody>
+      </p:sp>
+      <p:sp>
+        <p:nvSpPr>
+          <p:cNvPr id="18" name="TextBox 17"/>
           <p:cNvSpPr txBox="1"/>
           <p:nvPr/>
         </p:nvSpPr>
         <p:spPr>
           <a:xfrm>
-            <a:off x="1965960" y="1984248"/>
-            <a:ext cx="5836615" cy="228600"/>
+            <a:off x="1078992" y="5413248"/>
+            <a:ext cx="9555480" cy="274320"/>
           </a:xfrm>
           <a:prstGeom prst="rect">
             <a:avLst/>
@@ -9294,6 +10037,17 @@
           <a:p>
             <a:pPr algn="l"/>
             <a:r>
+              <a:rPr sz="1700" b="0" i="0" lang="en-US" altLang="en-US">
+                <a:solidFill>
+                  <a:srgbClr val="24333D"/>
+                </a:solidFill>
+                <a:latin typeface="Sarabun"/>
+                <a:ea typeface="Sarabun"/>
+                <a:cs typeface="Sarabun"/>
+              </a:rPr>
+              <a:t>Listen and repeat: </a:t>
+            </a:r>
+            <a:r>
               <a:rPr sz="1700" b="0" i="0" lang="th-TH" altLang="en-US">
                 <a:solidFill>
                   <a:srgbClr val="24333D"/>
@@ -9302,34 +10056,8 @@
                 <a:ea typeface="Sarabun"/>
                 <a:cs typeface="Sarabun"/>
               </a:rPr>
-              <a:t>สวัสดีครับ ผมชื่อ Oliver ครับ</a:t>
-            </a:r>
-          </a:p>
-        </p:txBody>
-      </p:sp>
-      <p:sp>
-        <p:nvSpPr>
-          <p:cNvPr id="12" name="TextBox 11"/>
-          <p:cNvSpPr txBox="1"/>
-          <p:nvPr/>
-        </p:nvSpPr>
-        <p:spPr>
-          <a:xfrm>
-            <a:off x="1965960" y="2212848"/>
-            <a:ext cx="5836615" cy="201168"/>
-          </a:xfrm>
-          <a:prstGeom prst="rect">
-            <a:avLst/>
-          </a:prstGeom>
-          <a:noFill/>
-        </p:spPr>
-        <p:txBody>
-          <a:bodyPr wrap="square" anchor="t">
-            <a:spAutoFit/>
-          </a:bodyPr>
-          <a:lstStyle/>
-          <a:p>
-            <a:pPr algn="l"/>
+              <a:t>ไทย</a:t>
+            </a:r>
             <a:r>
               <a:rPr sz="1700" b="0" i="1" lang="en-US" altLang="en-US">
                 <a:solidFill>
@@ -9339,230 +10067,101 @@
                 <a:ea typeface="Sarabun"/>
                 <a:cs typeface="Sarabun"/>
               </a:rPr>
-              <a:t>sà-wàt-dii khráp phǒm chûue Oliver khráp</a:t>
-            </a:r>
-          </a:p>
-        </p:txBody>
-      </p:sp>
-      <p:sp>
-        <p:nvSpPr>
-          <p:cNvPr id="13" name="TextBox 12"/>
-          <p:cNvSpPr txBox="1"/>
-          <p:nvPr/>
-        </p:nvSpPr>
-        <p:spPr>
-          <a:xfrm>
-            <a:off x="1965960" y="2414016"/>
-            <a:ext cx="5836615" cy="201168"/>
-          </a:xfrm>
-          <a:prstGeom prst="rect">
-            <a:avLst/>
-          </a:prstGeom>
-          <a:noFill/>
-        </p:spPr>
-        <p:txBody>
-          <a:bodyPr wrap="square" anchor="t">
-            <a:spAutoFit/>
-          </a:bodyPr>
-          <a:lstStyle/>
-          <a:p>
-            <a:pPr algn="l"/>
+              <a:t> (thai)</a:t>
+            </a:r>
             <a:r>
               <a:rPr sz="1700" b="0" i="0" lang="en-US" altLang="en-US">
                 <a:solidFill>
+                  <a:srgbClr val="24333D"/>
+                </a:solidFill>
+                <a:latin typeface="Sarabun"/>
+                <a:ea typeface="Sarabun"/>
+                <a:cs typeface="Sarabun"/>
+              </a:rPr>
+              <a:t>, </a:t>
+            </a:r>
+            <a:r>
+              <a:rPr sz="1700" b="0" i="0" lang="th-TH" altLang="en-US">
+                <a:solidFill>
+                  <a:srgbClr val="24333D"/>
+                </a:solidFill>
+                <a:latin typeface="Sarabun"/>
+                <a:ea typeface="Sarabun"/>
+                <a:cs typeface="Sarabun"/>
+              </a:rPr>
+              <a:t>อังกฤษ</a:t>
+            </a:r>
+            <a:r>
+              <a:rPr sz="1700" b="0" i="1" lang="en-US" altLang="en-US">
+                <a:solidFill>
                   <a:srgbClr val="566873"/>
                 </a:solidFill>
                 <a:latin typeface="Sarabun"/>
                 <a:ea typeface="Sarabun"/>
                 <a:cs typeface="Sarabun"/>
               </a:rPr>
-              <a:t>Hello! My name is Oliver.</a:t>
-            </a:r>
-          </a:p>
-        </p:txBody>
-      </p:sp>
-      <p:sp>
-        <p:nvSpPr>
-          <p:cNvPr id="14" name="Rounded Rectangle 13"/>
+              <a:t> (ang-grìt)</a:t>
+            </a:r>
+            <a:r>
+              <a:rPr sz="1700" b="0" i="0" lang="en-US" altLang="en-US">
+                <a:solidFill>
+                  <a:srgbClr val="24333D"/>
+                </a:solidFill>
+                <a:latin typeface="Sarabun"/>
+                <a:ea typeface="Sarabun"/>
+                <a:cs typeface="Sarabun"/>
+              </a:rPr>
+              <a:t>, </a:t>
+            </a:r>
+            <a:r>
+              <a:rPr sz="1700" b="0" i="0" lang="th-TH" altLang="en-US">
+                <a:solidFill>
+                  <a:srgbClr val="24333D"/>
+                </a:solidFill>
+                <a:latin typeface="Sarabun"/>
+                <a:ea typeface="Sarabun"/>
+                <a:cs typeface="Sarabun"/>
+              </a:rPr>
+              <a:t>อเมริกา</a:t>
+            </a:r>
+            <a:r>
+              <a:rPr sz="1700" b="0" i="1" lang="en-US" altLang="en-US">
+                <a:solidFill>
+                  <a:srgbClr val="566873"/>
+                </a:solidFill>
+                <a:latin typeface="Sarabun"/>
+                <a:ea typeface="Sarabun"/>
+                <a:cs typeface="Sarabun"/>
+              </a:rPr>
+              <a:t> (à-mee-rí-kaa)</a:t>
+            </a:r>
+            <a:r>
+              <a:rPr sz="1700" b="0" i="0" lang="en-US" altLang="en-US">
+                <a:solidFill>
+                  <a:srgbClr val="24333D"/>
+                </a:solidFill>
+                <a:latin typeface="Sarabun"/>
+                <a:ea typeface="Sarabun"/>
+                <a:cs typeface="Sarabun"/>
+              </a:rPr>
+              <a:t>. Say each one twice.</a:t>
+            </a:r>
+          </a:p>
+        </p:txBody>
+      </p:sp>
+      <p:sp>
+        <p:nvSpPr>
+          <p:cNvPr id="19" name="Oval 18"/>
           <p:cNvSpPr/>
           <p:nvPr/>
         </p:nvSpPr>
         <p:spPr>
           <a:xfrm>
-            <a:off x="731520" y="2926080"/>
-            <a:ext cx="1371600" cy="274320"/>
-          </a:xfrm>
-          <a:prstGeom prst="roundRect">
-            <a:avLst>
-              <a:gd name="adj" fmla="val 28000"/>
-            </a:avLst>
-          </a:prstGeom>
-          <a:solidFill>
-            <a:srgbClr val="7A8F54"/>
-          </a:solidFill>
-          <a:ln>
-            <a:noFill/>
-          </a:ln>
-        </p:spPr>
-        <p:style>
-          <a:lnRef idx="1">
-            <a:schemeClr val="accent1"/>
-          </a:lnRef>
-          <a:fillRef idx="3">
-            <a:schemeClr val="accent1"/>
-          </a:fillRef>
-          <a:effectRef idx="2">
-            <a:schemeClr val="accent1"/>
-          </a:effectRef>
-          <a:fontRef idx="minor">
-            <a:schemeClr val="lt1"/>
-          </a:fontRef>
-        </p:style>
-        <p:txBody>
-          <a:bodyPr rtlCol="0" anchor="ctr" wrap="none"/>
-          <a:lstStyle/>
-          <a:p>
-            <a:pPr algn="ctr"/>
-            <a:r>
-              <a:rPr sz="1200" b="1" lang="en-US" altLang="en-US">
-                <a:solidFill>
-                  <a:srgbClr val="FFFFFF"/>
-                </a:solidFill>
-                <a:latin typeface="Sarabun"/>
-                <a:ea typeface="Sarabun"/>
-                <a:cs typeface="Sarabun"/>
-              </a:rPr>
-              <a:t>New person</a:t>
-            </a:r>
-          </a:p>
-        </p:txBody>
-      </p:sp>
-      <p:sp>
-        <p:nvSpPr>
-          <p:cNvPr id="15" name="TextBox 14"/>
-          <p:cNvSpPr txBox="1"/>
-          <p:nvPr/>
-        </p:nvSpPr>
-        <p:spPr>
-          <a:xfrm>
-            <a:off x="1965960" y="2898648"/>
-            <a:ext cx="8823960" cy="228600"/>
-          </a:xfrm>
-          <a:prstGeom prst="rect">
-            <a:avLst/>
-          </a:prstGeom>
-          <a:noFill/>
-        </p:spPr>
-        <p:txBody>
-          <a:bodyPr wrap="square" anchor="t">
-            <a:spAutoFit/>
-          </a:bodyPr>
-          <a:lstStyle/>
-          <a:p>
-            <a:pPr algn="l"/>
-            <a:r>
-              <a:rPr sz="1700" b="0" i="0" lang="th-TH" altLang="en-US">
-                <a:solidFill>
-                  <a:srgbClr val="24333D"/>
-                </a:solidFill>
-                <a:latin typeface="Sarabun"/>
-                <a:ea typeface="Sarabun"/>
-                <a:cs typeface="Sarabun"/>
-              </a:rPr>
-              <a:t>ยินดีที่ได้รู้จักค่ะ คุณมาจากไหนคะ</a:t>
-            </a:r>
-          </a:p>
-        </p:txBody>
-      </p:sp>
-      <p:sp>
-        <p:nvSpPr>
-          <p:cNvPr id="16" name="TextBox 15"/>
-          <p:cNvSpPr txBox="1"/>
-          <p:nvPr/>
-        </p:nvSpPr>
-        <p:spPr>
-          <a:xfrm>
-            <a:off x="1965960" y="3127248"/>
-            <a:ext cx="8823960" cy="201168"/>
-          </a:xfrm>
-          <a:prstGeom prst="rect">
-            <a:avLst/>
-          </a:prstGeom>
-          <a:noFill/>
-        </p:spPr>
-        <p:txBody>
-          <a:bodyPr wrap="square" anchor="t">
-            <a:spAutoFit/>
-          </a:bodyPr>
-          <a:lstStyle/>
-          <a:p>
-            <a:pPr algn="l"/>
-            <a:r>
-              <a:rPr sz="1700" b="0" i="1" lang="en-US" altLang="en-US">
-                <a:solidFill>
-                  <a:srgbClr val="566873"/>
-                </a:solidFill>
-                <a:latin typeface="Sarabun"/>
-                <a:ea typeface="Sarabun"/>
-                <a:cs typeface="Sarabun"/>
-              </a:rPr>
-              <a:t>yin-dii thîi dâai rúu-jàk khâ khun maa-jàak nǎi khá</a:t>
-            </a:r>
-          </a:p>
-        </p:txBody>
-      </p:sp>
-      <p:sp>
-        <p:nvSpPr>
-          <p:cNvPr id="17" name="TextBox 16"/>
-          <p:cNvSpPr txBox="1"/>
-          <p:nvPr/>
-        </p:nvSpPr>
-        <p:spPr>
-          <a:xfrm>
-            <a:off x="1965960" y="3328416"/>
-            <a:ext cx="8823960" cy="201168"/>
-          </a:xfrm>
-          <a:prstGeom prst="rect">
-            <a:avLst/>
-          </a:prstGeom>
-          <a:noFill/>
-        </p:spPr>
-        <p:txBody>
-          <a:bodyPr wrap="square" anchor="t">
-            <a:spAutoFit/>
-          </a:bodyPr>
-          <a:lstStyle/>
-          <a:p>
-            <a:pPr algn="l"/>
-            <a:r>
-              <a:rPr sz="1700" b="0" i="0" lang="en-US" altLang="en-US">
-                <a:solidFill>
-                  <a:srgbClr val="566873"/>
-                </a:solidFill>
-                <a:latin typeface="Sarabun"/>
-                <a:ea typeface="Sarabun"/>
-                <a:cs typeface="Sarabun"/>
-              </a:rPr>
-              <a:t>Nice to meet you. Where are you from?</a:t>
-            </a:r>
-          </a:p>
-        </p:txBody>
-      </p:sp>
-      <p:sp>
-        <p:nvSpPr>
-          <p:cNvPr id="18" name="Rounded Rectangle 17"/>
-          <p:cNvSpPr/>
-          <p:nvPr/>
-        </p:nvSpPr>
-        <p:spPr>
-          <a:xfrm>
-            <a:off x="731520" y="3840480"/>
-            <a:ext cx="1051560" cy="274320"/>
-          </a:xfrm>
-          <a:prstGeom prst="roundRect">
-            <a:avLst>
-              <a:gd name="adj" fmla="val 28000"/>
-            </a:avLst>
+            <a:off x="932688" y="5833872"/>
+            <a:ext cx="82296" cy="82296"/>
+          </a:xfrm>
+          <a:prstGeom prst="ellipse">
+            <a:avLst/>
           </a:prstGeom>
           <a:solidFill>
             <a:srgbClr val="C96F4A"/>
@@ -9586,34 +10185,23 @@
           </a:fontRef>
         </p:style>
         <p:txBody>
-          <a:bodyPr rtlCol="0" anchor="ctr" wrap="none"/>
+          <a:bodyPr rtlCol="0" anchor="ctr"/>
           <a:lstStyle/>
           <a:p>
             <a:pPr algn="ctr"/>
-            <a:r>
-              <a:rPr sz="1200" b="1" lang="en-US" altLang="en-US">
-                <a:solidFill>
-                  <a:srgbClr val="FFFFFF"/>
-                </a:solidFill>
-                <a:latin typeface="Sarabun"/>
-                <a:ea typeface="Sarabun"/>
-                <a:cs typeface="Sarabun"/>
-              </a:rPr>
-              <a:t>You</a:t>
-            </a:r>
-          </a:p>
-        </p:txBody>
-      </p:sp>
-      <p:sp>
-        <p:nvSpPr>
-          <p:cNvPr id="19" name="TextBox 18"/>
+          </a:p>
+        </p:txBody>
+      </p:sp>
+      <p:sp>
+        <p:nvSpPr>
+          <p:cNvPr id="20" name="TextBox 19"/>
           <p:cNvSpPr txBox="1"/>
           <p:nvPr/>
         </p:nvSpPr>
         <p:spPr>
           <a:xfrm>
-            <a:off x="1965960" y="3813048"/>
-            <a:ext cx="8823960" cy="228600"/>
+            <a:off x="1078992" y="5742432"/>
+            <a:ext cx="9555480" cy="475488"/>
           </a:xfrm>
           <a:prstGeom prst="rect">
             <a:avLst/>
@@ -9636,34 +10224,19 @@
                 <a:ea typeface="Sarabun"/>
                 <a:cs typeface="Sarabun"/>
               </a:rPr>
-              <a:t>ผมมาจากอังกฤษครับ</a:t>
-            </a:r>
-          </a:p>
-        </p:txBody>
-      </p:sp>
-      <p:sp>
-        <p:nvSpPr>
-          <p:cNvPr id="20" name="TextBox 19"/>
-          <p:cNvSpPr txBox="1"/>
-          <p:nvPr/>
-        </p:nvSpPr>
-        <p:spPr>
-          <a:xfrm>
-            <a:off x="1965960" y="4041648"/>
-            <a:ext cx="8823960" cy="201168"/>
-          </a:xfrm>
-          <a:prstGeom prst="rect">
-            <a:avLst/>
-          </a:prstGeom>
-          <a:noFill/>
-        </p:spPr>
-        <p:txBody>
-          <a:bodyPr wrap="square" anchor="t">
-            <a:spAutoFit/>
-          </a:bodyPr>
-          <a:lstStyle/>
-          <a:p>
-            <a:pPr algn="l"/>
+              <a:t>Substitution drill: say ผม</a:t>
+            </a:r>
+            <a:r>
+              <a:rPr sz="1700" b="0" i="0" lang="th-TH" altLang="en-US">
+                <a:solidFill>
+                  <a:srgbClr val="24333D"/>
+                </a:solidFill>
+                <a:latin typeface="Sarabun"/>
+                <a:ea typeface="Sarabun"/>
+                <a:cs typeface="Sarabun"/>
+              </a:rPr>
+              <a:t>มาจาก</a:t>
+            </a:r>
             <a:r>
               <a:rPr sz="1700" b="0" i="1" lang="en-US" altLang="en-US">
                 <a:solidFill>
@@ -9673,127 +10246,129 @@
                 <a:ea typeface="Sarabun"/>
                 <a:cs typeface="Sarabun"/>
               </a:rPr>
-              <a:t>phǒm maa-jàak ang-grìt khráp</a:t>
-            </a:r>
-          </a:p>
-        </p:txBody>
-      </p:sp>
-      <p:sp>
-        <p:nvSpPr>
-          <p:cNvPr id="21" name="TextBox 20"/>
-          <p:cNvSpPr txBox="1"/>
-          <p:nvPr/>
-        </p:nvSpPr>
-        <p:spPr>
-          <a:xfrm>
-            <a:off x="1965960" y="4242816"/>
-            <a:ext cx="8823960" cy="201168"/>
-          </a:xfrm>
-          <a:prstGeom prst="rect">
-            <a:avLst/>
-          </a:prstGeom>
-          <a:noFill/>
-        </p:spPr>
-        <p:txBody>
-          <a:bodyPr wrap="square" anchor="t">
-            <a:spAutoFit/>
-          </a:bodyPr>
-          <a:lstStyle/>
-          <a:p>
-            <a:pPr algn="l"/>
+              <a:t> (maa-jàak)</a:t>
+            </a:r>
+            <a:r>
+              <a:rPr sz="1700" b="0" i="0" lang="th-TH" altLang="en-US">
+                <a:solidFill>
+                  <a:srgbClr val="24333D"/>
+                </a:solidFill>
+                <a:latin typeface="Sarabun"/>
+                <a:ea typeface="Sarabun"/>
+                <a:cs typeface="Sarabun"/>
+              </a:rPr>
+              <a:t>ประเทศ</a:t>
+            </a:r>
+            <a:r>
+              <a:rPr sz="1700" b="0" i="1" lang="en-US" altLang="en-US">
+                <a:solidFill>
+                  <a:srgbClr val="566873"/>
+                </a:solidFill>
+                <a:latin typeface="Sarabun"/>
+                <a:ea typeface="Sarabun"/>
+                <a:cs typeface="Sarabun"/>
+              </a:rPr>
+              <a:t> (bprà-thêet)</a:t>
+            </a:r>
+            <a:r>
+              <a:rPr sz="1700" b="0" i="0" lang="th-TH" altLang="en-US">
+                <a:solidFill>
+                  <a:srgbClr val="24333D"/>
+                </a:solidFill>
+                <a:latin typeface="Sarabun"/>
+                <a:ea typeface="Sarabun"/>
+                <a:cs typeface="Sarabun"/>
+              </a:rPr>
+              <a:t>ไทย</a:t>
+            </a:r>
+            <a:r>
+              <a:rPr sz="1700" b="0" i="1" lang="en-US" altLang="en-US">
+                <a:solidFill>
+                  <a:srgbClr val="566873"/>
+                </a:solidFill>
+                <a:latin typeface="Sarabun"/>
+                <a:ea typeface="Sarabun"/>
+                <a:cs typeface="Sarabun"/>
+              </a:rPr>
+              <a:t> (thai)</a:t>
+            </a:r>
+            <a:r>
+              <a:rPr sz="1700" b="0" i="0" lang="th-TH" altLang="en-US">
+                <a:solidFill>
+                  <a:srgbClr val="24333D"/>
+                </a:solidFill>
+                <a:latin typeface="Sarabun"/>
+                <a:ea typeface="Sarabun"/>
+                <a:cs typeface="Sarabun"/>
+              </a:rPr>
+              <a:t>ครับ. Now swap </a:t>
+            </a:r>
+            <a:r>
+              <a:rPr sz="1700" b="0" i="0" lang="th-TH" altLang="en-US">
+                <a:solidFill>
+                  <a:srgbClr val="24333D"/>
+                </a:solidFill>
+                <a:latin typeface="Sarabun"/>
+                <a:ea typeface="Sarabun"/>
+                <a:cs typeface="Sarabun"/>
+              </a:rPr>
+              <a:t>ไทย</a:t>
+            </a:r>
+            <a:r>
+              <a:rPr sz="1700" b="0" i="1" lang="en-US" altLang="en-US">
+                <a:solidFill>
+                  <a:srgbClr val="566873"/>
+                </a:solidFill>
+                <a:latin typeface="Sarabun"/>
+                <a:ea typeface="Sarabun"/>
+                <a:cs typeface="Sarabun"/>
+              </a:rPr>
+              <a:t> (thai)</a:t>
+            </a:r>
             <a:r>
               <a:rPr sz="1700" b="0" i="0" lang="en-US" altLang="en-US">
                 <a:solidFill>
+                  <a:srgbClr val="24333D"/>
+                </a:solidFill>
+                <a:latin typeface="Sarabun"/>
+                <a:ea typeface="Sarabun"/>
+                <a:cs typeface="Sarabun"/>
+              </a:rPr>
+              <a:t> for </a:t>
+            </a:r>
+            <a:r>
+              <a:rPr sz="1700" b="0" i="0" lang="th-TH" altLang="en-US">
+                <a:solidFill>
+                  <a:srgbClr val="24333D"/>
+                </a:solidFill>
+                <a:latin typeface="Sarabun"/>
+                <a:ea typeface="Sarabun"/>
+                <a:cs typeface="Sarabun"/>
+              </a:rPr>
+              <a:t>อังกฤษ</a:t>
+            </a:r>
+            <a:r>
+              <a:rPr sz="1700" b="0" i="1" lang="en-US" altLang="en-US">
+                <a:solidFill>
                   <a:srgbClr val="566873"/>
                 </a:solidFill>
                 <a:latin typeface="Sarabun"/>
                 <a:ea typeface="Sarabun"/>
                 <a:cs typeface="Sarabun"/>
               </a:rPr>
-              <a:t>I am from England.</a:t>
-            </a:r>
-          </a:p>
-        </p:txBody>
-      </p:sp>
-      <p:sp>
-        <p:nvSpPr>
-          <p:cNvPr id="22" name="Rounded Rectangle 21"/>
-          <p:cNvSpPr/>
-          <p:nvPr/>
-        </p:nvSpPr>
-        <p:spPr>
-          <a:xfrm>
-            <a:off x="731520" y="4754880"/>
-            <a:ext cx="1371600" cy="274320"/>
-          </a:xfrm>
-          <a:prstGeom prst="roundRect">
-            <a:avLst>
-              <a:gd name="adj" fmla="val 28000"/>
-            </a:avLst>
-          </a:prstGeom>
-          <a:solidFill>
-            <a:srgbClr val="7A8F54"/>
-          </a:solidFill>
-          <a:ln>
-            <a:noFill/>
-          </a:ln>
-        </p:spPr>
-        <p:style>
-          <a:lnRef idx="1">
-            <a:schemeClr val="accent1"/>
-          </a:lnRef>
-          <a:fillRef idx="3">
-            <a:schemeClr val="accent1"/>
-          </a:fillRef>
-          <a:effectRef idx="2">
-            <a:schemeClr val="accent1"/>
-          </a:effectRef>
-          <a:fontRef idx="minor">
-            <a:schemeClr val="lt1"/>
-          </a:fontRef>
-        </p:style>
-        <p:txBody>
-          <a:bodyPr rtlCol="0" anchor="ctr" wrap="none"/>
-          <a:lstStyle/>
-          <a:p>
-            <a:pPr algn="ctr"/>
-            <a:r>
-              <a:rPr sz="1200" b="1" lang="en-US" altLang="en-US">
-                <a:solidFill>
-                  <a:srgbClr val="FFFFFF"/>
-                </a:solidFill>
-                <a:latin typeface="Sarabun"/>
-                <a:ea typeface="Sarabun"/>
-                <a:cs typeface="Sarabun"/>
-              </a:rPr>
-              <a:t>New person</a:t>
-            </a:r>
-          </a:p>
-        </p:txBody>
-      </p:sp>
-      <p:sp>
-        <p:nvSpPr>
-          <p:cNvPr id="23" name="TextBox 22"/>
-          <p:cNvSpPr txBox="1"/>
-          <p:nvPr/>
-        </p:nvSpPr>
-        <p:spPr>
-          <a:xfrm>
-            <a:off x="1965960" y="4727448"/>
-            <a:ext cx="8823960" cy="228600"/>
-          </a:xfrm>
-          <a:prstGeom prst="rect">
-            <a:avLst/>
-          </a:prstGeom>
-          <a:noFill/>
-        </p:spPr>
-        <p:txBody>
-          <a:bodyPr wrap="square" anchor="t">
-            <a:spAutoFit/>
-          </a:bodyPr>
-          <a:lstStyle/>
-          <a:p>
-            <a:pPr algn="l"/>
+              <a:t> (ang-grìt)</a:t>
+            </a:r>
+            <a:r>
+              <a:rPr sz="1700" b="0" i="0" lang="en-US" altLang="en-US">
+                <a:solidFill>
+                  <a:srgbClr val="24333D"/>
+                </a:solidFill>
+                <a:latin typeface="Sarabun"/>
+                <a:ea typeface="Sarabun"/>
+                <a:cs typeface="Sarabun"/>
+              </a:rPr>
+              <a:t>. Now swap for </a:t>
+            </a:r>
             <a:r>
               <a:rPr sz="1700" b="0" i="0" lang="th-TH" altLang="en-US">
                 <a:solidFill>
@@ -9803,34 +10378,8 @@
                 <a:ea typeface="Sarabun"/>
                 <a:cs typeface="Sarabun"/>
               </a:rPr>
-              <a:t>อ๋อ คนอังกฤษ ยินดีต้อนรับค่ะ</a:t>
-            </a:r>
-          </a:p>
-        </p:txBody>
-      </p:sp>
-      <p:sp>
-        <p:nvSpPr>
-          <p:cNvPr id="24" name="TextBox 23"/>
-          <p:cNvSpPr txBox="1"/>
-          <p:nvPr/>
-        </p:nvSpPr>
-        <p:spPr>
-          <a:xfrm>
-            <a:off x="1965960" y="4956048"/>
-            <a:ext cx="8823960" cy="201168"/>
-          </a:xfrm>
-          <a:prstGeom prst="rect">
-            <a:avLst/>
-          </a:prstGeom>
-          <a:noFill/>
-        </p:spPr>
-        <p:txBody>
-          <a:bodyPr wrap="square" anchor="t">
-            <a:spAutoFit/>
-          </a:bodyPr>
-          <a:lstStyle/>
-          <a:p>
-            <a:pPr algn="l"/>
+              <a:t>อเมริกา</a:t>
+            </a:r>
             <a:r>
               <a:rPr sz="1700" b="0" i="1" lang="en-US" altLang="en-US">
                 <a:solidFill>
@@ -9840,44 +10389,18 @@
                 <a:ea typeface="Sarabun"/>
                 <a:cs typeface="Sarabun"/>
               </a:rPr>
-              <a:t>ǎw khon ang-grìt yin-dii dtâwn-ráp khâ</a:t>
-            </a:r>
-          </a:p>
-        </p:txBody>
-      </p:sp>
-      <p:sp>
-        <p:nvSpPr>
-          <p:cNvPr id="25" name="TextBox 24"/>
-          <p:cNvSpPr txBox="1"/>
-          <p:nvPr/>
-        </p:nvSpPr>
-        <p:spPr>
-          <a:xfrm>
-            <a:off x="1965960" y="5157216"/>
-            <a:ext cx="8823960" cy="201168"/>
-          </a:xfrm>
-          <a:prstGeom prst="rect">
-            <a:avLst/>
-          </a:prstGeom>
-          <a:noFill/>
-        </p:spPr>
-        <p:txBody>
-          <a:bodyPr wrap="square" anchor="t">
-            <a:spAutoFit/>
-          </a:bodyPr>
-          <a:lstStyle/>
-          <a:p>
-            <a:pPr algn="l"/>
+              <a:t> (à-mee-rí-kaa)</a:t>
+            </a:r>
             <a:r>
               <a:rPr sz="1700" b="0" i="0" lang="en-US" altLang="en-US">
                 <a:solidFill>
-                  <a:srgbClr val="566873"/>
-                </a:solidFill>
-                <a:latin typeface="Sarabun"/>
-                <a:ea typeface="Sarabun"/>
-                <a:cs typeface="Sarabun"/>
-              </a:rPr>
-              <a:t>Oh, an English person! Welcome.</a:t>
+                  <a:srgbClr val="24333D"/>
+                </a:solidFill>
+                <a:latin typeface="Sarabun"/>
+                <a:ea typeface="Sarabun"/>
+                <a:cs typeface="Sarabun"/>
+              </a:rPr>
+              <a:t>.</a:t>
             </a:r>
           </a:p>
         </p:txBody>
@@ -10040,7 +10563,7 @@
                 <a:ea typeface="Sarabun"/>
                 <a:cs typeface="Sarabun"/>
               </a:rPr>
-              <a:t>Recap</a:t>
+              <a:t>Teaching slide</a:t>
             </a:r>
           </a:p>
         </p:txBody>
@@ -10077,60 +10600,64 @@
                 <a:ea typeface="Sarabun"/>
                 <a:cs typeface="Sarabun"/>
               </a:rPr>
-              <a:t>Recap</a:t>
-            </a:r>
-          </a:p>
-        </p:txBody>
-      </p:sp>
-      <p:sp>
-        <p:nvSpPr>
-          <p:cNvPr id="6" name="TextBox 5"/>
-          <p:cNvSpPr txBox="1"/>
-          <p:nvPr/>
-        </p:nvSpPr>
-        <p:spPr>
-          <a:xfrm>
-            <a:off x="932688" y="1563624"/>
-            <a:ext cx="6705295" cy="228600"/>
-          </a:xfrm>
-          <a:prstGeom prst="rect">
-            <a:avLst/>
-          </a:prstGeom>
-          <a:noFill/>
-        </p:spPr>
-        <p:txBody>
-          <a:bodyPr wrap="square" anchor="t">
-            <a:spAutoFit/>
-          </a:bodyPr>
-          <a:lstStyle/>
-          <a:p>
-            <a:pPr algn="l"/>
-            <a:r>
-              <a:rPr sz="1700" b="1" i="0" lang="en-US" altLang="en-US">
-                <a:solidFill>
-                  <a:srgbClr val="355C7D"/>
-                </a:solidFill>
-                <a:latin typeface="Sarabun"/>
-                <a:ea typeface="Sarabun"/>
-                <a:cs typeface="Sarabun"/>
-              </a:rPr>
-              <a:t>What you can now do</a:t>
-            </a:r>
-          </a:p>
-        </p:txBody>
-      </p:sp>
-      <p:sp>
-        <p:nvSpPr>
-          <p:cNvPr id="7" name="Oval 6"/>
+              <a:t>Pronunciation: the bp sound</a:t>
+            </a:r>
+          </a:p>
+        </p:txBody>
+      </p:sp>
+      <p:sp>
+        <p:nvSpPr>
+          <p:cNvPr id="6" name="Rounded Rectangle 5"/>
           <p:cNvSpPr/>
           <p:nvPr/>
         </p:nvSpPr>
         <p:spPr>
           <a:xfrm>
-            <a:off x="932688" y="1947672"/>
-            <a:ext cx="82296" cy="82296"/>
-          </a:xfrm>
-          <a:prstGeom prst="ellipse">
+            <a:off x="731520" y="1325880"/>
+            <a:ext cx="7071055" cy="1572768"/>
+          </a:xfrm>
+          <a:prstGeom prst="roundRect">
+            <a:avLst/>
+          </a:prstGeom>
+          <a:noFill/>
+          <a:ln>
+            <a:noFill/>
+          </a:ln>
+        </p:spPr>
+        <p:style>
+          <a:lnRef idx="1">
+            <a:schemeClr val="accent1"/>
+          </a:lnRef>
+          <a:fillRef idx="3">
+            <a:schemeClr val="accent1"/>
+          </a:fillRef>
+          <a:effectRef idx="2">
+            <a:schemeClr val="accent1"/>
+          </a:effectRef>
+          <a:fontRef idx="minor">
+            <a:schemeClr val="lt1"/>
+          </a:fontRef>
+        </p:style>
+        <p:txBody>
+          <a:bodyPr rtlCol="0" anchor="ctr"/>
+          <a:lstStyle/>
+          <a:p>
+            <a:pPr algn="ctr"/>
+          </a:p>
+        </p:txBody>
+      </p:sp>
+      <p:sp>
+        <p:nvSpPr>
+          <p:cNvPr id="7" name="Rectangle 6"/>
+          <p:cNvSpPr/>
+          <p:nvPr/>
+        </p:nvSpPr>
+        <p:spPr>
+          <a:xfrm>
+            <a:off x="868680" y="1527048"/>
+            <a:ext cx="73152" cy="1143000"/>
+          </a:xfrm>
+          <a:prstGeom prst="rect">
             <a:avLst/>
           </a:prstGeom>
           <a:solidFill>
@@ -10170,8 +10697,8 @@
         </p:nvSpPr>
         <p:spPr>
           <a:xfrm>
-            <a:off x="1078992" y="1856232"/>
-            <a:ext cx="6568135" cy="475488"/>
+            <a:off x="1078992" y="1463040"/>
+            <a:ext cx="6613855" cy="320040"/>
           </a:xfrm>
           <a:prstGeom prst="rect">
             <a:avLst/>
@@ -10186,64 +10713,146 @@
           <a:p>
             <a:pPr algn="l"/>
             <a:r>
+              <a:rPr sz="1700" b="0" i="0" lang="th-TH" altLang="en-US">
+                <a:solidFill>
+                  <a:srgbClr val="24333D"/>
+                </a:solidFill>
+                <a:latin typeface="Sarabun"/>
+                <a:ea typeface="Sarabun"/>
+                <a:cs typeface="Sarabun"/>
+              </a:rPr>
+              <a:t>ประเทศ</a:t>
+            </a:r>
+          </a:p>
+        </p:txBody>
+      </p:sp>
+      <p:sp>
+        <p:nvSpPr>
+          <p:cNvPr id="9" name="TextBox 8"/>
+          <p:cNvSpPr txBox="1"/>
+          <p:nvPr/>
+        </p:nvSpPr>
+        <p:spPr>
+          <a:xfrm>
+            <a:off x="1078992" y="1828800"/>
+            <a:ext cx="6613855" cy="274320"/>
+          </a:xfrm>
+          <a:prstGeom prst="rect">
+            <a:avLst/>
+          </a:prstGeom>
+          <a:noFill/>
+        </p:spPr>
+        <p:txBody>
+          <a:bodyPr wrap="square" anchor="t">
+            <a:spAutoFit/>
+          </a:bodyPr>
+          <a:lstStyle/>
+          <a:p>
+            <a:pPr algn="l"/>
+            <a:r>
+              <a:rPr sz="1700" b="0" i="1" lang="en-US" altLang="en-US">
+                <a:solidFill>
+                  <a:srgbClr val="566873"/>
+                </a:solidFill>
+                <a:latin typeface="Sarabun"/>
+                <a:ea typeface="Sarabun"/>
+                <a:cs typeface="Sarabun"/>
+              </a:rPr>
+              <a:t>bprà-thêet</a:t>
+            </a:r>
+          </a:p>
+        </p:txBody>
+      </p:sp>
+      <p:sp>
+        <p:nvSpPr>
+          <p:cNvPr id="10" name="TextBox 9"/>
+          <p:cNvSpPr txBox="1"/>
+          <p:nvPr/>
+        </p:nvSpPr>
+        <p:spPr>
+          <a:xfrm>
+            <a:off x="1078992" y="2203704"/>
+            <a:ext cx="6613855" cy="274320"/>
+          </a:xfrm>
+          <a:prstGeom prst="rect">
+            <a:avLst/>
+          </a:prstGeom>
+          <a:noFill/>
+        </p:spPr>
+        <p:txBody>
+          <a:bodyPr wrap="square" anchor="t">
+            <a:spAutoFit/>
+          </a:bodyPr>
+          <a:lstStyle/>
+          <a:p>
+            <a:pPr algn="l"/>
+            <a:r>
               <a:rPr sz="1700" b="0" i="0" lang="en-US" altLang="en-US">
                 <a:solidFill>
-                  <a:srgbClr val="24333D"/>
-                </a:solidFill>
-                <a:latin typeface="Sarabun"/>
-                <a:ea typeface="Sarabun"/>
-                <a:cs typeface="Sarabun"/>
-              </a:rPr>
-              <a:t>Look away and try: how do you ask someone's name in Thai? Say it before looking. </a:t>
-            </a:r>
-            <a:r>
-              <a:rPr sz="1700" b="0" i="0" lang="th-TH" altLang="en-US">
-                <a:solidFill>
-                  <a:srgbClr val="24333D"/>
-                </a:solidFill>
-                <a:latin typeface="Sarabun"/>
-                <a:ea typeface="Sarabun"/>
-                <a:cs typeface="Sarabun"/>
-              </a:rPr>
-              <a:t>คุณชื่ออะไร</a:t>
-            </a:r>
-            <a:r>
-              <a:rPr sz="1700" b="0" i="1" lang="en-US" altLang="en-US">
-                <a:solidFill>
-                  <a:srgbClr val="566873"/>
-                </a:solidFill>
-                <a:latin typeface="Sarabun"/>
-                <a:ea typeface="Sarabun"/>
-                <a:cs typeface="Sarabun"/>
-              </a:rPr>
-              <a:t> (khun chûue à-rai)</a:t>
-            </a:r>
-            <a:r>
-              <a:rPr sz="1700" b="0" i="0" lang="en-US" altLang="en-US">
-                <a:solidFill>
-                  <a:srgbClr val="24333D"/>
-                </a:solidFill>
-                <a:latin typeface="Sarabun"/>
-                <a:ea typeface="Sarabun"/>
-                <a:cs typeface="Sarabun"/>
-              </a:rPr>
-              <a:t>.</a:t>
-            </a:r>
-          </a:p>
-        </p:txBody>
-      </p:sp>
-      <p:sp>
-        <p:nvSpPr>
-          <p:cNvPr id="9" name="Oval 8"/>
+                  <a:srgbClr val="82909A"/>
+                </a:solidFill>
+                <a:latin typeface="Sarabun"/>
+                <a:ea typeface="Sarabun"/>
+                <a:cs typeface="Sarabun"/>
+              </a:rPr>
+              <a:t>country (bp — no air puff)</a:t>
+            </a:r>
+          </a:p>
+        </p:txBody>
+      </p:sp>
+      <p:sp>
+        <p:nvSpPr>
+          <p:cNvPr id="11" name="Rounded Rectangle 10"/>
           <p:cNvSpPr/>
           <p:nvPr/>
         </p:nvSpPr>
         <p:spPr>
           <a:xfrm>
-            <a:off x="932688" y="2478024"/>
-            <a:ext cx="82296" cy="82296"/>
-          </a:xfrm>
-          <a:prstGeom prst="ellipse">
+            <a:off x="731520" y="3081528"/>
+            <a:ext cx="7071055" cy="1572768"/>
+          </a:xfrm>
+          <a:prstGeom prst="roundRect">
+            <a:avLst/>
+          </a:prstGeom>
+          <a:noFill/>
+          <a:ln>
+            <a:noFill/>
+          </a:ln>
+        </p:spPr>
+        <p:style>
+          <a:lnRef idx="1">
+            <a:schemeClr val="accent1"/>
+          </a:lnRef>
+          <a:fillRef idx="3">
+            <a:schemeClr val="accent1"/>
+          </a:fillRef>
+          <a:effectRef idx="2">
+            <a:schemeClr val="accent1"/>
+          </a:effectRef>
+          <a:fontRef idx="minor">
+            <a:schemeClr val="lt1"/>
+          </a:fontRef>
+        </p:style>
+        <p:txBody>
+          <a:bodyPr rtlCol="0" anchor="ctr"/>
+          <a:lstStyle/>
+          <a:p>
+            <a:pPr algn="ctr"/>
+          </a:p>
+        </p:txBody>
+      </p:sp>
+      <p:sp>
+        <p:nvSpPr>
+          <p:cNvPr id="12" name="Rectangle 11"/>
+          <p:cNvSpPr/>
+          <p:nvPr/>
+        </p:nvSpPr>
+        <p:spPr>
+          <a:xfrm>
+            <a:off x="868680" y="3282696"/>
+            <a:ext cx="73152" cy="1143000"/>
+          </a:xfrm>
+          <a:prstGeom prst="rect">
             <a:avLst/>
           </a:prstGeom>
           <a:solidFill>
@@ -10277,14 +10886,14 @@
       </p:sp>
       <p:sp>
         <p:nvSpPr>
-          <p:cNvPr id="10" name="TextBox 9"/>
+          <p:cNvPr id="13" name="TextBox 12"/>
           <p:cNvSpPr txBox="1"/>
           <p:nvPr/>
         </p:nvSpPr>
         <p:spPr>
           <a:xfrm>
-            <a:off x="1078992" y="2386584"/>
-            <a:ext cx="6568135" cy="475488"/>
+            <a:off x="1078992" y="3218688"/>
+            <a:ext cx="6613855" cy="320040"/>
           </a:xfrm>
           <a:prstGeom prst="rect">
             <a:avLst/>
@@ -10307,19 +10916,34 @@
                 <a:ea typeface="Sarabun"/>
                 <a:cs typeface="Sarabun"/>
               </a:rPr>
-              <a:t>How do you say where you are from? ผม/ฉัน </a:t>
-            </a:r>
-            <a:r>
-              <a:rPr sz="1700" b="0" i="0" lang="th-TH" altLang="en-US">
-                <a:solidFill>
-                  <a:srgbClr val="24333D"/>
-                </a:solidFill>
-                <a:latin typeface="Sarabun"/>
-                <a:ea typeface="Sarabun"/>
-                <a:cs typeface="Sarabun"/>
-              </a:rPr>
-              <a:t>มาจาก</a:t>
-            </a:r>
+              <a:t>ป่า</a:t>
+            </a:r>
+          </a:p>
+        </p:txBody>
+      </p:sp>
+      <p:sp>
+        <p:nvSpPr>
+          <p:cNvPr id="14" name="TextBox 13"/>
+          <p:cNvSpPr txBox="1"/>
+          <p:nvPr/>
+        </p:nvSpPr>
+        <p:spPr>
+          <a:xfrm>
+            <a:off x="1078992" y="3584448"/>
+            <a:ext cx="6613855" cy="274320"/>
+          </a:xfrm>
+          <a:prstGeom prst="rect">
+            <a:avLst/>
+          </a:prstGeom>
+          <a:noFill/>
+        </p:spPr>
+        <p:txBody>
+          <a:bodyPr wrap="square" anchor="t">
+            <a:spAutoFit/>
+          </a:bodyPr>
+          <a:lstStyle/>
+          <a:p>
+            <a:pPr algn="l"/>
             <a:r>
               <a:rPr sz="1700" b="0" i="1" lang="en-US" altLang="en-US">
                 <a:solidFill>
@@ -10329,34 +10953,101 @@
                 <a:ea typeface="Sarabun"/>
                 <a:cs typeface="Sarabun"/>
               </a:rPr>
-              <a:t> (maa-jàak)</a:t>
-            </a:r>
+              <a:t>bpàa</a:t>
+            </a:r>
+          </a:p>
+        </p:txBody>
+      </p:sp>
+      <p:sp>
+        <p:nvSpPr>
+          <p:cNvPr id="15" name="TextBox 14"/>
+          <p:cNvSpPr txBox="1"/>
+          <p:nvPr/>
+        </p:nvSpPr>
+        <p:spPr>
+          <a:xfrm>
+            <a:off x="1078992" y="3959352"/>
+            <a:ext cx="6613855" cy="274320"/>
+          </a:xfrm>
+          <a:prstGeom prst="rect">
+            <a:avLst/>
+          </a:prstGeom>
+          <a:noFill/>
+        </p:spPr>
+        <p:txBody>
+          <a:bodyPr wrap="square" anchor="t">
+            <a:spAutoFit/>
+          </a:bodyPr>
+          <a:lstStyle/>
+          <a:p>
+            <a:pPr algn="l"/>
             <a:r>
               <a:rPr sz="1700" b="0" i="0" lang="en-US" altLang="en-US">
                 <a:solidFill>
-                  <a:srgbClr val="24333D"/>
-                </a:solidFill>
-                <a:latin typeface="Sarabun"/>
-                <a:ea typeface="Sarabun"/>
-                <a:cs typeface="Sarabun"/>
-              </a:rPr>
-              <a:t> + country.</a:t>
-            </a:r>
-          </a:p>
-        </p:txBody>
-      </p:sp>
-      <p:sp>
-        <p:nvSpPr>
-          <p:cNvPr id="11" name="Oval 10"/>
+                  <a:srgbClr val="82909A"/>
+                </a:solidFill>
+                <a:latin typeface="Sarabun"/>
+                <a:ea typeface="Sarabun"/>
+                <a:cs typeface="Sarabun"/>
+              </a:rPr>
+              <a:t>forest (bp — no air puff)</a:t>
+            </a:r>
+          </a:p>
+        </p:txBody>
+      </p:sp>
+      <p:sp>
+        <p:nvSpPr>
+          <p:cNvPr id="16" name="Rounded Rectangle 15"/>
           <p:cNvSpPr/>
           <p:nvPr/>
         </p:nvSpPr>
         <p:spPr>
           <a:xfrm>
-            <a:off x="932688" y="3008376"/>
-            <a:ext cx="82296" cy="82296"/>
-          </a:xfrm>
-          <a:prstGeom prst="ellipse">
+            <a:off x="731520" y="4837176"/>
+            <a:ext cx="7071055" cy="1572768"/>
+          </a:xfrm>
+          <a:prstGeom prst="roundRect">
+            <a:avLst/>
+          </a:prstGeom>
+          <a:noFill/>
+          <a:ln>
+            <a:noFill/>
+          </a:ln>
+        </p:spPr>
+        <p:style>
+          <a:lnRef idx="1">
+            <a:schemeClr val="accent1"/>
+          </a:lnRef>
+          <a:fillRef idx="3">
+            <a:schemeClr val="accent1"/>
+          </a:fillRef>
+          <a:effectRef idx="2">
+            <a:schemeClr val="accent1"/>
+          </a:effectRef>
+          <a:fontRef idx="minor">
+            <a:schemeClr val="lt1"/>
+          </a:fontRef>
+        </p:style>
+        <p:txBody>
+          <a:bodyPr rtlCol="0" anchor="ctr"/>
+          <a:lstStyle/>
+          <a:p>
+            <a:pPr algn="ctr"/>
+          </a:p>
+        </p:txBody>
+      </p:sp>
+      <p:sp>
+        <p:nvSpPr>
+          <p:cNvPr id="17" name="Rectangle 16"/>
+          <p:cNvSpPr/>
+          <p:nvPr/>
+        </p:nvSpPr>
+        <p:spPr>
+          <a:xfrm>
+            <a:off x="868680" y="5038344"/>
+            <a:ext cx="73152" cy="1143000"/>
+          </a:xfrm>
+          <a:prstGeom prst="rect">
             <a:avLst/>
           </a:prstGeom>
           <a:solidFill>
@@ -10390,14 +11081,14 @@
       </p:sp>
       <p:sp>
         <p:nvSpPr>
-          <p:cNvPr id="12" name="TextBox 11"/>
+          <p:cNvPr id="18" name="TextBox 17"/>
           <p:cNvSpPr txBox="1"/>
           <p:nvPr/>
         </p:nvSpPr>
         <p:spPr>
           <a:xfrm>
-            <a:off x="1078992" y="2916936"/>
-            <a:ext cx="6568135" cy="475488"/>
+            <a:off x="1078992" y="4974336"/>
+            <a:ext cx="6613855" cy="320040"/>
           </a:xfrm>
           <a:prstGeom prst="rect">
             <a:avLst/>
@@ -10412,7 +11103,7 @@
           <a:p>
             <a:pPr algn="l"/>
             <a:r>
-              <a:rPr sz="1700" b="0" i="0" lang="en-US" altLang="en-US">
+              <a:rPr sz="1700" b="0" i="0" lang="th-TH" altLang="en-US">
                 <a:solidFill>
                   <a:srgbClr val="24333D"/>
                 </a:solidFill>
@@ -10420,130 +11111,21 @@
                 <a:ea typeface="Sarabun"/>
                 <a:cs typeface="Sarabun"/>
               </a:rPr>
-              <a:t>What does </a:t>
-            </a:r>
-            <a:r>
-              <a:rPr sz="1700" b="0" i="0" lang="th-TH" altLang="en-US">
-                <a:solidFill>
-                  <a:srgbClr val="24333D"/>
-                </a:solidFill>
-                <a:latin typeface="Sarabun"/>
-                <a:ea typeface="Sarabun"/>
-                <a:cs typeface="Sarabun"/>
-              </a:rPr>
-              <a:t>คน</a:t>
-            </a:r>
-            <a:r>
-              <a:rPr sz="1700" b="0" i="1" lang="en-US" altLang="en-US">
-                <a:solidFill>
-                  <a:srgbClr val="566873"/>
-                </a:solidFill>
-                <a:latin typeface="Sarabun"/>
-                <a:ea typeface="Sarabun"/>
-                <a:cs typeface="Sarabun"/>
-              </a:rPr>
-              <a:t> (khon)</a:t>
-            </a:r>
-            <a:r>
-              <a:rPr sz="1700" b="0" i="0" lang="en-US" altLang="en-US">
-                <a:solidFill>
-                  <a:srgbClr val="24333D"/>
-                </a:solidFill>
-                <a:latin typeface="Sarabun"/>
-                <a:ea typeface="Sarabun"/>
-                <a:cs typeface="Sarabun"/>
-              </a:rPr>
-              <a:t> mean? Person. How do you say 'Thai person'? </a:t>
-            </a:r>
-            <a:r>
-              <a:rPr sz="1700" b="0" i="0" lang="th-TH" altLang="en-US">
-                <a:solidFill>
-                  <a:srgbClr val="24333D"/>
-                </a:solidFill>
-                <a:latin typeface="Sarabun"/>
-                <a:ea typeface="Sarabun"/>
-                <a:cs typeface="Sarabun"/>
-              </a:rPr>
-              <a:t>คนไทย</a:t>
-            </a:r>
-            <a:r>
-              <a:rPr sz="1700" b="0" i="1" lang="en-US" altLang="en-US">
-                <a:solidFill>
-                  <a:srgbClr val="566873"/>
-                </a:solidFill>
-                <a:latin typeface="Sarabun"/>
-                <a:ea typeface="Sarabun"/>
-                <a:cs typeface="Sarabun"/>
-              </a:rPr>
-              <a:t> (khon thai)</a:t>
-            </a:r>
-            <a:r>
-              <a:rPr sz="1700" b="0" i="0" lang="en-US" altLang="en-US">
-                <a:solidFill>
-                  <a:srgbClr val="24333D"/>
-                </a:solidFill>
-                <a:latin typeface="Sarabun"/>
-                <a:ea typeface="Sarabun"/>
-                <a:cs typeface="Sarabun"/>
-              </a:rPr>
-              <a:t>.</a:t>
-            </a:r>
-          </a:p>
-        </p:txBody>
-      </p:sp>
-      <p:sp>
-        <p:nvSpPr>
-          <p:cNvPr id="13" name="Oval 12"/>
-          <p:cNvSpPr/>
-          <p:nvPr/>
-        </p:nvSpPr>
-        <p:spPr>
-          <a:xfrm>
-            <a:off x="932688" y="3538728"/>
-            <a:ext cx="82296" cy="82296"/>
-          </a:xfrm>
-          <a:prstGeom prst="ellipse">
-            <a:avLst/>
-          </a:prstGeom>
-          <a:solidFill>
-            <a:srgbClr val="355C7D"/>
-          </a:solidFill>
-          <a:ln>
-            <a:noFill/>
-          </a:ln>
-        </p:spPr>
-        <p:style>
-          <a:lnRef idx="1">
-            <a:schemeClr val="accent1"/>
-          </a:lnRef>
-          <a:fillRef idx="3">
-            <a:schemeClr val="accent1"/>
-          </a:fillRef>
-          <a:effectRef idx="2">
-            <a:schemeClr val="accent1"/>
-          </a:effectRef>
-          <a:fontRef idx="minor">
-            <a:schemeClr val="lt1"/>
-          </a:fontRef>
-        </p:style>
-        <p:txBody>
-          <a:bodyPr rtlCol="0" anchor="ctr"/>
-          <a:lstStyle/>
-          <a:p>
-            <a:pPr algn="ctr"/>
-          </a:p>
-        </p:txBody>
-      </p:sp>
-      <p:sp>
-        <p:nvSpPr>
-          <p:cNvPr id="14" name="TextBox 13"/>
+              <a:t>ผ้า</a:t>
+            </a:r>
+          </a:p>
+        </p:txBody>
+      </p:sp>
+      <p:sp>
+        <p:nvSpPr>
+          <p:cNvPr id="19" name="TextBox 18"/>
           <p:cNvSpPr txBox="1"/>
           <p:nvPr/>
         </p:nvSpPr>
         <p:spPr>
           <a:xfrm>
-            <a:off x="1078992" y="3447288"/>
-            <a:ext cx="6568135" cy="475488"/>
+            <a:off x="1078992" y="5340096"/>
+            <a:ext cx="6613855" cy="274320"/>
           </a:xfrm>
           <a:prstGeom prst="rect">
             <a:avLst/>
@@ -10558,28 +11140,6 @@
           <a:p>
             <a:pPr algn="l"/>
             <a:r>
-              <a:rPr sz="1700" b="0" i="0" lang="en-US" altLang="en-US">
-                <a:solidFill>
-                  <a:srgbClr val="24333D"/>
-                </a:solidFill>
-                <a:latin typeface="Sarabun"/>
-                <a:ea typeface="Sarabun"/>
-                <a:cs typeface="Sarabun"/>
-              </a:rPr>
-              <a:t>From lesson 1: how do you say thank you? </a:t>
-            </a:r>
-            <a:r>
-              <a:rPr sz="1700" b="0" i="0" lang="th-TH" altLang="en-US">
-                <a:solidFill>
-                  <a:srgbClr val="24333D"/>
-                </a:solidFill>
-                <a:latin typeface="Sarabun"/>
-                <a:ea typeface="Sarabun"/>
-                <a:cs typeface="Sarabun"/>
-              </a:rPr>
-              <a:t>ขอบคุณ</a:t>
-            </a:r>
-            <a:r>
               <a:rPr sz="1700" b="0" i="1" lang="en-US" altLang="en-US">
                 <a:solidFill>
                   <a:srgbClr val="566873"/>
@@ -10588,75 +11148,21 @@
                 <a:ea typeface="Sarabun"/>
                 <a:cs typeface="Sarabun"/>
               </a:rPr>
-              <a:t> (khàawp-khun)</a:t>
-            </a:r>
-            <a:r>
-              <a:rPr sz="1700" b="0" i="0" lang="th-TH" altLang="en-US">
-                <a:solidFill>
-                  <a:srgbClr val="24333D"/>
-                </a:solidFill>
-                <a:latin typeface="Sarabun"/>
-                <a:ea typeface="Sarabun"/>
-                <a:cs typeface="Sarabun"/>
-              </a:rPr>
-              <a:t>. How do you respond to thanks? ไม่เป็นไร.</a:t>
-            </a:r>
-          </a:p>
-        </p:txBody>
-      </p:sp>
-      <p:sp>
-        <p:nvSpPr>
-          <p:cNvPr id="15" name="Oval 14"/>
-          <p:cNvSpPr/>
-          <p:nvPr/>
-        </p:nvSpPr>
-        <p:spPr>
-          <a:xfrm>
-            <a:off x="932688" y="4069080"/>
-            <a:ext cx="82296" cy="82296"/>
-          </a:xfrm>
-          <a:prstGeom prst="ellipse">
-            <a:avLst/>
-          </a:prstGeom>
-          <a:solidFill>
-            <a:srgbClr val="355C7D"/>
-          </a:solidFill>
-          <a:ln>
-            <a:noFill/>
-          </a:ln>
-        </p:spPr>
-        <p:style>
-          <a:lnRef idx="1">
-            <a:schemeClr val="accent1"/>
-          </a:lnRef>
-          <a:fillRef idx="3">
-            <a:schemeClr val="accent1"/>
-          </a:fillRef>
-          <a:effectRef idx="2">
-            <a:schemeClr val="accent1"/>
-          </a:effectRef>
-          <a:fontRef idx="minor">
-            <a:schemeClr val="lt1"/>
-          </a:fontRef>
-        </p:style>
-        <p:txBody>
-          <a:bodyPr rtlCol="0" anchor="ctr"/>
-          <a:lstStyle/>
-          <a:p>
-            <a:pPr algn="ctr"/>
-          </a:p>
-        </p:txBody>
-      </p:sp>
-      <p:sp>
-        <p:nvSpPr>
-          <p:cNvPr id="16" name="TextBox 15"/>
+              <a:t>phâa</a:t>
+            </a:r>
+          </a:p>
+        </p:txBody>
+      </p:sp>
+      <p:sp>
+        <p:nvSpPr>
+          <p:cNvPr id="20" name="TextBox 19"/>
           <p:cNvSpPr txBox="1"/>
           <p:nvPr/>
         </p:nvSpPr>
         <p:spPr>
           <a:xfrm>
-            <a:off x="1078992" y="3977640"/>
-            <a:ext cx="6568135" cy="475488"/>
+            <a:off x="1078992" y="5715000"/>
+            <a:ext cx="6613855" cy="274320"/>
           </a:xfrm>
           <a:prstGeom prst="rect">
             <a:avLst/>
@@ -10673,262 +11179,13 @@
             <a:r>
               <a:rPr sz="1700" b="0" i="0" lang="en-US" altLang="en-US">
                 <a:solidFill>
-                  <a:srgbClr val="24333D"/>
-                </a:solidFill>
-                <a:latin typeface="Sarabun"/>
-                <a:ea typeface="Sarabun"/>
-                <a:cs typeface="Sarabun"/>
-              </a:rPr>
-              <a:t>Tone check: </a:t>
-            </a:r>
-            <a:r>
-              <a:rPr sz="1700" b="0" i="0" lang="th-TH" altLang="en-US">
-                <a:solidFill>
-                  <a:srgbClr val="24333D"/>
-                </a:solidFill>
-                <a:latin typeface="Sarabun"/>
-                <a:ea typeface="Sarabun"/>
-                <a:cs typeface="Sarabun"/>
-              </a:rPr>
-              <a:t>ชื่อ</a:t>
-            </a:r>
-            <a:r>
-              <a:rPr sz="1700" b="0" i="1" lang="en-US" altLang="en-US">
-                <a:solidFill>
-                  <a:srgbClr val="566873"/>
-                </a:solidFill>
-                <a:latin typeface="Sarabun"/>
-                <a:ea typeface="Sarabun"/>
-                <a:cs typeface="Sarabun"/>
-              </a:rPr>
-              <a:t> (chûue)</a:t>
-            </a:r>
-            <a:r>
-              <a:rPr sz="1700" b="0" i="0" lang="en-US" altLang="en-US">
-                <a:solidFill>
-                  <a:srgbClr val="24333D"/>
-                </a:solidFill>
-                <a:latin typeface="Sarabun"/>
-                <a:ea typeface="Sarabun"/>
-                <a:cs typeface="Sarabun"/>
-              </a:rPr>
-              <a:t> has a falling tone — voice drops. </a:t>
-            </a:r>
-            <a:r>
-              <a:rPr sz="1700" b="0" i="0" lang="th-TH" altLang="en-US">
-                <a:solidFill>
-                  <a:srgbClr val="24333D"/>
-                </a:solidFill>
-                <a:latin typeface="Sarabun"/>
-                <a:ea typeface="Sarabun"/>
-                <a:cs typeface="Sarabun"/>
-              </a:rPr>
-              <a:t>มา</a:t>
-            </a:r>
-            <a:r>
-              <a:rPr sz="1700" b="0" i="1" lang="en-US" altLang="en-US">
-                <a:solidFill>
-                  <a:srgbClr val="566873"/>
-                </a:solidFill>
-                <a:latin typeface="Sarabun"/>
-                <a:ea typeface="Sarabun"/>
-                <a:cs typeface="Sarabun"/>
-              </a:rPr>
-              <a:t> (maa)</a:t>
-            </a:r>
-            <a:r>
-              <a:rPr sz="1700" b="0" i="0" lang="en-US" altLang="en-US">
-                <a:solidFill>
-                  <a:srgbClr val="24333D"/>
-                </a:solidFill>
-                <a:latin typeface="Sarabun"/>
-                <a:ea typeface="Sarabun"/>
-                <a:cs typeface="Sarabun"/>
-              </a:rPr>
-              <a:t> has a mid tone — voice stays flat.</a:t>
-            </a:r>
-          </a:p>
-        </p:txBody>
-      </p:sp>
-      <p:sp>
-        <p:nvSpPr>
-          <p:cNvPr id="17" name="TextBox 16"/>
-          <p:cNvSpPr txBox="1"/>
-          <p:nvPr/>
-        </p:nvSpPr>
-        <p:spPr>
-          <a:xfrm>
-            <a:off x="932688" y="4928616"/>
-            <a:ext cx="9692640" cy="228600"/>
-          </a:xfrm>
-          <a:prstGeom prst="rect">
-            <a:avLst/>
-          </a:prstGeom>
-          <a:noFill/>
-        </p:spPr>
-        <p:txBody>
-          <a:bodyPr wrap="square" anchor="t">
-            <a:spAutoFit/>
-          </a:bodyPr>
-          <a:lstStyle/>
-          <a:p>
-            <a:pPr algn="l"/>
-            <a:r>
-              <a:rPr sz="1700" b="1" i="0" lang="en-US" altLang="en-US">
-                <a:solidFill>
-                  <a:srgbClr val="7A8F54"/>
-                </a:solidFill>
-                <a:latin typeface="Sarabun"/>
-                <a:ea typeface="Sarabun"/>
-                <a:cs typeface="Sarabun"/>
-              </a:rPr>
-              <a:t>Remember</a:t>
-            </a:r>
-          </a:p>
-        </p:txBody>
-      </p:sp>
-      <p:sp>
-        <p:nvSpPr>
-          <p:cNvPr id="18" name="Oval 17"/>
-          <p:cNvSpPr/>
-          <p:nvPr/>
-        </p:nvSpPr>
-        <p:spPr>
-          <a:xfrm>
-            <a:off x="932688" y="5312664"/>
-            <a:ext cx="82296" cy="82296"/>
-          </a:xfrm>
-          <a:prstGeom prst="ellipse">
-            <a:avLst/>
-          </a:prstGeom>
-          <a:solidFill>
-            <a:srgbClr val="7A8F54"/>
-          </a:solidFill>
-          <a:ln>
-            <a:noFill/>
-          </a:ln>
-        </p:spPr>
-        <p:style>
-          <a:lnRef idx="1">
-            <a:schemeClr val="accent1"/>
-          </a:lnRef>
-          <a:fillRef idx="3">
-            <a:schemeClr val="accent1"/>
-          </a:fillRef>
-          <a:effectRef idx="2">
-            <a:schemeClr val="accent1"/>
-          </a:effectRef>
-          <a:fontRef idx="minor">
-            <a:schemeClr val="lt1"/>
-          </a:fontRef>
-        </p:style>
-        <p:txBody>
-          <a:bodyPr rtlCol="0" anchor="ctr"/>
-          <a:lstStyle/>
-          <a:p>
-            <a:pPr algn="ctr"/>
-          </a:p>
-        </p:txBody>
-      </p:sp>
-      <p:sp>
-        <p:nvSpPr>
-          <p:cNvPr id="19" name="TextBox 18"/>
-          <p:cNvSpPr txBox="1"/>
-          <p:nvPr/>
-        </p:nvSpPr>
-        <p:spPr>
-          <a:xfrm>
-            <a:off x="1078992" y="5221224"/>
-            <a:ext cx="9555480" cy="475488"/>
-          </a:xfrm>
-          <a:prstGeom prst="rect">
-            <a:avLst/>
-          </a:prstGeom>
-          <a:noFill/>
-        </p:spPr>
-        <p:txBody>
-          <a:bodyPr wrap="square" anchor="t">
-            <a:spAutoFit/>
-          </a:bodyPr>
-          <a:lstStyle/>
-          <a:p>
-            <a:pPr algn="l"/>
-            <a:r>
-              <a:rPr sz="1700" b="0" i="0" lang="en-US" altLang="en-US">
-                <a:solidFill>
-                  <a:srgbClr val="24333D"/>
-                </a:solidFill>
-                <a:latin typeface="Sarabun"/>
-                <a:ea typeface="Sarabun"/>
-                <a:cs typeface="Sarabun"/>
-              </a:rPr>
-              <a:t>Tone check: </a:t>
-            </a:r>
-            <a:r>
-              <a:rPr sz="1700" b="0" i="0" lang="th-TH" altLang="en-US">
-                <a:solidFill>
-                  <a:srgbClr val="24333D"/>
-                </a:solidFill>
-                <a:latin typeface="Sarabun"/>
-                <a:ea typeface="Sarabun"/>
-                <a:cs typeface="Sarabun"/>
-              </a:rPr>
-              <a:t>ชื่อ</a:t>
-            </a:r>
-            <a:r>
-              <a:rPr sz="1700" b="0" i="1" lang="en-US" altLang="en-US">
-                <a:solidFill>
-                  <a:srgbClr val="566873"/>
-                </a:solidFill>
-                <a:latin typeface="Sarabun"/>
-                <a:ea typeface="Sarabun"/>
-                <a:cs typeface="Sarabun"/>
-              </a:rPr>
-              <a:t> (chûue)</a:t>
-            </a:r>
-            <a:r>
-              <a:rPr sz="1700" b="0" i="0" lang="en-US" altLang="en-US">
-                <a:solidFill>
-                  <a:srgbClr val="24333D"/>
-                </a:solidFill>
-                <a:latin typeface="Sarabun"/>
-                <a:ea typeface="Sarabun"/>
-                <a:cs typeface="Sarabun"/>
-              </a:rPr>
-              <a:t> has a falling tone — voice drops. </a:t>
-            </a:r>
-            <a:r>
-              <a:rPr sz="1700" b="0" i="0" lang="th-TH" altLang="en-US">
-                <a:solidFill>
-                  <a:srgbClr val="24333D"/>
-                </a:solidFill>
-                <a:latin typeface="Sarabun"/>
-                <a:ea typeface="Sarabun"/>
-                <a:cs typeface="Sarabun"/>
-              </a:rPr>
-              <a:t>มา</a:t>
-            </a:r>
-            <a:r>
-              <a:rPr sz="1700" b="0" i="1" lang="en-US" altLang="en-US">
-                <a:solidFill>
-                  <a:srgbClr val="566873"/>
-                </a:solidFill>
-                <a:latin typeface="Sarabun"/>
-                <a:ea typeface="Sarabun"/>
-                <a:cs typeface="Sarabun"/>
-              </a:rPr>
-              <a:t> (maa)</a:t>
-            </a:r>
-            <a:r>
-              <a:rPr sz="1700" b="0" i="0" lang="en-US" altLang="en-US">
-                <a:solidFill>
-                  <a:srgbClr val="24333D"/>
-                </a:solidFill>
-                <a:latin typeface="Sarabun"/>
-                <a:ea typeface="Sarabun"/>
-                <a:cs typeface="Sarabun"/>
-              </a:rPr>
-              <a:t> has a mid tone — voice stays flat.</a:t>
+                  <a:srgbClr val="82909A"/>
+                </a:solidFill>
+                <a:latin typeface="Sarabun"/>
+                <a:ea typeface="Sarabun"/>
+                <a:cs typeface="Sarabun"/>
+              </a:rPr>
+              <a:t>cloth (ph — air puff)</a:t>
             </a:r>
           </a:p>
         </p:txBody>
@@ -11091,7 +11348,7 @@
                 <a:ea typeface="Sarabun"/>
                 <a:cs typeface="Sarabun"/>
               </a:rPr>
-              <a:t>Closing</a:t>
+              <a:t>Roleplay</a:t>
             </a:r>
           </a:p>
         </p:txBody>
@@ -11128,21 +11385,77 @@
                 <a:ea typeface="Sarabun"/>
                 <a:cs typeface="Sarabun"/>
               </a:rPr>
-              <a:t>Closing</a:t>
-            </a:r>
-          </a:p>
-        </p:txBody>
-      </p:sp>
-      <p:sp>
-        <p:nvSpPr>
-          <p:cNvPr id="6" name="TextBox 5"/>
+              <a:t>Roleplay</a:t>
+            </a:r>
+          </a:p>
+        </p:txBody>
+      </p:sp>
+      <p:sp>
+        <p:nvSpPr>
+          <p:cNvPr id="6" name="Rounded Rectangle 5"/>
+          <p:cNvSpPr/>
+          <p:nvPr/>
+        </p:nvSpPr>
+        <p:spPr>
+          <a:xfrm>
+            <a:off x="731520" y="1097280"/>
+            <a:ext cx="1051560" cy="274320"/>
+          </a:xfrm>
+          <a:prstGeom prst="roundRect">
+            <a:avLst>
+              <a:gd name="adj" fmla="val 28000"/>
+            </a:avLst>
+          </a:prstGeom>
+          <a:solidFill>
+            <a:srgbClr val="7A8F54"/>
+          </a:solidFill>
+          <a:ln>
+            <a:noFill/>
+          </a:ln>
+        </p:spPr>
+        <p:style>
+          <a:lnRef idx="1">
+            <a:schemeClr val="accent1"/>
+          </a:lnRef>
+          <a:fillRef idx="3">
+            <a:schemeClr val="accent1"/>
+          </a:fillRef>
+          <a:effectRef idx="2">
+            <a:schemeClr val="accent1"/>
+          </a:effectRef>
+          <a:fontRef idx="minor">
+            <a:schemeClr val="lt1"/>
+          </a:fontRef>
+        </p:style>
+        <p:txBody>
+          <a:bodyPr rtlCol="0" anchor="ctr" wrap="none"/>
+          <a:lstStyle/>
+          <a:p>
+            <a:pPr algn="ctr"/>
+            <a:r>
+              <a:rPr sz="1200" b="1" lang="en-US" altLang="en-US">
+                <a:solidFill>
+                  <a:srgbClr val="FFFFFF"/>
+                </a:solidFill>
+                <a:latin typeface="Sarabun"/>
+                <a:ea typeface="Sarabun"/>
+                <a:cs typeface="Sarabun"/>
+              </a:rPr>
+              <a:t>You</a:t>
+            </a:r>
+          </a:p>
+        </p:txBody>
+      </p:sp>
+      <p:sp>
+        <p:nvSpPr>
+          <p:cNvPr id="7" name="TextBox 6"/>
           <p:cNvSpPr txBox="1"/>
           <p:nvPr/>
         </p:nvSpPr>
         <p:spPr>
           <a:xfrm>
-            <a:off x="932688" y="1746504"/>
-            <a:ext cx="6705295" cy="228600"/>
+            <a:off x="1965960" y="1069848"/>
+            <a:ext cx="5836615" cy="228600"/>
           </a:xfrm>
           <a:prstGeom prst="rect">
             <a:avLst/>
@@ -11157,32 +11470,108 @@
           <a:p>
             <a:pPr algn="l"/>
             <a:r>
-              <a:rPr sz="1700" b="1" i="0" lang="en-US" altLang="en-US">
-                <a:solidFill>
-                  <a:srgbClr val="C96F4A"/>
-                </a:solidFill>
-                <a:latin typeface="Sarabun"/>
-                <a:ea typeface="Sarabun"/>
-                <a:cs typeface="Sarabun"/>
-              </a:rPr>
-              <a:t>Next steps</a:t>
-            </a:r>
-          </a:p>
-        </p:txBody>
-      </p:sp>
-      <p:sp>
-        <p:nvSpPr>
-          <p:cNvPr id="7" name="Oval 6"/>
+              <a:rPr sz="1700" b="0" i="0" lang="th-TH" altLang="en-US">
+                <a:solidFill>
+                  <a:srgbClr val="24333D"/>
+                </a:solidFill>
+                <a:latin typeface="Sarabun"/>
+                <a:ea typeface="Sarabun"/>
+                <a:cs typeface="Sarabun"/>
+              </a:rPr>
+              <a:t>สวัสดีครับ</a:t>
+            </a:r>
+          </a:p>
+        </p:txBody>
+      </p:sp>
+      <p:sp>
+        <p:nvSpPr>
+          <p:cNvPr id="8" name="TextBox 7"/>
+          <p:cNvSpPr txBox="1"/>
+          <p:nvPr/>
+        </p:nvSpPr>
+        <p:spPr>
+          <a:xfrm>
+            <a:off x="1965960" y="1298448"/>
+            <a:ext cx="5836615" cy="201168"/>
+          </a:xfrm>
+          <a:prstGeom prst="rect">
+            <a:avLst/>
+          </a:prstGeom>
+          <a:noFill/>
+        </p:spPr>
+        <p:txBody>
+          <a:bodyPr wrap="square" anchor="t">
+            <a:spAutoFit/>
+          </a:bodyPr>
+          <a:lstStyle/>
+          <a:p>
+            <a:pPr algn="l"/>
+            <a:r>
+              <a:rPr sz="1700" b="0" i="1" lang="en-US" altLang="en-US">
+                <a:solidFill>
+                  <a:srgbClr val="566873"/>
+                </a:solidFill>
+                <a:latin typeface="Sarabun"/>
+                <a:ea typeface="Sarabun"/>
+                <a:cs typeface="Sarabun"/>
+              </a:rPr>
+              <a:t>sà-wàt-dii khráp</a:t>
+            </a:r>
+          </a:p>
+        </p:txBody>
+      </p:sp>
+      <p:sp>
+        <p:nvSpPr>
+          <p:cNvPr id="9" name="TextBox 8"/>
+          <p:cNvSpPr txBox="1"/>
+          <p:nvPr/>
+        </p:nvSpPr>
+        <p:spPr>
+          <a:xfrm>
+            <a:off x="1965960" y="1499616"/>
+            <a:ext cx="5836615" cy="201168"/>
+          </a:xfrm>
+          <a:prstGeom prst="rect">
+            <a:avLst/>
+          </a:prstGeom>
+          <a:noFill/>
+        </p:spPr>
+        <p:txBody>
+          <a:bodyPr wrap="square" anchor="t">
+            <a:spAutoFit/>
+          </a:bodyPr>
+          <a:lstStyle/>
+          <a:p>
+            <a:pPr algn="l"/>
+            <a:r>
+              <a:rPr sz="1700" b="0" i="0" lang="en-US" altLang="en-US">
+                <a:solidFill>
+                  <a:srgbClr val="566873"/>
+                </a:solidFill>
+                <a:latin typeface="Sarabun"/>
+                <a:ea typeface="Sarabun"/>
+                <a:cs typeface="Sarabun"/>
+              </a:rPr>
+              <a:t>Hello.</a:t>
+            </a:r>
+          </a:p>
+        </p:txBody>
+      </p:sp>
+      <p:sp>
+        <p:nvSpPr>
+          <p:cNvPr id="10" name="Rounded Rectangle 9"/>
           <p:cNvSpPr/>
           <p:nvPr/>
         </p:nvSpPr>
         <p:spPr>
           <a:xfrm>
-            <a:off x="932688" y="2130552"/>
-            <a:ext cx="82296" cy="82296"/>
-          </a:xfrm>
-          <a:prstGeom prst="ellipse">
-            <a:avLst/>
+            <a:off x="731520" y="2011680"/>
+            <a:ext cx="1371600" cy="274320"/>
+          </a:xfrm>
+          <a:prstGeom prst="roundRect">
+            <a:avLst>
+              <a:gd name="adj" fmla="val 28000"/>
+            </a:avLst>
           </a:prstGeom>
           <a:solidFill>
             <a:srgbClr val="C96F4A"/>
@@ -11206,23 +11595,34 @@
           </a:fontRef>
         </p:style>
         <p:txBody>
-          <a:bodyPr rtlCol="0" anchor="ctr"/>
+          <a:bodyPr rtlCol="0" anchor="ctr" wrap="none"/>
           <a:lstStyle/>
           <a:p>
             <a:pPr algn="ctr"/>
-          </a:p>
-        </p:txBody>
-      </p:sp>
-      <p:sp>
-        <p:nvSpPr>
-          <p:cNvPr id="8" name="TextBox 7"/>
+            <a:r>
+              <a:rPr sz="1200" b="1" lang="en-US" altLang="en-US">
+                <a:solidFill>
+                  <a:srgbClr val="FFFFFF"/>
+                </a:solidFill>
+                <a:latin typeface="Sarabun"/>
+                <a:ea typeface="Sarabun"/>
+                <a:cs typeface="Sarabun"/>
+              </a:rPr>
+              <a:t>New person</a:t>
+            </a:r>
+          </a:p>
+        </p:txBody>
+      </p:sp>
+      <p:sp>
+        <p:nvSpPr>
+          <p:cNvPr id="11" name="TextBox 10"/>
           <p:cNvSpPr txBox="1"/>
           <p:nvPr/>
         </p:nvSpPr>
         <p:spPr>
           <a:xfrm>
-            <a:off x="1078992" y="2039112"/>
-            <a:ext cx="6568135" cy="676656"/>
+            <a:off x="1965960" y="1984248"/>
+            <a:ext cx="5836615" cy="228600"/>
           </a:xfrm>
           <a:prstGeom prst="rect">
             <a:avLst/>
@@ -11237,32 +11637,275 @@
           <a:p>
             <a:pPr algn="l"/>
             <a:r>
+              <a:rPr sz="1700" b="0" i="0" lang="th-TH" altLang="en-US">
+                <a:solidFill>
+                  <a:srgbClr val="24333D"/>
+                </a:solidFill>
+                <a:latin typeface="Sarabun"/>
+                <a:ea typeface="Sarabun"/>
+                <a:cs typeface="Sarabun"/>
+              </a:rPr>
+              <a:t>สวัสดีค่ะ</a:t>
+            </a:r>
+          </a:p>
+        </p:txBody>
+      </p:sp>
+      <p:sp>
+        <p:nvSpPr>
+          <p:cNvPr id="12" name="TextBox 11"/>
+          <p:cNvSpPr txBox="1"/>
+          <p:nvPr/>
+        </p:nvSpPr>
+        <p:spPr>
+          <a:xfrm>
+            <a:off x="1965960" y="2212848"/>
+            <a:ext cx="5836615" cy="201168"/>
+          </a:xfrm>
+          <a:prstGeom prst="rect">
+            <a:avLst/>
+          </a:prstGeom>
+          <a:noFill/>
+        </p:spPr>
+        <p:txBody>
+          <a:bodyPr wrap="square" anchor="t">
+            <a:spAutoFit/>
+          </a:bodyPr>
+          <a:lstStyle/>
+          <a:p>
+            <a:pPr algn="l"/>
+            <a:r>
+              <a:rPr sz="1700" b="0" i="1" lang="en-US" altLang="en-US">
+                <a:solidFill>
+                  <a:srgbClr val="566873"/>
+                </a:solidFill>
+                <a:latin typeface="Sarabun"/>
+                <a:ea typeface="Sarabun"/>
+                <a:cs typeface="Sarabun"/>
+              </a:rPr>
+              <a:t>sà-wàt-dii khâ</a:t>
+            </a:r>
+          </a:p>
+        </p:txBody>
+      </p:sp>
+      <p:sp>
+        <p:nvSpPr>
+          <p:cNvPr id="13" name="TextBox 12"/>
+          <p:cNvSpPr txBox="1"/>
+          <p:nvPr/>
+        </p:nvSpPr>
+        <p:spPr>
+          <a:xfrm>
+            <a:off x="1965960" y="2414016"/>
+            <a:ext cx="5836615" cy="201168"/>
+          </a:xfrm>
+          <a:prstGeom prst="rect">
+            <a:avLst/>
+          </a:prstGeom>
+          <a:noFill/>
+        </p:spPr>
+        <p:txBody>
+          <a:bodyPr wrap="square" anchor="t">
+            <a:spAutoFit/>
+          </a:bodyPr>
+          <a:lstStyle/>
+          <a:p>
+            <a:pPr algn="l"/>
+            <a:r>
               <a:rPr sz="1700" b="0" i="0" lang="en-US" altLang="en-US">
                 <a:solidFill>
+                  <a:srgbClr val="566873"/>
+                </a:solidFill>
+                <a:latin typeface="Sarabun"/>
+                <a:ea typeface="Sarabun"/>
+                <a:cs typeface="Sarabun"/>
+              </a:rPr>
+              <a:t>Hello.</a:t>
+            </a:r>
+          </a:p>
+        </p:txBody>
+      </p:sp>
+      <p:sp>
+        <p:nvSpPr>
+          <p:cNvPr id="14" name="Rounded Rectangle 13"/>
+          <p:cNvSpPr/>
+          <p:nvPr/>
+        </p:nvSpPr>
+        <p:spPr>
+          <a:xfrm>
+            <a:off x="731520" y="2926080"/>
+            <a:ext cx="1051560" cy="274320"/>
+          </a:xfrm>
+          <a:prstGeom prst="roundRect">
+            <a:avLst>
+              <a:gd name="adj" fmla="val 28000"/>
+            </a:avLst>
+          </a:prstGeom>
+          <a:solidFill>
+            <a:srgbClr val="7A8F54"/>
+          </a:solidFill>
+          <a:ln>
+            <a:noFill/>
+          </a:ln>
+        </p:spPr>
+        <p:style>
+          <a:lnRef idx="1">
+            <a:schemeClr val="accent1"/>
+          </a:lnRef>
+          <a:fillRef idx="3">
+            <a:schemeClr val="accent1"/>
+          </a:fillRef>
+          <a:effectRef idx="2">
+            <a:schemeClr val="accent1"/>
+          </a:effectRef>
+          <a:fontRef idx="minor">
+            <a:schemeClr val="lt1"/>
+          </a:fontRef>
+        </p:style>
+        <p:txBody>
+          <a:bodyPr rtlCol="0" anchor="ctr" wrap="none"/>
+          <a:lstStyle/>
+          <a:p>
+            <a:pPr algn="ctr"/>
+            <a:r>
+              <a:rPr sz="1200" b="1" lang="en-US" altLang="en-US">
+                <a:solidFill>
+                  <a:srgbClr val="FFFFFF"/>
+                </a:solidFill>
+                <a:latin typeface="Sarabun"/>
+                <a:ea typeface="Sarabun"/>
+                <a:cs typeface="Sarabun"/>
+              </a:rPr>
+              <a:t>You</a:t>
+            </a:r>
+          </a:p>
+        </p:txBody>
+      </p:sp>
+      <p:sp>
+        <p:nvSpPr>
+          <p:cNvPr id="15" name="TextBox 14"/>
+          <p:cNvSpPr txBox="1"/>
+          <p:nvPr/>
+        </p:nvSpPr>
+        <p:spPr>
+          <a:xfrm>
+            <a:off x="1965960" y="2898648"/>
+            <a:ext cx="8823960" cy="228600"/>
+          </a:xfrm>
+          <a:prstGeom prst="rect">
+            <a:avLst/>
+          </a:prstGeom>
+          <a:noFill/>
+        </p:spPr>
+        <p:txBody>
+          <a:bodyPr wrap="square" anchor="t">
+            <a:spAutoFit/>
+          </a:bodyPr>
+          <a:lstStyle/>
+          <a:p>
+            <a:pPr algn="l"/>
+            <a:r>
+              <a:rPr sz="1700" b="0" i="0" lang="th-TH" altLang="en-US">
+                <a:solidFill>
                   <a:srgbClr val="24333D"/>
                 </a:solidFill>
                 <a:latin typeface="Sarabun"/>
                 <a:ea typeface="Sarabun"/>
                 <a:cs typeface="Sarabun"/>
               </a:rPr>
-              <a:t>By the end, you can greet, ask a name, give a name, and say where they are from in a compact polite exchange.</a:t>
-            </a:r>
-          </a:p>
-        </p:txBody>
-      </p:sp>
-      <p:sp>
-        <p:nvSpPr>
-          <p:cNvPr id="9" name="Oval 8"/>
+              <a:t>ผมชื่อ Mark ครับ คุณชื่ออะไรครับ</a:t>
+            </a:r>
+          </a:p>
+        </p:txBody>
+      </p:sp>
+      <p:sp>
+        <p:nvSpPr>
+          <p:cNvPr id="16" name="TextBox 15"/>
+          <p:cNvSpPr txBox="1"/>
+          <p:nvPr/>
+        </p:nvSpPr>
+        <p:spPr>
+          <a:xfrm>
+            <a:off x="1965960" y="3127248"/>
+            <a:ext cx="8823960" cy="201168"/>
+          </a:xfrm>
+          <a:prstGeom prst="rect">
+            <a:avLst/>
+          </a:prstGeom>
+          <a:noFill/>
+        </p:spPr>
+        <p:txBody>
+          <a:bodyPr wrap="square" anchor="t">
+            <a:spAutoFit/>
+          </a:bodyPr>
+          <a:lstStyle/>
+          <a:p>
+            <a:pPr algn="l"/>
+            <a:r>
+              <a:rPr sz="1700" b="0" i="1" lang="en-US" altLang="en-US">
+                <a:solidFill>
+                  <a:srgbClr val="566873"/>
+                </a:solidFill>
+                <a:latin typeface="Sarabun"/>
+                <a:ea typeface="Sarabun"/>
+                <a:cs typeface="Sarabun"/>
+              </a:rPr>
+              <a:t>phǒm chûue Mark khráp khun chûue à-rai khráp</a:t>
+            </a:r>
+          </a:p>
+        </p:txBody>
+      </p:sp>
+      <p:sp>
+        <p:nvSpPr>
+          <p:cNvPr id="17" name="TextBox 16"/>
+          <p:cNvSpPr txBox="1"/>
+          <p:nvPr/>
+        </p:nvSpPr>
+        <p:spPr>
+          <a:xfrm>
+            <a:off x="1965960" y="3328416"/>
+            <a:ext cx="8823960" cy="201168"/>
+          </a:xfrm>
+          <a:prstGeom prst="rect">
+            <a:avLst/>
+          </a:prstGeom>
+          <a:noFill/>
+        </p:spPr>
+        <p:txBody>
+          <a:bodyPr wrap="square" anchor="t">
+            <a:spAutoFit/>
+          </a:bodyPr>
+          <a:lstStyle/>
+          <a:p>
+            <a:pPr algn="l"/>
+            <a:r>
+              <a:rPr sz="1700" b="0" i="0" lang="en-US" altLang="en-US">
+                <a:solidFill>
+                  <a:srgbClr val="566873"/>
+                </a:solidFill>
+                <a:latin typeface="Sarabun"/>
+                <a:ea typeface="Sarabun"/>
+                <a:cs typeface="Sarabun"/>
+              </a:rPr>
+              <a:t>My name is Mark. What is your name?</a:t>
+            </a:r>
+          </a:p>
+        </p:txBody>
+      </p:sp>
+      <p:sp>
+        <p:nvSpPr>
+          <p:cNvPr id="18" name="Rounded Rectangle 17"/>
           <p:cNvSpPr/>
           <p:nvPr/>
         </p:nvSpPr>
         <p:spPr>
           <a:xfrm>
-            <a:off x="932688" y="2862072"/>
-            <a:ext cx="82296" cy="82296"/>
-          </a:xfrm>
-          <a:prstGeom prst="ellipse">
-            <a:avLst/>
+            <a:off x="731520" y="3840480"/>
+            <a:ext cx="1371600" cy="274320"/>
+          </a:xfrm>
+          <a:prstGeom prst="roundRect">
+            <a:avLst>
+              <a:gd name="adj" fmla="val 28000"/>
+            </a:avLst>
           </a:prstGeom>
           <a:solidFill>
             <a:srgbClr val="C96F4A"/>
@@ -11286,23 +11929,34 @@
           </a:fontRef>
         </p:style>
         <p:txBody>
-          <a:bodyPr rtlCol="0" anchor="ctr"/>
+          <a:bodyPr rtlCol="0" anchor="ctr" wrap="none"/>
           <a:lstStyle/>
           <a:p>
             <a:pPr algn="ctr"/>
-          </a:p>
-        </p:txBody>
-      </p:sp>
-      <p:sp>
-        <p:nvSpPr>
-          <p:cNvPr id="10" name="TextBox 9"/>
+            <a:r>
+              <a:rPr sz="1200" b="1" lang="en-US" altLang="en-US">
+                <a:solidFill>
+                  <a:srgbClr val="FFFFFF"/>
+                </a:solidFill>
+                <a:latin typeface="Sarabun"/>
+                <a:ea typeface="Sarabun"/>
+                <a:cs typeface="Sarabun"/>
+              </a:rPr>
+              <a:t>New person</a:t>
+            </a:r>
+          </a:p>
+        </p:txBody>
+      </p:sp>
+      <p:sp>
+        <p:nvSpPr>
+          <p:cNvPr id="19" name="TextBox 18"/>
           <p:cNvSpPr txBox="1"/>
           <p:nvPr/>
         </p:nvSpPr>
         <p:spPr>
           <a:xfrm>
-            <a:off x="1078992" y="2770632"/>
-            <a:ext cx="6568135" cy="274320"/>
+            <a:off x="1965960" y="3813048"/>
+            <a:ext cx="8823960" cy="228600"/>
           </a:xfrm>
           <a:prstGeom prst="rect">
             <a:avLst/>
@@ -11317,15 +11971,256 @@
           <a:p>
             <a:pPr algn="l"/>
             <a:r>
+              <a:rPr sz="1700" b="0" i="0" lang="th-TH" altLang="en-US">
+                <a:solidFill>
+                  <a:srgbClr val="24333D"/>
+                </a:solidFill>
+                <a:latin typeface="Sarabun"/>
+                <a:ea typeface="Sarabun"/>
+                <a:cs typeface="Sarabun"/>
+              </a:rPr>
+              <a:t>ฉันชื่อ Nine ค่ะ คุณมาจากประเทศอะไรคะ</a:t>
+            </a:r>
+          </a:p>
+        </p:txBody>
+      </p:sp>
+      <p:sp>
+        <p:nvSpPr>
+          <p:cNvPr id="20" name="TextBox 19"/>
+          <p:cNvSpPr txBox="1"/>
+          <p:nvPr/>
+        </p:nvSpPr>
+        <p:spPr>
+          <a:xfrm>
+            <a:off x="1965960" y="4041648"/>
+            <a:ext cx="8823960" cy="201168"/>
+          </a:xfrm>
+          <a:prstGeom prst="rect">
+            <a:avLst/>
+          </a:prstGeom>
+          <a:noFill/>
+        </p:spPr>
+        <p:txBody>
+          <a:bodyPr wrap="square" anchor="t">
+            <a:spAutoFit/>
+          </a:bodyPr>
+          <a:lstStyle/>
+          <a:p>
+            <a:pPr algn="l"/>
+            <a:r>
+              <a:rPr sz="1700" b="0" i="1" lang="en-US" altLang="en-US">
+                <a:solidFill>
+                  <a:srgbClr val="566873"/>
+                </a:solidFill>
+                <a:latin typeface="Sarabun"/>
+                <a:ea typeface="Sarabun"/>
+                <a:cs typeface="Sarabun"/>
+              </a:rPr>
+              <a:t>chǎn chûue Nine khâ khun maa-jàak bprà-thêet à-rai khá</a:t>
+            </a:r>
+          </a:p>
+        </p:txBody>
+      </p:sp>
+      <p:sp>
+        <p:nvSpPr>
+          <p:cNvPr id="21" name="TextBox 20"/>
+          <p:cNvSpPr txBox="1"/>
+          <p:nvPr/>
+        </p:nvSpPr>
+        <p:spPr>
+          <a:xfrm>
+            <a:off x="1965960" y="4242816"/>
+            <a:ext cx="8823960" cy="201168"/>
+          </a:xfrm>
+          <a:prstGeom prst="rect">
+            <a:avLst/>
+          </a:prstGeom>
+          <a:noFill/>
+        </p:spPr>
+        <p:txBody>
+          <a:bodyPr wrap="square" anchor="t">
+            <a:spAutoFit/>
+          </a:bodyPr>
+          <a:lstStyle/>
+          <a:p>
+            <a:pPr algn="l"/>
+            <a:r>
               <a:rPr sz="1700" b="0" i="0" lang="en-US" altLang="en-US">
                 <a:solidFill>
+                  <a:srgbClr val="566873"/>
+                </a:solidFill>
+                <a:latin typeface="Sarabun"/>
+                <a:ea typeface="Sarabun"/>
+                <a:cs typeface="Sarabun"/>
+              </a:rPr>
+              <a:t>My name is Nine. What country are you from?</a:t>
+            </a:r>
+          </a:p>
+        </p:txBody>
+      </p:sp>
+      <p:sp>
+        <p:nvSpPr>
+          <p:cNvPr id="22" name="Rounded Rectangle 21"/>
+          <p:cNvSpPr/>
+          <p:nvPr/>
+        </p:nvSpPr>
+        <p:spPr>
+          <a:xfrm>
+            <a:off x="731520" y="4754880"/>
+            <a:ext cx="1051560" cy="274320"/>
+          </a:xfrm>
+          <a:prstGeom prst="roundRect">
+            <a:avLst>
+              <a:gd name="adj" fmla="val 28000"/>
+            </a:avLst>
+          </a:prstGeom>
+          <a:solidFill>
+            <a:srgbClr val="7A8F54"/>
+          </a:solidFill>
+          <a:ln>
+            <a:noFill/>
+          </a:ln>
+        </p:spPr>
+        <p:style>
+          <a:lnRef idx="1">
+            <a:schemeClr val="accent1"/>
+          </a:lnRef>
+          <a:fillRef idx="3">
+            <a:schemeClr val="accent1"/>
+          </a:fillRef>
+          <a:effectRef idx="2">
+            <a:schemeClr val="accent1"/>
+          </a:effectRef>
+          <a:fontRef idx="minor">
+            <a:schemeClr val="lt1"/>
+          </a:fontRef>
+        </p:style>
+        <p:txBody>
+          <a:bodyPr rtlCol="0" anchor="ctr" wrap="none"/>
+          <a:lstStyle/>
+          <a:p>
+            <a:pPr algn="ctr"/>
+            <a:r>
+              <a:rPr sz="1200" b="1" lang="en-US" altLang="en-US">
+                <a:solidFill>
+                  <a:srgbClr val="FFFFFF"/>
+                </a:solidFill>
+                <a:latin typeface="Sarabun"/>
+                <a:ea typeface="Sarabun"/>
+                <a:cs typeface="Sarabun"/>
+              </a:rPr>
+              <a:t>You</a:t>
+            </a:r>
+          </a:p>
+        </p:txBody>
+      </p:sp>
+      <p:sp>
+        <p:nvSpPr>
+          <p:cNvPr id="23" name="TextBox 22"/>
+          <p:cNvSpPr txBox="1"/>
+          <p:nvPr/>
+        </p:nvSpPr>
+        <p:spPr>
+          <a:xfrm>
+            <a:off x="1965960" y="4727448"/>
+            <a:ext cx="8823960" cy="228600"/>
+          </a:xfrm>
+          <a:prstGeom prst="rect">
+            <a:avLst/>
+          </a:prstGeom>
+          <a:noFill/>
+        </p:spPr>
+        <p:txBody>
+          <a:bodyPr wrap="square" anchor="t">
+            <a:spAutoFit/>
+          </a:bodyPr>
+          <a:lstStyle/>
+          <a:p>
+            <a:pPr algn="l"/>
+            <a:r>
+              <a:rPr sz="1700" b="0" i="0" lang="th-TH" altLang="en-US">
+                <a:solidFill>
                   <a:srgbClr val="24333D"/>
                 </a:solidFill>
                 <a:latin typeface="Sarabun"/>
                 <a:ea typeface="Sarabun"/>
                 <a:cs typeface="Sarabun"/>
               </a:rPr>
-              <a:t>Next: First Contact and Courtesy continues.</a:t>
+              <a:t>ผมมาจากประเทศอังกฤษครับ</a:t>
+            </a:r>
+          </a:p>
+        </p:txBody>
+      </p:sp>
+      <p:sp>
+        <p:nvSpPr>
+          <p:cNvPr id="24" name="TextBox 23"/>
+          <p:cNvSpPr txBox="1"/>
+          <p:nvPr/>
+        </p:nvSpPr>
+        <p:spPr>
+          <a:xfrm>
+            <a:off x="1965960" y="4956048"/>
+            <a:ext cx="8823960" cy="201168"/>
+          </a:xfrm>
+          <a:prstGeom prst="rect">
+            <a:avLst/>
+          </a:prstGeom>
+          <a:noFill/>
+        </p:spPr>
+        <p:txBody>
+          <a:bodyPr wrap="square" anchor="t">
+            <a:spAutoFit/>
+          </a:bodyPr>
+          <a:lstStyle/>
+          <a:p>
+            <a:pPr algn="l"/>
+            <a:r>
+              <a:rPr sz="1700" b="0" i="1" lang="en-US" altLang="en-US">
+                <a:solidFill>
+                  <a:srgbClr val="566873"/>
+                </a:solidFill>
+                <a:latin typeface="Sarabun"/>
+                <a:ea typeface="Sarabun"/>
+                <a:cs typeface="Sarabun"/>
+              </a:rPr>
+              <a:t>phǒm maa-jàak bprà-thêet ang-grìt khráp</a:t>
+            </a:r>
+          </a:p>
+        </p:txBody>
+      </p:sp>
+      <p:sp>
+        <p:nvSpPr>
+          <p:cNvPr id="25" name="TextBox 24"/>
+          <p:cNvSpPr txBox="1"/>
+          <p:nvPr/>
+        </p:nvSpPr>
+        <p:spPr>
+          <a:xfrm>
+            <a:off x="1965960" y="5157216"/>
+            <a:ext cx="8823960" cy="201168"/>
+          </a:xfrm>
+          <a:prstGeom prst="rect">
+            <a:avLst/>
+          </a:prstGeom>
+          <a:noFill/>
+        </p:spPr>
+        <p:txBody>
+          <a:bodyPr wrap="square" anchor="t">
+            <a:spAutoFit/>
+          </a:bodyPr>
+          <a:lstStyle/>
+          <a:p>
+            <a:pPr algn="l"/>
+            <a:r>
+              <a:rPr sz="1700" b="0" i="0" lang="en-US" altLang="en-US">
+                <a:solidFill>
+                  <a:srgbClr val="566873"/>
+                </a:solidFill>
+                <a:latin typeface="Sarabun"/>
+                <a:ea typeface="Sarabun"/>
+                <a:cs typeface="Sarabun"/>
+              </a:rPr>
+              <a:t>I come from England.</a:t>
             </a:r>
           </a:p>
         </p:txBody>
